--- a/plugins/gradient-cio/assets/examples/gradient-idd-private-markets-pme.pptx
+++ b/plugins/gradient-cio/assets/examples/gradient-idd-private-markets-pme.pptx
@@ -24,6 +24,7 @@
     <ns0:sldId id="272" ns1:id="rId23"/>
     <ns0:sldId id="273" ns1:id="rId24"/>
     <ns0:sldId id="274" ns1:id="rId25"/>
+    <ns0:sldId id="275" ns1:id="rId26"/>
   </ns0:sldIdLst>
   <ns0:sldSz cx="12191695" cy="6858000" type="screen16x9"/>
   <ns0:notesSz cx="6858000" cy="9144000"/>
@@ -5601,7 +5602,7 @@
               <a:rPr>
                 <a:latin typeface="Inter"/>
               </a:rPr>
-              <a:t>AUDIENCE</a:t>
+              <a:t>PREPARED FOR</a:t>
             </a:r>
           </a:p>
         </p:txBody>
@@ -5734,224 +5735,7 @@
       </p:sp>
       <p:sp>
         <p:nvSpPr>
-          <p:cNvPr id="17" name="Rectangle 16"/>
-          <p:cNvSpPr/>
-          <p:nvPr/>
-        </p:nvSpPr>
-        <p:spPr>
-          <a:xfrm>
-            <a:off x="685800" y="5687568"/>
-            <a:ext cx="3337560" cy="530352"/>
-          </a:xfrm>
-          <a:prstGeom prst="rect">
-            <a:avLst/>
-          </a:prstGeom>
-          <a:solidFill>
-            <a:srgbClr val="C6F432"/>
-          </a:solidFill>
-          <a:ln>
-            <a:solidFill>
-              <a:srgbClr val="C6F432"/>
-            </a:solidFill>
-          </a:ln>
-        </p:spPr>
-        <p:style>
-          <a:lnRef idx="1">
-            <a:schemeClr val="accent1"/>
-          </a:lnRef>
-          <a:fillRef idx="3">
-            <a:schemeClr val="accent1"/>
-          </a:fillRef>
-          <a:effectRef idx="2">
-            <a:schemeClr val="accent1"/>
-          </a:effectRef>
-          <a:fontRef idx="minor">
-            <a:schemeClr val="lt1"/>
-          </a:fontRef>
-        </p:style>
-        <p:txBody>
-          <a:bodyPr rtlCol="0" anchor="ctr"/>
-          <a:lstStyle/>
-          <a:p>
-            <a:pPr algn="ctr">
-              <a:defRPr>
-                <a:latin typeface="Inter"/>
-              </a:defRPr>
-            </a:pPr>
-          </a:p>
-        </p:txBody>
-      </p:sp>
-      <p:sp>
-        <p:nvSpPr>
-          <p:cNvPr id="18" name="TextBox 17"/>
-          <p:cNvSpPr txBox="1"/>
-          <p:nvPr/>
-        </p:nvSpPr>
-        <p:spPr>
-          <a:xfrm>
-            <a:off x="822960" y="5760720"/>
-            <a:ext cx="3063240" cy="128016"/>
-          </a:xfrm>
-          <a:prstGeom prst="rect">
-            <a:avLst/>
-          </a:prstGeom>
-          <a:noFill/>
-        </p:spPr>
-        <p:txBody>
-          <a:bodyPr wrap="none" lIns="9144" rIns="9144" tIns="9144" bIns="9144" anchor="t">
-            <a:spAutoFit/>
-          </a:bodyPr>
-          <a:lstStyle/>
-          <a:p>
-            <a:pPr algn="l">
-              <a:spcAft>
-                <a:spcPts val="0"/>
-              </a:spcAft>
-              <a:defRPr sz="620" b="1">
-                <a:solidFill>
-                  <a:srgbClr val="0D1117"/>
-                </a:solidFill>
-                <a:latin typeface="Inter"/>
-              </a:defRPr>
-            </a:pPr>
-            <a:r>
-              <a:rPr>
-                <a:latin typeface="Inter"/>
-              </a:rPr>
-              <a:t>OVERALL VIEW</a:t>
-            </a:r>
-          </a:p>
-        </p:txBody>
-      </p:sp>
-      <p:sp>
-        <p:nvSpPr>
-          <p:cNvPr id="19" name="TextBox 18"/>
-          <p:cNvSpPr txBox="1"/>
-          <p:nvPr/>
-        </p:nvSpPr>
-        <p:spPr>
-          <a:xfrm>
-            <a:off x="822960" y="5916168"/>
-            <a:ext cx="3063240" cy="182880"/>
-          </a:xfrm>
-          <a:prstGeom prst="rect">
-            <a:avLst/>
-          </a:prstGeom>
-          <a:noFill/>
-        </p:spPr>
-        <p:txBody>
-          <a:bodyPr wrap="none" lIns="9144" rIns="9144" tIns="9144" bIns="9144" anchor="t">
-            <a:spAutoFit/>
-          </a:bodyPr>
-          <a:lstStyle/>
-          <a:p>
-            <a:pPr algn="l">
-              <a:spcAft>
-                <a:spcPts val="0"/>
-              </a:spcAft>
-              <a:defRPr sz="900" b="1">
-                <a:solidFill>
-                  <a:srgbClr val="0D1117"/>
-                </a:solidFill>
-                <a:latin typeface="Inter"/>
-              </a:defRPr>
-            </a:pPr>
-            <a:r>
-              <a:rPr>
-                <a:latin typeface="Inter"/>
-              </a:rPr>
-              <a:t>PME positive across both benchmarks</a:t>
-            </a:r>
-          </a:p>
-        </p:txBody>
-      </p:sp>
-      <p:sp>
-        <p:nvSpPr>
-          <p:cNvPr id="20" name="TextBox 19"/>
-          <p:cNvSpPr txBox="1"/>
-          <p:nvPr/>
-        </p:nvSpPr>
-        <p:spPr>
-          <a:xfrm>
-            <a:off x="4297680" y="5733288"/>
-            <a:ext cx="3108960" cy="164592"/>
-          </a:xfrm>
-          <a:prstGeom prst="rect">
-            <a:avLst/>
-          </a:prstGeom>
-          <a:noFill/>
-        </p:spPr>
-        <p:txBody>
-          <a:bodyPr wrap="none" lIns="9144" rIns="9144" tIns="9144" bIns="9144" anchor="t">
-            <a:spAutoFit/>
-          </a:bodyPr>
-          <a:lstStyle/>
-          <a:p>
-            <a:pPr algn="l">
-              <a:spcAft>
-                <a:spcPts val="0"/>
-              </a:spcAft>
-              <a:defRPr sz="650" b="1">
-                <a:solidFill>
-                  <a:srgbClr val="8A94A1"/>
-                </a:solidFill>
-                <a:latin typeface="Inter"/>
-              </a:defRPr>
-            </a:pPr>
-            <a:r>
-              <a:rPr>
-                <a:latin typeface="Inter"/>
-              </a:rPr>
-              <a:t>SCOPE REVIEWED</a:t>
-            </a:r>
-          </a:p>
-        </p:txBody>
-      </p:sp>
-      <p:sp>
-        <p:nvSpPr>
-          <p:cNvPr id="21" name="TextBox 20"/>
-          <p:cNvSpPr txBox="1"/>
-          <p:nvPr/>
-        </p:nvSpPr>
-        <p:spPr>
-          <a:xfrm>
-            <a:off x="4297680" y="5934456"/>
-            <a:ext cx="3108960" cy="201168"/>
-          </a:xfrm>
-          <a:prstGeom prst="rect">
-            <a:avLst/>
-          </a:prstGeom>
-          <a:noFill/>
-        </p:spPr>
-        <p:txBody>
-          <a:bodyPr wrap="none" lIns="9144" rIns="9144" tIns="9144" bIns="9144" anchor="t">
-            <a:spAutoFit/>
-          </a:bodyPr>
-          <a:lstStyle/>
-          <a:p>
-            <a:pPr algn="l">
-              <a:spcAft>
-                <a:spcPts val="0"/>
-              </a:spcAft>
-              <a:defRPr sz="800" b="1">
-                <a:solidFill>
-                  <a:srgbClr val="FFFFFF"/>
-                </a:solidFill>
-                <a:latin typeface="Inter"/>
-              </a:defRPr>
-            </a:pPr>
-            <a:r>
-              <a:rPr>
-                <a:latin typeface="Inter"/>
-              </a:rPr>
-              <a:t>7 of 7 · Complete</a:t>
-            </a:r>
-          </a:p>
-        </p:txBody>
-      </p:sp>
-      <p:sp>
-        <p:nvSpPr>
-          <p:cNvPr id="22" name="TextBox 21"/>
+          <p:cNvPr id="17" name="TextBox 16"/>
           <p:cNvSpPr txBox="1"/>
           <p:nvPr/>
         </p:nvSpPr>
@@ -5993,7 +5777,7 @@
       </p:sp>
       <p:sp>
         <p:nvSpPr>
-          <p:cNvPr id="23" name="TextBox 22"/>
+          <p:cNvPr id="18" name="TextBox 17"/>
           <p:cNvSpPr txBox="1"/>
           <p:nvPr/>
         </p:nvSpPr>
@@ -6035,7 +5819,7 @@
       </p:sp>
       <p:sp>
         <p:nvSpPr>
-          <p:cNvPr id="24" name="TextBox 23"/>
+          <p:cNvPr id="19" name="TextBox 18"/>
           <p:cNvSpPr txBox="1"/>
           <p:nvPr/>
         </p:nvSpPr>
@@ -6151,7 +5935,7 @@
         <p:spPr>
           <a:xfrm>
             <a:off x="640080" y="329184"/>
-            <a:ext cx="5303520" cy="182880"/>
+            <a:ext cx="9875520" cy="182880"/>
           </a:xfrm>
           <a:prstGeom prst="rect">
             <a:avLst/>
@@ -6192,48 +5976,6 @@
         </p:nvSpPr>
         <p:spPr>
           <a:xfrm>
-            <a:off x="5897880" y="310896"/>
-            <a:ext cx="4800600" cy="256032"/>
-          </a:xfrm>
-          <a:prstGeom prst="rect">
-            <a:avLst/>
-          </a:prstGeom>
-          <a:noFill/>
-        </p:spPr>
-        <p:txBody>
-          <a:bodyPr wrap="none" lIns="9144" rIns="9144" tIns="9144" bIns="9144" anchor="t">
-            <a:spAutoFit/>
-          </a:bodyPr>
-          <a:lstStyle/>
-          <a:p>
-            <a:pPr algn="r">
-              <a:spcAft>
-                <a:spcPts val="0"/>
-              </a:spcAft>
-              <a:defRPr sz="680" b="1">
-                <a:solidFill>
-                  <a:srgbClr val="4F6B00"/>
-                </a:solidFill>
-                <a:latin typeface="Inter"/>
-              </a:defRPr>
-            </a:pPr>
-            <a:r>
-              <a:rPr>
-                <a:latin typeface="Inter"/>
-              </a:rPr>
-              <a:t>Illustrative, Gradient Maintained — demo data, not the client's holdings or managers</a:t>
-            </a:r>
-          </a:p>
-        </p:txBody>
-      </p:sp>
-      <p:sp>
-        <p:nvSpPr>
-          <p:cNvPr id="5" name="TextBox 4"/>
-          <p:cNvSpPr txBox="1"/>
-          <p:nvPr/>
-        </p:nvSpPr>
-        <p:spPr>
-          <a:xfrm>
             <a:off x="640080" y="566928"/>
             <a:ext cx="10058400" cy="530352"/>
           </a:xfrm>
@@ -6270,7 +6012,7 @@
       </p:sp>
       <p:sp>
         <p:nvSpPr>
-          <p:cNvPr id="6" name="Rectangle 5"/>
+          <p:cNvPr id="5" name="Rectangle 4"/>
           <p:cNvSpPr/>
           <p:nvPr/>
         </p:nvSpPr>
@@ -6319,7 +6061,7 @@
       </p:sp>
       <p:sp>
         <p:nvSpPr>
-          <p:cNvPr id="7" name="Rectangle 6"/>
+          <p:cNvPr id="6" name="Rectangle 5"/>
           <p:cNvSpPr/>
           <p:nvPr/>
         </p:nvSpPr>
@@ -6368,7 +6110,7 @@
       </p:sp>
       <p:sp>
         <p:nvSpPr>
-          <p:cNvPr id="8" name="TextBox 7"/>
+          <p:cNvPr id="7" name="TextBox 6"/>
           <p:cNvSpPr txBox="1"/>
           <p:nvPr/>
         </p:nvSpPr>
@@ -6410,7 +6152,7 @@
       </p:sp>
       <p:sp>
         <p:nvSpPr>
-          <p:cNvPr id="9" name="Rectangle 8"/>
+          <p:cNvPr id="8" name="Rectangle 7"/>
           <p:cNvSpPr/>
           <p:nvPr/>
         </p:nvSpPr>
@@ -6459,7 +6201,7 @@
       </p:sp>
       <p:sp>
         <p:nvSpPr>
-          <p:cNvPr id="10" name="Rectangle 9"/>
+          <p:cNvPr id="9" name="Rectangle 8"/>
           <p:cNvSpPr/>
           <p:nvPr/>
         </p:nvSpPr>
@@ -6508,7 +6250,7 @@
       </p:sp>
       <p:sp>
         <p:nvSpPr>
-          <p:cNvPr id="11" name="TextBox 10"/>
+          <p:cNvPr id="10" name="TextBox 9"/>
           <p:cNvSpPr txBox="1"/>
           <p:nvPr/>
         </p:nvSpPr>
@@ -6550,7 +6292,7 @@
       </p:sp>
       <p:sp>
         <p:nvSpPr>
-          <p:cNvPr id="12" name="TextBox 11"/>
+          <p:cNvPr id="11" name="TextBox 10"/>
           <p:cNvSpPr txBox="1"/>
           <p:nvPr/>
         </p:nvSpPr>
@@ -6592,7 +6334,7 @@
       </p:sp>
       <p:sp>
         <p:nvSpPr>
-          <p:cNvPr id="13" name="Rectangle 12"/>
+          <p:cNvPr id="12" name="Rectangle 11"/>
           <p:cNvSpPr/>
           <p:nvPr/>
         </p:nvSpPr>
@@ -6641,7 +6383,7 @@
       </p:sp>
       <p:sp>
         <p:nvSpPr>
-          <p:cNvPr id="14" name="TextBox 13"/>
+          <p:cNvPr id="13" name="TextBox 12"/>
           <p:cNvSpPr txBox="1"/>
           <p:nvPr/>
         </p:nvSpPr>
@@ -6683,7 +6425,7 @@
       </p:sp>
       <p:sp>
         <p:nvSpPr>
-          <p:cNvPr id="15" name="TextBox 14"/>
+          <p:cNvPr id="14" name="TextBox 13"/>
           <p:cNvSpPr txBox="1"/>
           <p:nvPr/>
         </p:nvSpPr>
@@ -6725,7 +6467,7 @@
       </p:sp>
       <p:sp>
         <p:nvSpPr>
-          <p:cNvPr id="16" name="TextBox 15"/>
+          <p:cNvPr id="15" name="TextBox 14"/>
           <p:cNvSpPr txBox="1"/>
           <p:nvPr/>
         </p:nvSpPr>
@@ -6841,7 +6583,7 @@
         <p:spPr>
           <a:xfrm>
             <a:off x="640080" y="329184"/>
-            <a:ext cx="5303520" cy="182880"/>
+            <a:ext cx="9875520" cy="182880"/>
           </a:xfrm>
           <a:prstGeom prst="rect">
             <a:avLst/>
@@ -6882,48 +6624,6 @@
         </p:nvSpPr>
         <p:spPr>
           <a:xfrm>
-            <a:off x="5897880" y="310896"/>
-            <a:ext cx="4800600" cy="256032"/>
-          </a:xfrm>
-          <a:prstGeom prst="rect">
-            <a:avLst/>
-          </a:prstGeom>
-          <a:noFill/>
-        </p:spPr>
-        <p:txBody>
-          <a:bodyPr wrap="none" lIns="9144" rIns="9144" tIns="9144" bIns="9144" anchor="t">
-            <a:spAutoFit/>
-          </a:bodyPr>
-          <a:lstStyle/>
-          <a:p>
-            <a:pPr algn="r">
-              <a:spcAft>
-                <a:spcPts val="0"/>
-              </a:spcAft>
-              <a:defRPr sz="680" b="1">
-                <a:solidFill>
-                  <a:srgbClr val="4F6B00"/>
-                </a:solidFill>
-                <a:latin typeface="Inter"/>
-              </a:defRPr>
-            </a:pPr>
-            <a:r>
-              <a:rPr>
-                <a:latin typeface="Inter"/>
-              </a:rPr>
-              <a:t>Illustrative, Gradient Maintained — demo data, not the client's holdings or managers</a:t>
-            </a:r>
-          </a:p>
-        </p:txBody>
-      </p:sp>
-      <p:sp>
-        <p:nvSpPr>
-          <p:cNvPr id="5" name="TextBox 4"/>
-          <p:cNvSpPr txBox="1"/>
-          <p:nvPr/>
-        </p:nvSpPr>
-        <p:spPr>
-          <a:xfrm>
             <a:off x="640080" y="566928"/>
             <a:ext cx="10058400" cy="530352"/>
           </a:xfrm>
@@ -6960,7 +6660,7 @@
       </p:sp>
       <p:sp>
         <p:nvSpPr>
-          <p:cNvPr id="6" name="Rectangle 5"/>
+          <p:cNvPr id="5" name="Rectangle 4"/>
           <p:cNvSpPr/>
           <p:nvPr/>
         </p:nvSpPr>
@@ -7009,7 +6709,7 @@
       </p:sp>
       <p:sp>
         <p:nvSpPr>
-          <p:cNvPr id="7" name="Rectangle 6"/>
+          <p:cNvPr id="6" name="Rectangle 5"/>
           <p:cNvSpPr/>
           <p:nvPr/>
         </p:nvSpPr>
@@ -7058,7 +6758,7 @@
       </p:sp>
       <p:sp>
         <p:nvSpPr>
-          <p:cNvPr id="8" name="TextBox 7"/>
+          <p:cNvPr id="7" name="TextBox 6"/>
           <p:cNvSpPr txBox="1"/>
           <p:nvPr/>
         </p:nvSpPr>
@@ -7100,7 +6800,7 @@
       </p:sp>
       <p:sp>
         <p:nvSpPr>
-          <p:cNvPr id="9" name="TextBox 8"/>
+          <p:cNvPr id="8" name="TextBox 7"/>
           <p:cNvSpPr txBox="1"/>
           <p:nvPr/>
         </p:nvSpPr>
@@ -7142,7 +6842,7 @@
       </p:sp>
       <p:graphicFrame>
         <p:nvGraphicFramePr>
-          <p:cNvPr id="10" name="Chart 9"/>
+          <p:cNvPr id="9" name="Chart 8"/>
           <p:cNvGraphicFramePr>
             <a:graphicFrameLocks noGrp="1"/>
           </p:cNvGraphicFramePr>
@@ -7160,7 +6860,7 @@
       </p:graphicFrame>
       <p:sp>
         <p:nvSpPr>
-          <p:cNvPr id="11" name="Rectangle 10"/>
+          <p:cNvPr id="10" name="Rectangle 9"/>
           <p:cNvSpPr/>
           <p:nvPr/>
         </p:nvSpPr>
@@ -7209,7 +6909,7 @@
       </p:sp>
       <p:sp>
         <p:nvSpPr>
-          <p:cNvPr id="12" name="TextBox 11"/>
+          <p:cNvPr id="11" name="TextBox 10"/>
           <p:cNvSpPr txBox="1"/>
           <p:nvPr/>
         </p:nvSpPr>
@@ -7251,7 +6951,7 @@
       </p:sp>
       <p:sp>
         <p:nvSpPr>
-          <p:cNvPr id="13" name="TextBox 12"/>
+          <p:cNvPr id="12" name="TextBox 11"/>
           <p:cNvSpPr txBox="1"/>
           <p:nvPr/>
         </p:nvSpPr>
@@ -7293,7 +6993,7 @@
       </p:sp>
       <p:sp>
         <p:nvSpPr>
-          <p:cNvPr id="14" name="TextBox 13"/>
+          <p:cNvPr id="13" name="TextBox 12"/>
           <p:cNvSpPr txBox="1"/>
           <p:nvPr/>
         </p:nvSpPr>
@@ -7409,7 +7109,7 @@
         <p:spPr>
           <a:xfrm>
             <a:off x="640080" y="329184"/>
-            <a:ext cx="5303520" cy="182880"/>
+            <a:ext cx="9875520" cy="182880"/>
           </a:xfrm>
           <a:prstGeom prst="rect">
             <a:avLst/>
@@ -7450,48 +7150,6 @@
         </p:nvSpPr>
         <p:spPr>
           <a:xfrm>
-            <a:off x="5897880" y="310896"/>
-            <a:ext cx="4800600" cy="256032"/>
-          </a:xfrm>
-          <a:prstGeom prst="rect">
-            <a:avLst/>
-          </a:prstGeom>
-          <a:noFill/>
-        </p:spPr>
-        <p:txBody>
-          <a:bodyPr wrap="none" lIns="9144" rIns="9144" tIns="9144" bIns="9144" anchor="t">
-            <a:spAutoFit/>
-          </a:bodyPr>
-          <a:lstStyle/>
-          <a:p>
-            <a:pPr algn="r">
-              <a:spcAft>
-                <a:spcPts val="0"/>
-              </a:spcAft>
-              <a:defRPr sz="680" b="1">
-                <a:solidFill>
-                  <a:srgbClr val="4F6B00"/>
-                </a:solidFill>
-                <a:latin typeface="Inter"/>
-              </a:defRPr>
-            </a:pPr>
-            <a:r>
-              <a:rPr>
-                <a:latin typeface="Inter"/>
-              </a:rPr>
-              <a:t>Illustrative, Gradient Maintained — demo data, not the client's holdings or managers</a:t>
-            </a:r>
-          </a:p>
-        </p:txBody>
-      </p:sp>
-      <p:sp>
-        <p:nvSpPr>
-          <p:cNvPr id="5" name="TextBox 4"/>
-          <p:cNvSpPr txBox="1"/>
-          <p:nvPr/>
-        </p:nvSpPr>
-        <p:spPr>
-          <a:xfrm>
             <a:off x="640080" y="566928"/>
             <a:ext cx="10058400" cy="530352"/>
           </a:xfrm>
@@ -7528,7 +7186,7 @@
       </p:sp>
       <p:sp>
         <p:nvSpPr>
-          <p:cNvPr id="6" name="Rectangle 5"/>
+          <p:cNvPr id="5" name="Rectangle 4"/>
           <p:cNvSpPr/>
           <p:nvPr/>
         </p:nvSpPr>
@@ -7577,7 +7235,7 @@
       </p:sp>
       <p:sp>
         <p:nvSpPr>
-          <p:cNvPr id="7" name="Rectangle 6"/>
+          <p:cNvPr id="6" name="Rectangle 5"/>
           <p:cNvSpPr/>
           <p:nvPr/>
         </p:nvSpPr>
@@ -7626,7 +7284,7 @@
       </p:sp>
       <p:sp>
         <p:nvSpPr>
-          <p:cNvPr id="8" name="TextBox 7"/>
+          <p:cNvPr id="7" name="TextBox 6"/>
           <p:cNvSpPr txBox="1"/>
           <p:nvPr/>
         </p:nvSpPr>
@@ -7668,7 +7326,7 @@
       </p:sp>
       <p:sp>
         <p:nvSpPr>
-          <p:cNvPr id="9" name="TextBox 8"/>
+          <p:cNvPr id="8" name="TextBox 7"/>
           <p:cNvSpPr txBox="1"/>
           <p:nvPr/>
         </p:nvSpPr>
@@ -7710,7 +7368,7 @@
       </p:sp>
       <p:graphicFrame>
         <p:nvGraphicFramePr>
-          <p:cNvPr id="10" name="Chart 9"/>
+          <p:cNvPr id="9" name="Chart 8"/>
           <p:cNvGraphicFramePr>
             <a:graphicFrameLocks noGrp="1"/>
           </p:cNvGraphicFramePr>
@@ -7728,7 +7386,7 @@
       </p:graphicFrame>
       <p:sp>
         <p:nvSpPr>
-          <p:cNvPr id="11" name="Rectangle 10"/>
+          <p:cNvPr id="10" name="Rectangle 9"/>
           <p:cNvSpPr/>
           <p:nvPr/>
         </p:nvSpPr>
@@ -7777,7 +7435,7 @@
       </p:sp>
       <p:sp>
         <p:nvSpPr>
-          <p:cNvPr id="12" name="TextBox 11"/>
+          <p:cNvPr id="11" name="TextBox 10"/>
           <p:cNvSpPr txBox="1"/>
           <p:nvPr/>
         </p:nvSpPr>
@@ -7819,7 +7477,7 @@
       </p:sp>
       <p:sp>
         <p:nvSpPr>
-          <p:cNvPr id="13" name="TextBox 12"/>
+          <p:cNvPr id="12" name="TextBox 11"/>
           <p:cNvSpPr txBox="1"/>
           <p:nvPr/>
         </p:nvSpPr>
@@ -7861,7 +7519,7 @@
       </p:sp>
       <p:sp>
         <p:nvSpPr>
-          <p:cNvPr id="14" name="TextBox 13"/>
+          <p:cNvPr id="13" name="TextBox 12"/>
           <p:cNvSpPr txBox="1"/>
           <p:nvPr/>
         </p:nvSpPr>
@@ -7977,7 +7635,7 @@
         <p:spPr>
           <a:xfrm>
             <a:off x="640080" y="329184"/>
-            <a:ext cx="5303520" cy="182880"/>
+            <a:ext cx="9875520" cy="182880"/>
           </a:xfrm>
           <a:prstGeom prst="rect">
             <a:avLst/>
@@ -8018,48 +7676,6 @@
         </p:nvSpPr>
         <p:spPr>
           <a:xfrm>
-            <a:off x="5897880" y="310896"/>
-            <a:ext cx="4800600" cy="256032"/>
-          </a:xfrm>
-          <a:prstGeom prst="rect">
-            <a:avLst/>
-          </a:prstGeom>
-          <a:noFill/>
-        </p:spPr>
-        <p:txBody>
-          <a:bodyPr wrap="none" lIns="9144" rIns="9144" tIns="9144" bIns="9144" anchor="t">
-            <a:spAutoFit/>
-          </a:bodyPr>
-          <a:lstStyle/>
-          <a:p>
-            <a:pPr algn="r">
-              <a:spcAft>
-                <a:spcPts val="0"/>
-              </a:spcAft>
-              <a:defRPr sz="680" b="1">
-                <a:solidFill>
-                  <a:srgbClr val="4F6B00"/>
-                </a:solidFill>
-                <a:latin typeface="Inter"/>
-              </a:defRPr>
-            </a:pPr>
-            <a:r>
-              <a:rPr>
-                <a:latin typeface="Inter"/>
-              </a:rPr>
-              <a:t>Illustrative, Gradient Maintained — demo data, not the client's holdings or managers</a:t>
-            </a:r>
-          </a:p>
-        </p:txBody>
-      </p:sp>
-      <p:sp>
-        <p:nvSpPr>
-          <p:cNvPr id="5" name="TextBox 4"/>
-          <p:cNvSpPr txBox="1"/>
-          <p:nvPr/>
-        </p:nvSpPr>
-        <p:spPr>
-          <a:xfrm>
             <a:off x="640080" y="566928"/>
             <a:ext cx="10058400" cy="530352"/>
           </a:xfrm>
@@ -8096,7 +7712,7 @@
       </p:sp>
       <p:sp>
         <p:nvSpPr>
-          <p:cNvPr id="6" name="Rectangle 5"/>
+          <p:cNvPr id="5" name="Rectangle 4"/>
           <p:cNvSpPr/>
           <p:nvPr/>
         </p:nvSpPr>
@@ -8145,7 +7761,7 @@
       </p:sp>
       <p:sp>
         <p:nvSpPr>
-          <p:cNvPr id="7" name="Rectangle 6"/>
+          <p:cNvPr id="6" name="Rectangle 5"/>
           <p:cNvSpPr/>
           <p:nvPr/>
         </p:nvSpPr>
@@ -8194,7 +7810,7 @@
       </p:sp>
       <p:sp>
         <p:nvSpPr>
-          <p:cNvPr id="8" name="TextBox 7"/>
+          <p:cNvPr id="7" name="TextBox 6"/>
           <p:cNvSpPr txBox="1"/>
           <p:nvPr/>
         </p:nvSpPr>
@@ -8236,7 +7852,7 @@
       </p:sp>
       <p:sp>
         <p:nvSpPr>
-          <p:cNvPr id="9" name="TextBox 8"/>
+          <p:cNvPr id="8" name="TextBox 7"/>
           <p:cNvSpPr txBox="1"/>
           <p:nvPr/>
         </p:nvSpPr>
@@ -8278,7 +7894,7 @@
       </p:sp>
       <p:graphicFrame>
         <p:nvGraphicFramePr>
-          <p:cNvPr id="10" name="Chart 9"/>
+          <p:cNvPr id="9" name="Chart 8"/>
           <p:cNvGraphicFramePr>
             <a:graphicFrameLocks noGrp="1"/>
           </p:cNvGraphicFramePr>
@@ -8296,7 +7912,7 @@
       </p:graphicFrame>
       <p:sp>
         <p:nvSpPr>
-          <p:cNvPr id="11" name="Rectangle 10"/>
+          <p:cNvPr id="10" name="Rectangle 9"/>
           <p:cNvSpPr/>
           <p:nvPr/>
         </p:nvSpPr>
@@ -8345,7 +7961,7 @@
       </p:sp>
       <p:sp>
         <p:nvSpPr>
-          <p:cNvPr id="12" name="TextBox 11"/>
+          <p:cNvPr id="11" name="TextBox 10"/>
           <p:cNvSpPr txBox="1"/>
           <p:nvPr/>
         </p:nvSpPr>
@@ -8387,7 +8003,7 @@
       </p:sp>
       <p:sp>
         <p:nvSpPr>
-          <p:cNvPr id="13" name="TextBox 12"/>
+          <p:cNvPr id="12" name="TextBox 11"/>
           <p:cNvSpPr txBox="1"/>
           <p:nvPr/>
         </p:nvSpPr>
@@ -8429,7 +8045,7 @@
       </p:sp>
       <p:sp>
         <p:nvSpPr>
-          <p:cNvPr id="14" name="TextBox 13"/>
+          <p:cNvPr id="13" name="TextBox 12"/>
           <p:cNvSpPr txBox="1"/>
           <p:nvPr/>
         </p:nvSpPr>
@@ -8545,7 +8161,7 @@
         <p:spPr>
           <a:xfrm>
             <a:off x="640080" y="329184"/>
-            <a:ext cx="5303520" cy="182880"/>
+            <a:ext cx="9875520" cy="182880"/>
           </a:xfrm>
           <a:prstGeom prst="rect">
             <a:avLst/>
@@ -8586,48 +8202,6 @@
         </p:nvSpPr>
         <p:spPr>
           <a:xfrm>
-            <a:off x="5897880" y="310896"/>
-            <a:ext cx="4800600" cy="256032"/>
-          </a:xfrm>
-          <a:prstGeom prst="rect">
-            <a:avLst/>
-          </a:prstGeom>
-          <a:noFill/>
-        </p:spPr>
-        <p:txBody>
-          <a:bodyPr wrap="none" lIns="9144" rIns="9144" tIns="9144" bIns="9144" anchor="t">
-            <a:spAutoFit/>
-          </a:bodyPr>
-          <a:lstStyle/>
-          <a:p>
-            <a:pPr algn="r">
-              <a:spcAft>
-                <a:spcPts val="0"/>
-              </a:spcAft>
-              <a:defRPr sz="680" b="1">
-                <a:solidFill>
-                  <a:srgbClr val="4F6B00"/>
-                </a:solidFill>
-                <a:latin typeface="Inter"/>
-              </a:defRPr>
-            </a:pPr>
-            <a:r>
-              <a:rPr>
-                <a:latin typeface="Inter"/>
-              </a:rPr>
-              <a:t>Illustrative, Gradient Maintained — demo data, not the client's holdings or managers</a:t>
-            </a:r>
-          </a:p>
-        </p:txBody>
-      </p:sp>
-      <p:sp>
-        <p:nvSpPr>
-          <p:cNvPr id="5" name="TextBox 4"/>
-          <p:cNvSpPr txBox="1"/>
-          <p:nvPr/>
-        </p:nvSpPr>
-        <p:spPr>
-          <a:xfrm>
             <a:off x="640080" y="566928"/>
             <a:ext cx="10058400" cy="530352"/>
           </a:xfrm>
@@ -8664,7 +8238,7 @@
       </p:sp>
       <p:sp>
         <p:nvSpPr>
-          <p:cNvPr id="6" name="Rectangle 5"/>
+          <p:cNvPr id="5" name="Rectangle 4"/>
           <p:cNvSpPr/>
           <p:nvPr/>
         </p:nvSpPr>
@@ -8713,7 +8287,7 @@
       </p:sp>
       <p:sp>
         <p:nvSpPr>
-          <p:cNvPr id="7" name="Rectangle 6"/>
+          <p:cNvPr id="6" name="Rectangle 5"/>
           <p:cNvSpPr/>
           <p:nvPr/>
         </p:nvSpPr>
@@ -8762,7 +8336,7 @@
       </p:sp>
       <p:sp>
         <p:nvSpPr>
-          <p:cNvPr id="8" name="TextBox 7"/>
+          <p:cNvPr id="7" name="TextBox 6"/>
           <p:cNvSpPr txBox="1"/>
           <p:nvPr/>
         </p:nvSpPr>
@@ -8804,7 +8378,7 @@
       </p:sp>
       <p:sp>
         <p:nvSpPr>
-          <p:cNvPr id="9" name="Rectangle 8"/>
+          <p:cNvPr id="8" name="Rectangle 7"/>
           <p:cNvSpPr/>
           <p:nvPr/>
         </p:nvSpPr>
@@ -8853,7 +8427,7 @@
       </p:sp>
       <p:sp>
         <p:nvSpPr>
-          <p:cNvPr id="10" name="Rectangle 9"/>
+          <p:cNvPr id="9" name="Rectangle 8"/>
           <p:cNvSpPr/>
           <p:nvPr/>
         </p:nvSpPr>
@@ -8902,7 +8476,7 @@
       </p:sp>
       <p:sp>
         <p:nvSpPr>
-          <p:cNvPr id="11" name="TextBox 10"/>
+          <p:cNvPr id="10" name="TextBox 9"/>
           <p:cNvSpPr txBox="1"/>
           <p:nvPr/>
         </p:nvSpPr>
@@ -8944,7 +8518,7 @@
       </p:sp>
       <p:sp>
         <p:nvSpPr>
-          <p:cNvPr id="12" name="TextBox 11"/>
+          <p:cNvPr id="11" name="TextBox 10"/>
           <p:cNvSpPr txBox="1"/>
           <p:nvPr/>
         </p:nvSpPr>
@@ -8986,7 +8560,7 @@
       </p:sp>
       <p:sp>
         <p:nvSpPr>
-          <p:cNvPr id="13" name="Rectangle 12"/>
+          <p:cNvPr id="12" name="Rectangle 11"/>
           <p:cNvSpPr/>
           <p:nvPr/>
         </p:nvSpPr>
@@ -9035,7 +8609,7 @@
       </p:sp>
       <p:sp>
         <p:nvSpPr>
-          <p:cNvPr id="14" name="TextBox 13"/>
+          <p:cNvPr id="13" name="TextBox 12"/>
           <p:cNvSpPr txBox="1"/>
           <p:nvPr/>
         </p:nvSpPr>
@@ -9077,7 +8651,7 @@
       </p:sp>
       <p:sp>
         <p:nvSpPr>
-          <p:cNvPr id="15" name="TextBox 14"/>
+          <p:cNvPr id="14" name="TextBox 13"/>
           <p:cNvSpPr txBox="1"/>
           <p:nvPr/>
         </p:nvSpPr>
@@ -9119,7 +8693,7 @@
       </p:sp>
       <p:sp>
         <p:nvSpPr>
-          <p:cNvPr id="16" name="TextBox 15"/>
+          <p:cNvPr id="15" name="TextBox 14"/>
           <p:cNvSpPr txBox="1"/>
           <p:nvPr/>
         </p:nvSpPr>
@@ -9235,7 +8809,7 @@
         <p:spPr>
           <a:xfrm>
             <a:off x="640080" y="329184"/>
-            <a:ext cx="5303520" cy="182880"/>
+            <a:ext cx="9875520" cy="182880"/>
           </a:xfrm>
           <a:prstGeom prst="rect">
             <a:avLst/>
@@ -9276,48 +8850,6 @@
         </p:nvSpPr>
         <p:spPr>
           <a:xfrm>
-            <a:off x="5897880" y="310896"/>
-            <a:ext cx="4800600" cy="256032"/>
-          </a:xfrm>
-          <a:prstGeom prst="rect">
-            <a:avLst/>
-          </a:prstGeom>
-          <a:noFill/>
-        </p:spPr>
-        <p:txBody>
-          <a:bodyPr wrap="none" lIns="9144" rIns="9144" tIns="9144" bIns="9144" anchor="t">
-            <a:spAutoFit/>
-          </a:bodyPr>
-          <a:lstStyle/>
-          <a:p>
-            <a:pPr algn="r">
-              <a:spcAft>
-                <a:spcPts val="0"/>
-              </a:spcAft>
-              <a:defRPr sz="680" b="1">
-                <a:solidFill>
-                  <a:srgbClr val="4F6B00"/>
-                </a:solidFill>
-                <a:latin typeface="Inter"/>
-              </a:defRPr>
-            </a:pPr>
-            <a:r>
-              <a:rPr>
-                <a:latin typeface="Inter"/>
-              </a:rPr>
-              <a:t>Illustrative, Gradient Maintained — demo data, not the client's holdings or managers</a:t>
-            </a:r>
-          </a:p>
-        </p:txBody>
-      </p:sp>
-      <p:sp>
-        <p:nvSpPr>
-          <p:cNvPr id="5" name="TextBox 4"/>
-          <p:cNvSpPr txBox="1"/>
-          <p:nvPr/>
-        </p:nvSpPr>
-        <p:spPr>
-          <a:xfrm>
             <a:off x="640080" y="566928"/>
             <a:ext cx="10058400" cy="530352"/>
           </a:xfrm>
@@ -9354,7 +8886,7 @@
       </p:sp>
       <p:sp>
         <p:nvSpPr>
-          <p:cNvPr id="6" name="Rectangle 5"/>
+          <p:cNvPr id="5" name="Rectangle 4"/>
           <p:cNvSpPr/>
           <p:nvPr/>
         </p:nvSpPr>
@@ -9403,7 +8935,7 @@
       </p:sp>
       <p:sp>
         <p:nvSpPr>
-          <p:cNvPr id="7" name="Rectangle 6"/>
+          <p:cNvPr id="6" name="Rectangle 5"/>
           <p:cNvSpPr/>
           <p:nvPr/>
         </p:nvSpPr>
@@ -9452,7 +8984,7 @@
       </p:sp>
       <p:sp>
         <p:nvSpPr>
-          <p:cNvPr id="8" name="TextBox 7"/>
+          <p:cNvPr id="7" name="TextBox 6"/>
           <p:cNvSpPr txBox="1"/>
           <p:nvPr/>
         </p:nvSpPr>
@@ -9494,7 +9026,7 @@
       </p:sp>
       <p:sp>
         <p:nvSpPr>
-          <p:cNvPr id="9" name="TextBox 8"/>
+          <p:cNvPr id="8" name="TextBox 7"/>
           <p:cNvSpPr txBox="1"/>
           <p:nvPr/>
         </p:nvSpPr>
@@ -9536,7 +9068,7 @@
       </p:sp>
       <p:graphicFrame>
         <p:nvGraphicFramePr>
-          <p:cNvPr id="10" name="Chart 9"/>
+          <p:cNvPr id="9" name="Chart 8"/>
           <p:cNvGraphicFramePr>
             <a:graphicFrameLocks noGrp="1"/>
           </p:cNvGraphicFramePr>
@@ -9554,7 +9086,7 @@
       </p:graphicFrame>
       <p:sp>
         <p:nvSpPr>
-          <p:cNvPr id="11" name="Rectangle 10"/>
+          <p:cNvPr id="10" name="Rectangle 9"/>
           <p:cNvSpPr/>
           <p:nvPr/>
         </p:nvSpPr>
@@ -9603,7 +9135,7 @@
       </p:sp>
       <p:sp>
         <p:nvSpPr>
-          <p:cNvPr id="12" name="TextBox 11"/>
+          <p:cNvPr id="11" name="TextBox 10"/>
           <p:cNvSpPr txBox="1"/>
           <p:nvPr/>
         </p:nvSpPr>
@@ -9645,7 +9177,7 @@
       </p:sp>
       <p:sp>
         <p:nvSpPr>
-          <p:cNvPr id="13" name="TextBox 12"/>
+          <p:cNvPr id="12" name="TextBox 11"/>
           <p:cNvSpPr txBox="1"/>
           <p:nvPr/>
         </p:nvSpPr>
@@ -9687,7 +9219,7 @@
       </p:sp>
       <p:sp>
         <p:nvSpPr>
-          <p:cNvPr id="14" name="TextBox 13"/>
+          <p:cNvPr id="13" name="TextBox 12"/>
           <p:cNvSpPr txBox="1"/>
           <p:nvPr/>
         </p:nvSpPr>
@@ -9803,7 +9335,7 @@
         <p:spPr>
           <a:xfrm>
             <a:off x="640080" y="329184"/>
-            <a:ext cx="5303520" cy="182880"/>
+            <a:ext cx="9875520" cy="182880"/>
           </a:xfrm>
           <a:prstGeom prst="rect">
             <a:avLst/>
@@ -9844,48 +9376,6 @@
         </p:nvSpPr>
         <p:spPr>
           <a:xfrm>
-            <a:off x="5897880" y="310896"/>
-            <a:ext cx="4800600" cy="256032"/>
-          </a:xfrm>
-          <a:prstGeom prst="rect">
-            <a:avLst/>
-          </a:prstGeom>
-          <a:noFill/>
-        </p:spPr>
-        <p:txBody>
-          <a:bodyPr wrap="none" lIns="9144" rIns="9144" tIns="9144" bIns="9144" anchor="t">
-            <a:spAutoFit/>
-          </a:bodyPr>
-          <a:lstStyle/>
-          <a:p>
-            <a:pPr algn="r">
-              <a:spcAft>
-                <a:spcPts val="0"/>
-              </a:spcAft>
-              <a:defRPr sz="680" b="1">
-                <a:solidFill>
-                  <a:srgbClr val="4F6B00"/>
-                </a:solidFill>
-                <a:latin typeface="Inter"/>
-              </a:defRPr>
-            </a:pPr>
-            <a:r>
-              <a:rPr>
-                <a:latin typeface="Inter"/>
-              </a:rPr>
-              <a:t>Illustrative, Gradient Maintained — demo data, not the client's holdings or managers</a:t>
-            </a:r>
-          </a:p>
-        </p:txBody>
-      </p:sp>
-      <p:sp>
-        <p:nvSpPr>
-          <p:cNvPr id="5" name="TextBox 4"/>
-          <p:cNvSpPr txBox="1"/>
-          <p:nvPr/>
-        </p:nvSpPr>
-        <p:spPr>
-          <a:xfrm>
             <a:off x="640080" y="566928"/>
             <a:ext cx="10058400" cy="530352"/>
           </a:xfrm>
@@ -9922,7 +9412,7 @@
       </p:sp>
       <p:sp>
         <p:nvSpPr>
-          <p:cNvPr id="6" name="Rectangle 5"/>
+          <p:cNvPr id="5" name="Rectangle 4"/>
           <p:cNvSpPr/>
           <p:nvPr/>
         </p:nvSpPr>
@@ -9971,7 +9461,7 @@
       </p:sp>
       <p:sp>
         <p:nvSpPr>
-          <p:cNvPr id="7" name="Rectangle 6"/>
+          <p:cNvPr id="6" name="Rectangle 5"/>
           <p:cNvSpPr/>
           <p:nvPr/>
         </p:nvSpPr>
@@ -10020,7 +9510,7 @@
       </p:sp>
       <p:sp>
         <p:nvSpPr>
-          <p:cNvPr id="8" name="TextBox 7"/>
+          <p:cNvPr id="7" name="TextBox 6"/>
           <p:cNvSpPr txBox="1"/>
           <p:nvPr/>
         </p:nvSpPr>
@@ -10062,7 +9552,7 @@
       </p:sp>
       <p:sp>
         <p:nvSpPr>
-          <p:cNvPr id="9" name="TextBox 8"/>
+          <p:cNvPr id="8" name="TextBox 7"/>
           <p:cNvSpPr txBox="1"/>
           <p:nvPr/>
         </p:nvSpPr>
@@ -10104,7 +9594,7 @@
       </p:sp>
       <p:graphicFrame>
         <p:nvGraphicFramePr>
-          <p:cNvPr id="10" name="Table 9"/>
+          <p:cNvPr id="9" name="Table 8"/>
           <p:cNvGraphicFramePr>
             <a:graphicFrameLocks noGrp="1"/>
           </p:cNvGraphicFramePr>
@@ -10626,7 +10116,7 @@
       </p:graphicFrame>
       <p:sp>
         <p:nvSpPr>
-          <p:cNvPr id="11" name="TextBox 10"/>
+          <p:cNvPr id="10" name="TextBox 9"/>
           <p:cNvSpPr txBox="1"/>
           <p:nvPr/>
         </p:nvSpPr>
@@ -10668,7 +10158,7 @@
       </p:sp>
       <p:sp>
         <p:nvSpPr>
-          <p:cNvPr id="12" name="Rectangle 11"/>
+          <p:cNvPr id="11" name="Rectangle 10"/>
           <p:cNvSpPr/>
           <p:nvPr/>
         </p:nvSpPr>
@@ -10717,7 +10207,7 @@
       </p:sp>
       <p:sp>
         <p:nvSpPr>
-          <p:cNvPr id="13" name="Rectangle 12"/>
+          <p:cNvPr id="12" name="Rectangle 11"/>
           <p:cNvSpPr/>
           <p:nvPr/>
         </p:nvSpPr>
@@ -10766,7 +10256,7 @@
       </p:sp>
       <p:sp>
         <p:nvSpPr>
-          <p:cNvPr id="14" name="TextBox 13"/>
+          <p:cNvPr id="13" name="TextBox 12"/>
           <p:cNvSpPr txBox="1"/>
           <p:nvPr/>
         </p:nvSpPr>
@@ -10808,7 +10298,7 @@
       </p:sp>
       <p:sp>
         <p:nvSpPr>
-          <p:cNvPr id="15" name="TextBox 14"/>
+          <p:cNvPr id="14" name="TextBox 13"/>
           <p:cNvSpPr txBox="1"/>
           <p:nvPr/>
         </p:nvSpPr>
@@ -10850,7 +10340,7 @@
       </p:sp>
       <p:sp>
         <p:nvSpPr>
-          <p:cNvPr id="16" name="Rectangle 15"/>
+          <p:cNvPr id="15" name="Rectangle 14"/>
           <p:cNvSpPr/>
           <p:nvPr/>
         </p:nvSpPr>
@@ -10899,7 +10389,7 @@
       </p:sp>
       <p:sp>
         <p:nvSpPr>
-          <p:cNvPr id="17" name="TextBox 16"/>
+          <p:cNvPr id="16" name="TextBox 15"/>
           <p:cNvSpPr txBox="1"/>
           <p:nvPr/>
         </p:nvSpPr>
@@ -10941,7 +10431,7 @@
       </p:sp>
       <p:sp>
         <p:nvSpPr>
-          <p:cNvPr id="18" name="TextBox 17"/>
+          <p:cNvPr id="17" name="TextBox 16"/>
           <p:cNvSpPr txBox="1"/>
           <p:nvPr/>
         </p:nvSpPr>
@@ -10983,7 +10473,7 @@
       </p:sp>
       <p:sp>
         <p:nvSpPr>
-          <p:cNvPr id="19" name="TextBox 18"/>
+          <p:cNvPr id="18" name="TextBox 17"/>
           <p:cNvSpPr txBox="1"/>
           <p:nvPr/>
         </p:nvSpPr>
@@ -11099,7 +10589,7 @@
         <p:spPr>
           <a:xfrm>
             <a:off x="640080" y="329184"/>
-            <a:ext cx="5303520" cy="182880"/>
+            <a:ext cx="9875520" cy="182880"/>
           </a:xfrm>
           <a:prstGeom prst="rect">
             <a:avLst/>
@@ -11140,48 +10630,6 @@
         </p:nvSpPr>
         <p:spPr>
           <a:xfrm>
-            <a:off x="5897880" y="310896"/>
-            <a:ext cx="4800600" cy="256032"/>
-          </a:xfrm>
-          <a:prstGeom prst="rect">
-            <a:avLst/>
-          </a:prstGeom>
-          <a:noFill/>
-        </p:spPr>
-        <p:txBody>
-          <a:bodyPr wrap="none" lIns="9144" rIns="9144" tIns="9144" bIns="9144" anchor="t">
-            <a:spAutoFit/>
-          </a:bodyPr>
-          <a:lstStyle/>
-          <a:p>
-            <a:pPr algn="r">
-              <a:spcAft>
-                <a:spcPts val="0"/>
-              </a:spcAft>
-              <a:defRPr sz="680" b="1">
-                <a:solidFill>
-                  <a:srgbClr val="4F6B00"/>
-                </a:solidFill>
-                <a:latin typeface="Inter"/>
-              </a:defRPr>
-            </a:pPr>
-            <a:r>
-              <a:rPr>
-                <a:latin typeface="Inter"/>
-              </a:rPr>
-              <a:t>Illustrative, Gradient Maintained — demo data, not the client's holdings or managers</a:t>
-            </a:r>
-          </a:p>
-        </p:txBody>
-      </p:sp>
-      <p:sp>
-        <p:nvSpPr>
-          <p:cNvPr id="5" name="TextBox 4"/>
-          <p:cNvSpPr txBox="1"/>
-          <p:nvPr/>
-        </p:nvSpPr>
-        <p:spPr>
-          <a:xfrm>
             <a:off x="640080" y="566928"/>
             <a:ext cx="10058400" cy="530352"/>
           </a:xfrm>
@@ -11218,7 +10666,7 @@
       </p:sp>
       <p:sp>
         <p:nvSpPr>
-          <p:cNvPr id="6" name="Rectangle 5"/>
+          <p:cNvPr id="5" name="Rectangle 4"/>
           <p:cNvSpPr/>
           <p:nvPr/>
         </p:nvSpPr>
@@ -11267,7 +10715,7 @@
       </p:sp>
       <p:sp>
         <p:nvSpPr>
-          <p:cNvPr id="7" name="Rectangle 6"/>
+          <p:cNvPr id="6" name="Rectangle 5"/>
           <p:cNvSpPr/>
           <p:nvPr/>
         </p:nvSpPr>
@@ -11316,7 +10764,7 @@
       </p:sp>
       <p:sp>
         <p:nvSpPr>
-          <p:cNvPr id="8" name="TextBox 7"/>
+          <p:cNvPr id="7" name="TextBox 6"/>
           <p:cNvSpPr txBox="1"/>
           <p:nvPr/>
         </p:nvSpPr>
@@ -11358,7 +10806,7 @@
       </p:sp>
       <p:sp>
         <p:nvSpPr>
-          <p:cNvPr id="9" name="TextBox 8"/>
+          <p:cNvPr id="8" name="TextBox 7"/>
           <p:cNvSpPr txBox="1"/>
           <p:nvPr/>
         </p:nvSpPr>
@@ -11400,7 +10848,7 @@
       </p:sp>
       <p:sp>
         <p:nvSpPr>
-          <p:cNvPr id="10" name="TextBox 9"/>
+          <p:cNvPr id="9" name="TextBox 8"/>
           <p:cNvSpPr txBox="1"/>
           <p:nvPr/>
         </p:nvSpPr>
@@ -11480,7 +10928,7 @@
       </p:sp>
       <p:sp>
         <p:nvSpPr>
-          <p:cNvPr id="11" name="TextBox 10"/>
+          <p:cNvPr id="10" name="TextBox 9"/>
           <p:cNvSpPr txBox="1"/>
           <p:nvPr/>
         </p:nvSpPr>
@@ -11581,7 +11029,7 @@
       </p:sp>
       <p:sp>
         <p:nvSpPr>
-          <p:cNvPr id="12" name="Rectangle 11"/>
+          <p:cNvPr id="11" name="Rectangle 10"/>
           <p:cNvSpPr/>
           <p:nvPr/>
         </p:nvSpPr>
@@ -11630,7 +11078,7 @@
       </p:sp>
       <p:sp>
         <p:nvSpPr>
-          <p:cNvPr id="13" name="TextBox 12"/>
+          <p:cNvPr id="12" name="TextBox 11"/>
           <p:cNvSpPr txBox="1"/>
           <p:nvPr/>
         </p:nvSpPr>
@@ -11672,7 +11120,7 @@
       </p:sp>
       <p:sp>
         <p:nvSpPr>
-          <p:cNvPr id="14" name="TextBox 13"/>
+          <p:cNvPr id="13" name="TextBox 12"/>
           <p:cNvSpPr txBox="1"/>
           <p:nvPr/>
         </p:nvSpPr>
@@ -11714,7 +11162,7 @@
       </p:sp>
       <p:sp>
         <p:nvSpPr>
-          <p:cNvPr id="15" name="TextBox 14"/>
+          <p:cNvPr id="14" name="TextBox 13"/>
           <p:cNvSpPr txBox="1"/>
           <p:nvPr/>
         </p:nvSpPr>
@@ -11830,7 +11278,7 @@
         <p:spPr>
           <a:xfrm>
             <a:off x="640080" y="329184"/>
-            <a:ext cx="5303520" cy="182880"/>
+            <a:ext cx="9875520" cy="182880"/>
           </a:xfrm>
           <a:prstGeom prst="rect">
             <a:avLst/>
@@ -11871,48 +11319,6 @@
         </p:nvSpPr>
         <p:spPr>
           <a:xfrm>
-            <a:off x="5897880" y="310896"/>
-            <a:ext cx="4800600" cy="256032"/>
-          </a:xfrm>
-          <a:prstGeom prst="rect">
-            <a:avLst/>
-          </a:prstGeom>
-          <a:noFill/>
-        </p:spPr>
-        <p:txBody>
-          <a:bodyPr wrap="none" lIns="9144" rIns="9144" tIns="9144" bIns="9144" anchor="t">
-            <a:spAutoFit/>
-          </a:bodyPr>
-          <a:lstStyle/>
-          <a:p>
-            <a:pPr algn="r">
-              <a:spcAft>
-                <a:spcPts val="0"/>
-              </a:spcAft>
-              <a:defRPr sz="680" b="1">
-                <a:solidFill>
-                  <a:srgbClr val="4F6B00"/>
-                </a:solidFill>
-                <a:latin typeface="Inter"/>
-              </a:defRPr>
-            </a:pPr>
-            <a:r>
-              <a:rPr>
-                <a:latin typeface="Inter"/>
-              </a:rPr>
-              <a:t>Illustrative, Gradient Maintained — demo data, not the client's holdings or managers</a:t>
-            </a:r>
-          </a:p>
-        </p:txBody>
-      </p:sp>
-      <p:sp>
-        <p:nvSpPr>
-          <p:cNvPr id="5" name="TextBox 4"/>
-          <p:cNvSpPr txBox="1"/>
-          <p:nvPr/>
-        </p:nvSpPr>
-        <p:spPr>
-          <a:xfrm>
             <a:off x="640080" y="566928"/>
             <a:ext cx="10058400" cy="530352"/>
           </a:xfrm>
@@ -11949,7 +11355,7 @@
       </p:sp>
       <p:sp>
         <p:nvSpPr>
-          <p:cNvPr id="6" name="Rectangle 5"/>
+          <p:cNvPr id="5" name="Rectangle 4"/>
           <p:cNvSpPr/>
           <p:nvPr/>
         </p:nvSpPr>
@@ -11998,7 +11404,7 @@
       </p:sp>
       <p:sp>
         <p:nvSpPr>
-          <p:cNvPr id="7" name="Rectangle 6"/>
+          <p:cNvPr id="6" name="Rectangle 5"/>
           <p:cNvSpPr/>
           <p:nvPr/>
         </p:nvSpPr>
@@ -12047,7 +11453,7 @@
       </p:sp>
       <p:sp>
         <p:nvSpPr>
-          <p:cNvPr id="8" name="TextBox 7"/>
+          <p:cNvPr id="7" name="TextBox 6"/>
           <p:cNvSpPr txBox="1"/>
           <p:nvPr/>
         </p:nvSpPr>
@@ -12089,7 +11495,7 @@
       </p:sp>
       <p:graphicFrame>
         <p:nvGraphicFramePr>
-          <p:cNvPr id="9" name="Table 8"/>
+          <p:cNvPr id="8" name="Table 7"/>
           <p:cNvGraphicFramePr>
             <a:graphicFrameLocks noGrp="1"/>
           </p:cNvGraphicFramePr>
@@ -12107,14 +11513,10 @@
               </a:tblPr>
               <a:tblGrid>
                 <a:gridCol w="2011680"/>
-                <a:gridCol w="1112139"/>
-                <a:gridCol w="1112139"/>
-                <a:gridCol w="1112139"/>
-                <a:gridCol w="1112139"/>
-                <a:gridCol w="1112139"/>
-                <a:gridCol w="1112139"/>
-                <a:gridCol w="1112139"/>
-                <a:gridCol w="1112139"/>
+                <a:gridCol w="2224278"/>
+                <a:gridCol w="2224278"/>
+                <a:gridCol w="2224278"/>
+                <a:gridCol w="2224278"/>
               </a:tblGrid>
               <a:tr h="586359">
                 <a:tc>
@@ -12188,7 +11590,7 @@
                         <a:rPr>
                           <a:latin typeface="Inter"/>
                         </a:rPr>
-                        <a:t>Basis</a:t>
+                        <a:t>Source</a:t>
                       </a:r>
                     </a:p>
                   </a:txBody>
@@ -12215,7 +11617,1600 @@
                         <a:rPr>
                           <a:latin typeface="Inter"/>
                         </a:rPr>
-                        <a:t>Tool / view</a:t>
+                        <a:t>As of</a:t>
+                      </a:r>
+                    </a:p>
+                  </a:txBody>
+                  <a:tcPr marL="54864" marR="54864" marT="27432" marB="27432" anchor="ctr">
+                    <a:solidFill>
+                      <a:srgbClr val="0D1117"/>
+                    </a:solidFill>
+                  </a:tcPr>
+                </a:tc>
+                <a:tc>
+                  <a:txBody>
+                    <a:bodyPr/>
+                    <a:lstStyle/>
+                    <a:p>
+                      <a:pPr>
+                        <a:defRPr sz="750" b="1">
+                          <a:solidFill>
+                            <a:srgbClr val="FFFFFF"/>
+                          </a:solidFill>
+                          <a:latin typeface="Inter"/>
+                        </a:defRPr>
+                      </a:pPr>
+                      <a:r>
+                        <a:rPr>
+                          <a:latin typeface="Inter"/>
+                        </a:rPr>
+                        <a:t>Check</a:t>
+                      </a:r>
+                    </a:p>
+                  </a:txBody>
+                  <a:tcPr marL="54864" marR="54864" marT="27432" marB="27432" anchor="ctr">
+                    <a:solidFill>
+                      <a:srgbClr val="0D1117"/>
+                    </a:solidFill>
+                  </a:tcPr>
+                </a:tc>
+              </a:tr>
+              <a:tr h="586359">
+                <a:tc>
+                  <a:txBody>
+                    <a:bodyPr/>
+                    <a:lstStyle/>
+                    <a:p>
+                      <a:pPr>
+                        <a:defRPr sz="720" b="1">
+                          <a:solidFill>
+                            <a:srgbClr val="0D1117"/>
+                          </a:solidFill>
+                          <a:latin typeface="Inter"/>
+                        </a:defRPr>
+                      </a:pPr>
+                      <a:r>
+                        <a:rPr>
+                          <a:latin typeface="Inter"/>
+                        </a:rPr>
+                        <a:t>S1</a:t>
+                      </a:r>
+                    </a:p>
+                  </a:txBody>
+                  <a:tcPr marL="54864" marR="54864" marT="27432" marB="27432" anchor="ctr">
+                    <a:solidFill>
+                      <a:srgbClr val="FFFFFF"/>
+                    </a:solidFill>
+                  </a:tcPr>
+                </a:tc>
+                <a:tc>
+                  <a:txBody>
+                    <a:bodyPr/>
+                    <a:lstStyle/>
+                    <a:p>
+                      <a:pPr>
+                        <a:defRPr sz="720" b="0">
+                          <a:solidFill>
+                            <a:srgbClr val="0D1117"/>
+                          </a:solidFill>
+                          <a:latin typeface="Inter"/>
+                        </a:defRPr>
+                      </a:pPr>
+                      <a:r>
+                        <a:rPr>
+                          <a:latin typeface="Inter"/>
+                        </a:rPr>
+                        <a:t>Canonical portfolio</a:t>
+                      </a:r>
+                    </a:p>
+                  </a:txBody>
+                  <a:tcPr marL="54864" marR="54864" marT="27432" marB="27432" anchor="ctr">
+                    <a:solidFill>
+                      <a:srgbClr val="FFFFFF"/>
+                    </a:solidFill>
+                  </a:tcPr>
+                </a:tc>
+                <a:tc>
+                  <a:txBody>
+                    <a:bodyPr/>
+                    <a:lstStyle/>
+                    <a:p>
+                      <a:pPr>
+                        <a:defRPr sz="720" b="0">
+                          <a:solidFill>
+                            <a:srgbClr val="0D1117"/>
+                          </a:solidFill>
+                          <a:latin typeface="Inter"/>
+                        </a:defRPr>
+                      </a:pPr>
+                      <a:r>
+                        <a:rPr>
+                          <a:latin typeface="Inter"/>
+                        </a:rPr>
+                        <a:t>list_portfolios</a:t>
+                      </a:r>
+                    </a:p>
+                  </a:txBody>
+                  <a:tcPr marL="54864" marR="54864" marT="27432" marB="27432" anchor="ctr">
+                    <a:solidFill>
+                      <a:srgbClr val="FFFFFF"/>
+                    </a:solidFill>
+                  </a:tcPr>
+                </a:tc>
+                <a:tc>
+                  <a:txBody>
+                    <a:bodyPr/>
+                    <a:lstStyle/>
+                    <a:p>
+                      <a:pPr>
+                        <a:defRPr sz="720" b="0">
+                          <a:solidFill>
+                            <a:srgbClr val="0D1117"/>
+                          </a:solidFill>
+                          <a:latin typeface="Inter"/>
+                        </a:defRPr>
+                      </a:pPr>
+                      <a:r>
+                        <a:rPr>
+                          <a:latin typeface="Inter"/>
+                        </a:rPr>
+                        <a:t>2025-12-31</a:t>
+                      </a:r>
+                    </a:p>
+                  </a:txBody>
+                  <a:tcPr marL="54864" marR="54864" marT="27432" marB="27432" anchor="ctr">
+                    <a:solidFill>
+                      <a:srgbClr val="FFFFFF"/>
+                    </a:solidFill>
+                  </a:tcPr>
+                </a:tc>
+                <a:tc>
+                  <a:txBody>
+                    <a:bodyPr/>
+                    <a:lstStyle/>
+                    <a:p>
+                      <a:pPr>
+                        <a:defRPr sz="720" b="1">
+                          <a:solidFill>
+                            <a:srgbClr val="C6F432"/>
+                          </a:solidFill>
+                          <a:latin typeface="Inter"/>
+                        </a:defRPr>
+                      </a:pPr>
+                      <a:r>
+                        <a:rPr>
+                          <a:latin typeface="Inter"/>
+                        </a:rPr>
+                        <a:t>● Passed</a:t>
+                      </a:r>
+                    </a:p>
+                  </a:txBody>
+                  <a:tcPr marL="54864" marR="54864" marT="27432" marB="27432" anchor="ctr">
+                    <a:solidFill>
+                      <a:srgbClr val="F5F7F9"/>
+                    </a:solidFill>
+                  </a:tcPr>
+                </a:tc>
+              </a:tr>
+              <a:tr h="586359">
+                <a:tc>
+                  <a:txBody>
+                    <a:bodyPr/>
+                    <a:lstStyle/>
+                    <a:p>
+                      <a:pPr>
+                        <a:defRPr sz="720" b="1">
+                          <a:solidFill>
+                            <a:srgbClr val="0D1117"/>
+                          </a:solidFill>
+                          <a:latin typeface="Inter"/>
+                        </a:defRPr>
+                      </a:pPr>
+                      <a:r>
+                        <a:rPr>
+                          <a:latin typeface="Inter"/>
+                        </a:rPr>
+                        <a:t>S2</a:t>
+                      </a:r>
+                    </a:p>
+                  </a:txBody>
+                  <a:tcPr marL="54864" marR="54864" marT="27432" marB="27432" anchor="ctr">
+                    <a:solidFill>
+                      <a:srgbClr val="F5F7F9"/>
+                    </a:solidFill>
+                  </a:tcPr>
+                </a:tc>
+                <a:tc>
+                  <a:txBody>
+                    <a:bodyPr/>
+                    <a:lstStyle/>
+                    <a:p>
+                      <a:pPr>
+                        <a:defRPr sz="720" b="0">
+                          <a:solidFill>
+                            <a:srgbClr val="0D1117"/>
+                          </a:solidFill>
+                          <a:latin typeface="Inter"/>
+                        </a:defRPr>
+                      </a:pPr>
+                      <a:r>
+                        <a:rPr>
+                          <a:latin typeface="Inter"/>
+                        </a:rPr>
+                        <a:t>Canonical commitment</a:t>
+                      </a:r>
+                    </a:p>
+                  </a:txBody>
+                  <a:tcPr marL="54864" marR="54864" marT="27432" marB="27432" anchor="ctr">
+                    <a:solidFill>
+                      <a:srgbClr val="F5F7F9"/>
+                    </a:solidFill>
+                  </a:tcPr>
+                </a:tc>
+                <a:tc>
+                  <a:txBody>
+                    <a:bodyPr/>
+                    <a:lstStyle/>
+                    <a:p>
+                      <a:pPr>
+                        <a:defRPr sz="720" b="0">
+                          <a:solidFill>
+                            <a:srgbClr val="0D1117"/>
+                          </a:solidFill>
+                          <a:latin typeface="Inter"/>
+                        </a:defRPr>
+                      </a:pPr>
+                      <a:r>
+                        <a:rPr>
+                          <a:latin typeface="Inter"/>
+                        </a:rPr>
+                        <a:t>get_portfolio_exposure</a:t>
+                      </a:r>
+                    </a:p>
+                  </a:txBody>
+                  <a:tcPr marL="54864" marR="54864" marT="27432" marB="27432" anchor="ctr">
+                    <a:solidFill>
+                      <a:srgbClr val="F5F7F9"/>
+                    </a:solidFill>
+                  </a:tcPr>
+                </a:tc>
+                <a:tc>
+                  <a:txBody>
+                    <a:bodyPr/>
+                    <a:lstStyle/>
+                    <a:p>
+                      <a:pPr>
+                        <a:defRPr sz="720" b="0">
+                          <a:solidFill>
+                            <a:srgbClr val="0D1117"/>
+                          </a:solidFill>
+                          <a:latin typeface="Inter"/>
+                        </a:defRPr>
+                      </a:pPr>
+                      <a:r>
+                        <a:rPr>
+                          <a:latin typeface="Inter"/>
+                        </a:rPr>
+                        <a:t>2025-12-31</a:t>
+                      </a:r>
+                    </a:p>
+                  </a:txBody>
+                  <a:tcPr marL="54864" marR="54864" marT="27432" marB="27432" anchor="ctr">
+                    <a:solidFill>
+                      <a:srgbClr val="F5F7F9"/>
+                    </a:solidFill>
+                  </a:tcPr>
+                </a:tc>
+                <a:tc>
+                  <a:txBody>
+                    <a:bodyPr/>
+                    <a:lstStyle/>
+                    <a:p>
+                      <a:pPr>
+                        <a:defRPr sz="720" b="1">
+                          <a:solidFill>
+                            <a:srgbClr val="C6F432"/>
+                          </a:solidFill>
+                          <a:latin typeface="Inter"/>
+                        </a:defRPr>
+                      </a:pPr>
+                      <a:r>
+                        <a:rPr>
+                          <a:latin typeface="Inter"/>
+                        </a:rPr>
+                        <a:t>● Passed</a:t>
+                      </a:r>
+                    </a:p>
+                  </a:txBody>
+                  <a:tcPr marL="54864" marR="54864" marT="27432" marB="27432" anchor="ctr">
+                    <a:solidFill>
+                      <a:srgbClr val="F5F7F9"/>
+                    </a:solidFill>
+                  </a:tcPr>
+                </a:tc>
+              </a:tr>
+              <a:tr h="586359">
+                <a:tc>
+                  <a:txBody>
+                    <a:bodyPr/>
+                    <a:lstStyle/>
+                    <a:p>
+                      <a:pPr>
+                        <a:defRPr sz="720" b="1">
+                          <a:solidFill>
+                            <a:srgbClr val="0D1117"/>
+                          </a:solidFill>
+                          <a:latin typeface="Inter"/>
+                        </a:defRPr>
+                      </a:pPr>
+                      <a:r>
+                        <a:rPr>
+                          <a:latin typeface="Inter"/>
+                        </a:rPr>
+                        <a:t>S3</a:t>
+                      </a:r>
+                    </a:p>
+                  </a:txBody>
+                  <a:tcPr marL="54864" marR="54864" marT="27432" marB="27432" anchor="ctr">
+                    <a:solidFill>
+                      <a:srgbClr val="FFFFFF"/>
+                    </a:solidFill>
+                  </a:tcPr>
+                </a:tc>
+                <a:tc>
+                  <a:txBody>
+                    <a:bodyPr/>
+                    <a:lstStyle/>
+                    <a:p>
+                      <a:pPr>
+                        <a:defRPr sz="720" b="0">
+                          <a:solidFill>
+                            <a:srgbClr val="0D1117"/>
+                          </a:solidFill>
+                          <a:latin typeface="Inter"/>
+                        </a:defRPr>
+                      </a:pPr>
+                      <a:r>
+                        <a:rPr>
+                          <a:latin typeface="Inter"/>
+                        </a:rPr>
+                        <a:t>Holdings and ILPA context</a:t>
+                      </a:r>
+                    </a:p>
+                  </a:txBody>
+                  <a:tcPr marL="54864" marR="54864" marT="27432" marB="27432" anchor="ctr">
+                    <a:solidFill>
+                      <a:srgbClr val="FFFFFF"/>
+                    </a:solidFill>
+                  </a:tcPr>
+                </a:tc>
+                <a:tc>
+                  <a:txBody>
+                    <a:bodyPr/>
+                    <a:lstStyle/>
+                    <a:p>
+                      <a:pPr>
+                        <a:defRPr sz="720" b="0">
+                          <a:solidFill>
+                            <a:srgbClr val="0D1117"/>
+                          </a:solidFill>
+                          <a:latin typeface="Inter"/>
+                        </a:defRPr>
+                      </a:pPr>
+                      <a:r>
+                        <a:rPr>
+                          <a:latin typeface="Inter"/>
+                        </a:rPr>
+                        <a:t>get_private_markets_holdings</a:t>
+                      </a:r>
+                    </a:p>
+                  </a:txBody>
+                  <a:tcPr marL="54864" marR="54864" marT="27432" marB="27432" anchor="ctr">
+                    <a:solidFill>
+                      <a:srgbClr val="FFFFFF"/>
+                    </a:solidFill>
+                  </a:tcPr>
+                </a:tc>
+                <a:tc>
+                  <a:txBody>
+                    <a:bodyPr/>
+                    <a:lstStyle/>
+                    <a:p>
+                      <a:pPr>
+                        <a:defRPr sz="720" b="0">
+                          <a:solidFill>
+                            <a:srgbClr val="0D1117"/>
+                          </a:solidFill>
+                          <a:latin typeface="Inter"/>
+                        </a:defRPr>
+                      </a:pPr>
+                      <a:r>
+                        <a:rPr>
+                          <a:latin typeface="Inter"/>
+                        </a:rPr>
+                        <a:t>2025-12-31</a:t>
+                      </a:r>
+                    </a:p>
+                  </a:txBody>
+                  <a:tcPr marL="54864" marR="54864" marT="27432" marB="27432" anchor="ctr">
+                    <a:solidFill>
+                      <a:srgbClr val="FFFFFF"/>
+                    </a:solidFill>
+                  </a:tcPr>
+                </a:tc>
+                <a:tc>
+                  <a:txBody>
+                    <a:bodyPr/>
+                    <a:lstStyle/>
+                    <a:p>
+                      <a:pPr>
+                        <a:defRPr sz="720" b="1">
+                          <a:solidFill>
+                            <a:srgbClr val="F2A93B"/>
+                          </a:solidFill>
+                          <a:latin typeface="Inter"/>
+                        </a:defRPr>
+                      </a:pPr>
+                      <a:r>
+                        <a:rPr>
+                          <a:latin typeface="Inter"/>
+                        </a:rPr>
+                        <a:t>● Partly available</a:t>
+                      </a:r>
+                    </a:p>
+                  </a:txBody>
+                  <a:tcPr marL="54864" marR="54864" marT="27432" marB="27432" anchor="ctr">
+                    <a:solidFill>
+                      <a:srgbClr val="F5F7F9"/>
+                    </a:solidFill>
+                  </a:tcPr>
+                </a:tc>
+              </a:tr>
+              <a:tr h="586359">
+                <a:tc>
+                  <a:txBody>
+                    <a:bodyPr/>
+                    <a:lstStyle/>
+                    <a:p>
+                      <a:pPr>
+                        <a:defRPr sz="720" b="1">
+                          <a:solidFill>
+                            <a:srgbClr val="0D1117"/>
+                          </a:solidFill>
+                          <a:latin typeface="Inter"/>
+                        </a:defRPr>
+                      </a:pPr>
+                      <a:r>
+                        <a:rPr>
+                          <a:latin typeface="Inter"/>
+                        </a:rPr>
+                        <a:t>S4</a:t>
+                      </a:r>
+                    </a:p>
+                  </a:txBody>
+                  <a:tcPr marL="54864" marR="54864" marT="27432" marB="27432" anchor="ctr">
+                    <a:solidFill>
+                      <a:srgbClr val="F5F7F9"/>
+                    </a:solidFill>
+                  </a:tcPr>
+                </a:tc>
+                <a:tc>
+                  <a:txBody>
+                    <a:bodyPr/>
+                    <a:lstStyle/>
+                    <a:p>
+                      <a:pPr>
+                        <a:defRPr sz="720" b="0">
+                          <a:solidFill>
+                            <a:srgbClr val="0D1117"/>
+                          </a:solidFill>
+                          <a:latin typeface="Inter"/>
+                        </a:defRPr>
+                      </a:pPr>
+                      <a:r>
+                        <a:rPr>
+                          <a:latin typeface="Inter"/>
+                        </a:rPr>
+                        <a:t>Primary and sensitivity benchmark identities</a:t>
+                      </a:r>
+                    </a:p>
+                  </a:txBody>
+                  <a:tcPr marL="54864" marR="54864" marT="27432" marB="27432" anchor="ctr">
+                    <a:solidFill>
+                      <a:srgbClr val="F5F7F9"/>
+                    </a:solidFill>
+                  </a:tcPr>
+                </a:tc>
+                <a:tc>
+                  <a:txBody>
+                    <a:bodyPr/>
+                    <a:lstStyle/>
+                    <a:p>
+                      <a:pPr>
+                        <a:defRPr sz="720" b="0">
+                          <a:solidFill>
+                            <a:srgbClr val="0D1117"/>
+                          </a:solidFill>
+                          <a:latin typeface="Inter"/>
+                        </a:defRPr>
+                      </a:pPr>
+                      <a:r>
+                        <a:rPr>
+                          <a:latin typeface="Inter"/>
+                        </a:rPr>
+                        <a:t>get_benchmarks</a:t>
+                      </a:r>
+                    </a:p>
+                  </a:txBody>
+                  <a:tcPr marL="54864" marR="54864" marT="27432" marB="27432" anchor="ctr">
+                    <a:solidFill>
+                      <a:srgbClr val="F5F7F9"/>
+                    </a:solidFill>
+                  </a:tcPr>
+                </a:tc>
+                <a:tc>
+                  <a:txBody>
+                    <a:bodyPr/>
+                    <a:lstStyle/>
+                    <a:p>
+                      <a:pPr>
+                        <a:defRPr sz="720" b="0">
+                          <a:solidFill>
+                            <a:srgbClr val="0D1117"/>
+                          </a:solidFill>
+                          <a:latin typeface="Inter"/>
+                        </a:defRPr>
+                      </a:pPr>
+                      <a:r>
+                        <a:rPr>
+                          <a:latin typeface="Inter"/>
+                        </a:rPr>
+                        <a:t>2025-12-31</a:t>
+                      </a:r>
+                    </a:p>
+                  </a:txBody>
+                  <a:tcPr marL="54864" marR="54864" marT="27432" marB="27432" anchor="ctr">
+                    <a:solidFill>
+                      <a:srgbClr val="F5F7F9"/>
+                    </a:solidFill>
+                  </a:tcPr>
+                </a:tc>
+                <a:tc>
+                  <a:txBody>
+                    <a:bodyPr/>
+                    <a:lstStyle/>
+                    <a:p>
+                      <a:pPr>
+                        <a:defRPr sz="720" b="1">
+                          <a:solidFill>
+                            <a:srgbClr val="C6F432"/>
+                          </a:solidFill>
+                          <a:latin typeface="Inter"/>
+                        </a:defRPr>
+                      </a:pPr>
+                      <a:r>
+                        <a:rPr>
+                          <a:latin typeface="Inter"/>
+                        </a:rPr>
+                        <a:t>● Passed</a:t>
+                      </a:r>
+                    </a:p>
+                  </a:txBody>
+                  <a:tcPr marL="54864" marR="54864" marT="27432" marB="27432" anchor="ctr">
+                    <a:solidFill>
+                      <a:srgbClr val="F5F7F9"/>
+                    </a:solidFill>
+                  </a:tcPr>
+                </a:tc>
+              </a:tr>
+              <a:tr h="586359">
+                <a:tc>
+                  <a:txBody>
+                    <a:bodyPr/>
+                    <a:lstStyle/>
+                    <a:p>
+                      <a:pPr>
+                        <a:defRPr sz="720" b="1">
+                          <a:solidFill>
+                            <a:srgbClr val="0D1117"/>
+                          </a:solidFill>
+                          <a:latin typeface="Inter"/>
+                        </a:defRPr>
+                      </a:pPr>
+                      <a:r>
+                        <a:rPr>
+                          <a:latin typeface="Inter"/>
+                        </a:rPr>
+                        <a:t>S5</a:t>
+                      </a:r>
+                    </a:p>
+                  </a:txBody>
+                  <a:tcPr marL="54864" marR="54864" marT="27432" marB="27432" anchor="ctr">
+                    <a:solidFill>
+                      <a:srgbClr val="FFFFFF"/>
+                    </a:solidFill>
+                  </a:tcPr>
+                </a:tc>
+                <a:tc>
+                  <a:txBody>
+                    <a:bodyPr/>
+                    <a:lstStyle/>
+                    <a:p>
+                      <a:pPr>
+                        <a:defRPr sz="720" b="0">
+                          <a:solidFill>
+                            <a:srgbClr val="0D1117"/>
+                          </a:solidFill>
+                          <a:latin typeface="Inter"/>
+                        </a:defRPr>
+                      </a:pPr>
+                      <a:r>
+                        <a:rPr>
+                          <a:latin typeface="Inter"/>
+                        </a:rPr>
+                        <a:t>Primary commitment-scoped session</a:t>
+                      </a:r>
+                    </a:p>
+                  </a:txBody>
+                  <a:tcPr marL="54864" marR="54864" marT="27432" marB="27432" anchor="ctr">
+                    <a:solidFill>
+                      <a:srgbClr val="FFFFFF"/>
+                    </a:solidFill>
+                  </a:tcPr>
+                </a:tc>
+                <a:tc>
+                  <a:txBody>
+                    <a:bodyPr/>
+                    <a:lstStyle/>
+                    <a:p>
+                      <a:pPr>
+                        <a:defRPr sz="720" b="0">
+                          <a:solidFill>
+                            <a:srgbClr val="0D1117"/>
+                          </a:solidFill>
+                          <a:latin typeface="Inter"/>
+                        </a:defRPr>
+                      </a:pPr>
+                      <a:r>
+                        <a:rPr>
+                          <a:latin typeface="Inter"/>
+                        </a:rPr>
+                        <a:t>build_strategy_lab_session</a:t>
+                      </a:r>
+                    </a:p>
+                  </a:txBody>
+                  <a:tcPr marL="54864" marR="54864" marT="27432" marB="27432" anchor="ctr">
+                    <a:solidFill>
+                      <a:srgbClr val="FFFFFF"/>
+                    </a:solidFill>
+                  </a:tcPr>
+                </a:tc>
+                <a:tc>
+                  <a:txBody>
+                    <a:bodyPr/>
+                    <a:lstStyle/>
+                    <a:p>
+                      <a:pPr>
+                        <a:defRPr sz="720" b="0">
+                          <a:solidFill>
+                            <a:srgbClr val="0D1117"/>
+                          </a:solidFill>
+                          <a:latin typeface="Inter"/>
+                        </a:defRPr>
+                      </a:pPr>
+                      <a:r>
+                        <a:rPr>
+                          <a:latin typeface="Inter"/>
+                        </a:rPr>
+                        <a:t>2025-12-31</a:t>
+                      </a:r>
+                    </a:p>
+                  </a:txBody>
+                  <a:tcPr marL="54864" marR="54864" marT="27432" marB="27432" anchor="ctr">
+                    <a:solidFill>
+                      <a:srgbClr val="FFFFFF"/>
+                    </a:solidFill>
+                  </a:tcPr>
+                </a:tc>
+                <a:tc>
+                  <a:txBody>
+                    <a:bodyPr/>
+                    <a:lstStyle/>
+                    <a:p>
+                      <a:pPr>
+                        <a:defRPr sz="720" b="1">
+                          <a:solidFill>
+                            <a:srgbClr val="C6F432"/>
+                          </a:solidFill>
+                          <a:latin typeface="Inter"/>
+                        </a:defRPr>
+                      </a:pPr>
+                      <a:r>
+                        <a:rPr>
+                          <a:latin typeface="Inter"/>
+                        </a:rPr>
+                        <a:t>● Passed</a:t>
+                      </a:r>
+                    </a:p>
+                  </a:txBody>
+                  <a:tcPr marL="54864" marR="54864" marT="27432" marB="27432" anchor="ctr">
+                    <a:solidFill>
+                      <a:srgbClr val="F5F7F9"/>
+                    </a:solidFill>
+                  </a:tcPr>
+                </a:tc>
+              </a:tr>
+              <a:tr h="586359">
+                <a:tc>
+                  <a:txBody>
+                    <a:bodyPr/>
+                    <a:lstStyle/>
+                    <a:p>
+                      <a:pPr>
+                        <a:defRPr sz="720" b="1">
+                          <a:solidFill>
+                            <a:srgbClr val="0D1117"/>
+                          </a:solidFill>
+                          <a:latin typeface="Inter"/>
+                        </a:defRPr>
+                      </a:pPr>
+                      <a:r>
+                        <a:rPr>
+                          <a:latin typeface="Inter"/>
+                        </a:rPr>
+                        <a:t>S6</a:t>
+                      </a:r>
+                    </a:p>
+                  </a:txBody>
+                  <a:tcPr marL="54864" marR="54864" marT="27432" marB="27432" anchor="ctr">
+                    <a:solidFill>
+                      <a:srgbClr val="F5F7F9"/>
+                    </a:solidFill>
+                  </a:tcPr>
+                </a:tc>
+                <a:tc>
+                  <a:txBody>
+                    <a:bodyPr/>
+                    <a:lstStyle/>
+                    <a:p>
+                      <a:pPr>
+                        <a:defRPr sz="720" b="0">
+                          <a:solidFill>
+                            <a:srgbClr val="0D1117"/>
+                          </a:solidFill>
+                          <a:latin typeface="Inter"/>
+                        </a:defRPr>
+                      </a:pPr>
+                      <a:r>
+                        <a:rPr>
+                          <a:latin typeface="Inter"/>
+                        </a:rPr>
+                        <a:t>Primary PME metrics</a:t>
+                      </a:r>
+                    </a:p>
+                  </a:txBody>
+                  <a:tcPr marL="54864" marR="54864" marT="27432" marB="27432" anchor="ctr">
+                    <a:solidFill>
+                      <a:srgbClr val="F5F7F9"/>
+                    </a:solidFill>
+                  </a:tcPr>
+                </a:tc>
+                <a:tc>
+                  <a:txBody>
+                    <a:bodyPr/>
+                    <a:lstStyle/>
+                    <a:p>
+                      <a:pPr>
+                        <a:defRPr sz="720" b="0">
+                          <a:solidFill>
+                            <a:srgbClr val="0D1117"/>
+                          </a:solidFill>
+                          <a:latin typeface="Inter"/>
+                        </a:defRPr>
+                      </a:pPr>
+                      <a:r>
+                        <a:rPr>
+                          <a:latin typeface="Inter"/>
+                        </a:rPr>
+                        <a:t>run_strategy_lab_private_markets_pme</a:t>
+                      </a:r>
+                    </a:p>
+                  </a:txBody>
+                  <a:tcPr marL="54864" marR="54864" marT="27432" marB="27432" anchor="ctr">
+                    <a:solidFill>
+                      <a:srgbClr val="F5F7F9"/>
+                    </a:solidFill>
+                  </a:tcPr>
+                </a:tc>
+                <a:tc>
+                  <a:txBody>
+                    <a:bodyPr/>
+                    <a:lstStyle/>
+                    <a:p>
+                      <a:pPr>
+                        <a:defRPr sz="720" b="0">
+                          <a:solidFill>
+                            <a:srgbClr val="0D1117"/>
+                          </a:solidFill>
+                          <a:latin typeface="Inter"/>
+                        </a:defRPr>
+                      </a:pPr>
+                      <a:r>
+                        <a:rPr>
+                          <a:latin typeface="Inter"/>
+                        </a:rPr>
+                        <a:t>2025-12-31</a:t>
+                      </a:r>
+                    </a:p>
+                  </a:txBody>
+                  <a:tcPr marL="54864" marR="54864" marT="27432" marB="27432" anchor="ctr">
+                    <a:solidFill>
+                      <a:srgbClr val="F5F7F9"/>
+                    </a:solidFill>
+                  </a:tcPr>
+                </a:tc>
+                <a:tc>
+                  <a:txBody>
+                    <a:bodyPr/>
+                    <a:lstStyle/>
+                    <a:p>
+                      <a:pPr>
+                        <a:defRPr sz="720" b="1">
+                          <a:solidFill>
+                            <a:srgbClr val="C6F432"/>
+                          </a:solidFill>
+                          <a:latin typeface="Inter"/>
+                        </a:defRPr>
+                      </a:pPr>
+                      <a:r>
+                        <a:rPr>
+                          <a:latin typeface="Inter"/>
+                        </a:rPr>
+                        <a:t>● Passed</a:t>
+                      </a:r>
+                    </a:p>
+                  </a:txBody>
+                  <a:tcPr marL="54864" marR="54864" marT="27432" marB="27432" anchor="ctr">
+                    <a:solidFill>
+                      <a:srgbClr val="F5F7F9"/>
+                    </a:solidFill>
+                  </a:tcPr>
+                </a:tc>
+              </a:tr>
+              <a:tr h="586359">
+                <a:tc>
+                  <a:txBody>
+                    <a:bodyPr/>
+                    <a:lstStyle/>
+                    <a:p>
+                      <a:pPr>
+                        <a:defRPr sz="720" b="1">
+                          <a:solidFill>
+                            <a:srgbClr val="0D1117"/>
+                          </a:solidFill>
+                          <a:latin typeface="Inter"/>
+                        </a:defRPr>
+                      </a:pPr>
+                      <a:r>
+                        <a:rPr>
+                          <a:latin typeface="Inter"/>
+                        </a:rPr>
+                        <a:t>S7</a:t>
+                      </a:r>
+                    </a:p>
+                  </a:txBody>
+                  <a:tcPr marL="54864" marR="54864" marT="27432" marB="27432" anchor="ctr">
+                    <a:solidFill>
+                      <a:srgbClr val="FFFFFF"/>
+                    </a:solidFill>
+                  </a:tcPr>
+                </a:tc>
+                <a:tc>
+                  <a:txBody>
+                    <a:bodyPr/>
+                    <a:lstStyle/>
+                    <a:p>
+                      <a:pPr>
+                        <a:defRPr sz="720" b="0">
+                          <a:solidFill>
+                            <a:srgbClr val="0D1117"/>
+                          </a:solidFill>
+                          <a:latin typeface="Inter"/>
+                        </a:defRPr>
+                      </a:pPr>
+                      <a:r>
+                        <a:rPr>
+                          <a:latin typeface="Inter"/>
+                        </a:rPr>
+                        <a:t>Sensitivity PME metrics</a:t>
+                      </a:r>
+                    </a:p>
+                  </a:txBody>
+                  <a:tcPr marL="54864" marR="54864" marT="27432" marB="27432" anchor="ctr">
+                    <a:solidFill>
+                      <a:srgbClr val="FFFFFF"/>
+                    </a:solidFill>
+                  </a:tcPr>
+                </a:tc>
+                <a:tc>
+                  <a:txBody>
+                    <a:bodyPr/>
+                    <a:lstStyle/>
+                    <a:p>
+                      <a:pPr>
+                        <a:defRPr sz="720" b="0">
+                          <a:solidFill>
+                            <a:srgbClr val="0D1117"/>
+                          </a:solidFill>
+                          <a:latin typeface="Inter"/>
+                        </a:defRPr>
+                      </a:pPr>
+                      <a:r>
+                        <a:rPr>
+                          <a:latin typeface="Inter"/>
+                        </a:rPr>
+                        <a:t>run_strategy_lab_private_markets_pme</a:t>
+                      </a:r>
+                    </a:p>
+                  </a:txBody>
+                  <a:tcPr marL="54864" marR="54864" marT="27432" marB="27432" anchor="ctr">
+                    <a:solidFill>
+                      <a:srgbClr val="FFFFFF"/>
+                    </a:solidFill>
+                  </a:tcPr>
+                </a:tc>
+                <a:tc>
+                  <a:txBody>
+                    <a:bodyPr/>
+                    <a:lstStyle/>
+                    <a:p>
+                      <a:pPr>
+                        <a:defRPr sz="720" b="0">
+                          <a:solidFill>
+                            <a:srgbClr val="0D1117"/>
+                          </a:solidFill>
+                          <a:latin typeface="Inter"/>
+                        </a:defRPr>
+                      </a:pPr>
+                      <a:r>
+                        <a:rPr>
+                          <a:latin typeface="Inter"/>
+                        </a:rPr>
+                        <a:t>2025-12-31</a:t>
+                      </a:r>
+                    </a:p>
+                  </a:txBody>
+                  <a:tcPr marL="54864" marR="54864" marT="27432" marB="27432" anchor="ctr">
+                    <a:solidFill>
+                      <a:srgbClr val="FFFFFF"/>
+                    </a:solidFill>
+                  </a:tcPr>
+                </a:tc>
+                <a:tc>
+                  <a:txBody>
+                    <a:bodyPr/>
+                    <a:lstStyle/>
+                    <a:p>
+                      <a:pPr>
+                        <a:defRPr sz="720" b="1">
+                          <a:solidFill>
+                            <a:srgbClr val="C6F432"/>
+                          </a:solidFill>
+                          <a:latin typeface="Inter"/>
+                        </a:defRPr>
+                      </a:pPr>
+                      <a:r>
+                        <a:rPr>
+                          <a:latin typeface="Inter"/>
+                        </a:rPr>
+                        <a:t>● Passed</a:t>
+                      </a:r>
+                    </a:p>
+                  </a:txBody>
+                  <a:tcPr marL="54864" marR="54864" marT="27432" marB="27432" anchor="ctr">
+                    <a:solidFill>
+                      <a:srgbClr val="F5F7F9"/>
+                    </a:solidFill>
+                  </a:tcPr>
+                </a:tc>
+              </a:tr>
+            </a:tbl>
+          </a:graphicData>
+        </a:graphic>
+      </p:graphicFrame>
+      <p:sp>
+        <p:nvSpPr>
+          <p:cNvPr id="9" name="TextBox 8"/>
+          <p:cNvSpPr txBox="1"/>
+          <p:nvPr/>
+        </p:nvSpPr>
+        <p:spPr>
+          <a:xfrm>
+            <a:off x="640080" y="6035040"/>
+            <a:ext cx="10908792" cy="164592"/>
+          </a:xfrm>
+          <a:prstGeom prst="rect">
+            <a:avLst/>
+          </a:prstGeom>
+          <a:noFill/>
+        </p:spPr>
+        <p:txBody>
+          <a:bodyPr wrap="none" lIns="9144" rIns="9144" tIns="9144" bIns="9144" anchor="t">
+            <a:spAutoFit/>
+          </a:bodyPr>
+          <a:lstStyle/>
+          <a:p>
+            <a:pPr algn="l">
+              <a:spcAft>
+                <a:spcPts val="0"/>
+              </a:spcAft>
+              <a:defRPr sz="680" b="0">
+                <a:solidFill>
+                  <a:srgbClr val="8A94A1"/>
+                </a:solidFill>
+                <a:latin typeface="Inter"/>
+              </a:defRPr>
+            </a:pPr>
+            <a:r>
+              <a:rPr>
+                <a:latin typeface="Inter"/>
+              </a:rPr>
+              <a:t>Illustrative, Gradient Maintained — demo data, not the client's holdings or managers. All organizations, portfolios, managers and results in this public example are illustrative.</a:t>
+            </a:r>
+          </a:p>
+        </p:txBody>
+      </p:sp>
+      <p:sp>
+        <p:nvSpPr>
+          <p:cNvPr id="10" name="Rectangle 9"/>
+          <p:cNvSpPr/>
+          <p:nvPr/>
+        </p:nvSpPr>
+        <p:spPr>
+          <a:xfrm>
+            <a:off x="640080" y="6446520"/>
+            <a:ext cx="10908792" cy="9144"/>
+          </a:xfrm>
+          <a:prstGeom prst="rect">
+            <a:avLst/>
+          </a:prstGeom>
+          <a:solidFill>
+            <a:srgbClr val="E3E7EC"/>
+          </a:solidFill>
+          <a:ln>
+            <a:solidFill>
+              <a:srgbClr val="E3E7EC"/>
+            </a:solidFill>
+          </a:ln>
+        </p:spPr>
+        <p:style>
+          <a:lnRef idx="1">
+            <a:schemeClr val="accent1"/>
+          </a:lnRef>
+          <a:fillRef idx="3">
+            <a:schemeClr val="accent1"/>
+          </a:fillRef>
+          <a:effectRef idx="2">
+            <a:schemeClr val="accent1"/>
+          </a:effectRef>
+          <a:fontRef idx="minor">
+            <a:schemeClr val="lt1"/>
+          </a:fontRef>
+        </p:style>
+        <p:txBody>
+          <a:bodyPr rtlCol="0" anchor="ctr"/>
+          <a:lstStyle/>
+          <a:p>
+            <a:pPr algn="ctr">
+              <a:defRPr>
+                <a:latin typeface="Inter"/>
+              </a:defRPr>
+            </a:pPr>
+          </a:p>
+        </p:txBody>
+      </p:sp>
+      <p:sp>
+        <p:nvSpPr>
+          <p:cNvPr id="11" name="TextBox 10"/>
+          <p:cNvSpPr txBox="1"/>
+          <p:nvPr/>
+        </p:nvSpPr>
+        <p:spPr>
+          <a:xfrm>
+            <a:off x="640080" y="6501384"/>
+            <a:ext cx="4297680" cy="146304"/>
+          </a:xfrm>
+          <a:prstGeom prst="rect">
+            <a:avLst/>
+          </a:prstGeom>
+          <a:noFill/>
+        </p:spPr>
+        <p:txBody>
+          <a:bodyPr wrap="none" lIns="9144" rIns="9144" tIns="9144" bIns="9144" anchor="t">
+            <a:spAutoFit/>
+          </a:bodyPr>
+          <a:lstStyle/>
+          <a:p>
+            <a:pPr algn="l">
+              <a:spcAft>
+                <a:spcPts val="0"/>
+              </a:spcAft>
+              <a:defRPr sz="650" b="0">
+                <a:solidFill>
+                  <a:srgbClr val="8A94A1"/>
+                </a:solidFill>
+                <a:latin typeface="Inter"/>
+              </a:defRPr>
+            </a:pPr>
+            <a:r>
+              <a:rPr>
+                <a:latin typeface="Inter"/>
+              </a:rPr>
+              <a:t>Sources: S1 · S2 · S3 · S4 · S5 · S6 · S7</a:t>
+            </a:r>
+          </a:p>
+        </p:txBody>
+      </p:sp>
+      <p:sp>
+        <p:nvSpPr>
+          <p:cNvPr id="12" name="TextBox 11"/>
+          <p:cNvSpPr txBox="1"/>
+          <p:nvPr/>
+        </p:nvSpPr>
+        <p:spPr>
+          <a:xfrm>
+            <a:off x="4480560" y="6501384"/>
+            <a:ext cx="5303520" cy="146304"/>
+          </a:xfrm>
+          <a:prstGeom prst="rect">
+            <a:avLst/>
+          </a:prstGeom>
+          <a:noFill/>
+        </p:spPr>
+        <p:txBody>
+          <a:bodyPr wrap="none" lIns="9144" rIns="9144" tIns="9144" bIns="9144" anchor="t">
+            <a:spAutoFit/>
+          </a:bodyPr>
+          <a:lstStyle/>
+          <a:p>
+            <a:pPr algn="ctr">
+              <a:spcAft>
+                <a:spcPts val="0"/>
+              </a:spcAft>
+              <a:defRPr sz="650" b="0">
+                <a:solidFill>
+                  <a:srgbClr val="8A94A1"/>
+                </a:solidFill>
+                <a:latin typeface="Inter"/>
+              </a:defRPr>
+            </a:pPr>
+            <a:r>
+              <a:rPr>
+                <a:latin typeface="Inter"/>
+              </a:rPr>
+              <a:t>Confidential — private markets review · Data as of 2025-12-31</a:t>
+            </a:r>
+          </a:p>
+        </p:txBody>
+      </p:sp>
+      <p:sp>
+        <p:nvSpPr>
+          <p:cNvPr id="13" name="TextBox 12"/>
+          <p:cNvSpPr txBox="1"/>
+          <p:nvPr/>
+        </p:nvSpPr>
+        <p:spPr>
+          <a:xfrm>
+            <a:off x="10287000" y="6501384"/>
+            <a:ext cx="1261872" cy="146304"/>
+          </a:xfrm>
+          <a:prstGeom prst="rect">
+            <a:avLst/>
+          </a:prstGeom>
+          <a:noFill/>
+        </p:spPr>
+        <p:txBody>
+          <a:bodyPr wrap="none" lIns="9144" rIns="9144" tIns="9144" bIns="9144" anchor="t">
+            <a:spAutoFit/>
+          </a:bodyPr>
+          <a:lstStyle/>
+          <a:p>
+            <a:pPr algn="r">
+              <a:spcAft>
+                <a:spcPts val="0"/>
+              </a:spcAft>
+              <a:defRPr sz="650" b="0">
+                <a:solidFill>
+                  <a:srgbClr val="8A94A1"/>
+                </a:solidFill>
+                <a:latin typeface="Inter"/>
+              </a:defRPr>
+            </a:pPr>
+            <a:r>
+              <a:rPr>
+                <a:latin typeface="Inter"/>
+              </a:rPr>
+              <a:t>18</a:t>
+            </a:r>
+          </a:p>
+        </p:txBody>
+      </p:sp>
+    </p:spTree>
+  </p:cSld>
+  <p:clrMapOvr>
+    <a:masterClrMapping/>
+  </p:clrMapOvr>
+</p:sld>
+</file>
+
+<file path=ppt/slides/slide19.xml><?xml version="1.0" encoding="utf-8"?>
+<p:sld xmlns:a="http://schemas.openxmlformats.org/drawingml/2006/main" xmlns:p="http://schemas.openxmlformats.org/presentationml/2006/main" xmlns:r="http://schemas.openxmlformats.org/officeDocument/2006/relationships">
+  <p:cSld>
+    <p:spTree>
+      <p:nvGrpSpPr>
+        <p:cNvPr id="1" name=""/>
+        <p:cNvGrpSpPr/>
+        <p:nvPr/>
+      </p:nvGrpSpPr>
+      <p:grpSpPr/>
+      <p:sp>
+        <p:nvSpPr>
+          <p:cNvPr id="2" name="Rectangle 1"/>
+          <p:cNvSpPr/>
+          <p:nvPr/>
+        </p:nvSpPr>
+        <p:spPr>
+          <a:xfrm>
+            <a:off x="0" y="0"/>
+            <a:ext cx="12191695" cy="6858000"/>
+          </a:xfrm>
+          <a:prstGeom prst="rect">
+            <a:avLst/>
+          </a:prstGeom>
+          <a:solidFill>
+            <a:srgbClr val="FFFFFF"/>
+          </a:solidFill>
+          <a:ln>
+            <a:solidFill>
+              <a:srgbClr val="FFFFFF"/>
+            </a:solidFill>
+          </a:ln>
+        </p:spPr>
+        <p:style>
+          <a:lnRef idx="1">
+            <a:schemeClr val="accent1"/>
+          </a:lnRef>
+          <a:fillRef idx="3">
+            <a:schemeClr val="accent1"/>
+          </a:fillRef>
+          <a:effectRef idx="2">
+            <a:schemeClr val="accent1"/>
+          </a:effectRef>
+          <a:fontRef idx="minor">
+            <a:schemeClr val="lt1"/>
+          </a:fontRef>
+        </p:style>
+        <p:txBody>
+          <a:bodyPr rtlCol="0" anchor="ctr"/>
+          <a:lstStyle/>
+          <a:p>
+            <a:pPr algn="ctr">
+              <a:defRPr>
+                <a:latin typeface="Inter"/>
+              </a:defRPr>
+            </a:pPr>
+          </a:p>
+        </p:txBody>
+      </p:sp>
+      <p:sp>
+        <p:nvSpPr>
+          <p:cNvPr id="3" name="TextBox 2"/>
+          <p:cNvSpPr txBox="1"/>
+          <p:nvPr/>
+        </p:nvSpPr>
+        <p:spPr>
+          <a:xfrm>
+            <a:off x="640080" y="329184"/>
+            <a:ext cx="9875520" cy="182880"/>
+          </a:xfrm>
+          <a:prstGeom prst="rect">
+            <a:avLst/>
+          </a:prstGeom>
+          <a:noFill/>
+        </p:spPr>
+        <p:txBody>
+          <a:bodyPr wrap="none" lIns="9144" rIns="9144" tIns="9144" bIns="9144" anchor="t">
+            <a:spAutoFit/>
+          </a:bodyPr>
+          <a:lstStyle/>
+          <a:p>
+            <a:pPr algn="l">
+              <a:spcAft>
+                <a:spcPts val="0"/>
+              </a:spcAft>
+              <a:defRPr sz="750" b="1">
+                <a:solidFill>
+                  <a:srgbClr val="4F6B00"/>
+                </a:solidFill>
+                <a:latin typeface="Inter"/>
+              </a:defRPr>
+            </a:pPr>
+            <a:r>
+              <a:rPr>
+                <a:latin typeface="Inter"/>
+              </a:rPr>
+              <a:t>SAVED ILLUSTRATIVE COMMITMENT, BENCHMARK, BUILDER AND PME EVIDENCE</a:t>
+            </a:r>
+          </a:p>
+        </p:txBody>
+      </p:sp>
+      <p:sp>
+        <p:nvSpPr>
+          <p:cNvPr id="4" name="TextBox 3"/>
+          <p:cNvSpPr txBox="1"/>
+          <p:nvPr/>
+        </p:nvSpPr>
+        <p:spPr>
+          <a:xfrm>
+            <a:off x="640080" y="566928"/>
+            <a:ext cx="10058400" cy="530352"/>
+          </a:xfrm>
+          <a:prstGeom prst="rect">
+            <a:avLst/>
+          </a:prstGeom>
+          <a:noFill/>
+        </p:spPr>
+        <p:txBody>
+          <a:bodyPr wrap="none" lIns="9144" rIns="9144" tIns="9144" bIns="9144" anchor="t">
+            <a:spAutoFit/>
+          </a:bodyPr>
+          <a:lstStyle/>
+          <a:p>
+            <a:pPr algn="l">
+              <a:spcAft>
+                <a:spcPts val="0"/>
+              </a:spcAft>
+              <a:defRPr sz="2300" b="1">
+                <a:solidFill>
+                  <a:srgbClr val="0D1117"/>
+                </a:solidFill>
+                <a:latin typeface="Inter"/>
+              </a:defRPr>
+            </a:pPr>
+            <a:r>
+              <a:rPr>
+                <a:latin typeface="Inter"/>
+              </a:rPr>
+              <a:t>Appendix — Sources and methods — continued</a:t>
+            </a:r>
+          </a:p>
+        </p:txBody>
+      </p:sp>
+      <p:sp>
+        <p:nvSpPr>
+          <p:cNvPr id="5" name="Rectangle 4"/>
+          <p:cNvSpPr/>
+          <p:nvPr/>
+        </p:nvSpPr>
+        <p:spPr>
+          <a:xfrm>
+            <a:off x="640080" y="1115568"/>
+            <a:ext cx="10908792" cy="18288"/>
+          </a:xfrm>
+          <a:prstGeom prst="rect">
+            <a:avLst/>
+          </a:prstGeom>
+          <a:solidFill>
+            <a:srgbClr val="0D1117"/>
+          </a:solidFill>
+          <a:ln>
+            <a:solidFill>
+              <a:srgbClr val="0D1117"/>
+            </a:solidFill>
+          </a:ln>
+        </p:spPr>
+        <p:style>
+          <a:lnRef idx="1">
+            <a:schemeClr val="accent1"/>
+          </a:lnRef>
+          <a:fillRef idx="3">
+            <a:schemeClr val="accent1"/>
+          </a:fillRef>
+          <a:effectRef idx="2">
+            <a:schemeClr val="accent1"/>
+          </a:effectRef>
+          <a:fontRef idx="minor">
+            <a:schemeClr val="lt1"/>
+          </a:fontRef>
+        </p:style>
+        <p:txBody>
+          <a:bodyPr rtlCol="0" anchor="ctr"/>
+          <a:lstStyle/>
+          <a:p>
+            <a:pPr algn="ctr">
+              <a:defRPr>
+                <a:latin typeface="Inter"/>
+              </a:defRPr>
+            </a:pPr>
+          </a:p>
+        </p:txBody>
+      </p:sp>
+      <p:sp>
+        <p:nvSpPr>
+          <p:cNvPr id="6" name="Rectangle 5"/>
+          <p:cNvSpPr/>
+          <p:nvPr/>
+        </p:nvSpPr>
+        <p:spPr>
+          <a:xfrm>
+            <a:off x="11018520" y="502920"/>
+            <a:ext cx="530352" cy="393192"/>
+          </a:xfrm>
+          <a:prstGeom prst="rect">
+            <a:avLst/>
+          </a:prstGeom>
+          <a:solidFill>
+            <a:srgbClr val="9AA5B1"/>
+          </a:solidFill>
+          <a:ln>
+            <a:solidFill>
+              <a:srgbClr val="9AA5B1"/>
+            </a:solidFill>
+          </a:ln>
+        </p:spPr>
+        <p:style>
+          <a:lnRef idx="1">
+            <a:schemeClr val="accent1"/>
+          </a:lnRef>
+          <a:fillRef idx="3">
+            <a:schemeClr val="accent1"/>
+          </a:fillRef>
+          <a:effectRef idx="2">
+            <a:schemeClr val="accent1"/>
+          </a:effectRef>
+          <a:fontRef idx="minor">
+            <a:schemeClr val="lt1"/>
+          </a:fontRef>
+        </p:style>
+        <p:txBody>
+          <a:bodyPr rtlCol="0" anchor="ctr"/>
+          <a:lstStyle/>
+          <a:p>
+            <a:pPr algn="ctr">
+              <a:defRPr>
+                <a:latin typeface="Inter"/>
+              </a:defRPr>
+            </a:pPr>
+          </a:p>
+        </p:txBody>
+      </p:sp>
+      <p:sp>
+        <p:nvSpPr>
+          <p:cNvPr id="7" name="TextBox 6"/>
+          <p:cNvSpPr txBox="1"/>
+          <p:nvPr/>
+        </p:nvSpPr>
+        <p:spPr>
+          <a:xfrm>
+            <a:off x="11045952" y="557784"/>
+            <a:ext cx="475488" cy="182880"/>
+          </a:xfrm>
+          <a:prstGeom prst="rect">
+            <a:avLst/>
+          </a:prstGeom>
+          <a:noFill/>
+        </p:spPr>
+        <p:txBody>
+          <a:bodyPr wrap="none" lIns="9144" rIns="9144" tIns="9144" bIns="9144" anchor="t">
+            <a:spAutoFit/>
+          </a:bodyPr>
+          <a:lstStyle/>
+          <a:p>
+            <a:pPr algn="ctr">
+              <a:spcAft>
+                <a:spcPts val="0"/>
+              </a:spcAft>
+              <a:defRPr sz="1000" b="1">
+                <a:solidFill>
+                  <a:srgbClr val="0D1117"/>
+                </a:solidFill>
+                <a:latin typeface="Inter"/>
+              </a:defRPr>
+            </a:pPr>
+            <a:r>
+              <a:rPr>
+                <a:latin typeface="Inter"/>
+              </a:rPr>
+              <a:t>A</a:t>
+            </a:r>
+          </a:p>
+        </p:txBody>
+      </p:sp>
+      <p:sp>
+        <p:nvSpPr>
+          <p:cNvPr id="8" name="TextBox 7"/>
+          <p:cNvSpPr txBox="1"/>
+          <p:nvPr/>
+        </p:nvSpPr>
+        <p:spPr>
+          <a:xfrm>
+            <a:off x="640080" y="1325880"/>
+            <a:ext cx="10908792" cy="201168"/>
+          </a:xfrm>
+          <a:prstGeom prst="rect">
+            <a:avLst/>
+          </a:prstGeom>
+          <a:noFill/>
+        </p:spPr>
+        <p:txBody>
+          <a:bodyPr wrap="none" lIns="9144" rIns="9144" tIns="9144" bIns="9144" anchor="t">
+            <a:spAutoFit/>
+          </a:bodyPr>
+          <a:lstStyle/>
+          <a:p>
+            <a:pPr algn="l">
+              <a:spcAft>
+                <a:spcPts val="0"/>
+              </a:spcAft>
+              <a:defRPr sz="720" b="1">
+                <a:solidFill>
+                  <a:srgbClr val="4A5563"/>
+                </a:solidFill>
+                <a:latin typeface="Inter"/>
+              </a:defRPr>
+            </a:pPr>
+            <a:r>
+              <a:rPr>
+                <a:latin typeface="Inter"/>
+              </a:rPr>
+              <a:t>SOURCE AUDIT TRAIL</a:t>
+            </a:r>
+          </a:p>
+        </p:txBody>
+      </p:sp>
+      <p:graphicFrame>
+        <p:nvGraphicFramePr>
+          <p:cNvPr id="9" name="Table 8"/>
+          <p:cNvGraphicFramePr>
+            <a:graphicFrameLocks noGrp="1"/>
+          </p:cNvGraphicFramePr>
+          <p:nvPr/>
+        </p:nvGraphicFramePr>
+        <p:xfrm>
+          <a:off x="640080" y="1600200"/>
+          <a:ext cx="10908792" cy="4416552"/>
+        </p:xfrm>
+        <a:graphic>
+          <a:graphicData uri="http://schemas.openxmlformats.org/drawingml/2006/table">
+            <a:tbl>
+              <a:tblPr firstRow="1" bandRow="1">
+                <a:tableStyleId>{5C22544A-7EE6-4342-B048-85BDC9FD1C3A}</a:tableStyleId>
+              </a:tblPr>
+              <a:tblGrid>
+                <a:gridCol w="2011680"/>
+                <a:gridCol w="2965704"/>
+                <a:gridCol w="2965704"/>
+                <a:gridCol w="2965704"/>
+              </a:tblGrid>
+              <a:tr h="552069">
+                <a:tc>
+                  <a:txBody>
+                    <a:bodyPr/>
+                    <a:lstStyle/>
+                    <a:p>
+                      <a:pPr>
+                        <a:defRPr sz="750" b="1">
+                          <a:solidFill>
+                            <a:srgbClr val="FFFFFF"/>
+                          </a:solidFill>
+                          <a:latin typeface="Inter"/>
+                        </a:defRPr>
+                      </a:pPr>
+                      <a:r>
+                        <a:rPr>
+                          <a:latin typeface="Inter"/>
+                        </a:rPr>
+                        <a:t>Tag</a:t>
                       </a:r>
                     </a:p>
                   </a:txBody>
@@ -12269,33 +13264,6 @@
                         <a:rPr>
                           <a:latin typeface="Inter"/>
                         </a:rPr>
-                        <a:t>As of</a:t>
-                      </a:r>
-                    </a:p>
-                  </a:txBody>
-                  <a:tcPr marL="54864" marR="54864" marT="27432" marB="27432" anchor="ctr">
-                    <a:solidFill>
-                      <a:srgbClr val="0D1117"/>
-                    </a:solidFill>
-                  </a:tcPr>
-                </a:tc>
-                <a:tc>
-                  <a:txBody>
-                    <a:bodyPr/>
-                    <a:lstStyle/>
-                    <a:p>
-                      <a:pPr>
-                        <a:defRPr sz="750" b="1">
-                          <a:solidFill>
-                            <a:srgbClr val="FFFFFF"/>
-                          </a:solidFill>
-                          <a:latin typeface="Inter"/>
-                        </a:defRPr>
-                      </a:pPr>
-                      <a:r>
-                        <a:rPr>
-                          <a:latin typeface="Inter"/>
-                        </a:rPr>
                         <a:t>Data scope</a:t>
                       </a:r>
                     </a:p>
@@ -12323,33 +13291,6 @@
                         <a:rPr>
                           <a:latin typeface="Inter"/>
                         </a:rPr>
-                        <a:t>Validation</a:t>
-                      </a:r>
-                    </a:p>
-                  </a:txBody>
-                  <a:tcPr marL="54864" marR="54864" marT="27432" marB="27432" anchor="ctr">
-                    <a:solidFill>
-                      <a:srgbClr val="0D1117"/>
-                    </a:solidFill>
-                  </a:tcPr>
-                </a:tc>
-                <a:tc>
-                  <a:txBody>
-                    <a:bodyPr/>
-                    <a:lstStyle/>
-                    <a:p>
-                      <a:pPr>
-                        <a:defRPr sz="750" b="1">
-                          <a:solidFill>
-                            <a:srgbClr val="FFFFFF"/>
-                          </a:solidFill>
-                          <a:latin typeface="Inter"/>
-                        </a:defRPr>
-                      </a:pPr>
-                      <a:r>
-                        <a:rPr>
-                          <a:latin typeface="Inter"/>
-                        </a:rPr>
                         <a:t>Digest</a:t>
                       </a:r>
                     </a:p>
@@ -12361,14 +13302,14 @@
                   </a:tcPr>
                 </a:tc>
               </a:tr>
-              <a:tr h="586359">
+              <a:tr h="552069">
                 <a:tc>
                   <a:txBody>
                     <a:bodyPr/>
                     <a:lstStyle/>
                     <a:p>
                       <a:pPr>
-                        <a:defRPr sz="650" b="1">
+                        <a:defRPr sz="800" b="1">
                           <a:solidFill>
                             <a:srgbClr val="0D1117"/>
                           </a:solidFill>
@@ -12395,88 +13336,7 @@
                     <a:lstStyle/>
                     <a:p>
                       <a:pPr>
-                        <a:defRPr sz="650" b="0">
-                          <a:solidFill>
-                            <a:srgbClr val="0D1117"/>
-                          </a:solidFill>
-                          <a:latin typeface="Inter"/>
-                        </a:defRPr>
-                      </a:pPr>
-                      <a:r>
-                        <a:rPr>
-                          <a:latin typeface="Inter"/>
-                        </a:rPr>
-                        <a:t>Canonical portfolio</a:t>
-                      </a:r>
-                    </a:p>
-                  </a:txBody>
-                  <a:tcPr marL="54864" marR="54864" marT="27432" marB="27432" anchor="ctr">
-                    <a:solidFill>
-                      <a:srgbClr val="FFFFFF"/>
-                    </a:solidFill>
-                  </a:tcPr>
-                </a:tc>
-                <a:tc>
-                  <a:txBody>
-                    <a:bodyPr/>
-                    <a:lstStyle/>
-                    <a:p>
-                      <a:pPr>
-                        <a:defRPr sz="650" b="0">
-                          <a:solidFill>
-                            <a:srgbClr val="0D1117"/>
-                          </a:solidFill>
-                          <a:latin typeface="Inter"/>
-                        </a:defRPr>
-                      </a:pPr>
-                      <a:r>
-                        <a:rPr>
-                          <a:latin typeface="Inter"/>
-                        </a:rPr>
-                        <a:t>gradient_tool</a:t>
-                      </a:r>
-                    </a:p>
-                  </a:txBody>
-                  <a:tcPr marL="54864" marR="54864" marT="27432" marB="27432" anchor="ctr">
-                    <a:solidFill>
-                      <a:srgbClr val="FFFFFF"/>
-                    </a:solidFill>
-                  </a:tcPr>
-                </a:tc>
-                <a:tc>
-                  <a:txBody>
-                    <a:bodyPr/>
-                    <a:lstStyle/>
-                    <a:p>
-                      <a:pPr>
-                        <a:defRPr sz="650" b="0">
-                          <a:solidFill>
-                            <a:srgbClr val="0D1117"/>
-                          </a:solidFill>
-                          <a:latin typeface="Inter"/>
-                        </a:defRPr>
-                      </a:pPr>
-                      <a:r>
-                        <a:rPr>
-                          <a:latin typeface="Inter"/>
-                        </a:rPr>
-                        <a:t>list_portfolios</a:t>
-                      </a:r>
-                    </a:p>
-                  </a:txBody>
-                  <a:tcPr marL="54864" marR="54864" marT="27432" marB="27432" anchor="ctr">
-                    <a:solidFill>
-                      <a:srgbClr val="FFFFFF"/>
-                    </a:solidFill>
-                  </a:tcPr>
-                </a:tc>
-                <a:tc>
-                  <a:txBody>
-                    <a:bodyPr/>
-                    <a:lstStyle/>
-                    <a:p>
-                      <a:pPr>
-                        <a:defRPr sz="650" b="0">
+                        <a:defRPr sz="800" b="0">
                           <a:solidFill>
                             <a:srgbClr val="0D1117"/>
                           </a:solidFill>
@@ -12503,34 +13363,7 @@
                     <a:lstStyle/>
                     <a:p>
                       <a:pPr>
-                        <a:defRPr sz="650" b="0">
-                          <a:solidFill>
-                            <a:srgbClr val="0D1117"/>
-                          </a:solidFill>
-                          <a:latin typeface="Inter"/>
-                        </a:defRPr>
-                      </a:pPr>
-                      <a:r>
-                        <a:rPr>
-                          <a:latin typeface="Inter"/>
-                        </a:rPr>
-                        <a:t>2025-12-31</a:t>
-                      </a:r>
-                    </a:p>
-                  </a:txBody>
-                  <a:tcPr marL="54864" marR="54864" marT="27432" marB="27432" anchor="ctr">
-                    <a:solidFill>
-                      <a:srgbClr val="FFFFFF"/>
-                    </a:solidFill>
-                  </a:tcPr>
-                </a:tc>
-                <a:tc>
-                  <a:txBody>
-                    <a:bodyPr/>
-                    <a:lstStyle/>
-                    <a:p>
-                      <a:pPr>
-                        <a:defRPr sz="650" b="0">
+                        <a:defRPr sz="800" b="0">
                           <a:solidFill>
                             <a:srgbClr val="0D1117"/>
                           </a:solidFill>
@@ -12557,34 +13390,7 @@
                     <a:lstStyle/>
                     <a:p>
                       <a:pPr>
-                        <a:defRPr sz="650" b="0">
-                          <a:solidFill>
-                            <a:srgbClr val="0D1117"/>
-                          </a:solidFill>
-                          <a:latin typeface="Inter"/>
-                        </a:defRPr>
-                      </a:pPr>
-                      <a:r>
-                        <a:rPr>
-                          <a:latin typeface="Inter"/>
-                        </a:rPr>
-                        <a:t>passed</a:t>
-                      </a:r>
-                    </a:p>
-                  </a:txBody>
-                  <a:tcPr marL="54864" marR="54864" marT="27432" marB="27432" anchor="ctr">
-                    <a:solidFill>
-                      <a:srgbClr val="FFFFFF"/>
-                    </a:solidFill>
-                  </a:tcPr>
-                </a:tc>
-                <a:tc>
-                  <a:txBody>
-                    <a:bodyPr/>
-                    <a:lstStyle/>
-                    <a:p>
-                      <a:pPr>
-                        <a:defRPr sz="650" b="0">
+                        <a:defRPr sz="800" b="0">
                           <a:solidFill>
                             <a:srgbClr val="0D1117"/>
                           </a:solidFill>
@@ -12606,14 +13412,14 @@
                   </a:tcPr>
                 </a:tc>
               </a:tr>
-              <a:tr h="586359">
+              <a:tr h="552069">
                 <a:tc>
                   <a:txBody>
                     <a:bodyPr/>
                     <a:lstStyle/>
                     <a:p>
                       <a:pPr>
-                        <a:defRPr sz="650" b="1">
+                        <a:defRPr sz="800" b="1">
                           <a:solidFill>
                             <a:srgbClr val="0D1117"/>
                           </a:solidFill>
@@ -12640,88 +13446,7 @@
                     <a:lstStyle/>
                     <a:p>
                       <a:pPr>
-                        <a:defRPr sz="650" b="0">
-                          <a:solidFill>
-                            <a:srgbClr val="0D1117"/>
-                          </a:solidFill>
-                          <a:latin typeface="Inter"/>
-                        </a:defRPr>
-                      </a:pPr>
-                      <a:r>
-                        <a:rPr>
-                          <a:latin typeface="Inter"/>
-                        </a:rPr>
-                        <a:t>Canonical commitment</a:t>
-                      </a:r>
-                    </a:p>
-                  </a:txBody>
-                  <a:tcPr marL="54864" marR="54864" marT="27432" marB="27432" anchor="ctr">
-                    <a:solidFill>
-                      <a:srgbClr val="F5F7F9"/>
-                    </a:solidFill>
-                  </a:tcPr>
-                </a:tc>
-                <a:tc>
-                  <a:txBody>
-                    <a:bodyPr/>
-                    <a:lstStyle/>
-                    <a:p>
-                      <a:pPr>
-                        <a:defRPr sz="650" b="0">
-                          <a:solidFill>
-                            <a:srgbClr val="0D1117"/>
-                          </a:solidFill>
-                          <a:latin typeface="Inter"/>
-                        </a:defRPr>
-                      </a:pPr>
-                      <a:r>
-                        <a:rPr>
-                          <a:latin typeface="Inter"/>
-                        </a:rPr>
-                        <a:t>gradient_tool</a:t>
-                      </a:r>
-                    </a:p>
-                  </a:txBody>
-                  <a:tcPr marL="54864" marR="54864" marT="27432" marB="27432" anchor="ctr">
-                    <a:solidFill>
-                      <a:srgbClr val="F5F7F9"/>
-                    </a:solidFill>
-                  </a:tcPr>
-                </a:tc>
-                <a:tc>
-                  <a:txBody>
-                    <a:bodyPr/>
-                    <a:lstStyle/>
-                    <a:p>
-                      <a:pPr>
-                        <a:defRPr sz="650" b="0">
-                          <a:solidFill>
-                            <a:srgbClr val="0D1117"/>
-                          </a:solidFill>
-                          <a:latin typeface="Inter"/>
-                        </a:defRPr>
-                      </a:pPr>
-                      <a:r>
-                        <a:rPr>
-                          <a:latin typeface="Inter"/>
-                        </a:rPr>
-                        <a:t>get_portfolio_exposure</a:t>
-                      </a:r>
-                    </a:p>
-                  </a:txBody>
-                  <a:tcPr marL="54864" marR="54864" marT="27432" marB="27432" anchor="ctr">
-                    <a:solidFill>
-                      <a:srgbClr val="F5F7F9"/>
-                    </a:solidFill>
-                  </a:tcPr>
-                </a:tc>
-                <a:tc>
-                  <a:txBody>
-                    <a:bodyPr/>
-                    <a:lstStyle/>
-                    <a:p>
-                      <a:pPr>
-                        <a:defRPr sz="650" b="0">
+                        <a:defRPr sz="800" b="0">
                           <a:solidFill>
                             <a:srgbClr val="0D1117"/>
                           </a:solidFill>
@@ -12748,34 +13473,7 @@
                     <a:lstStyle/>
                     <a:p>
                       <a:pPr>
-                        <a:defRPr sz="650" b="0">
-                          <a:solidFill>
-                            <a:srgbClr val="0D1117"/>
-                          </a:solidFill>
-                          <a:latin typeface="Inter"/>
-                        </a:defRPr>
-                      </a:pPr>
-                      <a:r>
-                        <a:rPr>
-                          <a:latin typeface="Inter"/>
-                        </a:rPr>
-                        <a:t>2025-12-31</a:t>
-                      </a:r>
-                    </a:p>
-                  </a:txBody>
-                  <a:tcPr marL="54864" marR="54864" marT="27432" marB="27432" anchor="ctr">
-                    <a:solidFill>
-                      <a:srgbClr val="F5F7F9"/>
-                    </a:solidFill>
-                  </a:tcPr>
-                </a:tc>
-                <a:tc>
-                  <a:txBody>
-                    <a:bodyPr/>
-                    <a:lstStyle/>
-                    <a:p>
-                      <a:pPr>
-                        <a:defRPr sz="650" b="0">
+                        <a:defRPr sz="800" b="0">
                           <a:solidFill>
                             <a:srgbClr val="0D1117"/>
                           </a:solidFill>
@@ -12802,34 +13500,7 @@
                     <a:lstStyle/>
                     <a:p>
                       <a:pPr>
-                        <a:defRPr sz="650" b="0">
-                          <a:solidFill>
-                            <a:srgbClr val="0D1117"/>
-                          </a:solidFill>
-                          <a:latin typeface="Inter"/>
-                        </a:defRPr>
-                      </a:pPr>
-                      <a:r>
-                        <a:rPr>
-                          <a:latin typeface="Inter"/>
-                        </a:rPr>
-                        <a:t>passed</a:t>
-                      </a:r>
-                    </a:p>
-                  </a:txBody>
-                  <a:tcPr marL="54864" marR="54864" marT="27432" marB="27432" anchor="ctr">
-                    <a:solidFill>
-                      <a:srgbClr val="F5F7F9"/>
-                    </a:solidFill>
-                  </a:tcPr>
-                </a:tc>
-                <a:tc>
-                  <a:txBody>
-                    <a:bodyPr/>
-                    <a:lstStyle/>
-                    <a:p>
-                      <a:pPr>
-                        <a:defRPr sz="650" b="0">
+                        <a:defRPr sz="800" b="0">
                           <a:solidFill>
                             <a:srgbClr val="0D1117"/>
                           </a:solidFill>
@@ -12851,14 +13522,14 @@
                   </a:tcPr>
                 </a:tc>
               </a:tr>
-              <a:tr h="586359">
+              <a:tr h="552069">
                 <a:tc>
                   <a:txBody>
                     <a:bodyPr/>
                     <a:lstStyle/>
                     <a:p>
                       <a:pPr>
-                        <a:defRPr sz="650" b="1">
+                        <a:defRPr sz="800" b="1">
                           <a:solidFill>
                             <a:srgbClr val="0D1117"/>
                           </a:solidFill>
@@ -12885,88 +13556,7 @@
                     <a:lstStyle/>
                     <a:p>
                       <a:pPr>
-                        <a:defRPr sz="650" b="0">
-                          <a:solidFill>
-                            <a:srgbClr val="0D1117"/>
-                          </a:solidFill>
-                          <a:latin typeface="Inter"/>
-                        </a:defRPr>
-                      </a:pPr>
-                      <a:r>
-                        <a:rPr>
-                          <a:latin typeface="Inter"/>
-                        </a:rPr>
-                        <a:t>Holdings and ILPA context</a:t>
-                      </a:r>
-                    </a:p>
-                  </a:txBody>
-                  <a:tcPr marL="54864" marR="54864" marT="27432" marB="27432" anchor="ctr">
-                    <a:solidFill>
-                      <a:srgbClr val="FFFFFF"/>
-                    </a:solidFill>
-                  </a:tcPr>
-                </a:tc>
-                <a:tc>
-                  <a:txBody>
-                    <a:bodyPr/>
-                    <a:lstStyle/>
-                    <a:p>
-                      <a:pPr>
-                        <a:defRPr sz="650" b="0">
-                          <a:solidFill>
-                            <a:srgbClr val="0D1117"/>
-                          </a:solidFill>
-                          <a:latin typeface="Inter"/>
-                        </a:defRPr>
-                      </a:pPr>
-                      <a:r>
-                        <a:rPr>
-                          <a:latin typeface="Inter"/>
-                        </a:rPr>
-                        <a:t>gradient_tool</a:t>
-                      </a:r>
-                    </a:p>
-                  </a:txBody>
-                  <a:tcPr marL="54864" marR="54864" marT="27432" marB="27432" anchor="ctr">
-                    <a:solidFill>
-                      <a:srgbClr val="FFFFFF"/>
-                    </a:solidFill>
-                  </a:tcPr>
-                </a:tc>
-                <a:tc>
-                  <a:txBody>
-                    <a:bodyPr/>
-                    <a:lstStyle/>
-                    <a:p>
-                      <a:pPr>
-                        <a:defRPr sz="650" b="0">
-                          <a:solidFill>
-                            <a:srgbClr val="0D1117"/>
-                          </a:solidFill>
-                          <a:latin typeface="Inter"/>
-                        </a:defRPr>
-                      </a:pPr>
-                      <a:r>
-                        <a:rPr>
-                          <a:latin typeface="Inter"/>
-                        </a:rPr>
-                        <a:t>get_private_markets_holdings</a:t>
-                      </a:r>
-                    </a:p>
-                  </a:txBody>
-                  <a:tcPr marL="54864" marR="54864" marT="27432" marB="27432" anchor="ctr">
-                    <a:solidFill>
-                      <a:srgbClr val="FFFFFF"/>
-                    </a:solidFill>
-                  </a:tcPr>
-                </a:tc>
-                <a:tc>
-                  <a:txBody>
-                    <a:bodyPr/>
-                    <a:lstStyle/>
-                    <a:p>
-                      <a:pPr>
-                        <a:defRPr sz="650" b="0">
+                        <a:defRPr sz="800" b="0">
                           <a:solidFill>
                             <a:srgbClr val="0D1117"/>
                           </a:solidFill>
@@ -12993,34 +13583,7 @@
                     <a:lstStyle/>
                     <a:p>
                       <a:pPr>
-                        <a:defRPr sz="650" b="0">
-                          <a:solidFill>
-                            <a:srgbClr val="0D1117"/>
-                          </a:solidFill>
-                          <a:latin typeface="Inter"/>
-                        </a:defRPr>
-                      </a:pPr>
-                      <a:r>
-                        <a:rPr>
-                          <a:latin typeface="Inter"/>
-                        </a:rPr>
-                        <a:t>2025-12-31</a:t>
-                      </a:r>
-                    </a:p>
-                  </a:txBody>
-                  <a:tcPr marL="54864" marR="54864" marT="27432" marB="27432" anchor="ctr">
-                    <a:solidFill>
-                      <a:srgbClr val="FFFFFF"/>
-                    </a:solidFill>
-                  </a:tcPr>
-                </a:tc>
-                <a:tc>
-                  <a:txBody>
-                    <a:bodyPr/>
-                    <a:lstStyle/>
-                    <a:p>
-                      <a:pPr>
-                        <a:defRPr sz="650" b="0">
+                        <a:defRPr sz="800" b="0">
                           <a:solidFill>
                             <a:srgbClr val="0D1117"/>
                           </a:solidFill>
@@ -13047,34 +13610,7 @@
                     <a:lstStyle/>
                     <a:p>
                       <a:pPr>
-                        <a:defRPr sz="650" b="0">
-                          <a:solidFill>
-                            <a:srgbClr val="0D1117"/>
-                          </a:solidFill>
-                          <a:latin typeface="Inter"/>
-                        </a:defRPr>
-                      </a:pPr>
-                      <a:r>
-                        <a:rPr>
-                          <a:latin typeface="Inter"/>
-                        </a:rPr>
-                        <a:t>partial</a:t>
-                      </a:r>
-                    </a:p>
-                  </a:txBody>
-                  <a:tcPr marL="54864" marR="54864" marT="27432" marB="27432" anchor="ctr">
-                    <a:solidFill>
-                      <a:srgbClr val="FFFFFF"/>
-                    </a:solidFill>
-                  </a:tcPr>
-                </a:tc>
-                <a:tc>
-                  <a:txBody>
-                    <a:bodyPr/>
-                    <a:lstStyle/>
-                    <a:p>
-                      <a:pPr>
-                        <a:defRPr sz="650" b="0">
+                        <a:defRPr sz="800" b="0">
                           <a:solidFill>
                             <a:srgbClr val="0D1117"/>
                           </a:solidFill>
@@ -13096,14 +13632,14 @@
                   </a:tcPr>
                 </a:tc>
               </a:tr>
-              <a:tr h="586359">
+              <a:tr h="552069">
                 <a:tc>
                   <a:txBody>
                     <a:bodyPr/>
                     <a:lstStyle/>
                     <a:p>
                       <a:pPr>
-                        <a:defRPr sz="650" b="1">
+                        <a:defRPr sz="800" b="1">
                           <a:solidFill>
                             <a:srgbClr val="0D1117"/>
                           </a:solidFill>
@@ -13130,88 +13666,7 @@
                     <a:lstStyle/>
                     <a:p>
                       <a:pPr>
-                        <a:defRPr sz="650" b="0">
-                          <a:solidFill>
-                            <a:srgbClr val="0D1117"/>
-                          </a:solidFill>
-                          <a:latin typeface="Inter"/>
-                        </a:defRPr>
-                      </a:pPr>
-                      <a:r>
-                        <a:rPr>
-                          <a:latin typeface="Inter"/>
-                        </a:rPr>
-                        <a:t>Primary and sensitivity benchmark identities</a:t>
-                      </a:r>
-                    </a:p>
-                  </a:txBody>
-                  <a:tcPr marL="54864" marR="54864" marT="27432" marB="27432" anchor="ctr">
-                    <a:solidFill>
-                      <a:srgbClr val="F5F7F9"/>
-                    </a:solidFill>
-                  </a:tcPr>
-                </a:tc>
-                <a:tc>
-                  <a:txBody>
-                    <a:bodyPr/>
-                    <a:lstStyle/>
-                    <a:p>
-                      <a:pPr>
-                        <a:defRPr sz="650" b="0">
-                          <a:solidFill>
-                            <a:srgbClr val="0D1117"/>
-                          </a:solidFill>
-                          <a:latin typeface="Inter"/>
-                        </a:defRPr>
-                      </a:pPr>
-                      <a:r>
-                        <a:rPr>
-                          <a:latin typeface="Inter"/>
-                        </a:rPr>
-                        <a:t>gradient_tool</a:t>
-                      </a:r>
-                    </a:p>
-                  </a:txBody>
-                  <a:tcPr marL="54864" marR="54864" marT="27432" marB="27432" anchor="ctr">
-                    <a:solidFill>
-                      <a:srgbClr val="F5F7F9"/>
-                    </a:solidFill>
-                  </a:tcPr>
-                </a:tc>
-                <a:tc>
-                  <a:txBody>
-                    <a:bodyPr/>
-                    <a:lstStyle/>
-                    <a:p>
-                      <a:pPr>
-                        <a:defRPr sz="650" b="0">
-                          <a:solidFill>
-                            <a:srgbClr val="0D1117"/>
-                          </a:solidFill>
-                          <a:latin typeface="Inter"/>
-                        </a:defRPr>
-                      </a:pPr>
-                      <a:r>
-                        <a:rPr>
-                          <a:latin typeface="Inter"/>
-                        </a:rPr>
-                        <a:t>get_benchmarks</a:t>
-                      </a:r>
-                    </a:p>
-                  </a:txBody>
-                  <a:tcPr marL="54864" marR="54864" marT="27432" marB="27432" anchor="ctr">
-                    <a:solidFill>
-                      <a:srgbClr val="F5F7F9"/>
-                    </a:solidFill>
-                  </a:tcPr>
-                </a:tc>
-                <a:tc>
-                  <a:txBody>
-                    <a:bodyPr/>
-                    <a:lstStyle/>
-                    <a:p>
-                      <a:pPr>
-                        <a:defRPr sz="650" b="0">
+                        <a:defRPr sz="800" b="0">
                           <a:solidFill>
                             <a:srgbClr val="0D1117"/>
                           </a:solidFill>
@@ -13238,34 +13693,7 @@
                     <a:lstStyle/>
                     <a:p>
                       <a:pPr>
-                        <a:defRPr sz="650" b="0">
-                          <a:solidFill>
-                            <a:srgbClr val="0D1117"/>
-                          </a:solidFill>
-                          <a:latin typeface="Inter"/>
-                        </a:defRPr>
-                      </a:pPr>
-                      <a:r>
-                        <a:rPr>
-                          <a:latin typeface="Inter"/>
-                        </a:rPr>
-                        <a:t>2025-12-31</a:t>
-                      </a:r>
-                    </a:p>
-                  </a:txBody>
-                  <a:tcPr marL="54864" marR="54864" marT="27432" marB="27432" anchor="ctr">
-                    <a:solidFill>
-                      <a:srgbClr val="F5F7F9"/>
-                    </a:solidFill>
-                  </a:tcPr>
-                </a:tc>
-                <a:tc>
-                  <a:txBody>
-                    <a:bodyPr/>
-                    <a:lstStyle/>
-                    <a:p>
-                      <a:pPr>
-                        <a:defRPr sz="650" b="0">
+                        <a:defRPr sz="800" b="0">
                           <a:solidFill>
                             <a:srgbClr val="0D1117"/>
                           </a:solidFill>
@@ -13292,34 +13720,7 @@
                     <a:lstStyle/>
                     <a:p>
                       <a:pPr>
-                        <a:defRPr sz="650" b="0">
-                          <a:solidFill>
-                            <a:srgbClr val="0D1117"/>
-                          </a:solidFill>
-                          <a:latin typeface="Inter"/>
-                        </a:defRPr>
-                      </a:pPr>
-                      <a:r>
-                        <a:rPr>
-                          <a:latin typeface="Inter"/>
-                        </a:rPr>
-                        <a:t>passed</a:t>
-                      </a:r>
-                    </a:p>
-                  </a:txBody>
-                  <a:tcPr marL="54864" marR="54864" marT="27432" marB="27432" anchor="ctr">
-                    <a:solidFill>
-                      <a:srgbClr val="F5F7F9"/>
-                    </a:solidFill>
-                  </a:tcPr>
-                </a:tc>
-                <a:tc>
-                  <a:txBody>
-                    <a:bodyPr/>
-                    <a:lstStyle/>
-                    <a:p>
-                      <a:pPr>
-                        <a:defRPr sz="650" b="0">
+                        <a:defRPr sz="800" b="0">
                           <a:solidFill>
                             <a:srgbClr val="0D1117"/>
                           </a:solidFill>
@@ -13341,14 +13742,14 @@
                   </a:tcPr>
                 </a:tc>
               </a:tr>
-              <a:tr h="586359">
+              <a:tr h="552069">
                 <a:tc>
                   <a:txBody>
                     <a:bodyPr/>
                     <a:lstStyle/>
                     <a:p>
                       <a:pPr>
-                        <a:defRPr sz="650" b="1">
+                        <a:defRPr sz="800" b="1">
                           <a:solidFill>
                             <a:srgbClr val="0D1117"/>
                           </a:solidFill>
@@ -13375,88 +13776,7 @@
                     <a:lstStyle/>
                     <a:p>
                       <a:pPr>
-                        <a:defRPr sz="650" b="0">
-                          <a:solidFill>
-                            <a:srgbClr val="0D1117"/>
-                          </a:solidFill>
-                          <a:latin typeface="Inter"/>
-                        </a:defRPr>
-                      </a:pPr>
-                      <a:r>
-                        <a:rPr>
-                          <a:latin typeface="Inter"/>
-                        </a:rPr>
-                        <a:t>Primary commitment-scoped session</a:t>
-                      </a:r>
-                    </a:p>
-                  </a:txBody>
-                  <a:tcPr marL="54864" marR="54864" marT="27432" marB="27432" anchor="ctr">
-                    <a:solidFill>
-                      <a:srgbClr val="FFFFFF"/>
-                    </a:solidFill>
-                  </a:tcPr>
-                </a:tc>
-                <a:tc>
-                  <a:txBody>
-                    <a:bodyPr/>
-                    <a:lstStyle/>
-                    <a:p>
-                      <a:pPr>
-                        <a:defRPr sz="650" b="0">
-                          <a:solidFill>
-                            <a:srgbClr val="0D1117"/>
-                          </a:solidFill>
-                          <a:latin typeface="Inter"/>
-                        </a:defRPr>
-                      </a:pPr>
-                      <a:r>
-                        <a:rPr>
-                          <a:latin typeface="Inter"/>
-                        </a:rPr>
-                        <a:t>gradient_tool</a:t>
-                      </a:r>
-                    </a:p>
-                  </a:txBody>
-                  <a:tcPr marL="54864" marR="54864" marT="27432" marB="27432" anchor="ctr">
-                    <a:solidFill>
-                      <a:srgbClr val="FFFFFF"/>
-                    </a:solidFill>
-                  </a:tcPr>
-                </a:tc>
-                <a:tc>
-                  <a:txBody>
-                    <a:bodyPr/>
-                    <a:lstStyle/>
-                    <a:p>
-                      <a:pPr>
-                        <a:defRPr sz="650" b="0">
-                          <a:solidFill>
-                            <a:srgbClr val="0D1117"/>
-                          </a:solidFill>
-                          <a:latin typeface="Inter"/>
-                        </a:defRPr>
-                      </a:pPr>
-                      <a:r>
-                        <a:rPr>
-                          <a:latin typeface="Inter"/>
-                        </a:rPr>
-                        <a:t>build_strategy_lab_session</a:t>
-                      </a:r>
-                    </a:p>
-                  </a:txBody>
-                  <a:tcPr marL="54864" marR="54864" marT="27432" marB="27432" anchor="ctr">
-                    <a:solidFill>
-                      <a:srgbClr val="FFFFFF"/>
-                    </a:solidFill>
-                  </a:tcPr>
-                </a:tc>
-                <a:tc>
-                  <a:txBody>
-                    <a:bodyPr/>
-                    <a:lstStyle/>
-                    <a:p>
-                      <a:pPr>
-                        <a:defRPr sz="650" b="0">
+                        <a:defRPr sz="800" b="0">
                           <a:solidFill>
                             <a:srgbClr val="0D1117"/>
                           </a:solidFill>
@@ -13483,34 +13803,7 @@
                     <a:lstStyle/>
                     <a:p>
                       <a:pPr>
-                        <a:defRPr sz="650" b="0">
-                          <a:solidFill>
-                            <a:srgbClr val="0D1117"/>
-                          </a:solidFill>
-                          <a:latin typeface="Inter"/>
-                        </a:defRPr>
-                      </a:pPr>
-                      <a:r>
-                        <a:rPr>
-                          <a:latin typeface="Inter"/>
-                        </a:rPr>
-                        <a:t>2025-12-31</a:t>
-                      </a:r>
-                    </a:p>
-                  </a:txBody>
-                  <a:tcPr marL="54864" marR="54864" marT="27432" marB="27432" anchor="ctr">
-                    <a:solidFill>
-                      <a:srgbClr val="FFFFFF"/>
-                    </a:solidFill>
-                  </a:tcPr>
-                </a:tc>
-                <a:tc>
-                  <a:txBody>
-                    <a:bodyPr/>
-                    <a:lstStyle/>
-                    <a:p>
-                      <a:pPr>
-                        <a:defRPr sz="650" b="0">
+                        <a:defRPr sz="800" b="0">
                           <a:solidFill>
                             <a:srgbClr val="0D1117"/>
                           </a:solidFill>
@@ -13537,34 +13830,7 @@
                     <a:lstStyle/>
                     <a:p>
                       <a:pPr>
-                        <a:defRPr sz="650" b="0">
-                          <a:solidFill>
-                            <a:srgbClr val="0D1117"/>
-                          </a:solidFill>
-                          <a:latin typeface="Inter"/>
-                        </a:defRPr>
-                      </a:pPr>
-                      <a:r>
-                        <a:rPr>
-                          <a:latin typeface="Inter"/>
-                        </a:rPr>
-                        <a:t>passed</a:t>
-                      </a:r>
-                    </a:p>
-                  </a:txBody>
-                  <a:tcPr marL="54864" marR="54864" marT="27432" marB="27432" anchor="ctr">
-                    <a:solidFill>
-                      <a:srgbClr val="FFFFFF"/>
-                    </a:solidFill>
-                  </a:tcPr>
-                </a:tc>
-                <a:tc>
-                  <a:txBody>
-                    <a:bodyPr/>
-                    <a:lstStyle/>
-                    <a:p>
-                      <a:pPr>
-                        <a:defRPr sz="650" b="0">
+                        <a:defRPr sz="800" b="0">
                           <a:solidFill>
                             <a:srgbClr val="0D1117"/>
                           </a:solidFill>
@@ -13586,14 +13852,14 @@
                   </a:tcPr>
                 </a:tc>
               </a:tr>
-              <a:tr h="586359">
+              <a:tr h="552069">
                 <a:tc>
                   <a:txBody>
                     <a:bodyPr/>
                     <a:lstStyle/>
                     <a:p>
                       <a:pPr>
-                        <a:defRPr sz="650" b="1">
+                        <a:defRPr sz="800" b="1">
                           <a:solidFill>
                             <a:srgbClr val="0D1117"/>
                           </a:solidFill>
@@ -13620,88 +13886,7 @@
                     <a:lstStyle/>
                     <a:p>
                       <a:pPr>
-                        <a:defRPr sz="650" b="0">
-                          <a:solidFill>
-                            <a:srgbClr val="0D1117"/>
-                          </a:solidFill>
-                          <a:latin typeface="Inter"/>
-                        </a:defRPr>
-                      </a:pPr>
-                      <a:r>
-                        <a:rPr>
-                          <a:latin typeface="Inter"/>
-                        </a:rPr>
-                        <a:t>Primary PME metrics</a:t>
-                      </a:r>
-                    </a:p>
-                  </a:txBody>
-                  <a:tcPr marL="54864" marR="54864" marT="27432" marB="27432" anchor="ctr">
-                    <a:solidFill>
-                      <a:srgbClr val="F5F7F9"/>
-                    </a:solidFill>
-                  </a:tcPr>
-                </a:tc>
-                <a:tc>
-                  <a:txBody>
-                    <a:bodyPr/>
-                    <a:lstStyle/>
-                    <a:p>
-                      <a:pPr>
-                        <a:defRPr sz="650" b="0">
-                          <a:solidFill>
-                            <a:srgbClr val="0D1117"/>
-                          </a:solidFill>
-                          <a:latin typeface="Inter"/>
-                        </a:defRPr>
-                      </a:pPr>
-                      <a:r>
-                        <a:rPr>
-                          <a:latin typeface="Inter"/>
-                        </a:rPr>
-                        <a:t>gradient_tool</a:t>
-                      </a:r>
-                    </a:p>
-                  </a:txBody>
-                  <a:tcPr marL="54864" marR="54864" marT="27432" marB="27432" anchor="ctr">
-                    <a:solidFill>
-                      <a:srgbClr val="F5F7F9"/>
-                    </a:solidFill>
-                  </a:tcPr>
-                </a:tc>
-                <a:tc>
-                  <a:txBody>
-                    <a:bodyPr/>
-                    <a:lstStyle/>
-                    <a:p>
-                      <a:pPr>
-                        <a:defRPr sz="650" b="0">
-                          <a:solidFill>
-                            <a:srgbClr val="0D1117"/>
-                          </a:solidFill>
-                          <a:latin typeface="Inter"/>
-                        </a:defRPr>
-                      </a:pPr>
-                      <a:r>
-                        <a:rPr>
-                          <a:latin typeface="Inter"/>
-                        </a:rPr>
-                        <a:t>run_strategy_lab_private_markets_pme</a:t>
-                      </a:r>
-                    </a:p>
-                  </a:txBody>
-                  <a:tcPr marL="54864" marR="54864" marT="27432" marB="27432" anchor="ctr">
-                    <a:solidFill>
-                      <a:srgbClr val="F5F7F9"/>
-                    </a:solidFill>
-                  </a:tcPr>
-                </a:tc>
-                <a:tc>
-                  <a:txBody>
-                    <a:bodyPr/>
-                    <a:lstStyle/>
-                    <a:p>
-                      <a:pPr>
-                        <a:defRPr sz="650" b="0">
+                        <a:defRPr sz="800" b="0">
                           <a:solidFill>
                             <a:srgbClr val="0D1117"/>
                           </a:solidFill>
@@ -13728,34 +13913,7 @@
                     <a:lstStyle/>
                     <a:p>
                       <a:pPr>
-                        <a:defRPr sz="650" b="0">
-                          <a:solidFill>
-                            <a:srgbClr val="0D1117"/>
-                          </a:solidFill>
-                          <a:latin typeface="Inter"/>
-                        </a:defRPr>
-                      </a:pPr>
-                      <a:r>
-                        <a:rPr>
-                          <a:latin typeface="Inter"/>
-                        </a:rPr>
-                        <a:t>2025-12-31</a:t>
-                      </a:r>
-                    </a:p>
-                  </a:txBody>
-                  <a:tcPr marL="54864" marR="54864" marT="27432" marB="27432" anchor="ctr">
-                    <a:solidFill>
-                      <a:srgbClr val="F5F7F9"/>
-                    </a:solidFill>
-                  </a:tcPr>
-                </a:tc>
-                <a:tc>
-                  <a:txBody>
-                    <a:bodyPr/>
-                    <a:lstStyle/>
-                    <a:p>
-                      <a:pPr>
-                        <a:defRPr sz="650" b="0">
+                        <a:defRPr sz="800" b="0">
                           <a:solidFill>
                             <a:srgbClr val="0D1117"/>
                           </a:solidFill>
@@ -13782,34 +13940,7 @@
                     <a:lstStyle/>
                     <a:p>
                       <a:pPr>
-                        <a:defRPr sz="650" b="0">
-                          <a:solidFill>
-                            <a:srgbClr val="0D1117"/>
-                          </a:solidFill>
-                          <a:latin typeface="Inter"/>
-                        </a:defRPr>
-                      </a:pPr>
-                      <a:r>
-                        <a:rPr>
-                          <a:latin typeface="Inter"/>
-                        </a:rPr>
-                        <a:t>passed</a:t>
-                      </a:r>
-                    </a:p>
-                  </a:txBody>
-                  <a:tcPr marL="54864" marR="54864" marT="27432" marB="27432" anchor="ctr">
-                    <a:solidFill>
-                      <a:srgbClr val="F5F7F9"/>
-                    </a:solidFill>
-                  </a:tcPr>
-                </a:tc>
-                <a:tc>
-                  <a:txBody>
-                    <a:bodyPr/>
-                    <a:lstStyle/>
-                    <a:p>
-                      <a:pPr>
-                        <a:defRPr sz="650" b="0">
+                        <a:defRPr sz="800" b="0">
                           <a:solidFill>
                             <a:srgbClr val="0D1117"/>
                           </a:solidFill>
@@ -13831,14 +13962,14 @@
                   </a:tcPr>
                 </a:tc>
               </a:tr>
-              <a:tr h="586359">
+              <a:tr h="552069">
                 <a:tc>
                   <a:txBody>
                     <a:bodyPr/>
                     <a:lstStyle/>
                     <a:p>
                       <a:pPr>
-                        <a:defRPr sz="650" b="1">
+                        <a:defRPr sz="800" b="1">
                           <a:solidFill>
                             <a:srgbClr val="0D1117"/>
                           </a:solidFill>
@@ -13865,88 +13996,7 @@
                     <a:lstStyle/>
                     <a:p>
                       <a:pPr>
-                        <a:defRPr sz="650" b="0">
-                          <a:solidFill>
-                            <a:srgbClr val="0D1117"/>
-                          </a:solidFill>
-                          <a:latin typeface="Inter"/>
-                        </a:defRPr>
-                      </a:pPr>
-                      <a:r>
-                        <a:rPr>
-                          <a:latin typeface="Inter"/>
-                        </a:rPr>
-                        <a:t>Sensitivity PME metrics</a:t>
-                      </a:r>
-                    </a:p>
-                  </a:txBody>
-                  <a:tcPr marL="54864" marR="54864" marT="27432" marB="27432" anchor="ctr">
-                    <a:solidFill>
-                      <a:srgbClr val="FFFFFF"/>
-                    </a:solidFill>
-                  </a:tcPr>
-                </a:tc>
-                <a:tc>
-                  <a:txBody>
-                    <a:bodyPr/>
-                    <a:lstStyle/>
-                    <a:p>
-                      <a:pPr>
-                        <a:defRPr sz="650" b="0">
-                          <a:solidFill>
-                            <a:srgbClr val="0D1117"/>
-                          </a:solidFill>
-                          <a:latin typeface="Inter"/>
-                        </a:defRPr>
-                      </a:pPr>
-                      <a:r>
-                        <a:rPr>
-                          <a:latin typeface="Inter"/>
-                        </a:rPr>
-                        <a:t>gradient_tool</a:t>
-                      </a:r>
-                    </a:p>
-                  </a:txBody>
-                  <a:tcPr marL="54864" marR="54864" marT="27432" marB="27432" anchor="ctr">
-                    <a:solidFill>
-                      <a:srgbClr val="FFFFFF"/>
-                    </a:solidFill>
-                  </a:tcPr>
-                </a:tc>
-                <a:tc>
-                  <a:txBody>
-                    <a:bodyPr/>
-                    <a:lstStyle/>
-                    <a:p>
-                      <a:pPr>
-                        <a:defRPr sz="650" b="0">
-                          <a:solidFill>
-                            <a:srgbClr val="0D1117"/>
-                          </a:solidFill>
-                          <a:latin typeface="Inter"/>
-                        </a:defRPr>
-                      </a:pPr>
-                      <a:r>
-                        <a:rPr>
-                          <a:latin typeface="Inter"/>
-                        </a:rPr>
-                        <a:t>run_strategy_lab_private_markets_pme</a:t>
-                      </a:r>
-                    </a:p>
-                  </a:txBody>
-                  <a:tcPr marL="54864" marR="54864" marT="27432" marB="27432" anchor="ctr">
-                    <a:solidFill>
-                      <a:srgbClr val="FFFFFF"/>
-                    </a:solidFill>
-                  </a:tcPr>
-                </a:tc>
-                <a:tc>
-                  <a:txBody>
-                    <a:bodyPr/>
-                    <a:lstStyle/>
-                    <a:p>
-                      <a:pPr>
-                        <a:defRPr sz="650" b="0">
+                        <a:defRPr sz="800" b="0">
                           <a:solidFill>
                             <a:srgbClr val="0D1117"/>
                           </a:solidFill>
@@ -13973,34 +14023,7 @@
                     <a:lstStyle/>
                     <a:p>
                       <a:pPr>
-                        <a:defRPr sz="650" b="0">
-                          <a:solidFill>
-                            <a:srgbClr val="0D1117"/>
-                          </a:solidFill>
-                          <a:latin typeface="Inter"/>
-                        </a:defRPr>
-                      </a:pPr>
-                      <a:r>
-                        <a:rPr>
-                          <a:latin typeface="Inter"/>
-                        </a:rPr>
-                        <a:t>2025-12-31</a:t>
-                      </a:r>
-                    </a:p>
-                  </a:txBody>
-                  <a:tcPr marL="54864" marR="54864" marT="27432" marB="27432" anchor="ctr">
-                    <a:solidFill>
-                      <a:srgbClr val="FFFFFF"/>
-                    </a:solidFill>
-                  </a:tcPr>
-                </a:tc>
-                <a:tc>
-                  <a:txBody>
-                    <a:bodyPr/>
-                    <a:lstStyle/>
-                    <a:p>
-                      <a:pPr>
-                        <a:defRPr sz="650" b="0">
+                        <a:defRPr sz="800" b="0">
                           <a:solidFill>
                             <a:srgbClr val="0D1117"/>
                           </a:solidFill>
@@ -14027,34 +14050,7 @@
                     <a:lstStyle/>
                     <a:p>
                       <a:pPr>
-                        <a:defRPr sz="650" b="0">
-                          <a:solidFill>
-                            <a:srgbClr val="0D1117"/>
-                          </a:solidFill>
-                          <a:latin typeface="Inter"/>
-                        </a:defRPr>
-                      </a:pPr>
-                      <a:r>
-                        <a:rPr>
-                          <a:latin typeface="Inter"/>
-                        </a:rPr>
-                        <a:t>passed</a:t>
-                      </a:r>
-                    </a:p>
-                  </a:txBody>
-                  <a:tcPr marL="54864" marR="54864" marT="27432" marB="27432" anchor="ctr">
-                    <a:solidFill>
-                      <a:srgbClr val="FFFFFF"/>
-                    </a:solidFill>
-                  </a:tcPr>
-                </a:tc>
-                <a:tc>
-                  <a:txBody>
-                    <a:bodyPr/>
-                    <a:lstStyle/>
-                    <a:p>
-                      <a:pPr>
-                        <a:defRPr sz="650" b="0">
+                        <a:defRPr sz="800" b="0">
                           <a:solidFill>
                             <a:srgbClr val="0D1117"/>
                           </a:solidFill>
@@ -14117,7 +14113,7 @@
               <a:rPr>
                 <a:latin typeface="Inter"/>
               </a:rPr>
-              <a:t>Illustrative, Gradient Maintained — demo data, not the client's holdings or managers. All organizations, portfolios, managers and results in this public example are illustrative.</a:t>
+              <a:t>Each digest is the SHA-256 fingerprint of the exact data the report used.</a:t>
             </a:r>
           </a:p>
         </p:txBody>
@@ -14292,7 +14288,7 @@
               <a:rPr>
                 <a:latin typeface="Inter"/>
               </a:rPr>
-              <a:t>18</a:t>
+              <a:t>19</a:t>
             </a:r>
           </a:p>
         </p:txBody>
@@ -14305,7 +14301,7 @@
 </p:sld>
 </file>
 
-<file path=ppt/slides/slide19.xml><?xml version="1.0" encoding="utf-8"?>
+<file path=ppt/slides/slide2.xml><?xml version="1.0" encoding="utf-8"?>
 <p:sld xmlns:a="http://schemas.openxmlformats.org/drawingml/2006/main" xmlns:p="http://schemas.openxmlformats.org/presentationml/2006/main" xmlns:r="http://schemas.openxmlformats.org/officeDocument/2006/relationships">
   <p:cSld>
     <p:spTree>
@@ -14373,7 +14369,7 @@
         <p:spPr>
           <a:xfrm>
             <a:off x="640080" y="329184"/>
-            <a:ext cx="5303520" cy="182880"/>
+            <a:ext cx="9875520" cy="182880"/>
           </a:xfrm>
           <a:prstGeom prst="rect">
             <a:avLst/>
@@ -14401,7 +14397,7 @@
               <a:rPr>
                 <a:latin typeface="Inter"/>
               </a:rPr>
-              <a:t>SAVED ILLUSTRATIVE COMMITMENT, BENCHMARK, BUILDER AND PME EVIDENCE</a:t>
+              <a:t>BOTH RETURNED PME PATHS EXCEED ONE, WITH MOST VALUE STILL UNREALIZED</a:t>
             </a:r>
           </a:p>
         </p:txBody>
@@ -14409,48 +14405,6 @@
       <p:sp>
         <p:nvSpPr>
           <p:cNvPr id="4" name="TextBox 3"/>
-          <p:cNvSpPr txBox="1"/>
-          <p:nvPr/>
-        </p:nvSpPr>
-        <p:spPr>
-          <a:xfrm>
-            <a:off x="5897880" y="310896"/>
-            <a:ext cx="4800600" cy="256032"/>
-          </a:xfrm>
-          <a:prstGeom prst="rect">
-            <a:avLst/>
-          </a:prstGeom>
-          <a:noFill/>
-        </p:spPr>
-        <p:txBody>
-          <a:bodyPr wrap="none" lIns="9144" rIns="9144" tIns="9144" bIns="9144" anchor="t">
-            <a:spAutoFit/>
-          </a:bodyPr>
-          <a:lstStyle/>
-          <a:p>
-            <a:pPr algn="r">
-              <a:spcAft>
-                <a:spcPts val="0"/>
-              </a:spcAft>
-              <a:defRPr sz="680" b="1">
-                <a:solidFill>
-                  <a:srgbClr val="4F6B00"/>
-                </a:solidFill>
-                <a:latin typeface="Inter"/>
-              </a:defRPr>
-            </a:pPr>
-            <a:r>
-              <a:rPr>
-                <a:latin typeface="Inter"/>
-              </a:rPr>
-              <a:t>Illustrative, Gradient Maintained — demo data, not the client's holdings or managers</a:t>
-            </a:r>
-          </a:p>
-        </p:txBody>
-      </p:sp>
-      <p:sp>
-        <p:nvSpPr>
-          <p:cNvPr id="5" name="TextBox 4"/>
           <p:cNvSpPr txBox="1"/>
           <p:nvPr/>
         </p:nvSpPr>
@@ -14485,14 +14439,14 @@
               <a:rPr>
                 <a:latin typeface="Inter"/>
               </a:rPr>
-              <a:t>Appendix — Sources and methods — continued</a:t>
-            </a:r>
-          </a:p>
-        </p:txBody>
-      </p:sp>
-      <p:sp>
-        <p:nvSpPr>
-          <p:cNvPr id="6" name="Rectangle 5"/>
+              <a:t>Executive conclusion</a:t>
+            </a:r>
+          </a:p>
+        </p:txBody>
+      </p:sp>
+      <p:sp>
+        <p:nvSpPr>
+          <p:cNvPr id="5" name="Rectangle 4"/>
           <p:cNvSpPr/>
           <p:nvPr/>
         </p:nvSpPr>
@@ -14541,7 +14495,1019 @@
       </p:sp>
       <p:sp>
         <p:nvSpPr>
-          <p:cNvPr id="7" name="Rectangle 6"/>
+          <p:cNvPr id="6" name="Rectangle 5"/>
+          <p:cNvSpPr/>
+          <p:nvPr/>
+        </p:nvSpPr>
+        <p:spPr>
+          <a:xfrm>
+            <a:off x="11018520" y="502920"/>
+            <a:ext cx="530352" cy="393192"/>
+          </a:xfrm>
+          <a:prstGeom prst="rect">
+            <a:avLst/>
+          </a:prstGeom>
+          <a:solidFill>
+            <a:srgbClr val="C6F432"/>
+          </a:solidFill>
+          <a:ln>
+            <a:solidFill>
+              <a:srgbClr val="C6F432"/>
+            </a:solidFill>
+          </a:ln>
+        </p:spPr>
+        <p:style>
+          <a:lnRef idx="1">
+            <a:schemeClr val="accent1"/>
+          </a:lnRef>
+          <a:fillRef idx="3">
+            <a:schemeClr val="accent1"/>
+          </a:fillRef>
+          <a:effectRef idx="2">
+            <a:schemeClr val="accent1"/>
+          </a:effectRef>
+          <a:fontRef idx="minor">
+            <a:schemeClr val="lt1"/>
+          </a:fontRef>
+        </p:style>
+        <p:txBody>
+          <a:bodyPr rtlCol="0" anchor="ctr"/>
+          <a:lstStyle/>
+          <a:p>
+            <a:pPr algn="ctr">
+              <a:defRPr>
+                <a:latin typeface="Inter"/>
+              </a:defRPr>
+            </a:pPr>
+          </a:p>
+        </p:txBody>
+      </p:sp>
+      <p:sp>
+        <p:nvSpPr>
+          <p:cNvPr id="7" name="TextBox 6"/>
+          <p:cNvSpPr txBox="1"/>
+          <p:nvPr/>
+        </p:nvSpPr>
+        <p:spPr>
+          <a:xfrm>
+            <a:off x="11045952" y="557784"/>
+            <a:ext cx="475488" cy="182880"/>
+          </a:xfrm>
+          <a:prstGeom prst="rect">
+            <a:avLst/>
+          </a:prstGeom>
+          <a:noFill/>
+        </p:spPr>
+        <p:txBody>
+          <a:bodyPr wrap="none" lIns="9144" rIns="9144" tIns="9144" bIns="9144" anchor="t">
+            <a:spAutoFit/>
+          </a:bodyPr>
+          <a:lstStyle/>
+          <a:p>
+            <a:pPr algn="ctr">
+              <a:spcAft>
+                <a:spcPts val="0"/>
+              </a:spcAft>
+              <a:defRPr sz="1000" b="1">
+                <a:solidFill>
+                  <a:srgbClr val="0D1117"/>
+                </a:solidFill>
+                <a:latin typeface="Inter"/>
+              </a:defRPr>
+            </a:pPr>
+            <a:r>
+              <a:rPr>
+                <a:latin typeface="Inter"/>
+              </a:rPr>
+              <a:t>1</a:t>
+            </a:r>
+          </a:p>
+        </p:txBody>
+      </p:sp>
+      <p:sp>
+        <p:nvSpPr>
+          <p:cNvPr id="8" name="Rectangle 7"/>
+          <p:cNvSpPr/>
+          <p:nvPr/>
+        </p:nvSpPr>
+        <p:spPr>
+          <a:xfrm>
+            <a:off x="640080" y="1325880"/>
+            <a:ext cx="10908792" cy="1592216"/>
+          </a:xfrm>
+          <a:prstGeom prst="rect">
+            <a:avLst/>
+          </a:prstGeom>
+          <a:solidFill>
+            <a:srgbClr val="F5F7F9"/>
+          </a:solidFill>
+          <a:ln>
+            <a:solidFill>
+              <a:srgbClr val="E3E7EC"/>
+            </a:solidFill>
+          </a:ln>
+        </p:spPr>
+        <p:style>
+          <a:lnRef idx="1">
+            <a:schemeClr val="accent1"/>
+          </a:lnRef>
+          <a:fillRef idx="3">
+            <a:schemeClr val="accent1"/>
+          </a:fillRef>
+          <a:effectRef idx="2">
+            <a:schemeClr val="accent1"/>
+          </a:effectRef>
+          <a:fontRef idx="minor">
+            <a:schemeClr val="lt1"/>
+          </a:fontRef>
+        </p:style>
+        <p:txBody>
+          <a:bodyPr rtlCol="0" anchor="ctr"/>
+          <a:lstStyle/>
+          <a:p>
+            <a:pPr algn="ctr">
+              <a:defRPr>
+                <a:latin typeface="Inter"/>
+              </a:defRPr>
+            </a:pPr>
+          </a:p>
+        </p:txBody>
+      </p:sp>
+      <p:sp>
+        <p:nvSpPr>
+          <p:cNvPr id="9" name="Rectangle 8"/>
+          <p:cNvSpPr/>
+          <p:nvPr/>
+        </p:nvSpPr>
+        <p:spPr>
+          <a:xfrm>
+            <a:off x="640080" y="1325880"/>
+            <a:ext cx="54864" cy="1592216"/>
+          </a:xfrm>
+          <a:prstGeom prst="rect">
+            <a:avLst/>
+          </a:prstGeom>
+          <a:solidFill>
+            <a:srgbClr val="C6F432"/>
+          </a:solidFill>
+          <a:ln>
+            <a:solidFill>
+              <a:srgbClr val="C6F432"/>
+            </a:solidFill>
+          </a:ln>
+        </p:spPr>
+        <p:style>
+          <a:lnRef idx="1">
+            <a:schemeClr val="accent1"/>
+          </a:lnRef>
+          <a:fillRef idx="3">
+            <a:schemeClr val="accent1"/>
+          </a:fillRef>
+          <a:effectRef idx="2">
+            <a:schemeClr val="accent1"/>
+          </a:effectRef>
+          <a:fontRef idx="minor">
+            <a:schemeClr val="lt1"/>
+          </a:fontRef>
+        </p:style>
+        <p:txBody>
+          <a:bodyPr rtlCol="0" anchor="ctr"/>
+          <a:lstStyle/>
+          <a:p>
+            <a:pPr algn="ctr">
+              <a:defRPr>
+                <a:latin typeface="Inter"/>
+              </a:defRPr>
+            </a:pPr>
+          </a:p>
+        </p:txBody>
+      </p:sp>
+      <p:sp>
+        <p:nvSpPr>
+          <p:cNvPr id="10" name="TextBox 9"/>
+          <p:cNvSpPr txBox="1"/>
+          <p:nvPr/>
+        </p:nvSpPr>
+        <p:spPr>
+          <a:xfrm>
+            <a:off x="804671" y="1435607"/>
+            <a:ext cx="10616184" cy="228600"/>
+          </a:xfrm>
+          <a:prstGeom prst="rect">
+            <a:avLst/>
+          </a:prstGeom>
+          <a:noFill/>
+        </p:spPr>
+        <p:txBody>
+          <a:bodyPr wrap="none" lIns="9144" rIns="9144" tIns="9144" bIns="9144" anchor="t">
+            <a:spAutoFit/>
+          </a:bodyPr>
+          <a:lstStyle/>
+          <a:p>
+            <a:pPr algn="l">
+              <a:spcAft>
+                <a:spcPts val="0"/>
+              </a:spcAft>
+              <a:defRPr sz="1000" b="1">
+                <a:solidFill>
+                  <a:srgbClr val="0D1117"/>
+                </a:solidFill>
+                <a:latin typeface="Inter"/>
+              </a:defRPr>
+            </a:pPr>
+            <a:r>
+              <a:rPr>
+                <a:latin typeface="Inter"/>
+              </a:rPr>
+              <a:t>Key judgment — Relative result</a:t>
+            </a:r>
+          </a:p>
+        </p:txBody>
+      </p:sp>
+      <p:sp>
+        <p:nvSpPr>
+          <p:cNvPr id="11" name="TextBox 10"/>
+          <p:cNvSpPr txBox="1"/>
+          <p:nvPr/>
+        </p:nvSpPr>
+        <p:spPr>
+          <a:xfrm>
+            <a:off x="804671" y="1719072"/>
+            <a:ext cx="10616184" cy="1107584"/>
+          </a:xfrm>
+          <a:prstGeom prst="rect">
+            <a:avLst/>
+          </a:prstGeom>
+          <a:noFill/>
+        </p:spPr>
+        <p:txBody>
+          <a:bodyPr wrap="none" lIns="9144" rIns="9144" tIns="9144" bIns="9144" anchor="t">
+            <a:spAutoFit/>
+          </a:bodyPr>
+          <a:lstStyle/>
+          <a:p>
+            <a:pPr algn="l">
+              <a:spcAft>
+                <a:spcPts val="0"/>
+              </a:spcAft>
+              <a:defRPr sz="950" b="0">
+                <a:solidFill>
+                  <a:srgbClr val="4A5563"/>
+                </a:solidFill>
+                <a:latin typeface="Inter"/>
+              </a:defRPr>
+            </a:pPr>
+            <a:r>
+              <a:rPr>
+                <a:latin typeface="Inter"/>
+              </a:rPr>
+              <a:t>Observation: Primary and sensitivity KS-PME were 1.08x and 1.03x [S6][S7]. Why it matters: Both returned paths finished above public-market parity. Uncertainty: Sensitivity evidence is limited to a 0.03x margin over parity. What would change the view: Either governed KS-PME path falling to 1.00x or below.</a:t>
+            </a:r>
+          </a:p>
+        </p:txBody>
+      </p:sp>
+      <p:sp>
+        <p:nvSpPr>
+          <p:cNvPr id="12" name="Rectangle 11"/>
+          <p:cNvSpPr/>
+          <p:nvPr/>
+        </p:nvSpPr>
+        <p:spPr>
+          <a:xfrm>
+            <a:off x="640080" y="3027824"/>
+            <a:ext cx="10908792" cy="1670266"/>
+          </a:xfrm>
+          <a:prstGeom prst="rect">
+            <a:avLst/>
+          </a:prstGeom>
+          <a:solidFill>
+            <a:srgbClr val="F5F7F9"/>
+          </a:solidFill>
+          <a:ln>
+            <a:solidFill>
+              <a:srgbClr val="E3E7EC"/>
+            </a:solidFill>
+          </a:ln>
+        </p:spPr>
+        <p:style>
+          <a:lnRef idx="1">
+            <a:schemeClr val="accent1"/>
+          </a:lnRef>
+          <a:fillRef idx="3">
+            <a:schemeClr val="accent1"/>
+          </a:fillRef>
+          <a:effectRef idx="2">
+            <a:schemeClr val="accent1"/>
+          </a:effectRef>
+          <a:fontRef idx="minor">
+            <a:schemeClr val="lt1"/>
+          </a:fontRef>
+        </p:style>
+        <p:txBody>
+          <a:bodyPr rtlCol="0" anchor="ctr"/>
+          <a:lstStyle/>
+          <a:p>
+            <a:pPr algn="ctr">
+              <a:defRPr>
+                <a:latin typeface="Inter"/>
+              </a:defRPr>
+            </a:pPr>
+          </a:p>
+        </p:txBody>
+      </p:sp>
+      <p:sp>
+        <p:nvSpPr>
+          <p:cNvPr id="13" name="Rectangle 12"/>
+          <p:cNvSpPr/>
+          <p:nvPr/>
+        </p:nvSpPr>
+        <p:spPr>
+          <a:xfrm>
+            <a:off x="640080" y="3027824"/>
+            <a:ext cx="54864" cy="1670266"/>
+          </a:xfrm>
+          <a:prstGeom prst="rect">
+            <a:avLst/>
+          </a:prstGeom>
+          <a:solidFill>
+            <a:srgbClr val="C6F432"/>
+          </a:solidFill>
+          <a:ln>
+            <a:solidFill>
+              <a:srgbClr val="C6F432"/>
+            </a:solidFill>
+          </a:ln>
+        </p:spPr>
+        <p:style>
+          <a:lnRef idx="1">
+            <a:schemeClr val="accent1"/>
+          </a:lnRef>
+          <a:fillRef idx="3">
+            <a:schemeClr val="accent1"/>
+          </a:fillRef>
+          <a:effectRef idx="2">
+            <a:schemeClr val="accent1"/>
+          </a:effectRef>
+          <a:fontRef idx="minor">
+            <a:schemeClr val="lt1"/>
+          </a:fontRef>
+        </p:style>
+        <p:txBody>
+          <a:bodyPr rtlCol="0" anchor="ctr"/>
+          <a:lstStyle/>
+          <a:p>
+            <a:pPr algn="ctr">
+              <a:defRPr>
+                <a:latin typeface="Inter"/>
+              </a:defRPr>
+            </a:pPr>
+          </a:p>
+        </p:txBody>
+      </p:sp>
+      <p:sp>
+        <p:nvSpPr>
+          <p:cNvPr id="14" name="TextBox 13"/>
+          <p:cNvSpPr txBox="1"/>
+          <p:nvPr/>
+        </p:nvSpPr>
+        <p:spPr>
+          <a:xfrm>
+            <a:off x="804671" y="3137552"/>
+            <a:ext cx="10616184" cy="228600"/>
+          </a:xfrm>
+          <a:prstGeom prst="rect">
+            <a:avLst/>
+          </a:prstGeom>
+          <a:noFill/>
+        </p:spPr>
+        <p:txBody>
+          <a:bodyPr wrap="none" lIns="9144" rIns="9144" tIns="9144" bIns="9144" anchor="t">
+            <a:spAutoFit/>
+          </a:bodyPr>
+          <a:lstStyle/>
+          <a:p>
+            <a:pPr algn="l">
+              <a:spcAft>
+                <a:spcPts val="0"/>
+              </a:spcAft>
+              <a:defRPr sz="1000" b="1">
+                <a:solidFill>
+                  <a:srgbClr val="0D1117"/>
+                </a:solidFill>
+                <a:latin typeface="Inter"/>
+              </a:defRPr>
+            </a:pPr>
+            <a:r>
+              <a:rPr>
+                <a:latin typeface="Inter"/>
+              </a:rPr>
+              <a:t>Key judgment — Direct alpha</a:t>
+            </a:r>
+          </a:p>
+        </p:txBody>
+      </p:sp>
+      <p:sp>
+        <p:nvSpPr>
+          <p:cNvPr id="15" name="TextBox 14"/>
+          <p:cNvSpPr txBox="1"/>
+          <p:nvPr/>
+        </p:nvSpPr>
+        <p:spPr>
+          <a:xfrm>
+            <a:off x="804671" y="3421016"/>
+            <a:ext cx="10616184" cy="1185634"/>
+          </a:xfrm>
+          <a:prstGeom prst="rect">
+            <a:avLst/>
+          </a:prstGeom>
+          <a:noFill/>
+        </p:spPr>
+        <p:txBody>
+          <a:bodyPr wrap="none" lIns="9144" rIns="9144" tIns="9144" bIns="9144" anchor="t">
+            <a:spAutoFit/>
+          </a:bodyPr>
+          <a:lstStyle/>
+          <a:p>
+            <a:pPr algn="l">
+              <a:spcAft>
+                <a:spcPts val="0"/>
+              </a:spcAft>
+              <a:defRPr sz="950" b="0">
+                <a:solidFill>
+                  <a:srgbClr val="4A5563"/>
+                </a:solidFill>
+                <a:latin typeface="Inter"/>
+              </a:defRPr>
+            </a:pPr>
+            <a:r>
+              <a:rPr>
+                <a:latin typeface="Inter"/>
+              </a:rPr>
+              <a:t>Observation: Direct alpha was +1.9% primary and +0.8% sensitivity [S6][S7]. Why it matters: Both server runs indicate positive annualized relative value. Uncertainty: The selected pair excludes benchmarks outside the returned catalog choices. What would change the view: A returned direct-alpha estimate at or below 0.0%.</a:t>
+            </a:r>
+          </a:p>
+        </p:txBody>
+      </p:sp>
+      <p:sp>
+        <p:nvSpPr>
+          <p:cNvPr id="16" name="Rectangle 15"/>
+          <p:cNvSpPr/>
+          <p:nvPr/>
+        </p:nvSpPr>
+        <p:spPr>
+          <a:xfrm>
+            <a:off x="640080" y="4807819"/>
+            <a:ext cx="10908792" cy="1410100"/>
+          </a:xfrm>
+          <a:prstGeom prst="rect">
+            <a:avLst/>
+          </a:prstGeom>
+          <a:solidFill>
+            <a:srgbClr val="F5F7F9"/>
+          </a:solidFill>
+          <a:ln>
+            <a:solidFill>
+              <a:srgbClr val="E3E7EC"/>
+            </a:solidFill>
+          </a:ln>
+        </p:spPr>
+        <p:style>
+          <a:lnRef idx="1">
+            <a:schemeClr val="accent1"/>
+          </a:lnRef>
+          <a:fillRef idx="3">
+            <a:schemeClr val="accent1"/>
+          </a:fillRef>
+          <a:effectRef idx="2">
+            <a:schemeClr val="accent1"/>
+          </a:effectRef>
+          <a:fontRef idx="minor">
+            <a:schemeClr val="lt1"/>
+          </a:fontRef>
+        </p:style>
+        <p:txBody>
+          <a:bodyPr rtlCol="0" anchor="ctr"/>
+          <a:lstStyle/>
+          <a:p>
+            <a:pPr algn="ctr">
+              <a:defRPr>
+                <a:latin typeface="Inter"/>
+              </a:defRPr>
+            </a:pPr>
+          </a:p>
+        </p:txBody>
+      </p:sp>
+      <p:sp>
+        <p:nvSpPr>
+          <p:cNvPr id="17" name="Rectangle 16"/>
+          <p:cNvSpPr/>
+          <p:nvPr/>
+        </p:nvSpPr>
+        <p:spPr>
+          <a:xfrm>
+            <a:off x="640080" y="4807819"/>
+            <a:ext cx="54864" cy="1410100"/>
+          </a:xfrm>
+          <a:prstGeom prst="rect">
+            <a:avLst/>
+          </a:prstGeom>
+          <a:solidFill>
+            <a:srgbClr val="F2A93B"/>
+          </a:solidFill>
+          <a:ln>
+            <a:solidFill>
+              <a:srgbClr val="F2A93B"/>
+            </a:solidFill>
+          </a:ln>
+        </p:spPr>
+        <p:style>
+          <a:lnRef idx="1">
+            <a:schemeClr val="accent1"/>
+          </a:lnRef>
+          <a:fillRef idx="3">
+            <a:schemeClr val="accent1"/>
+          </a:fillRef>
+          <a:effectRef idx="2">
+            <a:schemeClr val="accent1"/>
+          </a:effectRef>
+          <a:fontRef idx="minor">
+            <a:schemeClr val="lt1"/>
+          </a:fontRef>
+        </p:style>
+        <p:txBody>
+          <a:bodyPr rtlCol="0" anchor="ctr"/>
+          <a:lstStyle/>
+          <a:p>
+            <a:pPr algn="ctr">
+              <a:defRPr>
+                <a:latin typeface="Inter"/>
+              </a:defRPr>
+            </a:pPr>
+          </a:p>
+        </p:txBody>
+      </p:sp>
+      <p:sp>
+        <p:nvSpPr>
+          <p:cNvPr id="18" name="TextBox 17"/>
+          <p:cNvSpPr txBox="1"/>
+          <p:nvPr/>
+        </p:nvSpPr>
+        <p:spPr>
+          <a:xfrm>
+            <a:off x="804671" y="4917547"/>
+            <a:ext cx="10616184" cy="228600"/>
+          </a:xfrm>
+          <a:prstGeom prst="rect">
+            <a:avLst/>
+          </a:prstGeom>
+          <a:noFill/>
+        </p:spPr>
+        <p:txBody>
+          <a:bodyPr wrap="none" lIns="9144" rIns="9144" tIns="9144" bIns="9144" anchor="t">
+            <a:spAutoFit/>
+          </a:bodyPr>
+          <a:lstStyle/>
+          <a:p>
+            <a:pPr algn="l">
+              <a:spcAft>
+                <a:spcPts val="0"/>
+              </a:spcAft>
+              <a:defRPr sz="1000" b="1">
+                <a:solidFill>
+                  <a:srgbClr val="0D1117"/>
+                </a:solidFill>
+                <a:latin typeface="Inter"/>
+              </a:defRPr>
+            </a:pPr>
+            <a:r>
+              <a:rPr>
+                <a:latin typeface="Inter"/>
+              </a:rPr>
+              <a:t>Key judgment — Cash-flow context</a:t>
+            </a:r>
+          </a:p>
+        </p:txBody>
+      </p:sp>
+      <p:sp>
+        <p:nvSpPr>
+          <p:cNvPr id="19" name="TextBox 18"/>
+          <p:cNvSpPr txBox="1"/>
+          <p:nvPr/>
+        </p:nvSpPr>
+        <p:spPr>
+          <a:xfrm>
+            <a:off x="804671" y="5201011"/>
+            <a:ext cx="10616184" cy="925468"/>
+          </a:xfrm>
+          <a:prstGeom prst="rect">
+            <a:avLst/>
+          </a:prstGeom>
+          <a:noFill/>
+        </p:spPr>
+        <p:txBody>
+          <a:bodyPr wrap="none" lIns="9144" rIns="9144" tIns="9144" bIns="9144" anchor="t">
+            <a:spAutoFit/>
+          </a:bodyPr>
+          <a:lstStyle/>
+          <a:p>
+            <a:pPr algn="l">
+              <a:spcAft>
+                <a:spcPts val="0"/>
+              </a:spcAft>
+              <a:defRPr sz="950" b="0">
+                <a:solidFill>
+                  <a:srgbClr val="4A5563"/>
+                </a:solidFill>
+                <a:latin typeface="Inter"/>
+              </a:defRPr>
+            </a:pPr>
+            <a:r>
+              <a:rPr>
+                <a:latin typeface="Inter"/>
+              </a:rPr>
+              <a:t>Observation: Net IRR was 12.6% and TVPI was 1.41x, including 0.75x RVPI [S6]. Why it matters: More value remains unrealized than distributed. Uncertainty: Holdings context is not a PME input. What would change the view: Audited cash flows reducing TVPI by at least 0.10x.</a:t>
+            </a:r>
+          </a:p>
+        </p:txBody>
+      </p:sp>
+      <p:sp>
+        <p:nvSpPr>
+          <p:cNvPr id="20" name="Rectangle 19"/>
+          <p:cNvSpPr/>
+          <p:nvPr/>
+        </p:nvSpPr>
+        <p:spPr>
+          <a:xfrm>
+            <a:off x="640080" y="6446520"/>
+            <a:ext cx="10908792" cy="9144"/>
+          </a:xfrm>
+          <a:prstGeom prst="rect">
+            <a:avLst/>
+          </a:prstGeom>
+          <a:solidFill>
+            <a:srgbClr val="E3E7EC"/>
+          </a:solidFill>
+          <a:ln>
+            <a:solidFill>
+              <a:srgbClr val="E3E7EC"/>
+            </a:solidFill>
+          </a:ln>
+        </p:spPr>
+        <p:style>
+          <a:lnRef idx="1">
+            <a:schemeClr val="accent1"/>
+          </a:lnRef>
+          <a:fillRef idx="3">
+            <a:schemeClr val="accent1"/>
+          </a:fillRef>
+          <a:effectRef idx="2">
+            <a:schemeClr val="accent1"/>
+          </a:effectRef>
+          <a:fontRef idx="minor">
+            <a:schemeClr val="lt1"/>
+          </a:fontRef>
+        </p:style>
+        <p:txBody>
+          <a:bodyPr rtlCol="0" anchor="ctr"/>
+          <a:lstStyle/>
+          <a:p>
+            <a:pPr algn="ctr">
+              <a:defRPr>
+                <a:latin typeface="Inter"/>
+              </a:defRPr>
+            </a:pPr>
+          </a:p>
+        </p:txBody>
+      </p:sp>
+      <p:sp>
+        <p:nvSpPr>
+          <p:cNvPr id="21" name="TextBox 20"/>
+          <p:cNvSpPr txBox="1"/>
+          <p:nvPr/>
+        </p:nvSpPr>
+        <p:spPr>
+          <a:xfrm>
+            <a:off x="640080" y="6501384"/>
+            <a:ext cx="4297680" cy="146304"/>
+          </a:xfrm>
+          <a:prstGeom prst="rect">
+            <a:avLst/>
+          </a:prstGeom>
+          <a:noFill/>
+        </p:spPr>
+        <p:txBody>
+          <a:bodyPr wrap="none" lIns="9144" rIns="9144" tIns="9144" bIns="9144" anchor="t">
+            <a:spAutoFit/>
+          </a:bodyPr>
+          <a:lstStyle/>
+          <a:p>
+            <a:pPr algn="l">
+              <a:spcAft>
+                <a:spcPts val="0"/>
+              </a:spcAft>
+              <a:defRPr sz="650" b="0">
+                <a:solidFill>
+                  <a:srgbClr val="8A94A1"/>
+                </a:solidFill>
+                <a:latin typeface="Inter"/>
+              </a:defRPr>
+            </a:pPr>
+            <a:r>
+              <a:rPr>
+                <a:latin typeface="Inter"/>
+              </a:rPr>
+              <a:t>Sources: S6 · S7</a:t>
+            </a:r>
+          </a:p>
+        </p:txBody>
+      </p:sp>
+      <p:sp>
+        <p:nvSpPr>
+          <p:cNvPr id="22" name="TextBox 21"/>
+          <p:cNvSpPr txBox="1"/>
+          <p:nvPr/>
+        </p:nvSpPr>
+        <p:spPr>
+          <a:xfrm>
+            <a:off x="4480560" y="6501384"/>
+            <a:ext cx="5303520" cy="146304"/>
+          </a:xfrm>
+          <a:prstGeom prst="rect">
+            <a:avLst/>
+          </a:prstGeom>
+          <a:noFill/>
+        </p:spPr>
+        <p:txBody>
+          <a:bodyPr wrap="none" lIns="9144" rIns="9144" tIns="9144" bIns="9144" anchor="t">
+            <a:spAutoFit/>
+          </a:bodyPr>
+          <a:lstStyle/>
+          <a:p>
+            <a:pPr algn="ctr">
+              <a:spcAft>
+                <a:spcPts val="0"/>
+              </a:spcAft>
+              <a:defRPr sz="650" b="0">
+                <a:solidFill>
+                  <a:srgbClr val="8A94A1"/>
+                </a:solidFill>
+                <a:latin typeface="Inter"/>
+              </a:defRPr>
+            </a:pPr>
+            <a:r>
+              <a:rPr>
+                <a:latin typeface="Inter"/>
+              </a:rPr>
+              <a:t>Confidential — private markets review · Data as of 2025-12-31</a:t>
+            </a:r>
+          </a:p>
+        </p:txBody>
+      </p:sp>
+      <p:sp>
+        <p:nvSpPr>
+          <p:cNvPr id="23" name="TextBox 22"/>
+          <p:cNvSpPr txBox="1"/>
+          <p:nvPr/>
+        </p:nvSpPr>
+        <p:spPr>
+          <a:xfrm>
+            <a:off x="10287000" y="6501384"/>
+            <a:ext cx="1261872" cy="146304"/>
+          </a:xfrm>
+          <a:prstGeom prst="rect">
+            <a:avLst/>
+          </a:prstGeom>
+          <a:noFill/>
+        </p:spPr>
+        <p:txBody>
+          <a:bodyPr wrap="none" lIns="9144" rIns="9144" tIns="9144" bIns="9144" anchor="t">
+            <a:spAutoFit/>
+          </a:bodyPr>
+          <a:lstStyle/>
+          <a:p>
+            <a:pPr algn="r">
+              <a:spcAft>
+                <a:spcPts val="0"/>
+              </a:spcAft>
+              <a:defRPr sz="650" b="0">
+                <a:solidFill>
+                  <a:srgbClr val="8A94A1"/>
+                </a:solidFill>
+                <a:latin typeface="Inter"/>
+              </a:defRPr>
+            </a:pPr>
+            <a:r>
+              <a:rPr>
+                <a:latin typeface="Inter"/>
+              </a:rPr>
+              <a:t>2</a:t>
+            </a:r>
+          </a:p>
+        </p:txBody>
+      </p:sp>
+    </p:spTree>
+  </p:cSld>
+  <p:clrMapOvr>
+    <a:masterClrMapping/>
+  </p:clrMapOvr>
+</p:sld>
+</file>
+
+<file path=ppt/slides/slide20.xml><?xml version="1.0" encoding="utf-8"?>
+<p:sld xmlns:a="http://schemas.openxmlformats.org/drawingml/2006/main" xmlns:p="http://schemas.openxmlformats.org/presentationml/2006/main" xmlns:r="http://schemas.openxmlformats.org/officeDocument/2006/relationships">
+  <p:cSld>
+    <p:spTree>
+      <p:nvGrpSpPr>
+        <p:cNvPr id="1" name=""/>
+        <p:cNvGrpSpPr/>
+        <p:nvPr/>
+      </p:nvGrpSpPr>
+      <p:grpSpPr/>
+      <p:sp>
+        <p:nvSpPr>
+          <p:cNvPr id="2" name="Rectangle 1"/>
+          <p:cNvSpPr/>
+          <p:nvPr/>
+        </p:nvSpPr>
+        <p:spPr>
+          <a:xfrm>
+            <a:off x="0" y="0"/>
+            <a:ext cx="12191695" cy="6858000"/>
+          </a:xfrm>
+          <a:prstGeom prst="rect">
+            <a:avLst/>
+          </a:prstGeom>
+          <a:solidFill>
+            <a:srgbClr val="FFFFFF"/>
+          </a:solidFill>
+          <a:ln>
+            <a:solidFill>
+              <a:srgbClr val="FFFFFF"/>
+            </a:solidFill>
+          </a:ln>
+        </p:spPr>
+        <p:style>
+          <a:lnRef idx="1">
+            <a:schemeClr val="accent1"/>
+          </a:lnRef>
+          <a:fillRef idx="3">
+            <a:schemeClr val="accent1"/>
+          </a:fillRef>
+          <a:effectRef idx="2">
+            <a:schemeClr val="accent1"/>
+          </a:effectRef>
+          <a:fontRef idx="minor">
+            <a:schemeClr val="lt1"/>
+          </a:fontRef>
+        </p:style>
+        <p:txBody>
+          <a:bodyPr rtlCol="0" anchor="ctr"/>
+          <a:lstStyle/>
+          <a:p>
+            <a:pPr algn="ctr">
+              <a:defRPr>
+                <a:latin typeface="Inter"/>
+              </a:defRPr>
+            </a:pPr>
+          </a:p>
+        </p:txBody>
+      </p:sp>
+      <p:sp>
+        <p:nvSpPr>
+          <p:cNvPr id="3" name="TextBox 2"/>
+          <p:cNvSpPr txBox="1"/>
+          <p:nvPr/>
+        </p:nvSpPr>
+        <p:spPr>
+          <a:xfrm>
+            <a:off x="640080" y="329184"/>
+            <a:ext cx="9875520" cy="182880"/>
+          </a:xfrm>
+          <a:prstGeom prst="rect">
+            <a:avLst/>
+          </a:prstGeom>
+          <a:noFill/>
+        </p:spPr>
+        <p:txBody>
+          <a:bodyPr wrap="none" lIns="9144" rIns="9144" tIns="9144" bIns="9144" anchor="t">
+            <a:spAutoFit/>
+          </a:bodyPr>
+          <a:lstStyle/>
+          <a:p>
+            <a:pPr algn="l">
+              <a:spcAft>
+                <a:spcPts val="0"/>
+              </a:spcAft>
+              <a:defRPr sz="750" b="1">
+                <a:solidFill>
+                  <a:srgbClr val="4F6B00"/>
+                </a:solidFill>
+                <a:latin typeface="Inter"/>
+              </a:defRPr>
+            </a:pPr>
+            <a:r>
+              <a:rPr>
+                <a:latin typeface="Inter"/>
+              </a:rPr>
+              <a:t>SAVED ILLUSTRATIVE COMMITMENT, BENCHMARK, BUILDER AND PME EVIDENCE</a:t>
+            </a:r>
+          </a:p>
+        </p:txBody>
+      </p:sp>
+      <p:sp>
+        <p:nvSpPr>
+          <p:cNvPr id="4" name="TextBox 3"/>
+          <p:cNvSpPr txBox="1"/>
+          <p:nvPr/>
+        </p:nvSpPr>
+        <p:spPr>
+          <a:xfrm>
+            <a:off x="640080" y="566928"/>
+            <a:ext cx="10058400" cy="530352"/>
+          </a:xfrm>
+          <a:prstGeom prst="rect">
+            <a:avLst/>
+          </a:prstGeom>
+          <a:noFill/>
+        </p:spPr>
+        <p:txBody>
+          <a:bodyPr wrap="none" lIns="9144" rIns="9144" tIns="9144" bIns="9144" anchor="t">
+            <a:spAutoFit/>
+          </a:bodyPr>
+          <a:lstStyle/>
+          <a:p>
+            <a:pPr algn="l">
+              <a:spcAft>
+                <a:spcPts val="0"/>
+              </a:spcAft>
+              <a:defRPr sz="2300" b="1">
+                <a:solidFill>
+                  <a:srgbClr val="0D1117"/>
+                </a:solidFill>
+                <a:latin typeface="Inter"/>
+              </a:defRPr>
+            </a:pPr>
+            <a:r>
+              <a:rPr>
+                <a:latin typeface="Inter"/>
+              </a:rPr>
+              <a:t>Appendix — Sources and methods — continued</a:t>
+            </a:r>
+          </a:p>
+        </p:txBody>
+      </p:sp>
+      <p:sp>
+        <p:nvSpPr>
+          <p:cNvPr id="5" name="Rectangle 4"/>
+          <p:cNvSpPr/>
+          <p:nvPr/>
+        </p:nvSpPr>
+        <p:spPr>
+          <a:xfrm>
+            <a:off x="640080" y="1115568"/>
+            <a:ext cx="10908792" cy="18288"/>
+          </a:xfrm>
+          <a:prstGeom prst="rect">
+            <a:avLst/>
+          </a:prstGeom>
+          <a:solidFill>
+            <a:srgbClr val="0D1117"/>
+          </a:solidFill>
+          <a:ln>
+            <a:solidFill>
+              <a:srgbClr val="0D1117"/>
+            </a:solidFill>
+          </a:ln>
+        </p:spPr>
+        <p:style>
+          <a:lnRef idx="1">
+            <a:schemeClr val="accent1"/>
+          </a:lnRef>
+          <a:fillRef idx="3">
+            <a:schemeClr val="accent1"/>
+          </a:fillRef>
+          <a:effectRef idx="2">
+            <a:schemeClr val="accent1"/>
+          </a:effectRef>
+          <a:fontRef idx="minor">
+            <a:schemeClr val="lt1"/>
+          </a:fontRef>
+        </p:style>
+        <p:txBody>
+          <a:bodyPr rtlCol="0" anchor="ctr"/>
+          <a:lstStyle/>
+          <a:p>
+            <a:pPr algn="ctr">
+              <a:defRPr>
+                <a:latin typeface="Inter"/>
+              </a:defRPr>
+            </a:pPr>
+          </a:p>
+        </p:txBody>
+      </p:sp>
+      <p:sp>
+        <p:nvSpPr>
+          <p:cNvPr id="6" name="Rectangle 5"/>
           <p:cNvSpPr/>
           <p:nvPr/>
         </p:nvSpPr>
@@ -14590,7 +15556,7 @@
       </p:sp>
       <p:sp>
         <p:nvSpPr>
-          <p:cNvPr id="8" name="TextBox 7"/>
+          <p:cNvPr id="7" name="TextBox 6"/>
           <p:cNvSpPr txBox="1"/>
           <p:nvPr/>
         </p:nvSpPr>
@@ -14632,7 +15598,7 @@
       </p:sp>
       <p:sp>
         <p:nvSpPr>
-          <p:cNvPr id="9" name="TextBox 8"/>
+          <p:cNvPr id="8" name="TextBox 7"/>
           <p:cNvSpPr txBox="1"/>
           <p:nvPr/>
         </p:nvSpPr>
@@ -14674,7 +15640,7 @@
       </p:sp>
       <p:graphicFrame>
         <p:nvGraphicFramePr>
-          <p:cNvPr id="10" name="Table 9"/>
+          <p:cNvPr id="9" name="Table 8"/>
           <p:cNvGraphicFramePr>
             <a:graphicFrameLocks noGrp="1"/>
           </p:cNvGraphicFramePr>
@@ -15697,7 +16663,7 @@
       </p:graphicFrame>
       <p:sp>
         <p:nvSpPr>
-          <p:cNvPr id="11" name="Rectangle 10"/>
+          <p:cNvPr id="10" name="Rectangle 9"/>
           <p:cNvSpPr/>
           <p:nvPr/>
         </p:nvSpPr>
@@ -15746,7 +16712,7 @@
       </p:sp>
       <p:sp>
         <p:nvSpPr>
-          <p:cNvPr id="12" name="TextBox 11"/>
+          <p:cNvPr id="11" name="TextBox 10"/>
           <p:cNvSpPr txBox="1"/>
           <p:nvPr/>
         </p:nvSpPr>
@@ -15788,7 +16754,7 @@
       </p:sp>
       <p:sp>
         <p:nvSpPr>
-          <p:cNvPr id="13" name="TextBox 12"/>
+          <p:cNvPr id="12" name="TextBox 11"/>
           <p:cNvSpPr txBox="1"/>
           <p:nvPr/>
         </p:nvSpPr>
@@ -15830,7 +16796,7 @@
       </p:sp>
       <p:sp>
         <p:nvSpPr>
-          <p:cNvPr id="14" name="TextBox 13"/>
+          <p:cNvPr id="13" name="TextBox 12"/>
           <p:cNvSpPr txBox="1"/>
           <p:nvPr/>
         </p:nvSpPr>
@@ -15865,1061 +16831,7 @@
               <a:rPr>
                 <a:latin typeface="Inter"/>
               </a:rPr>
-              <a:t>19</a:t>
-            </a:r>
-          </a:p>
-        </p:txBody>
-      </p:sp>
-    </p:spTree>
-  </p:cSld>
-  <p:clrMapOvr>
-    <a:masterClrMapping/>
-  </p:clrMapOvr>
-</p:sld>
-</file>
-
-<file path=ppt/slides/slide2.xml><?xml version="1.0" encoding="utf-8"?>
-<p:sld xmlns:a="http://schemas.openxmlformats.org/drawingml/2006/main" xmlns:p="http://schemas.openxmlformats.org/presentationml/2006/main" xmlns:r="http://schemas.openxmlformats.org/officeDocument/2006/relationships">
-  <p:cSld>
-    <p:spTree>
-      <p:nvGrpSpPr>
-        <p:cNvPr id="1" name=""/>
-        <p:cNvGrpSpPr/>
-        <p:nvPr/>
-      </p:nvGrpSpPr>
-      <p:grpSpPr/>
-      <p:sp>
-        <p:nvSpPr>
-          <p:cNvPr id="2" name="Rectangle 1"/>
-          <p:cNvSpPr/>
-          <p:nvPr/>
-        </p:nvSpPr>
-        <p:spPr>
-          <a:xfrm>
-            <a:off x="0" y="0"/>
-            <a:ext cx="12191695" cy="6858000"/>
-          </a:xfrm>
-          <a:prstGeom prst="rect">
-            <a:avLst/>
-          </a:prstGeom>
-          <a:solidFill>
-            <a:srgbClr val="FFFFFF"/>
-          </a:solidFill>
-          <a:ln>
-            <a:solidFill>
-              <a:srgbClr val="FFFFFF"/>
-            </a:solidFill>
-          </a:ln>
-        </p:spPr>
-        <p:style>
-          <a:lnRef idx="1">
-            <a:schemeClr val="accent1"/>
-          </a:lnRef>
-          <a:fillRef idx="3">
-            <a:schemeClr val="accent1"/>
-          </a:fillRef>
-          <a:effectRef idx="2">
-            <a:schemeClr val="accent1"/>
-          </a:effectRef>
-          <a:fontRef idx="minor">
-            <a:schemeClr val="lt1"/>
-          </a:fontRef>
-        </p:style>
-        <p:txBody>
-          <a:bodyPr rtlCol="0" anchor="ctr"/>
-          <a:lstStyle/>
-          <a:p>
-            <a:pPr algn="ctr">
-              <a:defRPr>
-                <a:latin typeface="Inter"/>
-              </a:defRPr>
-            </a:pPr>
-          </a:p>
-        </p:txBody>
-      </p:sp>
-      <p:sp>
-        <p:nvSpPr>
-          <p:cNvPr id="3" name="TextBox 2"/>
-          <p:cNvSpPr txBox="1"/>
-          <p:nvPr/>
-        </p:nvSpPr>
-        <p:spPr>
-          <a:xfrm>
-            <a:off x="640080" y="329184"/>
-            <a:ext cx="5303520" cy="182880"/>
-          </a:xfrm>
-          <a:prstGeom prst="rect">
-            <a:avLst/>
-          </a:prstGeom>
-          <a:noFill/>
-        </p:spPr>
-        <p:txBody>
-          <a:bodyPr wrap="none" lIns="9144" rIns="9144" tIns="9144" bIns="9144" anchor="t">
-            <a:spAutoFit/>
-          </a:bodyPr>
-          <a:lstStyle/>
-          <a:p>
-            <a:pPr algn="l">
-              <a:spcAft>
-                <a:spcPts val="0"/>
-              </a:spcAft>
-              <a:defRPr sz="750" b="1">
-                <a:solidFill>
-                  <a:srgbClr val="4F6B00"/>
-                </a:solidFill>
-                <a:latin typeface="Inter"/>
-              </a:defRPr>
-            </a:pPr>
-            <a:r>
-              <a:rPr>
-                <a:latin typeface="Inter"/>
-              </a:rPr>
-              <a:t>BOTH RETURNED PME PATHS EXCEED ONE, WITH MOST VALUE STILL UNREALIZED</a:t>
-            </a:r>
-          </a:p>
-        </p:txBody>
-      </p:sp>
-      <p:sp>
-        <p:nvSpPr>
-          <p:cNvPr id="4" name="TextBox 3"/>
-          <p:cNvSpPr txBox="1"/>
-          <p:nvPr/>
-        </p:nvSpPr>
-        <p:spPr>
-          <a:xfrm>
-            <a:off x="5897880" y="310896"/>
-            <a:ext cx="4800600" cy="256032"/>
-          </a:xfrm>
-          <a:prstGeom prst="rect">
-            <a:avLst/>
-          </a:prstGeom>
-          <a:noFill/>
-        </p:spPr>
-        <p:txBody>
-          <a:bodyPr wrap="none" lIns="9144" rIns="9144" tIns="9144" bIns="9144" anchor="t">
-            <a:spAutoFit/>
-          </a:bodyPr>
-          <a:lstStyle/>
-          <a:p>
-            <a:pPr algn="r">
-              <a:spcAft>
-                <a:spcPts val="0"/>
-              </a:spcAft>
-              <a:defRPr sz="680" b="1">
-                <a:solidFill>
-                  <a:srgbClr val="4F6B00"/>
-                </a:solidFill>
-                <a:latin typeface="Inter"/>
-              </a:defRPr>
-            </a:pPr>
-            <a:r>
-              <a:rPr>
-                <a:latin typeface="Inter"/>
-              </a:rPr>
-              <a:t>Illustrative, Gradient Maintained — demo data, not the client's holdings or managers</a:t>
-            </a:r>
-          </a:p>
-        </p:txBody>
-      </p:sp>
-      <p:sp>
-        <p:nvSpPr>
-          <p:cNvPr id="5" name="TextBox 4"/>
-          <p:cNvSpPr txBox="1"/>
-          <p:nvPr/>
-        </p:nvSpPr>
-        <p:spPr>
-          <a:xfrm>
-            <a:off x="640080" y="566928"/>
-            <a:ext cx="10058400" cy="530352"/>
-          </a:xfrm>
-          <a:prstGeom prst="rect">
-            <a:avLst/>
-          </a:prstGeom>
-          <a:noFill/>
-        </p:spPr>
-        <p:txBody>
-          <a:bodyPr wrap="none" lIns="9144" rIns="9144" tIns="9144" bIns="9144" anchor="t">
-            <a:spAutoFit/>
-          </a:bodyPr>
-          <a:lstStyle/>
-          <a:p>
-            <a:pPr algn="l">
-              <a:spcAft>
-                <a:spcPts val="0"/>
-              </a:spcAft>
-              <a:defRPr sz="2300" b="1">
-                <a:solidFill>
-                  <a:srgbClr val="0D1117"/>
-                </a:solidFill>
-                <a:latin typeface="Inter"/>
-              </a:defRPr>
-            </a:pPr>
-            <a:r>
-              <a:rPr>
-                <a:latin typeface="Inter"/>
-              </a:rPr>
-              <a:t>Executive conclusion</a:t>
-            </a:r>
-          </a:p>
-        </p:txBody>
-      </p:sp>
-      <p:sp>
-        <p:nvSpPr>
-          <p:cNvPr id="6" name="Rectangle 5"/>
-          <p:cNvSpPr/>
-          <p:nvPr/>
-        </p:nvSpPr>
-        <p:spPr>
-          <a:xfrm>
-            <a:off x="640080" y="1115568"/>
-            <a:ext cx="10908792" cy="18288"/>
-          </a:xfrm>
-          <a:prstGeom prst="rect">
-            <a:avLst/>
-          </a:prstGeom>
-          <a:solidFill>
-            <a:srgbClr val="0D1117"/>
-          </a:solidFill>
-          <a:ln>
-            <a:solidFill>
-              <a:srgbClr val="0D1117"/>
-            </a:solidFill>
-          </a:ln>
-        </p:spPr>
-        <p:style>
-          <a:lnRef idx="1">
-            <a:schemeClr val="accent1"/>
-          </a:lnRef>
-          <a:fillRef idx="3">
-            <a:schemeClr val="accent1"/>
-          </a:fillRef>
-          <a:effectRef idx="2">
-            <a:schemeClr val="accent1"/>
-          </a:effectRef>
-          <a:fontRef idx="minor">
-            <a:schemeClr val="lt1"/>
-          </a:fontRef>
-        </p:style>
-        <p:txBody>
-          <a:bodyPr rtlCol="0" anchor="ctr"/>
-          <a:lstStyle/>
-          <a:p>
-            <a:pPr algn="ctr">
-              <a:defRPr>
-                <a:latin typeface="Inter"/>
-              </a:defRPr>
-            </a:pPr>
-          </a:p>
-        </p:txBody>
-      </p:sp>
-      <p:sp>
-        <p:nvSpPr>
-          <p:cNvPr id="7" name="Rectangle 6"/>
-          <p:cNvSpPr/>
-          <p:nvPr/>
-        </p:nvSpPr>
-        <p:spPr>
-          <a:xfrm>
-            <a:off x="11018520" y="502920"/>
-            <a:ext cx="530352" cy="393192"/>
-          </a:xfrm>
-          <a:prstGeom prst="rect">
-            <a:avLst/>
-          </a:prstGeom>
-          <a:solidFill>
-            <a:srgbClr val="C6F432"/>
-          </a:solidFill>
-          <a:ln>
-            <a:solidFill>
-              <a:srgbClr val="C6F432"/>
-            </a:solidFill>
-          </a:ln>
-        </p:spPr>
-        <p:style>
-          <a:lnRef idx="1">
-            <a:schemeClr val="accent1"/>
-          </a:lnRef>
-          <a:fillRef idx="3">
-            <a:schemeClr val="accent1"/>
-          </a:fillRef>
-          <a:effectRef idx="2">
-            <a:schemeClr val="accent1"/>
-          </a:effectRef>
-          <a:fontRef idx="minor">
-            <a:schemeClr val="lt1"/>
-          </a:fontRef>
-        </p:style>
-        <p:txBody>
-          <a:bodyPr rtlCol="0" anchor="ctr"/>
-          <a:lstStyle/>
-          <a:p>
-            <a:pPr algn="ctr">
-              <a:defRPr>
-                <a:latin typeface="Inter"/>
-              </a:defRPr>
-            </a:pPr>
-          </a:p>
-        </p:txBody>
-      </p:sp>
-      <p:sp>
-        <p:nvSpPr>
-          <p:cNvPr id="8" name="TextBox 7"/>
-          <p:cNvSpPr txBox="1"/>
-          <p:nvPr/>
-        </p:nvSpPr>
-        <p:spPr>
-          <a:xfrm>
-            <a:off x="11045952" y="557784"/>
-            <a:ext cx="475488" cy="182880"/>
-          </a:xfrm>
-          <a:prstGeom prst="rect">
-            <a:avLst/>
-          </a:prstGeom>
-          <a:noFill/>
-        </p:spPr>
-        <p:txBody>
-          <a:bodyPr wrap="none" lIns="9144" rIns="9144" tIns="9144" bIns="9144" anchor="t">
-            <a:spAutoFit/>
-          </a:bodyPr>
-          <a:lstStyle/>
-          <a:p>
-            <a:pPr algn="ctr">
-              <a:spcAft>
-                <a:spcPts val="0"/>
-              </a:spcAft>
-              <a:defRPr sz="1000" b="1">
-                <a:solidFill>
-                  <a:srgbClr val="0D1117"/>
-                </a:solidFill>
-                <a:latin typeface="Inter"/>
-              </a:defRPr>
-            </a:pPr>
-            <a:r>
-              <a:rPr>
-                <a:latin typeface="Inter"/>
-              </a:rPr>
-              <a:t>1</a:t>
-            </a:r>
-          </a:p>
-        </p:txBody>
-      </p:sp>
-      <p:sp>
-        <p:nvSpPr>
-          <p:cNvPr id="9" name="Rectangle 8"/>
-          <p:cNvSpPr/>
-          <p:nvPr/>
-        </p:nvSpPr>
-        <p:spPr>
-          <a:xfrm>
-            <a:off x="640080" y="1325880"/>
-            <a:ext cx="10908792" cy="1592216"/>
-          </a:xfrm>
-          <a:prstGeom prst="rect">
-            <a:avLst/>
-          </a:prstGeom>
-          <a:solidFill>
-            <a:srgbClr val="F5F7F9"/>
-          </a:solidFill>
-          <a:ln>
-            <a:solidFill>
-              <a:srgbClr val="E3E7EC"/>
-            </a:solidFill>
-          </a:ln>
-        </p:spPr>
-        <p:style>
-          <a:lnRef idx="1">
-            <a:schemeClr val="accent1"/>
-          </a:lnRef>
-          <a:fillRef idx="3">
-            <a:schemeClr val="accent1"/>
-          </a:fillRef>
-          <a:effectRef idx="2">
-            <a:schemeClr val="accent1"/>
-          </a:effectRef>
-          <a:fontRef idx="minor">
-            <a:schemeClr val="lt1"/>
-          </a:fontRef>
-        </p:style>
-        <p:txBody>
-          <a:bodyPr rtlCol="0" anchor="ctr"/>
-          <a:lstStyle/>
-          <a:p>
-            <a:pPr algn="ctr">
-              <a:defRPr>
-                <a:latin typeface="Inter"/>
-              </a:defRPr>
-            </a:pPr>
-          </a:p>
-        </p:txBody>
-      </p:sp>
-      <p:sp>
-        <p:nvSpPr>
-          <p:cNvPr id="10" name="Rectangle 9"/>
-          <p:cNvSpPr/>
-          <p:nvPr/>
-        </p:nvSpPr>
-        <p:spPr>
-          <a:xfrm>
-            <a:off x="640080" y="1325880"/>
-            <a:ext cx="54864" cy="1592216"/>
-          </a:xfrm>
-          <a:prstGeom prst="rect">
-            <a:avLst/>
-          </a:prstGeom>
-          <a:solidFill>
-            <a:srgbClr val="C6F432"/>
-          </a:solidFill>
-          <a:ln>
-            <a:solidFill>
-              <a:srgbClr val="C6F432"/>
-            </a:solidFill>
-          </a:ln>
-        </p:spPr>
-        <p:style>
-          <a:lnRef idx="1">
-            <a:schemeClr val="accent1"/>
-          </a:lnRef>
-          <a:fillRef idx="3">
-            <a:schemeClr val="accent1"/>
-          </a:fillRef>
-          <a:effectRef idx="2">
-            <a:schemeClr val="accent1"/>
-          </a:effectRef>
-          <a:fontRef idx="minor">
-            <a:schemeClr val="lt1"/>
-          </a:fontRef>
-        </p:style>
-        <p:txBody>
-          <a:bodyPr rtlCol="0" anchor="ctr"/>
-          <a:lstStyle/>
-          <a:p>
-            <a:pPr algn="ctr">
-              <a:defRPr>
-                <a:latin typeface="Inter"/>
-              </a:defRPr>
-            </a:pPr>
-          </a:p>
-        </p:txBody>
-      </p:sp>
-      <p:sp>
-        <p:nvSpPr>
-          <p:cNvPr id="11" name="TextBox 10"/>
-          <p:cNvSpPr txBox="1"/>
-          <p:nvPr/>
-        </p:nvSpPr>
-        <p:spPr>
-          <a:xfrm>
-            <a:off x="804671" y="1435607"/>
-            <a:ext cx="10616184" cy="228600"/>
-          </a:xfrm>
-          <a:prstGeom prst="rect">
-            <a:avLst/>
-          </a:prstGeom>
-          <a:noFill/>
-        </p:spPr>
-        <p:txBody>
-          <a:bodyPr wrap="none" lIns="9144" rIns="9144" tIns="9144" bIns="9144" anchor="t">
-            <a:spAutoFit/>
-          </a:bodyPr>
-          <a:lstStyle/>
-          <a:p>
-            <a:pPr algn="l">
-              <a:spcAft>
-                <a:spcPts val="0"/>
-              </a:spcAft>
-              <a:defRPr sz="1000" b="1">
-                <a:solidFill>
-                  <a:srgbClr val="0D1117"/>
-                </a:solidFill>
-                <a:latin typeface="Inter"/>
-              </a:defRPr>
-            </a:pPr>
-            <a:r>
-              <a:rPr>
-                <a:latin typeface="Inter"/>
-              </a:rPr>
-              <a:t>Key judgment — Relative result</a:t>
-            </a:r>
-          </a:p>
-        </p:txBody>
-      </p:sp>
-      <p:sp>
-        <p:nvSpPr>
-          <p:cNvPr id="12" name="TextBox 11"/>
-          <p:cNvSpPr txBox="1"/>
-          <p:nvPr/>
-        </p:nvSpPr>
-        <p:spPr>
-          <a:xfrm>
-            <a:off x="804671" y="1719072"/>
-            <a:ext cx="10616184" cy="1107584"/>
-          </a:xfrm>
-          <a:prstGeom prst="rect">
-            <a:avLst/>
-          </a:prstGeom>
-          <a:noFill/>
-        </p:spPr>
-        <p:txBody>
-          <a:bodyPr wrap="none" lIns="9144" rIns="9144" tIns="9144" bIns="9144" anchor="t">
-            <a:spAutoFit/>
-          </a:bodyPr>
-          <a:lstStyle/>
-          <a:p>
-            <a:pPr algn="l">
-              <a:spcAft>
-                <a:spcPts val="0"/>
-              </a:spcAft>
-              <a:defRPr sz="950" b="0">
-                <a:solidFill>
-                  <a:srgbClr val="4A5563"/>
-                </a:solidFill>
-                <a:latin typeface="Inter"/>
-              </a:defRPr>
-            </a:pPr>
-            <a:r>
-              <a:rPr>
-                <a:latin typeface="Inter"/>
-              </a:rPr>
-              <a:t>Observation: Primary and sensitivity KS-PME were 1.08x and 1.03x [S6][S7]. Why it matters: Both returned paths finished above public-market parity. Uncertainty: Sensitivity evidence is limited to a 0.03x margin over parity. What would change the view: Either governed KS-PME path falling to 1.00x or below.</a:t>
-            </a:r>
-          </a:p>
-        </p:txBody>
-      </p:sp>
-      <p:sp>
-        <p:nvSpPr>
-          <p:cNvPr id="13" name="Rectangle 12"/>
-          <p:cNvSpPr/>
-          <p:nvPr/>
-        </p:nvSpPr>
-        <p:spPr>
-          <a:xfrm>
-            <a:off x="640080" y="3027824"/>
-            <a:ext cx="10908792" cy="1670266"/>
-          </a:xfrm>
-          <a:prstGeom prst="rect">
-            <a:avLst/>
-          </a:prstGeom>
-          <a:solidFill>
-            <a:srgbClr val="F5F7F9"/>
-          </a:solidFill>
-          <a:ln>
-            <a:solidFill>
-              <a:srgbClr val="E3E7EC"/>
-            </a:solidFill>
-          </a:ln>
-        </p:spPr>
-        <p:style>
-          <a:lnRef idx="1">
-            <a:schemeClr val="accent1"/>
-          </a:lnRef>
-          <a:fillRef idx="3">
-            <a:schemeClr val="accent1"/>
-          </a:fillRef>
-          <a:effectRef idx="2">
-            <a:schemeClr val="accent1"/>
-          </a:effectRef>
-          <a:fontRef idx="minor">
-            <a:schemeClr val="lt1"/>
-          </a:fontRef>
-        </p:style>
-        <p:txBody>
-          <a:bodyPr rtlCol="0" anchor="ctr"/>
-          <a:lstStyle/>
-          <a:p>
-            <a:pPr algn="ctr">
-              <a:defRPr>
-                <a:latin typeface="Inter"/>
-              </a:defRPr>
-            </a:pPr>
-          </a:p>
-        </p:txBody>
-      </p:sp>
-      <p:sp>
-        <p:nvSpPr>
-          <p:cNvPr id="14" name="Rectangle 13"/>
-          <p:cNvSpPr/>
-          <p:nvPr/>
-        </p:nvSpPr>
-        <p:spPr>
-          <a:xfrm>
-            <a:off x="640080" y="3027824"/>
-            <a:ext cx="54864" cy="1670266"/>
-          </a:xfrm>
-          <a:prstGeom prst="rect">
-            <a:avLst/>
-          </a:prstGeom>
-          <a:solidFill>
-            <a:srgbClr val="C6F432"/>
-          </a:solidFill>
-          <a:ln>
-            <a:solidFill>
-              <a:srgbClr val="C6F432"/>
-            </a:solidFill>
-          </a:ln>
-        </p:spPr>
-        <p:style>
-          <a:lnRef idx="1">
-            <a:schemeClr val="accent1"/>
-          </a:lnRef>
-          <a:fillRef idx="3">
-            <a:schemeClr val="accent1"/>
-          </a:fillRef>
-          <a:effectRef idx="2">
-            <a:schemeClr val="accent1"/>
-          </a:effectRef>
-          <a:fontRef idx="minor">
-            <a:schemeClr val="lt1"/>
-          </a:fontRef>
-        </p:style>
-        <p:txBody>
-          <a:bodyPr rtlCol="0" anchor="ctr"/>
-          <a:lstStyle/>
-          <a:p>
-            <a:pPr algn="ctr">
-              <a:defRPr>
-                <a:latin typeface="Inter"/>
-              </a:defRPr>
-            </a:pPr>
-          </a:p>
-        </p:txBody>
-      </p:sp>
-      <p:sp>
-        <p:nvSpPr>
-          <p:cNvPr id="15" name="TextBox 14"/>
-          <p:cNvSpPr txBox="1"/>
-          <p:nvPr/>
-        </p:nvSpPr>
-        <p:spPr>
-          <a:xfrm>
-            <a:off x="804671" y="3137552"/>
-            <a:ext cx="10616184" cy="228600"/>
-          </a:xfrm>
-          <a:prstGeom prst="rect">
-            <a:avLst/>
-          </a:prstGeom>
-          <a:noFill/>
-        </p:spPr>
-        <p:txBody>
-          <a:bodyPr wrap="none" lIns="9144" rIns="9144" tIns="9144" bIns="9144" anchor="t">
-            <a:spAutoFit/>
-          </a:bodyPr>
-          <a:lstStyle/>
-          <a:p>
-            <a:pPr algn="l">
-              <a:spcAft>
-                <a:spcPts val="0"/>
-              </a:spcAft>
-              <a:defRPr sz="1000" b="1">
-                <a:solidFill>
-                  <a:srgbClr val="0D1117"/>
-                </a:solidFill>
-                <a:latin typeface="Inter"/>
-              </a:defRPr>
-            </a:pPr>
-            <a:r>
-              <a:rPr>
-                <a:latin typeface="Inter"/>
-              </a:rPr>
-              <a:t>Key judgment — Direct alpha</a:t>
-            </a:r>
-          </a:p>
-        </p:txBody>
-      </p:sp>
-      <p:sp>
-        <p:nvSpPr>
-          <p:cNvPr id="16" name="TextBox 15"/>
-          <p:cNvSpPr txBox="1"/>
-          <p:nvPr/>
-        </p:nvSpPr>
-        <p:spPr>
-          <a:xfrm>
-            <a:off x="804671" y="3421016"/>
-            <a:ext cx="10616184" cy="1185634"/>
-          </a:xfrm>
-          <a:prstGeom prst="rect">
-            <a:avLst/>
-          </a:prstGeom>
-          <a:noFill/>
-        </p:spPr>
-        <p:txBody>
-          <a:bodyPr wrap="none" lIns="9144" rIns="9144" tIns="9144" bIns="9144" anchor="t">
-            <a:spAutoFit/>
-          </a:bodyPr>
-          <a:lstStyle/>
-          <a:p>
-            <a:pPr algn="l">
-              <a:spcAft>
-                <a:spcPts val="0"/>
-              </a:spcAft>
-              <a:defRPr sz="950" b="0">
-                <a:solidFill>
-                  <a:srgbClr val="4A5563"/>
-                </a:solidFill>
-                <a:latin typeface="Inter"/>
-              </a:defRPr>
-            </a:pPr>
-            <a:r>
-              <a:rPr>
-                <a:latin typeface="Inter"/>
-              </a:rPr>
-              <a:t>Observation: Direct alpha was +1.9% primary and +0.8% sensitivity [S6][S7]. Why it matters: Both server runs indicate positive annualized relative value. Uncertainty: The selected pair excludes benchmarks outside the returned catalog choices. What would change the view: A returned direct-alpha estimate at or below 0.0%.</a:t>
-            </a:r>
-          </a:p>
-        </p:txBody>
-      </p:sp>
-      <p:sp>
-        <p:nvSpPr>
-          <p:cNvPr id="17" name="Rectangle 16"/>
-          <p:cNvSpPr/>
-          <p:nvPr/>
-        </p:nvSpPr>
-        <p:spPr>
-          <a:xfrm>
-            <a:off x="640080" y="4807819"/>
-            <a:ext cx="10908792" cy="1410100"/>
-          </a:xfrm>
-          <a:prstGeom prst="rect">
-            <a:avLst/>
-          </a:prstGeom>
-          <a:solidFill>
-            <a:srgbClr val="F5F7F9"/>
-          </a:solidFill>
-          <a:ln>
-            <a:solidFill>
-              <a:srgbClr val="E3E7EC"/>
-            </a:solidFill>
-          </a:ln>
-        </p:spPr>
-        <p:style>
-          <a:lnRef idx="1">
-            <a:schemeClr val="accent1"/>
-          </a:lnRef>
-          <a:fillRef idx="3">
-            <a:schemeClr val="accent1"/>
-          </a:fillRef>
-          <a:effectRef idx="2">
-            <a:schemeClr val="accent1"/>
-          </a:effectRef>
-          <a:fontRef idx="minor">
-            <a:schemeClr val="lt1"/>
-          </a:fontRef>
-        </p:style>
-        <p:txBody>
-          <a:bodyPr rtlCol="0" anchor="ctr"/>
-          <a:lstStyle/>
-          <a:p>
-            <a:pPr algn="ctr">
-              <a:defRPr>
-                <a:latin typeface="Inter"/>
-              </a:defRPr>
-            </a:pPr>
-          </a:p>
-        </p:txBody>
-      </p:sp>
-      <p:sp>
-        <p:nvSpPr>
-          <p:cNvPr id="18" name="Rectangle 17"/>
-          <p:cNvSpPr/>
-          <p:nvPr/>
-        </p:nvSpPr>
-        <p:spPr>
-          <a:xfrm>
-            <a:off x="640080" y="4807819"/>
-            <a:ext cx="54864" cy="1410100"/>
-          </a:xfrm>
-          <a:prstGeom prst="rect">
-            <a:avLst/>
-          </a:prstGeom>
-          <a:solidFill>
-            <a:srgbClr val="F2A93B"/>
-          </a:solidFill>
-          <a:ln>
-            <a:solidFill>
-              <a:srgbClr val="F2A93B"/>
-            </a:solidFill>
-          </a:ln>
-        </p:spPr>
-        <p:style>
-          <a:lnRef idx="1">
-            <a:schemeClr val="accent1"/>
-          </a:lnRef>
-          <a:fillRef idx="3">
-            <a:schemeClr val="accent1"/>
-          </a:fillRef>
-          <a:effectRef idx="2">
-            <a:schemeClr val="accent1"/>
-          </a:effectRef>
-          <a:fontRef idx="minor">
-            <a:schemeClr val="lt1"/>
-          </a:fontRef>
-        </p:style>
-        <p:txBody>
-          <a:bodyPr rtlCol="0" anchor="ctr"/>
-          <a:lstStyle/>
-          <a:p>
-            <a:pPr algn="ctr">
-              <a:defRPr>
-                <a:latin typeface="Inter"/>
-              </a:defRPr>
-            </a:pPr>
-          </a:p>
-        </p:txBody>
-      </p:sp>
-      <p:sp>
-        <p:nvSpPr>
-          <p:cNvPr id="19" name="TextBox 18"/>
-          <p:cNvSpPr txBox="1"/>
-          <p:nvPr/>
-        </p:nvSpPr>
-        <p:spPr>
-          <a:xfrm>
-            <a:off x="804671" y="4917547"/>
-            <a:ext cx="10616184" cy="228600"/>
-          </a:xfrm>
-          <a:prstGeom prst="rect">
-            <a:avLst/>
-          </a:prstGeom>
-          <a:noFill/>
-        </p:spPr>
-        <p:txBody>
-          <a:bodyPr wrap="none" lIns="9144" rIns="9144" tIns="9144" bIns="9144" anchor="t">
-            <a:spAutoFit/>
-          </a:bodyPr>
-          <a:lstStyle/>
-          <a:p>
-            <a:pPr algn="l">
-              <a:spcAft>
-                <a:spcPts val="0"/>
-              </a:spcAft>
-              <a:defRPr sz="1000" b="1">
-                <a:solidFill>
-                  <a:srgbClr val="0D1117"/>
-                </a:solidFill>
-                <a:latin typeface="Inter"/>
-              </a:defRPr>
-            </a:pPr>
-            <a:r>
-              <a:rPr>
-                <a:latin typeface="Inter"/>
-              </a:rPr>
-              <a:t>Key judgment — Cash-flow context</a:t>
-            </a:r>
-          </a:p>
-        </p:txBody>
-      </p:sp>
-      <p:sp>
-        <p:nvSpPr>
-          <p:cNvPr id="20" name="TextBox 19"/>
-          <p:cNvSpPr txBox="1"/>
-          <p:nvPr/>
-        </p:nvSpPr>
-        <p:spPr>
-          <a:xfrm>
-            <a:off x="804671" y="5201011"/>
-            <a:ext cx="10616184" cy="925468"/>
-          </a:xfrm>
-          <a:prstGeom prst="rect">
-            <a:avLst/>
-          </a:prstGeom>
-          <a:noFill/>
-        </p:spPr>
-        <p:txBody>
-          <a:bodyPr wrap="none" lIns="9144" rIns="9144" tIns="9144" bIns="9144" anchor="t">
-            <a:spAutoFit/>
-          </a:bodyPr>
-          <a:lstStyle/>
-          <a:p>
-            <a:pPr algn="l">
-              <a:spcAft>
-                <a:spcPts val="0"/>
-              </a:spcAft>
-              <a:defRPr sz="950" b="0">
-                <a:solidFill>
-                  <a:srgbClr val="4A5563"/>
-                </a:solidFill>
-                <a:latin typeface="Inter"/>
-              </a:defRPr>
-            </a:pPr>
-            <a:r>
-              <a:rPr>
-                <a:latin typeface="Inter"/>
-              </a:rPr>
-              <a:t>Observation: Net IRR was 12.6% and TVPI was 1.41x, including 0.75x RVPI [S6]. Why it matters: More value remains unrealized than distributed. Uncertainty: Holdings context is not a PME input. What would change the view: Audited cash flows reducing TVPI by at least 0.10x.</a:t>
-            </a:r>
-          </a:p>
-        </p:txBody>
-      </p:sp>
-      <p:sp>
-        <p:nvSpPr>
-          <p:cNvPr id="21" name="Rectangle 20"/>
-          <p:cNvSpPr/>
-          <p:nvPr/>
-        </p:nvSpPr>
-        <p:spPr>
-          <a:xfrm>
-            <a:off x="640080" y="6446520"/>
-            <a:ext cx="10908792" cy="9144"/>
-          </a:xfrm>
-          <a:prstGeom prst="rect">
-            <a:avLst/>
-          </a:prstGeom>
-          <a:solidFill>
-            <a:srgbClr val="E3E7EC"/>
-          </a:solidFill>
-          <a:ln>
-            <a:solidFill>
-              <a:srgbClr val="E3E7EC"/>
-            </a:solidFill>
-          </a:ln>
-        </p:spPr>
-        <p:style>
-          <a:lnRef idx="1">
-            <a:schemeClr val="accent1"/>
-          </a:lnRef>
-          <a:fillRef idx="3">
-            <a:schemeClr val="accent1"/>
-          </a:fillRef>
-          <a:effectRef idx="2">
-            <a:schemeClr val="accent1"/>
-          </a:effectRef>
-          <a:fontRef idx="minor">
-            <a:schemeClr val="lt1"/>
-          </a:fontRef>
-        </p:style>
-        <p:txBody>
-          <a:bodyPr rtlCol="0" anchor="ctr"/>
-          <a:lstStyle/>
-          <a:p>
-            <a:pPr algn="ctr">
-              <a:defRPr>
-                <a:latin typeface="Inter"/>
-              </a:defRPr>
-            </a:pPr>
-          </a:p>
-        </p:txBody>
-      </p:sp>
-      <p:sp>
-        <p:nvSpPr>
-          <p:cNvPr id="22" name="TextBox 21"/>
-          <p:cNvSpPr txBox="1"/>
-          <p:nvPr/>
-        </p:nvSpPr>
-        <p:spPr>
-          <a:xfrm>
-            <a:off x="640080" y="6501384"/>
-            <a:ext cx="4297680" cy="146304"/>
-          </a:xfrm>
-          <a:prstGeom prst="rect">
-            <a:avLst/>
-          </a:prstGeom>
-          <a:noFill/>
-        </p:spPr>
-        <p:txBody>
-          <a:bodyPr wrap="none" lIns="9144" rIns="9144" tIns="9144" bIns="9144" anchor="t">
-            <a:spAutoFit/>
-          </a:bodyPr>
-          <a:lstStyle/>
-          <a:p>
-            <a:pPr algn="l">
-              <a:spcAft>
-                <a:spcPts val="0"/>
-              </a:spcAft>
-              <a:defRPr sz="650" b="0">
-                <a:solidFill>
-                  <a:srgbClr val="8A94A1"/>
-                </a:solidFill>
-                <a:latin typeface="Inter"/>
-              </a:defRPr>
-            </a:pPr>
-            <a:r>
-              <a:rPr>
-                <a:latin typeface="Inter"/>
-              </a:rPr>
-              <a:t>Sources: S6 · S7</a:t>
-            </a:r>
-          </a:p>
-        </p:txBody>
-      </p:sp>
-      <p:sp>
-        <p:nvSpPr>
-          <p:cNvPr id="23" name="TextBox 22"/>
-          <p:cNvSpPr txBox="1"/>
-          <p:nvPr/>
-        </p:nvSpPr>
-        <p:spPr>
-          <a:xfrm>
-            <a:off x="4480560" y="6501384"/>
-            <a:ext cx="5303520" cy="146304"/>
-          </a:xfrm>
-          <a:prstGeom prst="rect">
-            <a:avLst/>
-          </a:prstGeom>
-          <a:noFill/>
-        </p:spPr>
-        <p:txBody>
-          <a:bodyPr wrap="none" lIns="9144" rIns="9144" tIns="9144" bIns="9144" anchor="t">
-            <a:spAutoFit/>
-          </a:bodyPr>
-          <a:lstStyle/>
-          <a:p>
-            <a:pPr algn="ctr">
-              <a:spcAft>
-                <a:spcPts val="0"/>
-              </a:spcAft>
-              <a:defRPr sz="650" b="0">
-                <a:solidFill>
-                  <a:srgbClr val="8A94A1"/>
-                </a:solidFill>
-                <a:latin typeface="Inter"/>
-              </a:defRPr>
-            </a:pPr>
-            <a:r>
-              <a:rPr>
-                <a:latin typeface="Inter"/>
-              </a:rPr>
-              <a:t>Confidential — private markets review · Data as of 2025-12-31</a:t>
-            </a:r>
-          </a:p>
-        </p:txBody>
-      </p:sp>
-      <p:sp>
-        <p:nvSpPr>
-          <p:cNvPr id="24" name="TextBox 23"/>
-          <p:cNvSpPr txBox="1"/>
-          <p:nvPr/>
-        </p:nvSpPr>
-        <p:spPr>
-          <a:xfrm>
-            <a:off x="10287000" y="6501384"/>
-            <a:ext cx="1261872" cy="146304"/>
-          </a:xfrm>
-          <a:prstGeom prst="rect">
-            <a:avLst/>
-          </a:prstGeom>
-          <a:noFill/>
-        </p:spPr>
-        <p:txBody>
-          <a:bodyPr wrap="none" lIns="9144" rIns="9144" tIns="9144" bIns="9144" anchor="t">
-            <a:spAutoFit/>
-          </a:bodyPr>
-          <a:lstStyle/>
-          <a:p>
-            <a:pPr algn="r">
-              <a:spcAft>
-                <a:spcPts val="0"/>
-              </a:spcAft>
-              <a:defRPr sz="650" b="0">
-                <a:solidFill>
-                  <a:srgbClr val="8A94A1"/>
-                </a:solidFill>
-                <a:latin typeface="Inter"/>
-              </a:defRPr>
-            </a:pPr>
-            <a:r>
-              <a:rPr>
-                <a:latin typeface="Inter"/>
-              </a:rPr>
-              <a:t>2</a:t>
+              <a:t>20</a:t>
             </a:r>
           </a:p>
         </p:txBody>
@@ -17000,7 +16912,7 @@
         <p:spPr>
           <a:xfrm>
             <a:off x="640080" y="329184"/>
-            <a:ext cx="5303520" cy="182880"/>
+            <a:ext cx="9875520" cy="182880"/>
           </a:xfrm>
           <a:prstGeom prst="rect">
             <a:avLst/>
@@ -17041,48 +16953,6 @@
         </p:nvSpPr>
         <p:spPr>
           <a:xfrm>
-            <a:off x="5897880" y="310896"/>
-            <a:ext cx="4800600" cy="256032"/>
-          </a:xfrm>
-          <a:prstGeom prst="rect">
-            <a:avLst/>
-          </a:prstGeom>
-          <a:noFill/>
-        </p:spPr>
-        <p:txBody>
-          <a:bodyPr wrap="none" lIns="9144" rIns="9144" tIns="9144" bIns="9144" anchor="t">
-            <a:spAutoFit/>
-          </a:bodyPr>
-          <a:lstStyle/>
-          <a:p>
-            <a:pPr algn="r">
-              <a:spcAft>
-                <a:spcPts val="0"/>
-              </a:spcAft>
-              <a:defRPr sz="680" b="1">
-                <a:solidFill>
-                  <a:srgbClr val="4F6B00"/>
-                </a:solidFill>
-                <a:latin typeface="Inter"/>
-              </a:defRPr>
-            </a:pPr>
-            <a:r>
-              <a:rPr>
-                <a:latin typeface="Inter"/>
-              </a:rPr>
-              <a:t>Illustrative, Gradient Maintained — demo data, not the client's holdings or managers</a:t>
-            </a:r>
-          </a:p>
-        </p:txBody>
-      </p:sp>
-      <p:sp>
-        <p:nvSpPr>
-          <p:cNvPr id="5" name="TextBox 4"/>
-          <p:cNvSpPr txBox="1"/>
-          <p:nvPr/>
-        </p:nvSpPr>
-        <p:spPr>
-          <a:xfrm>
             <a:off x="640080" y="566928"/>
             <a:ext cx="10058400" cy="530352"/>
           </a:xfrm>
@@ -17119,7 +16989,7 @@
       </p:sp>
       <p:sp>
         <p:nvSpPr>
-          <p:cNvPr id="6" name="Rectangle 5"/>
+          <p:cNvPr id="5" name="Rectangle 4"/>
           <p:cNvSpPr/>
           <p:nvPr/>
         </p:nvSpPr>
@@ -17168,7 +17038,7 @@
       </p:sp>
       <p:sp>
         <p:nvSpPr>
-          <p:cNvPr id="7" name="Rectangle 6"/>
+          <p:cNvPr id="6" name="Rectangle 5"/>
           <p:cNvSpPr/>
           <p:nvPr/>
         </p:nvSpPr>
@@ -17217,7 +17087,7 @@
       </p:sp>
       <p:sp>
         <p:nvSpPr>
-          <p:cNvPr id="8" name="TextBox 7"/>
+          <p:cNvPr id="7" name="TextBox 6"/>
           <p:cNvSpPr txBox="1"/>
           <p:nvPr/>
         </p:nvSpPr>
@@ -17259,7 +17129,7 @@
       </p:sp>
       <p:graphicFrame>
         <p:nvGraphicFramePr>
-          <p:cNvPr id="9" name="Table 8"/>
+          <p:cNvPr id="8" name="Table 7"/>
           <p:cNvGraphicFramePr>
             <a:graphicFrameLocks noGrp="1"/>
           </p:cNvGraphicFramePr>
@@ -17408,7 +17278,7 @@
                         <a:rPr>
                           <a:latin typeface="Inter"/>
                         </a:rPr>
-                        <a:t>● available</a:t>
+                        <a:t>● Available</a:t>
                       </a:r>
                     </a:p>
                   </a:txBody>
@@ -17491,7 +17361,7 @@
                         <a:rPr>
                           <a:latin typeface="Inter"/>
                         </a:rPr>
-                        <a:t>● available</a:t>
+                        <a:t>● Available</a:t>
                       </a:r>
                     </a:p>
                   </a:txBody>
@@ -17574,7 +17444,7 @@
                         <a:rPr>
                           <a:latin typeface="Inter"/>
                         </a:rPr>
-                        <a:t>● available</a:t>
+                        <a:t>● Available</a:t>
                       </a:r>
                     </a:p>
                   </a:txBody>
@@ -17657,7 +17527,7 @@
                         <a:rPr>
                           <a:latin typeface="Inter"/>
                         </a:rPr>
-                        <a:t>● partial</a:t>
+                        <a:t>● Partly available</a:t>
                       </a:r>
                     </a:p>
                   </a:txBody>
@@ -17701,7 +17571,7 @@
       </p:graphicFrame>
       <p:sp>
         <p:nvSpPr>
-          <p:cNvPr id="10" name="Rectangle 9"/>
+          <p:cNvPr id="9" name="Rectangle 8"/>
           <p:cNvSpPr/>
           <p:nvPr/>
         </p:nvSpPr>
@@ -17750,7 +17620,7 @@
       </p:sp>
       <p:sp>
         <p:nvSpPr>
-          <p:cNvPr id="11" name="TextBox 10"/>
+          <p:cNvPr id="10" name="TextBox 9"/>
           <p:cNvSpPr txBox="1"/>
           <p:nvPr/>
         </p:nvSpPr>
@@ -17792,7 +17662,7 @@
       </p:sp>
       <p:sp>
         <p:nvSpPr>
-          <p:cNvPr id="12" name="TextBox 11"/>
+          <p:cNvPr id="11" name="TextBox 10"/>
           <p:cNvSpPr txBox="1"/>
           <p:nvPr/>
         </p:nvSpPr>
@@ -17834,7 +17704,7 @@
       </p:sp>
       <p:sp>
         <p:nvSpPr>
-          <p:cNvPr id="13" name="TextBox 12"/>
+          <p:cNvPr id="12" name="TextBox 11"/>
           <p:cNvSpPr txBox="1"/>
           <p:nvPr/>
         </p:nvSpPr>
@@ -17950,7 +17820,7 @@
         <p:spPr>
           <a:xfrm>
             <a:off x="640080" y="329184"/>
-            <a:ext cx="5303520" cy="182880"/>
+            <a:ext cx="9875520" cy="182880"/>
           </a:xfrm>
           <a:prstGeom prst="rect">
             <a:avLst/>
@@ -17991,48 +17861,6 @@
         </p:nvSpPr>
         <p:spPr>
           <a:xfrm>
-            <a:off x="5897880" y="310896"/>
-            <a:ext cx="4800600" cy="256032"/>
-          </a:xfrm>
-          <a:prstGeom prst="rect">
-            <a:avLst/>
-          </a:prstGeom>
-          <a:noFill/>
-        </p:spPr>
-        <p:txBody>
-          <a:bodyPr wrap="none" lIns="9144" rIns="9144" tIns="9144" bIns="9144" anchor="t">
-            <a:spAutoFit/>
-          </a:bodyPr>
-          <a:lstStyle/>
-          <a:p>
-            <a:pPr algn="r">
-              <a:spcAft>
-                <a:spcPts val="0"/>
-              </a:spcAft>
-              <a:defRPr sz="680" b="1">
-                <a:solidFill>
-                  <a:srgbClr val="4F6B00"/>
-                </a:solidFill>
-                <a:latin typeface="Inter"/>
-              </a:defRPr>
-            </a:pPr>
-            <a:r>
-              <a:rPr>
-                <a:latin typeface="Inter"/>
-              </a:rPr>
-              <a:t>Illustrative, Gradient Maintained — demo data, not the client's holdings or managers</a:t>
-            </a:r>
-          </a:p>
-        </p:txBody>
-      </p:sp>
-      <p:sp>
-        <p:nvSpPr>
-          <p:cNvPr id="5" name="TextBox 4"/>
-          <p:cNvSpPr txBox="1"/>
-          <p:nvPr/>
-        </p:nvSpPr>
-        <p:spPr>
-          <a:xfrm>
             <a:off x="640080" y="566928"/>
             <a:ext cx="10058400" cy="530352"/>
           </a:xfrm>
@@ -18069,7 +17897,7 @@
       </p:sp>
       <p:sp>
         <p:nvSpPr>
-          <p:cNvPr id="6" name="Rectangle 5"/>
+          <p:cNvPr id="5" name="Rectangle 4"/>
           <p:cNvSpPr/>
           <p:nvPr/>
         </p:nvSpPr>
@@ -18118,7 +17946,7 @@
       </p:sp>
       <p:sp>
         <p:nvSpPr>
-          <p:cNvPr id="7" name="Rectangle 6"/>
+          <p:cNvPr id="6" name="Rectangle 5"/>
           <p:cNvSpPr/>
           <p:nvPr/>
         </p:nvSpPr>
@@ -18167,7 +17995,7 @@
       </p:sp>
       <p:sp>
         <p:nvSpPr>
-          <p:cNvPr id="8" name="TextBox 7"/>
+          <p:cNvPr id="7" name="TextBox 6"/>
           <p:cNvSpPr txBox="1"/>
           <p:nvPr/>
         </p:nvSpPr>
@@ -18209,7 +18037,7 @@
       </p:sp>
       <p:sp>
         <p:nvSpPr>
-          <p:cNvPr id="9" name="TextBox 8"/>
+          <p:cNvPr id="8" name="TextBox 7"/>
           <p:cNvSpPr txBox="1"/>
           <p:nvPr/>
         </p:nvSpPr>
@@ -18251,7 +18079,7 @@
       </p:sp>
       <p:graphicFrame>
         <p:nvGraphicFramePr>
-          <p:cNvPr id="10" name="Chart 9"/>
+          <p:cNvPr id="9" name="Chart 8"/>
           <p:cNvGraphicFramePr>
             <a:graphicFrameLocks noGrp="1"/>
           </p:cNvGraphicFramePr>
@@ -18269,7 +18097,7 @@
       </p:graphicFrame>
       <p:sp>
         <p:nvSpPr>
-          <p:cNvPr id="11" name="Rectangle 10"/>
+          <p:cNvPr id="10" name="Rectangle 9"/>
           <p:cNvSpPr/>
           <p:nvPr/>
         </p:nvSpPr>
@@ -18318,7 +18146,7 @@
       </p:sp>
       <p:sp>
         <p:nvSpPr>
-          <p:cNvPr id="12" name="TextBox 11"/>
+          <p:cNvPr id="11" name="TextBox 10"/>
           <p:cNvSpPr txBox="1"/>
           <p:nvPr/>
         </p:nvSpPr>
@@ -18360,7 +18188,7 @@
       </p:sp>
       <p:sp>
         <p:nvSpPr>
-          <p:cNvPr id="13" name="TextBox 12"/>
+          <p:cNvPr id="12" name="TextBox 11"/>
           <p:cNvSpPr txBox="1"/>
           <p:nvPr/>
         </p:nvSpPr>
@@ -18402,7 +18230,7 @@
       </p:sp>
       <p:sp>
         <p:nvSpPr>
-          <p:cNvPr id="14" name="TextBox 13"/>
+          <p:cNvPr id="13" name="TextBox 12"/>
           <p:cNvSpPr txBox="1"/>
           <p:nvPr/>
         </p:nvSpPr>
@@ -18518,7 +18346,7 @@
         <p:spPr>
           <a:xfrm>
             <a:off x="640080" y="329184"/>
-            <a:ext cx="5303520" cy="182880"/>
+            <a:ext cx="9875520" cy="182880"/>
           </a:xfrm>
           <a:prstGeom prst="rect">
             <a:avLst/>
@@ -18559,48 +18387,6 @@
         </p:nvSpPr>
         <p:spPr>
           <a:xfrm>
-            <a:off x="5897880" y="310896"/>
-            <a:ext cx="4800600" cy="256032"/>
-          </a:xfrm>
-          <a:prstGeom prst="rect">
-            <a:avLst/>
-          </a:prstGeom>
-          <a:noFill/>
-        </p:spPr>
-        <p:txBody>
-          <a:bodyPr wrap="none" lIns="9144" rIns="9144" tIns="9144" bIns="9144" anchor="t">
-            <a:spAutoFit/>
-          </a:bodyPr>
-          <a:lstStyle/>
-          <a:p>
-            <a:pPr algn="r">
-              <a:spcAft>
-                <a:spcPts val="0"/>
-              </a:spcAft>
-              <a:defRPr sz="680" b="1">
-                <a:solidFill>
-                  <a:srgbClr val="4F6B00"/>
-                </a:solidFill>
-                <a:latin typeface="Inter"/>
-              </a:defRPr>
-            </a:pPr>
-            <a:r>
-              <a:rPr>
-                <a:latin typeface="Inter"/>
-              </a:rPr>
-              <a:t>Illustrative, Gradient Maintained — demo data, not the client's holdings or managers</a:t>
-            </a:r>
-          </a:p>
-        </p:txBody>
-      </p:sp>
-      <p:sp>
-        <p:nvSpPr>
-          <p:cNvPr id="5" name="TextBox 4"/>
-          <p:cNvSpPr txBox="1"/>
-          <p:nvPr/>
-        </p:nvSpPr>
-        <p:spPr>
-          <a:xfrm>
             <a:off x="640080" y="566928"/>
             <a:ext cx="10058400" cy="530352"/>
           </a:xfrm>
@@ -18637,7 +18423,7 @@
       </p:sp>
       <p:sp>
         <p:nvSpPr>
-          <p:cNvPr id="6" name="Rectangle 5"/>
+          <p:cNvPr id="5" name="Rectangle 4"/>
           <p:cNvSpPr/>
           <p:nvPr/>
         </p:nvSpPr>
@@ -18686,7 +18472,7 @@
       </p:sp>
       <p:sp>
         <p:nvSpPr>
-          <p:cNvPr id="7" name="Rectangle 6"/>
+          <p:cNvPr id="6" name="Rectangle 5"/>
           <p:cNvSpPr/>
           <p:nvPr/>
         </p:nvSpPr>
@@ -18735,7 +18521,7 @@
       </p:sp>
       <p:sp>
         <p:nvSpPr>
-          <p:cNvPr id="8" name="TextBox 7"/>
+          <p:cNvPr id="7" name="TextBox 6"/>
           <p:cNvSpPr txBox="1"/>
           <p:nvPr/>
         </p:nvSpPr>
@@ -18777,7 +18563,7 @@
       </p:sp>
       <p:sp>
         <p:nvSpPr>
-          <p:cNvPr id="9" name="TextBox 8"/>
+          <p:cNvPr id="8" name="TextBox 7"/>
           <p:cNvSpPr txBox="1"/>
           <p:nvPr/>
         </p:nvSpPr>
@@ -18819,7 +18605,7 @@
       </p:sp>
       <p:graphicFrame>
         <p:nvGraphicFramePr>
-          <p:cNvPr id="10" name="Chart 9"/>
+          <p:cNvPr id="9" name="Chart 8"/>
           <p:cNvGraphicFramePr>
             <a:graphicFrameLocks noGrp="1"/>
           </p:cNvGraphicFramePr>
@@ -18837,7 +18623,7 @@
       </p:graphicFrame>
       <p:sp>
         <p:nvSpPr>
-          <p:cNvPr id="11" name="Rectangle 10"/>
+          <p:cNvPr id="10" name="Rectangle 9"/>
           <p:cNvSpPr/>
           <p:nvPr/>
         </p:nvSpPr>
@@ -18886,7 +18672,7 @@
       </p:sp>
       <p:sp>
         <p:nvSpPr>
-          <p:cNvPr id="12" name="TextBox 11"/>
+          <p:cNvPr id="11" name="TextBox 10"/>
           <p:cNvSpPr txBox="1"/>
           <p:nvPr/>
         </p:nvSpPr>
@@ -18928,7 +18714,7 @@
       </p:sp>
       <p:sp>
         <p:nvSpPr>
-          <p:cNvPr id="13" name="TextBox 12"/>
+          <p:cNvPr id="12" name="TextBox 11"/>
           <p:cNvSpPr txBox="1"/>
           <p:nvPr/>
         </p:nvSpPr>
@@ -18970,7 +18756,7 @@
       </p:sp>
       <p:sp>
         <p:nvSpPr>
-          <p:cNvPr id="14" name="TextBox 13"/>
+          <p:cNvPr id="13" name="TextBox 12"/>
           <p:cNvSpPr txBox="1"/>
           <p:nvPr/>
         </p:nvSpPr>
@@ -19086,7 +18872,7 @@
         <p:spPr>
           <a:xfrm>
             <a:off x="640080" y="329184"/>
-            <a:ext cx="5303520" cy="182880"/>
+            <a:ext cx="9875520" cy="182880"/>
           </a:xfrm>
           <a:prstGeom prst="rect">
             <a:avLst/>
@@ -19127,48 +18913,6 @@
         </p:nvSpPr>
         <p:spPr>
           <a:xfrm>
-            <a:off x="5897880" y="310896"/>
-            <a:ext cx="4800600" cy="256032"/>
-          </a:xfrm>
-          <a:prstGeom prst="rect">
-            <a:avLst/>
-          </a:prstGeom>
-          <a:noFill/>
-        </p:spPr>
-        <p:txBody>
-          <a:bodyPr wrap="none" lIns="9144" rIns="9144" tIns="9144" bIns="9144" anchor="t">
-            <a:spAutoFit/>
-          </a:bodyPr>
-          <a:lstStyle/>
-          <a:p>
-            <a:pPr algn="r">
-              <a:spcAft>
-                <a:spcPts val="0"/>
-              </a:spcAft>
-              <a:defRPr sz="680" b="1">
-                <a:solidFill>
-                  <a:srgbClr val="4F6B00"/>
-                </a:solidFill>
-                <a:latin typeface="Inter"/>
-              </a:defRPr>
-            </a:pPr>
-            <a:r>
-              <a:rPr>
-                <a:latin typeface="Inter"/>
-              </a:rPr>
-              <a:t>Illustrative, Gradient Maintained — demo data, not the client's holdings or managers</a:t>
-            </a:r>
-          </a:p>
-        </p:txBody>
-      </p:sp>
-      <p:sp>
-        <p:nvSpPr>
-          <p:cNvPr id="5" name="TextBox 4"/>
-          <p:cNvSpPr txBox="1"/>
-          <p:nvPr/>
-        </p:nvSpPr>
-        <p:spPr>
-          <a:xfrm>
             <a:off x="640080" y="566928"/>
             <a:ext cx="10058400" cy="530352"/>
           </a:xfrm>
@@ -19205,7 +18949,7 @@
       </p:sp>
       <p:sp>
         <p:nvSpPr>
-          <p:cNvPr id="6" name="Rectangle 5"/>
+          <p:cNvPr id="5" name="Rectangle 4"/>
           <p:cNvSpPr/>
           <p:nvPr/>
         </p:nvSpPr>
@@ -19254,7 +18998,7 @@
       </p:sp>
       <p:sp>
         <p:nvSpPr>
-          <p:cNvPr id="7" name="Rectangle 6"/>
+          <p:cNvPr id="6" name="Rectangle 5"/>
           <p:cNvSpPr/>
           <p:nvPr/>
         </p:nvSpPr>
@@ -19303,7 +19047,7 @@
       </p:sp>
       <p:sp>
         <p:nvSpPr>
-          <p:cNvPr id="8" name="TextBox 7"/>
+          <p:cNvPr id="7" name="TextBox 6"/>
           <p:cNvSpPr txBox="1"/>
           <p:nvPr/>
         </p:nvSpPr>
@@ -19345,7 +19089,7 @@
       </p:sp>
       <p:sp>
         <p:nvSpPr>
-          <p:cNvPr id="9" name="TextBox 8"/>
+          <p:cNvPr id="8" name="TextBox 7"/>
           <p:cNvSpPr txBox="1"/>
           <p:nvPr/>
         </p:nvSpPr>
@@ -19387,7 +19131,7 @@
       </p:sp>
       <p:graphicFrame>
         <p:nvGraphicFramePr>
-          <p:cNvPr id="10" name="Chart 9"/>
+          <p:cNvPr id="9" name="Chart 8"/>
           <p:cNvGraphicFramePr>
             <a:graphicFrameLocks noGrp="1"/>
           </p:cNvGraphicFramePr>
@@ -19405,7 +19149,7 @@
       </p:graphicFrame>
       <p:sp>
         <p:nvSpPr>
-          <p:cNvPr id="11" name="Rectangle 10"/>
+          <p:cNvPr id="10" name="Rectangle 9"/>
           <p:cNvSpPr/>
           <p:nvPr/>
         </p:nvSpPr>
@@ -19454,7 +19198,7 @@
       </p:sp>
       <p:sp>
         <p:nvSpPr>
-          <p:cNvPr id="12" name="TextBox 11"/>
+          <p:cNvPr id="11" name="TextBox 10"/>
           <p:cNvSpPr txBox="1"/>
           <p:nvPr/>
         </p:nvSpPr>
@@ -19496,7 +19240,7 @@
       </p:sp>
       <p:sp>
         <p:nvSpPr>
-          <p:cNvPr id="13" name="TextBox 12"/>
+          <p:cNvPr id="12" name="TextBox 11"/>
           <p:cNvSpPr txBox="1"/>
           <p:nvPr/>
         </p:nvSpPr>
@@ -19538,7 +19282,7 @@
       </p:sp>
       <p:sp>
         <p:nvSpPr>
-          <p:cNvPr id="14" name="TextBox 13"/>
+          <p:cNvPr id="13" name="TextBox 12"/>
           <p:cNvSpPr txBox="1"/>
           <p:nvPr/>
         </p:nvSpPr>
@@ -19654,7 +19398,7 @@
         <p:spPr>
           <a:xfrm>
             <a:off x="640080" y="329184"/>
-            <a:ext cx="5303520" cy="182880"/>
+            <a:ext cx="9875520" cy="182880"/>
           </a:xfrm>
           <a:prstGeom prst="rect">
             <a:avLst/>
@@ -19695,48 +19439,6 @@
         </p:nvSpPr>
         <p:spPr>
           <a:xfrm>
-            <a:off x="5897880" y="310896"/>
-            <a:ext cx="4800600" cy="256032"/>
-          </a:xfrm>
-          <a:prstGeom prst="rect">
-            <a:avLst/>
-          </a:prstGeom>
-          <a:noFill/>
-        </p:spPr>
-        <p:txBody>
-          <a:bodyPr wrap="none" lIns="9144" rIns="9144" tIns="9144" bIns="9144" anchor="t">
-            <a:spAutoFit/>
-          </a:bodyPr>
-          <a:lstStyle/>
-          <a:p>
-            <a:pPr algn="r">
-              <a:spcAft>
-                <a:spcPts val="0"/>
-              </a:spcAft>
-              <a:defRPr sz="680" b="1">
-                <a:solidFill>
-                  <a:srgbClr val="4F6B00"/>
-                </a:solidFill>
-                <a:latin typeface="Inter"/>
-              </a:defRPr>
-            </a:pPr>
-            <a:r>
-              <a:rPr>
-                <a:latin typeface="Inter"/>
-              </a:rPr>
-              <a:t>Illustrative, Gradient Maintained — demo data, not the client's holdings or managers</a:t>
-            </a:r>
-          </a:p>
-        </p:txBody>
-      </p:sp>
-      <p:sp>
-        <p:nvSpPr>
-          <p:cNvPr id="5" name="TextBox 4"/>
-          <p:cNvSpPr txBox="1"/>
-          <p:nvPr/>
-        </p:nvSpPr>
-        <p:spPr>
-          <a:xfrm>
             <a:off x="640080" y="566928"/>
             <a:ext cx="10058400" cy="530352"/>
           </a:xfrm>
@@ -19773,7 +19475,7 @@
       </p:sp>
       <p:sp>
         <p:nvSpPr>
-          <p:cNvPr id="6" name="Rectangle 5"/>
+          <p:cNvPr id="5" name="Rectangle 4"/>
           <p:cNvSpPr/>
           <p:nvPr/>
         </p:nvSpPr>
@@ -19822,7 +19524,7 @@
       </p:sp>
       <p:sp>
         <p:nvSpPr>
-          <p:cNvPr id="7" name="Rectangle 6"/>
+          <p:cNvPr id="6" name="Rectangle 5"/>
           <p:cNvSpPr/>
           <p:nvPr/>
         </p:nvSpPr>
@@ -19871,7 +19573,7 @@
       </p:sp>
       <p:sp>
         <p:nvSpPr>
-          <p:cNvPr id="8" name="TextBox 7"/>
+          <p:cNvPr id="7" name="TextBox 6"/>
           <p:cNvSpPr txBox="1"/>
           <p:nvPr/>
         </p:nvSpPr>
@@ -19913,7 +19615,7 @@
       </p:sp>
       <p:sp>
         <p:nvSpPr>
-          <p:cNvPr id="9" name="TextBox 8"/>
+          <p:cNvPr id="8" name="TextBox 7"/>
           <p:cNvSpPr txBox="1"/>
           <p:nvPr/>
         </p:nvSpPr>
@@ -19955,7 +19657,7 @@
       </p:sp>
       <p:graphicFrame>
         <p:nvGraphicFramePr>
-          <p:cNvPr id="10" name="Chart 9"/>
+          <p:cNvPr id="9" name="Chart 8"/>
           <p:cNvGraphicFramePr>
             <a:graphicFrameLocks noGrp="1"/>
           </p:cNvGraphicFramePr>
@@ -19973,7 +19675,7 @@
       </p:graphicFrame>
       <p:sp>
         <p:nvSpPr>
-          <p:cNvPr id="11" name="Rectangle 10"/>
+          <p:cNvPr id="10" name="Rectangle 9"/>
           <p:cNvSpPr/>
           <p:nvPr/>
         </p:nvSpPr>
@@ -20022,7 +19724,7 @@
       </p:sp>
       <p:sp>
         <p:nvSpPr>
-          <p:cNvPr id="12" name="TextBox 11"/>
+          <p:cNvPr id="11" name="TextBox 10"/>
           <p:cNvSpPr txBox="1"/>
           <p:nvPr/>
         </p:nvSpPr>
@@ -20064,7 +19766,7 @@
       </p:sp>
       <p:sp>
         <p:nvSpPr>
-          <p:cNvPr id="13" name="TextBox 12"/>
+          <p:cNvPr id="12" name="TextBox 11"/>
           <p:cNvSpPr txBox="1"/>
           <p:nvPr/>
         </p:nvSpPr>
@@ -20106,7 +19808,7 @@
       </p:sp>
       <p:sp>
         <p:nvSpPr>
-          <p:cNvPr id="14" name="TextBox 13"/>
+          <p:cNvPr id="13" name="TextBox 12"/>
           <p:cNvSpPr txBox="1"/>
           <p:nvPr/>
         </p:nvSpPr>
@@ -20222,7 +19924,7 @@
         <p:spPr>
           <a:xfrm>
             <a:off x="640080" y="329184"/>
-            <a:ext cx="5303520" cy="182880"/>
+            <a:ext cx="9875520" cy="182880"/>
           </a:xfrm>
           <a:prstGeom prst="rect">
             <a:avLst/>
@@ -20263,48 +19965,6 @@
         </p:nvSpPr>
         <p:spPr>
           <a:xfrm>
-            <a:off x="5897880" y="310896"/>
-            <a:ext cx="4800600" cy="256032"/>
-          </a:xfrm>
-          <a:prstGeom prst="rect">
-            <a:avLst/>
-          </a:prstGeom>
-          <a:noFill/>
-        </p:spPr>
-        <p:txBody>
-          <a:bodyPr wrap="none" lIns="9144" rIns="9144" tIns="9144" bIns="9144" anchor="t">
-            <a:spAutoFit/>
-          </a:bodyPr>
-          <a:lstStyle/>
-          <a:p>
-            <a:pPr algn="r">
-              <a:spcAft>
-                <a:spcPts val="0"/>
-              </a:spcAft>
-              <a:defRPr sz="680" b="1">
-                <a:solidFill>
-                  <a:srgbClr val="4F6B00"/>
-                </a:solidFill>
-                <a:latin typeface="Inter"/>
-              </a:defRPr>
-            </a:pPr>
-            <a:r>
-              <a:rPr>
-                <a:latin typeface="Inter"/>
-              </a:rPr>
-              <a:t>Illustrative, Gradient Maintained — demo data, not the client's holdings or managers</a:t>
-            </a:r>
-          </a:p>
-        </p:txBody>
-      </p:sp>
-      <p:sp>
-        <p:nvSpPr>
-          <p:cNvPr id="5" name="TextBox 4"/>
-          <p:cNvSpPr txBox="1"/>
-          <p:nvPr/>
-        </p:nvSpPr>
-        <p:spPr>
-          <a:xfrm>
             <a:off x="640080" y="566928"/>
             <a:ext cx="10058400" cy="530352"/>
           </a:xfrm>
@@ -20341,7 +20001,7 @@
       </p:sp>
       <p:sp>
         <p:nvSpPr>
-          <p:cNvPr id="6" name="Rectangle 5"/>
+          <p:cNvPr id="5" name="Rectangle 4"/>
           <p:cNvSpPr/>
           <p:nvPr/>
         </p:nvSpPr>
@@ -20390,7 +20050,7 @@
       </p:sp>
       <p:sp>
         <p:nvSpPr>
-          <p:cNvPr id="7" name="Rectangle 6"/>
+          <p:cNvPr id="6" name="Rectangle 5"/>
           <p:cNvSpPr/>
           <p:nvPr/>
         </p:nvSpPr>
@@ -20439,7 +20099,7 @@
       </p:sp>
       <p:sp>
         <p:nvSpPr>
-          <p:cNvPr id="8" name="TextBox 7"/>
+          <p:cNvPr id="7" name="TextBox 6"/>
           <p:cNvSpPr txBox="1"/>
           <p:nvPr/>
         </p:nvSpPr>
@@ -20481,7 +20141,7 @@
       </p:sp>
       <p:sp>
         <p:nvSpPr>
-          <p:cNvPr id="9" name="TextBox 8"/>
+          <p:cNvPr id="8" name="TextBox 7"/>
           <p:cNvSpPr txBox="1"/>
           <p:nvPr/>
         </p:nvSpPr>
@@ -20523,7 +20183,7 @@
       </p:sp>
       <p:graphicFrame>
         <p:nvGraphicFramePr>
-          <p:cNvPr id="10" name="Chart 9"/>
+          <p:cNvPr id="9" name="Chart 8"/>
           <p:cNvGraphicFramePr>
             <a:graphicFrameLocks noGrp="1"/>
           </p:cNvGraphicFramePr>
@@ -20541,7 +20201,7 @@
       </p:graphicFrame>
       <p:sp>
         <p:nvSpPr>
-          <p:cNvPr id="11" name="Rectangle 10"/>
+          <p:cNvPr id="10" name="Rectangle 9"/>
           <p:cNvSpPr/>
           <p:nvPr/>
         </p:nvSpPr>
@@ -20590,7 +20250,7 @@
       </p:sp>
       <p:sp>
         <p:nvSpPr>
-          <p:cNvPr id="12" name="TextBox 11"/>
+          <p:cNvPr id="11" name="TextBox 10"/>
           <p:cNvSpPr txBox="1"/>
           <p:nvPr/>
         </p:nvSpPr>
@@ -20632,7 +20292,7 @@
       </p:sp>
       <p:sp>
         <p:nvSpPr>
-          <p:cNvPr id="13" name="TextBox 12"/>
+          <p:cNvPr id="12" name="TextBox 11"/>
           <p:cNvSpPr txBox="1"/>
           <p:nvPr/>
         </p:nvSpPr>
@@ -20674,7 +20334,7 @@
       </p:sp>
       <p:sp>
         <p:nvSpPr>
-          <p:cNvPr id="14" name="TextBox 13"/>
+          <p:cNvPr id="13" name="TextBox 12"/>
           <p:cNvSpPr txBox="1"/>
           <p:nvPr/>
         </p:nvSpPr>
@@ -20790,7 +20450,7 @@
         <p:spPr>
           <a:xfrm>
             <a:off x="640080" y="329184"/>
-            <a:ext cx="5303520" cy="182880"/>
+            <a:ext cx="9875520" cy="182880"/>
           </a:xfrm>
           <a:prstGeom prst="rect">
             <a:avLst/>
@@ -20831,48 +20491,6 @@
         </p:nvSpPr>
         <p:spPr>
           <a:xfrm>
-            <a:off x="5897880" y="310896"/>
-            <a:ext cx="4800600" cy="256032"/>
-          </a:xfrm>
-          <a:prstGeom prst="rect">
-            <a:avLst/>
-          </a:prstGeom>
-          <a:noFill/>
-        </p:spPr>
-        <p:txBody>
-          <a:bodyPr wrap="none" lIns="9144" rIns="9144" tIns="9144" bIns="9144" anchor="t">
-            <a:spAutoFit/>
-          </a:bodyPr>
-          <a:lstStyle/>
-          <a:p>
-            <a:pPr algn="r">
-              <a:spcAft>
-                <a:spcPts val="0"/>
-              </a:spcAft>
-              <a:defRPr sz="680" b="1">
-                <a:solidFill>
-                  <a:srgbClr val="4F6B00"/>
-                </a:solidFill>
-                <a:latin typeface="Inter"/>
-              </a:defRPr>
-            </a:pPr>
-            <a:r>
-              <a:rPr>
-                <a:latin typeface="Inter"/>
-              </a:rPr>
-              <a:t>Illustrative, Gradient Maintained — demo data, not the client's holdings or managers</a:t>
-            </a:r>
-          </a:p>
-        </p:txBody>
-      </p:sp>
-      <p:sp>
-        <p:nvSpPr>
-          <p:cNvPr id="5" name="TextBox 4"/>
-          <p:cNvSpPr txBox="1"/>
-          <p:nvPr/>
-        </p:nvSpPr>
-        <p:spPr>
-          <a:xfrm>
             <a:off x="640080" y="566928"/>
             <a:ext cx="10058400" cy="530352"/>
           </a:xfrm>
@@ -20909,7 +20527,7 @@
       </p:sp>
       <p:sp>
         <p:nvSpPr>
-          <p:cNvPr id="6" name="Rectangle 5"/>
+          <p:cNvPr id="5" name="Rectangle 4"/>
           <p:cNvSpPr/>
           <p:nvPr/>
         </p:nvSpPr>
@@ -20958,7 +20576,7 @@
       </p:sp>
       <p:sp>
         <p:nvSpPr>
-          <p:cNvPr id="7" name="Rectangle 6"/>
+          <p:cNvPr id="6" name="Rectangle 5"/>
           <p:cNvSpPr/>
           <p:nvPr/>
         </p:nvSpPr>
@@ -21007,7 +20625,7 @@
       </p:sp>
       <p:sp>
         <p:nvSpPr>
-          <p:cNvPr id="8" name="TextBox 7"/>
+          <p:cNvPr id="7" name="TextBox 6"/>
           <p:cNvSpPr txBox="1"/>
           <p:nvPr/>
         </p:nvSpPr>
@@ -21049,7 +20667,7 @@
       </p:sp>
       <p:sp>
         <p:nvSpPr>
-          <p:cNvPr id="9" name="TextBox 8"/>
+          <p:cNvPr id="8" name="TextBox 7"/>
           <p:cNvSpPr txBox="1"/>
           <p:nvPr/>
         </p:nvSpPr>
@@ -21091,7 +20709,7 @@
       </p:sp>
       <p:graphicFrame>
         <p:nvGraphicFramePr>
-          <p:cNvPr id="10" name="Chart 9"/>
+          <p:cNvPr id="9" name="Chart 8"/>
           <p:cNvGraphicFramePr>
             <a:graphicFrameLocks noGrp="1"/>
           </p:cNvGraphicFramePr>
@@ -21109,7 +20727,7 @@
       </p:graphicFrame>
       <p:sp>
         <p:nvSpPr>
-          <p:cNvPr id="11" name="Rectangle 10"/>
+          <p:cNvPr id="10" name="Rectangle 9"/>
           <p:cNvSpPr/>
           <p:nvPr/>
         </p:nvSpPr>
@@ -21158,7 +20776,7 @@
       </p:sp>
       <p:sp>
         <p:nvSpPr>
-          <p:cNvPr id="12" name="TextBox 11"/>
+          <p:cNvPr id="11" name="TextBox 10"/>
           <p:cNvSpPr txBox="1"/>
           <p:nvPr/>
         </p:nvSpPr>
@@ -21200,7 +20818,7 @@
       </p:sp>
       <p:sp>
         <p:nvSpPr>
-          <p:cNvPr id="13" name="TextBox 12"/>
+          <p:cNvPr id="12" name="TextBox 11"/>
           <p:cNvSpPr txBox="1"/>
           <p:nvPr/>
         </p:nvSpPr>
@@ -21242,7 +20860,7 @@
       </p:sp>
       <p:sp>
         <p:nvSpPr>
-          <p:cNvPr id="14" name="TextBox 13"/>
+          <p:cNvPr id="13" name="TextBox 12"/>
           <p:cNvSpPr txBox="1"/>
           <p:nvPr/>
         </p:nvSpPr>

--- a/plugins/gradient-cio/assets/examples/gradient-idd-private-markets-pme.pptx
+++ b/plugins/gradient-cio/assets/examples/gradient-idd-private-markets-pme.pptx
@@ -19,11 +19,6 @@
     <ns0:sldId id="267" ns1:id="rId18"/>
     <ns0:sldId id="268" ns1:id="rId19"/>
     <ns0:sldId id="269" ns1:id="rId20"/>
-    <ns0:sldId id="270" ns1:id="rId21"/>
-    <ns0:sldId id="271" ns1:id="rId22"/>
-    <ns0:sldId id="272" ns1:id="rId23"/>
-    <ns0:sldId id="273" ns1:id="rId24"/>
-    <ns0:sldId id="274" ns1:id="rId25"/>
   </ns0:sldIdLst>
   <ns0:sldSz cx="12191695" cy="6858000" type="screen16x9"/>
   <ns0:notesSz cx="6858000" cy="9144000"/>
@@ -1221,7 +1216,10 @@
       </c:catAx>
       <c:valAx>
         <c:axId val="2140495176"/>
-        <c:scaling/>
+        <c:scaling>
+          <c:max val="50.0"/>
+          <c:min val="-100.0"/>
+        </c:scaling>
         <c:delete val="0"/>
         <c:axPos val="l"/>
         <c:majorGridlines/>
@@ -1240,6 +1238,7 @@
         </c:txPr>
         <c:crossAx val="2118791784"/>
         <c:crosses val="autoZero"/>
+        <c:majorUnit val="50.0"/>
       </c:valAx>
     </c:plotArea>
     <c:plotVisOnly val="1"/>
@@ -1380,7 +1379,10 @@
       </c:catAx>
       <c:valAx>
         <c:axId val="2140495176"/>
-        <c:scaling/>
+        <c:scaling>
+          <c:max val="1.1"/>
+          <c:min val="0.7000000000000001"/>
+        </c:scaling>
         <c:delete val="0"/>
         <c:axPos val="l"/>
         <c:majorGridlines/>
@@ -1399,6 +1401,7 @@
         </c:txPr>
         <c:crossAx val="2118791784"/>
         <c:crosses val="autoZero"/>
+        <c:majorUnit val="0.1"/>
       </c:valAx>
     </c:plotArea>
     <c:plotVisOnly val="1"/>
@@ -1907,7 +1910,10 @@
       </c:catAx>
       <c:valAx>
         <c:axId val="2140495176"/>
-        <c:scaling/>
+        <c:scaling>
+          <c:max val="1.5"/>
+          <c:min val="0.0"/>
+        </c:scaling>
         <c:delete val="0"/>
         <c:axPos val="l"/>
         <c:majorGridlines/>
@@ -1926,6 +1932,7 @@
         </c:txPr>
         <c:crossAx val="2118791784"/>
         <c:crosses val="autoZero"/>
+        <c:majorUnit val="0.5"/>
       </c:valAx>
     </c:plotArea>
     <c:legend>
@@ -2080,7 +2087,10 @@
       </c:catAx>
       <c:valAx>
         <c:axId val="2140495176"/>
-        <c:scaling/>
+        <c:scaling>
+          <c:max val="20.0"/>
+          <c:min val="-30.0"/>
+        </c:scaling>
         <c:delete val="0"/>
         <c:axPos val="l"/>
         <c:majorGridlines/>
@@ -2099,6 +2109,7 @@
         </c:txPr>
         <c:crossAx val="2118791784"/>
         <c:crosses val="autoZero"/>
+        <c:majorUnit val="10.0"/>
       </c:valAx>
     </c:plotArea>
     <c:plotVisOnly val="1"/>
@@ -6179,7 +6190,7 @@
               <a:rPr>
                 <a:latin typeface="Inter"/>
               </a:rPr>
-              <a:t>CASH-FLOW AND PUBLIC-MARKET PATHS BOTH FINISH ABOVE PARITY</a:t>
+              <a:t>BOTH SEPARATELY BUILT PATHS REMAIN ABOVE PARITY</a:t>
             </a:r>
           </a:p>
         </p:txBody>
@@ -6263,7 +6274,7 @@
               <a:rPr>
                 <a:latin typeface="Inter"/>
               </a:rPr>
-              <a:t>PME and direct alpha — continued</a:t>
+              <a:t>Benchmark sensitivity</a:t>
             </a:r>
           </a:p>
         </p:txBody>
@@ -6403,119 +6414,21 @@
               <a:rPr>
                 <a:latin typeface="Inter"/>
               </a:rPr>
-              <a:t>3</a:t>
-            </a:r>
-          </a:p>
-        </p:txBody>
-      </p:sp>
-      <p:sp>
-        <p:nvSpPr>
-          <p:cNvPr id="9" name="Rectangle 8"/>
-          <p:cNvSpPr/>
+              <a:t>5</a:t>
+            </a:r>
+          </a:p>
+        </p:txBody>
+      </p:sp>
+      <p:sp>
+        <p:nvSpPr>
+          <p:cNvPr id="9" name="TextBox 8"/>
+          <p:cNvSpPr txBox="1"/>
           <p:nvPr/>
         </p:nvSpPr>
         <p:spPr>
           <a:xfrm>
             <a:off x="640080" y="1325880"/>
-            <a:ext cx="10908792" cy="4892040"/>
-          </a:xfrm>
-          <a:prstGeom prst="rect">
-            <a:avLst/>
-          </a:prstGeom>
-          <a:solidFill>
-            <a:srgbClr val="F5F7F9"/>
-          </a:solidFill>
-          <a:ln>
-            <a:solidFill>
-              <a:srgbClr val="E3E7EC"/>
-            </a:solidFill>
-          </a:ln>
-        </p:spPr>
-        <p:style>
-          <a:lnRef idx="1">
-            <a:schemeClr val="accent1"/>
-          </a:lnRef>
-          <a:fillRef idx="3">
-            <a:schemeClr val="accent1"/>
-          </a:fillRef>
-          <a:effectRef idx="2">
-            <a:schemeClr val="accent1"/>
-          </a:effectRef>
-          <a:fontRef idx="minor">
-            <a:schemeClr val="lt1"/>
-          </a:fontRef>
-        </p:style>
-        <p:txBody>
-          <a:bodyPr rtlCol="0" anchor="ctr"/>
-          <a:lstStyle/>
-          <a:p>
-            <a:pPr algn="ctr">
-              <a:defRPr>
-                <a:latin typeface="Inter"/>
-              </a:defRPr>
-            </a:pPr>
-          </a:p>
-        </p:txBody>
-      </p:sp>
-      <p:sp>
-        <p:nvSpPr>
-          <p:cNvPr id="10" name="Rectangle 9"/>
-          <p:cNvSpPr/>
-          <p:nvPr/>
-        </p:nvSpPr>
-        <p:spPr>
-          <a:xfrm>
-            <a:off x="640080" y="1325880"/>
-            <a:ext cx="54864" cy="4892040"/>
-          </a:xfrm>
-          <a:prstGeom prst="rect">
-            <a:avLst/>
-          </a:prstGeom>
-          <a:solidFill>
-            <a:srgbClr val="0D1117"/>
-          </a:solidFill>
-          <a:ln>
-            <a:solidFill>
-              <a:srgbClr val="0D1117"/>
-            </a:solidFill>
-          </a:ln>
-        </p:spPr>
-        <p:style>
-          <a:lnRef idx="1">
-            <a:schemeClr val="accent1"/>
-          </a:lnRef>
-          <a:fillRef idx="3">
-            <a:schemeClr val="accent1"/>
-          </a:fillRef>
-          <a:effectRef idx="2">
-            <a:schemeClr val="accent1"/>
-          </a:effectRef>
-          <a:fontRef idx="minor">
-            <a:schemeClr val="lt1"/>
-          </a:fontRef>
-        </p:style>
-        <p:txBody>
-          <a:bodyPr rtlCol="0" anchor="ctr"/>
-          <a:lstStyle/>
-          <a:p>
-            <a:pPr algn="ctr">
-              <a:defRPr>
-                <a:latin typeface="Inter"/>
-              </a:defRPr>
-            </a:pPr>
-          </a:p>
-        </p:txBody>
-      </p:sp>
-      <p:sp>
-        <p:nvSpPr>
-          <p:cNvPr id="11" name="TextBox 10"/>
-          <p:cNvSpPr txBox="1"/>
-          <p:nvPr/>
-        </p:nvSpPr>
-        <p:spPr>
-          <a:xfrm>
-            <a:off x="804671" y="1435607"/>
-            <a:ext cx="10616184" cy="228600"/>
+            <a:ext cx="10908792" cy="201168"/>
           </a:xfrm>
           <a:prstGeom prst="rect">
             <a:avLst/>
@@ -6532,49 +6445,7 @@
               <a:spcAft>
                 <a:spcPts val="0"/>
               </a:spcAft>
-              <a:defRPr sz="1000" b="1">
-                <a:solidFill>
-                  <a:srgbClr val="0D1117"/>
-                </a:solidFill>
-                <a:latin typeface="Inter"/>
-              </a:defRPr>
-            </a:pPr>
-            <a:r>
-              <a:rPr>
-                <a:latin typeface="Inter"/>
-              </a:rPr>
-              <a:t>Analysis — Primary PME result</a:t>
-            </a:r>
-          </a:p>
-        </p:txBody>
-      </p:sp>
-      <p:sp>
-        <p:nvSpPr>
-          <p:cNvPr id="12" name="TextBox 11"/>
-          <p:cNvSpPr txBox="1"/>
-          <p:nvPr/>
-        </p:nvSpPr>
-        <p:spPr>
-          <a:xfrm>
-            <a:off x="804671" y="1719072"/>
-            <a:ext cx="10616184" cy="4407408"/>
-          </a:xfrm>
-          <a:prstGeom prst="rect">
-            <a:avLst/>
-          </a:prstGeom>
-          <a:noFill/>
-        </p:spPr>
-        <p:txBody>
-          <a:bodyPr wrap="none" lIns="9144" rIns="9144" tIns="9144" bIns="9144" anchor="t">
-            <a:spAutoFit/>
-          </a:bodyPr>
-          <a:lstStyle/>
-          <a:p>
-            <a:pPr algn="l">
-              <a:spcAft>
-                <a:spcPts val="0"/>
-              </a:spcAft>
-              <a:defRPr sz="950" b="0">
+              <a:defRPr sz="720" b="1">
                 <a:solidFill>
                   <a:srgbClr val="4A5563"/>
                 </a:solidFill>
@@ -6585,14 +6456,32 @@
               <a:rPr>
                 <a:latin typeface="Inter"/>
               </a:rPr>
-              <a:t>Observation: KS-PME ended at 1.08x and direct alpha at +1.9% [S6]. Why it matters: Both returned relative measures are positive. Uncertainty: Persistence evidence is limited because PME stayed…</a:t>
-            </a:r>
-          </a:p>
-        </p:txBody>
-      </p:sp>
-      <p:sp>
-        <p:nvSpPr>
-          <p:cNvPr id="13" name="Rectangle 12"/>
+              <a:t>KS-PME BY BENCHMARK PATH</a:t>
+            </a:r>
+          </a:p>
+        </p:txBody>
+      </p:sp>
+      <p:graphicFrame>
+        <p:nvGraphicFramePr>
+          <p:cNvPr id="10" name="Chart 9"/>
+          <p:cNvGraphicFramePr>
+            <a:graphicFrameLocks noGrp="1"/>
+          </p:cNvGraphicFramePr>
+          <p:nvPr/>
+        </p:nvGraphicFramePr>
+        <p:xfrm>
+          <a:off x="640080" y="1600200"/>
+          <a:ext cx="10908792" cy="4617720"/>
+        </p:xfrm>
+        <a:graphic>
+          <a:graphicData uri="http://schemas.openxmlformats.org/drawingml/2006/chart">
+            <c:chart xmlns:c="http://schemas.openxmlformats.org/drawingml/2006/chart" r:id="rId2"/>
+          </a:graphicData>
+        </a:graphic>
+      </p:graphicFrame>
+      <p:sp>
+        <p:nvSpPr>
+          <p:cNvPr id="11" name="Rectangle 10"/>
           <p:cNvSpPr/>
           <p:nvPr/>
         </p:nvSpPr>
@@ -6641,7 +6530,7 @@
       </p:sp>
       <p:sp>
         <p:nvSpPr>
-          <p:cNvPr id="14" name="TextBox 13"/>
+          <p:cNvPr id="12" name="TextBox 11"/>
           <p:cNvSpPr txBox="1"/>
           <p:nvPr/>
         </p:nvSpPr>
@@ -6676,14 +6565,14 @@
               <a:rPr>
                 <a:latin typeface="Inter"/>
               </a:rPr>
-              <a:t>Sources: S6</a:t>
-            </a:r>
-          </a:p>
-        </p:txBody>
-      </p:sp>
-      <p:sp>
-        <p:nvSpPr>
-          <p:cNvPr id="15" name="TextBox 14"/>
+              <a:t>Sources: S6 · S7</a:t>
+            </a:r>
+          </a:p>
+        </p:txBody>
+      </p:sp>
+      <p:sp>
+        <p:nvSpPr>
+          <p:cNvPr id="13" name="TextBox 12"/>
           <p:cNvSpPr txBox="1"/>
           <p:nvPr/>
         </p:nvSpPr>
@@ -6725,7 +6614,7 @@
       </p:sp>
       <p:sp>
         <p:nvSpPr>
-          <p:cNvPr id="16" name="TextBox 15"/>
+          <p:cNvPr id="14" name="TextBox 13"/>
           <p:cNvSpPr txBox="1"/>
           <p:nvPr/>
         </p:nvSpPr>
@@ -6869,7 +6758,7 @@
               <a:rPr>
                 <a:latin typeface="Inter"/>
               </a:rPr>
-              <a:t>TVPI CROSSED 1.0X BEFORE NET IRR REACHED 12.6%</a:t>
+              <a:t>BOTH SEPARATELY BUILT PATHS REMAIN ABOVE PARITY</a:t>
             </a:r>
           </a:p>
         </p:txBody>
@@ -6953,7 +6842,7 @@
               <a:rPr>
                 <a:latin typeface="Inter"/>
               </a:rPr>
-              <a:t>IRR and multiple context</a:t>
+              <a:t>Benchmark sensitivity — continued</a:t>
             </a:r>
           </a:p>
         </p:txBody>
@@ -7093,7 +6982,7 @@
               <a:rPr>
                 <a:latin typeface="Inter"/>
               </a:rPr>
-              <a:t>4</a:t>
+              <a:t>5</a:t>
             </a:r>
           </a:p>
         </p:txBody>
@@ -7135,2968 +7024,6 @@
               <a:rPr>
                 <a:latin typeface="Inter"/>
               </a:rPr>
-              <a:t>FUND MULTIPLES PATH · TVPI, DPI AND RVPI [S6]</a:t>
-            </a:r>
-          </a:p>
-        </p:txBody>
-      </p:sp>
-      <p:graphicFrame>
-        <p:nvGraphicFramePr>
-          <p:cNvPr id="10" name="Chart 9"/>
-          <p:cNvGraphicFramePr>
-            <a:graphicFrameLocks noGrp="1"/>
-          </p:cNvGraphicFramePr>
-          <p:nvPr/>
-        </p:nvGraphicFramePr>
-        <p:xfrm>
-          <a:off x="640080" y="1600200"/>
-          <a:ext cx="10908792" cy="4617720"/>
-        </p:xfrm>
-        <a:graphic>
-          <a:graphicData uri="http://schemas.openxmlformats.org/drawingml/2006/chart">
-            <c:chart xmlns:c="http://schemas.openxmlformats.org/drawingml/2006/chart" r:id="rId2"/>
-          </a:graphicData>
-        </a:graphic>
-      </p:graphicFrame>
-      <p:sp>
-        <p:nvSpPr>
-          <p:cNvPr id="11" name="Rectangle 10"/>
-          <p:cNvSpPr/>
-          <p:nvPr/>
-        </p:nvSpPr>
-        <p:spPr>
-          <a:xfrm>
-            <a:off x="640080" y="6446520"/>
-            <a:ext cx="10908792" cy="9144"/>
-          </a:xfrm>
-          <a:prstGeom prst="rect">
-            <a:avLst/>
-          </a:prstGeom>
-          <a:solidFill>
-            <a:srgbClr val="E3E7EC"/>
-          </a:solidFill>
-          <a:ln>
-            <a:solidFill>
-              <a:srgbClr val="E3E7EC"/>
-            </a:solidFill>
-          </a:ln>
-        </p:spPr>
-        <p:style>
-          <a:lnRef idx="1">
-            <a:schemeClr val="accent1"/>
-          </a:lnRef>
-          <a:fillRef idx="3">
-            <a:schemeClr val="accent1"/>
-          </a:fillRef>
-          <a:effectRef idx="2">
-            <a:schemeClr val="accent1"/>
-          </a:effectRef>
-          <a:fontRef idx="minor">
-            <a:schemeClr val="lt1"/>
-          </a:fontRef>
-        </p:style>
-        <p:txBody>
-          <a:bodyPr rtlCol="0" anchor="ctr"/>
-          <a:lstStyle/>
-          <a:p>
-            <a:pPr algn="ctr">
-              <a:defRPr>
-                <a:latin typeface="Inter"/>
-              </a:defRPr>
-            </a:pPr>
-          </a:p>
-        </p:txBody>
-      </p:sp>
-      <p:sp>
-        <p:nvSpPr>
-          <p:cNvPr id="12" name="TextBox 11"/>
-          <p:cNvSpPr txBox="1"/>
-          <p:nvPr/>
-        </p:nvSpPr>
-        <p:spPr>
-          <a:xfrm>
-            <a:off x="640080" y="6501384"/>
-            <a:ext cx="4297680" cy="146304"/>
-          </a:xfrm>
-          <a:prstGeom prst="rect">
-            <a:avLst/>
-          </a:prstGeom>
-          <a:noFill/>
-        </p:spPr>
-        <p:txBody>
-          <a:bodyPr wrap="none" lIns="9144" rIns="9144" tIns="9144" bIns="9144" anchor="t">
-            <a:spAutoFit/>
-          </a:bodyPr>
-          <a:lstStyle/>
-          <a:p>
-            <a:pPr algn="l">
-              <a:spcAft>
-                <a:spcPts val="0"/>
-              </a:spcAft>
-              <a:defRPr sz="650" b="0">
-                <a:solidFill>
-                  <a:srgbClr val="8A94A1"/>
-                </a:solidFill>
-                <a:latin typeface="Inter"/>
-              </a:defRPr>
-            </a:pPr>
-            <a:r>
-              <a:rPr>
-                <a:latin typeface="Inter"/>
-              </a:rPr>
-              <a:t>Sources: S6</a:t>
-            </a:r>
-          </a:p>
-        </p:txBody>
-      </p:sp>
-      <p:sp>
-        <p:nvSpPr>
-          <p:cNvPr id="13" name="TextBox 12"/>
-          <p:cNvSpPr txBox="1"/>
-          <p:nvPr/>
-        </p:nvSpPr>
-        <p:spPr>
-          <a:xfrm>
-            <a:off x="4480560" y="6501384"/>
-            <a:ext cx="5303520" cy="146304"/>
-          </a:xfrm>
-          <a:prstGeom prst="rect">
-            <a:avLst/>
-          </a:prstGeom>
-          <a:noFill/>
-        </p:spPr>
-        <p:txBody>
-          <a:bodyPr wrap="none" lIns="9144" rIns="9144" tIns="9144" bIns="9144" anchor="t">
-            <a:spAutoFit/>
-          </a:bodyPr>
-          <a:lstStyle/>
-          <a:p>
-            <a:pPr algn="ctr">
-              <a:spcAft>
-                <a:spcPts val="0"/>
-              </a:spcAft>
-              <a:defRPr sz="650" b="0">
-                <a:solidFill>
-                  <a:srgbClr val="8A94A1"/>
-                </a:solidFill>
-                <a:latin typeface="Inter"/>
-              </a:defRPr>
-            </a:pPr>
-            <a:r>
-              <a:rPr>
-                <a:latin typeface="Inter"/>
-              </a:rPr>
-              <a:t>Confidential — private markets review · Data as of 2025-12-31</a:t>
-            </a:r>
-          </a:p>
-        </p:txBody>
-      </p:sp>
-      <p:sp>
-        <p:nvSpPr>
-          <p:cNvPr id="14" name="TextBox 13"/>
-          <p:cNvSpPr txBox="1"/>
-          <p:nvPr/>
-        </p:nvSpPr>
-        <p:spPr>
-          <a:xfrm>
-            <a:off x="10287000" y="6501384"/>
-            <a:ext cx="1261872" cy="146304"/>
-          </a:xfrm>
-          <a:prstGeom prst="rect">
-            <a:avLst/>
-          </a:prstGeom>
-          <a:noFill/>
-        </p:spPr>
-        <p:txBody>
-          <a:bodyPr wrap="none" lIns="9144" rIns="9144" tIns="9144" bIns="9144" anchor="t">
-            <a:spAutoFit/>
-          </a:bodyPr>
-          <a:lstStyle/>
-          <a:p>
-            <a:pPr algn="r">
-              <a:spcAft>
-                <a:spcPts val="0"/>
-              </a:spcAft>
-              <a:defRPr sz="650" b="0">
-                <a:solidFill>
-                  <a:srgbClr val="8A94A1"/>
-                </a:solidFill>
-                <a:latin typeface="Inter"/>
-              </a:defRPr>
-            </a:pPr>
-            <a:r>
-              <a:rPr>
-                <a:latin typeface="Inter"/>
-              </a:rPr>
-              <a:t>11</a:t>
-            </a:r>
-          </a:p>
-        </p:txBody>
-      </p:sp>
-    </p:spTree>
-  </p:cSld>
-  <p:clrMapOvr>
-    <a:masterClrMapping/>
-  </p:clrMapOvr>
-</p:sld>
-</file>
-
-<file path=ppt/slides/slide12.xml><?xml version="1.0" encoding="utf-8"?>
-<p:sld xmlns:a="http://schemas.openxmlformats.org/drawingml/2006/main" xmlns:p="http://schemas.openxmlformats.org/presentationml/2006/main" xmlns:r="http://schemas.openxmlformats.org/officeDocument/2006/relationships">
-  <p:cSld>
-    <p:spTree>
-      <p:nvGrpSpPr>
-        <p:cNvPr id="1" name=""/>
-        <p:cNvGrpSpPr/>
-        <p:nvPr/>
-      </p:nvGrpSpPr>
-      <p:grpSpPr/>
-      <p:sp>
-        <p:nvSpPr>
-          <p:cNvPr id="2" name="Rectangle 1"/>
-          <p:cNvSpPr/>
-          <p:nvPr/>
-        </p:nvSpPr>
-        <p:spPr>
-          <a:xfrm>
-            <a:off x="0" y="0"/>
-            <a:ext cx="12191695" cy="6858000"/>
-          </a:xfrm>
-          <a:prstGeom prst="rect">
-            <a:avLst/>
-          </a:prstGeom>
-          <a:solidFill>
-            <a:srgbClr val="FFFFFF"/>
-          </a:solidFill>
-          <a:ln>
-            <a:solidFill>
-              <a:srgbClr val="FFFFFF"/>
-            </a:solidFill>
-          </a:ln>
-        </p:spPr>
-        <p:style>
-          <a:lnRef idx="1">
-            <a:schemeClr val="accent1"/>
-          </a:lnRef>
-          <a:fillRef idx="3">
-            <a:schemeClr val="accent1"/>
-          </a:fillRef>
-          <a:effectRef idx="2">
-            <a:schemeClr val="accent1"/>
-          </a:effectRef>
-          <a:fontRef idx="minor">
-            <a:schemeClr val="lt1"/>
-          </a:fontRef>
-        </p:style>
-        <p:txBody>
-          <a:bodyPr rtlCol="0" anchor="ctr"/>
-          <a:lstStyle/>
-          <a:p>
-            <a:pPr algn="ctr">
-              <a:defRPr>
-                <a:latin typeface="Inter"/>
-              </a:defRPr>
-            </a:pPr>
-          </a:p>
-        </p:txBody>
-      </p:sp>
-      <p:sp>
-        <p:nvSpPr>
-          <p:cNvPr id="3" name="TextBox 2"/>
-          <p:cNvSpPr txBox="1"/>
-          <p:nvPr/>
-        </p:nvSpPr>
-        <p:spPr>
-          <a:xfrm>
-            <a:off x="640080" y="329184"/>
-            <a:ext cx="5303520" cy="182880"/>
-          </a:xfrm>
-          <a:prstGeom prst="rect">
-            <a:avLst/>
-          </a:prstGeom>
-          <a:noFill/>
-        </p:spPr>
-        <p:txBody>
-          <a:bodyPr wrap="none" lIns="9144" rIns="9144" tIns="9144" bIns="9144" anchor="t">
-            <a:spAutoFit/>
-          </a:bodyPr>
-          <a:lstStyle/>
-          <a:p>
-            <a:pPr algn="l">
-              <a:spcAft>
-                <a:spcPts val="0"/>
-              </a:spcAft>
-              <a:defRPr sz="750" b="1">
-                <a:solidFill>
-                  <a:srgbClr val="4F6B00"/>
-                </a:solidFill>
-                <a:latin typeface="Inter"/>
-              </a:defRPr>
-            </a:pPr>
-            <a:r>
-              <a:rPr>
-                <a:latin typeface="Inter"/>
-              </a:rPr>
-              <a:t>TVPI CROSSED 1.0X BEFORE NET IRR REACHED 12.6%</a:t>
-            </a:r>
-          </a:p>
-        </p:txBody>
-      </p:sp>
-      <p:sp>
-        <p:nvSpPr>
-          <p:cNvPr id="4" name="TextBox 3"/>
-          <p:cNvSpPr txBox="1"/>
-          <p:nvPr/>
-        </p:nvSpPr>
-        <p:spPr>
-          <a:xfrm>
-            <a:off x="5897880" y="310896"/>
-            <a:ext cx="4800600" cy="256032"/>
-          </a:xfrm>
-          <a:prstGeom prst="rect">
-            <a:avLst/>
-          </a:prstGeom>
-          <a:noFill/>
-        </p:spPr>
-        <p:txBody>
-          <a:bodyPr wrap="none" lIns="9144" rIns="9144" tIns="9144" bIns="9144" anchor="t">
-            <a:spAutoFit/>
-          </a:bodyPr>
-          <a:lstStyle/>
-          <a:p>
-            <a:pPr algn="r">
-              <a:spcAft>
-                <a:spcPts val="0"/>
-              </a:spcAft>
-              <a:defRPr sz="680" b="1">
-                <a:solidFill>
-                  <a:srgbClr val="4F6B00"/>
-                </a:solidFill>
-                <a:latin typeface="Inter"/>
-              </a:defRPr>
-            </a:pPr>
-            <a:r>
-              <a:rPr>
-                <a:latin typeface="Inter"/>
-              </a:rPr>
-              <a:t>Illustrative, Gradient Maintained — demo data, not the client's holdings or managers</a:t>
-            </a:r>
-          </a:p>
-        </p:txBody>
-      </p:sp>
-      <p:sp>
-        <p:nvSpPr>
-          <p:cNvPr id="5" name="TextBox 4"/>
-          <p:cNvSpPr txBox="1"/>
-          <p:nvPr/>
-        </p:nvSpPr>
-        <p:spPr>
-          <a:xfrm>
-            <a:off x="640080" y="566928"/>
-            <a:ext cx="10058400" cy="530352"/>
-          </a:xfrm>
-          <a:prstGeom prst="rect">
-            <a:avLst/>
-          </a:prstGeom>
-          <a:noFill/>
-        </p:spPr>
-        <p:txBody>
-          <a:bodyPr wrap="none" lIns="9144" rIns="9144" tIns="9144" bIns="9144" anchor="t">
-            <a:spAutoFit/>
-          </a:bodyPr>
-          <a:lstStyle/>
-          <a:p>
-            <a:pPr algn="l">
-              <a:spcAft>
-                <a:spcPts val="0"/>
-              </a:spcAft>
-              <a:defRPr sz="2300" b="1">
-                <a:solidFill>
-                  <a:srgbClr val="0D1117"/>
-                </a:solidFill>
-                <a:latin typeface="Inter"/>
-              </a:defRPr>
-            </a:pPr>
-            <a:r>
-              <a:rPr>
-                <a:latin typeface="Inter"/>
-              </a:rPr>
-              <a:t>IRR and multiple context — continued</a:t>
-            </a:r>
-          </a:p>
-        </p:txBody>
-      </p:sp>
-      <p:sp>
-        <p:nvSpPr>
-          <p:cNvPr id="6" name="Rectangle 5"/>
-          <p:cNvSpPr/>
-          <p:nvPr/>
-        </p:nvSpPr>
-        <p:spPr>
-          <a:xfrm>
-            <a:off x="640080" y="1115568"/>
-            <a:ext cx="10908792" cy="18288"/>
-          </a:xfrm>
-          <a:prstGeom prst="rect">
-            <a:avLst/>
-          </a:prstGeom>
-          <a:solidFill>
-            <a:srgbClr val="0D1117"/>
-          </a:solidFill>
-          <a:ln>
-            <a:solidFill>
-              <a:srgbClr val="0D1117"/>
-            </a:solidFill>
-          </a:ln>
-        </p:spPr>
-        <p:style>
-          <a:lnRef idx="1">
-            <a:schemeClr val="accent1"/>
-          </a:lnRef>
-          <a:fillRef idx="3">
-            <a:schemeClr val="accent1"/>
-          </a:fillRef>
-          <a:effectRef idx="2">
-            <a:schemeClr val="accent1"/>
-          </a:effectRef>
-          <a:fontRef idx="minor">
-            <a:schemeClr val="lt1"/>
-          </a:fontRef>
-        </p:style>
-        <p:txBody>
-          <a:bodyPr rtlCol="0" anchor="ctr"/>
-          <a:lstStyle/>
-          <a:p>
-            <a:pPr algn="ctr">
-              <a:defRPr>
-                <a:latin typeface="Inter"/>
-              </a:defRPr>
-            </a:pPr>
-          </a:p>
-        </p:txBody>
-      </p:sp>
-      <p:sp>
-        <p:nvSpPr>
-          <p:cNvPr id="7" name="Rectangle 6"/>
-          <p:cNvSpPr/>
-          <p:nvPr/>
-        </p:nvSpPr>
-        <p:spPr>
-          <a:xfrm>
-            <a:off x="11018520" y="502920"/>
-            <a:ext cx="530352" cy="393192"/>
-          </a:xfrm>
-          <a:prstGeom prst="rect">
-            <a:avLst/>
-          </a:prstGeom>
-          <a:solidFill>
-            <a:srgbClr val="C6F432"/>
-          </a:solidFill>
-          <a:ln>
-            <a:solidFill>
-              <a:srgbClr val="C6F432"/>
-            </a:solidFill>
-          </a:ln>
-        </p:spPr>
-        <p:style>
-          <a:lnRef idx="1">
-            <a:schemeClr val="accent1"/>
-          </a:lnRef>
-          <a:fillRef idx="3">
-            <a:schemeClr val="accent1"/>
-          </a:fillRef>
-          <a:effectRef idx="2">
-            <a:schemeClr val="accent1"/>
-          </a:effectRef>
-          <a:fontRef idx="minor">
-            <a:schemeClr val="lt1"/>
-          </a:fontRef>
-        </p:style>
-        <p:txBody>
-          <a:bodyPr rtlCol="0" anchor="ctr"/>
-          <a:lstStyle/>
-          <a:p>
-            <a:pPr algn="ctr">
-              <a:defRPr>
-                <a:latin typeface="Inter"/>
-              </a:defRPr>
-            </a:pPr>
-          </a:p>
-        </p:txBody>
-      </p:sp>
-      <p:sp>
-        <p:nvSpPr>
-          <p:cNvPr id="8" name="TextBox 7"/>
-          <p:cNvSpPr txBox="1"/>
-          <p:nvPr/>
-        </p:nvSpPr>
-        <p:spPr>
-          <a:xfrm>
-            <a:off x="11045952" y="557784"/>
-            <a:ext cx="475488" cy="182880"/>
-          </a:xfrm>
-          <a:prstGeom prst="rect">
-            <a:avLst/>
-          </a:prstGeom>
-          <a:noFill/>
-        </p:spPr>
-        <p:txBody>
-          <a:bodyPr wrap="none" lIns="9144" rIns="9144" tIns="9144" bIns="9144" anchor="t">
-            <a:spAutoFit/>
-          </a:bodyPr>
-          <a:lstStyle/>
-          <a:p>
-            <a:pPr algn="ctr">
-              <a:spcAft>
-                <a:spcPts val="0"/>
-              </a:spcAft>
-              <a:defRPr sz="1000" b="1">
-                <a:solidFill>
-                  <a:srgbClr val="0D1117"/>
-                </a:solidFill>
-                <a:latin typeface="Inter"/>
-              </a:defRPr>
-            </a:pPr>
-            <a:r>
-              <a:rPr>
-                <a:latin typeface="Inter"/>
-              </a:rPr>
-              <a:t>4</a:t>
-            </a:r>
-          </a:p>
-        </p:txBody>
-      </p:sp>
-      <p:sp>
-        <p:nvSpPr>
-          <p:cNvPr id="9" name="TextBox 8"/>
-          <p:cNvSpPr txBox="1"/>
-          <p:nvPr/>
-        </p:nvSpPr>
-        <p:spPr>
-          <a:xfrm>
-            <a:off x="640080" y="1325880"/>
-            <a:ext cx="10908792" cy="201168"/>
-          </a:xfrm>
-          <a:prstGeom prst="rect">
-            <a:avLst/>
-          </a:prstGeom>
-          <a:noFill/>
-        </p:spPr>
-        <p:txBody>
-          <a:bodyPr wrap="none" lIns="9144" rIns="9144" tIns="9144" bIns="9144" anchor="t">
-            <a:spAutoFit/>
-          </a:bodyPr>
-          <a:lstStyle/>
-          <a:p>
-            <a:pPr algn="l">
-              <a:spcAft>
-                <a:spcPts val="0"/>
-              </a:spcAft>
-              <a:defRPr sz="720" b="1">
-                <a:solidFill>
-                  <a:srgbClr val="4A5563"/>
-                </a:solidFill>
-                <a:latin typeface="Inter"/>
-              </a:defRPr>
-            </a:pPr>
-            <a:r>
-              <a:rPr>
-                <a:latin typeface="Inter"/>
-              </a:rPr>
-              <a:t>NET IRR PATH · 2020-12-31 TO 2025-12-31 [S6]</a:t>
-            </a:r>
-          </a:p>
-        </p:txBody>
-      </p:sp>
-      <p:graphicFrame>
-        <p:nvGraphicFramePr>
-          <p:cNvPr id="10" name="Chart 9"/>
-          <p:cNvGraphicFramePr>
-            <a:graphicFrameLocks noGrp="1"/>
-          </p:cNvGraphicFramePr>
-          <p:nvPr/>
-        </p:nvGraphicFramePr>
-        <p:xfrm>
-          <a:off x="640080" y="1600200"/>
-          <a:ext cx="10908792" cy="4617720"/>
-        </p:xfrm>
-        <a:graphic>
-          <a:graphicData uri="http://schemas.openxmlformats.org/drawingml/2006/chart">
-            <c:chart xmlns:c="http://schemas.openxmlformats.org/drawingml/2006/chart" r:id="rId2"/>
-          </a:graphicData>
-        </a:graphic>
-      </p:graphicFrame>
-      <p:sp>
-        <p:nvSpPr>
-          <p:cNvPr id="11" name="Rectangle 10"/>
-          <p:cNvSpPr/>
-          <p:nvPr/>
-        </p:nvSpPr>
-        <p:spPr>
-          <a:xfrm>
-            <a:off x="640080" y="6446520"/>
-            <a:ext cx="10908792" cy="9144"/>
-          </a:xfrm>
-          <a:prstGeom prst="rect">
-            <a:avLst/>
-          </a:prstGeom>
-          <a:solidFill>
-            <a:srgbClr val="E3E7EC"/>
-          </a:solidFill>
-          <a:ln>
-            <a:solidFill>
-              <a:srgbClr val="E3E7EC"/>
-            </a:solidFill>
-          </a:ln>
-        </p:spPr>
-        <p:style>
-          <a:lnRef idx="1">
-            <a:schemeClr val="accent1"/>
-          </a:lnRef>
-          <a:fillRef idx="3">
-            <a:schemeClr val="accent1"/>
-          </a:fillRef>
-          <a:effectRef idx="2">
-            <a:schemeClr val="accent1"/>
-          </a:effectRef>
-          <a:fontRef idx="minor">
-            <a:schemeClr val="lt1"/>
-          </a:fontRef>
-        </p:style>
-        <p:txBody>
-          <a:bodyPr rtlCol="0" anchor="ctr"/>
-          <a:lstStyle/>
-          <a:p>
-            <a:pPr algn="ctr">
-              <a:defRPr>
-                <a:latin typeface="Inter"/>
-              </a:defRPr>
-            </a:pPr>
-          </a:p>
-        </p:txBody>
-      </p:sp>
-      <p:sp>
-        <p:nvSpPr>
-          <p:cNvPr id="12" name="TextBox 11"/>
-          <p:cNvSpPr txBox="1"/>
-          <p:nvPr/>
-        </p:nvSpPr>
-        <p:spPr>
-          <a:xfrm>
-            <a:off x="640080" y="6501384"/>
-            <a:ext cx="4297680" cy="146304"/>
-          </a:xfrm>
-          <a:prstGeom prst="rect">
-            <a:avLst/>
-          </a:prstGeom>
-          <a:noFill/>
-        </p:spPr>
-        <p:txBody>
-          <a:bodyPr wrap="none" lIns="9144" rIns="9144" tIns="9144" bIns="9144" anchor="t">
-            <a:spAutoFit/>
-          </a:bodyPr>
-          <a:lstStyle/>
-          <a:p>
-            <a:pPr algn="l">
-              <a:spcAft>
-                <a:spcPts val="0"/>
-              </a:spcAft>
-              <a:defRPr sz="650" b="0">
-                <a:solidFill>
-                  <a:srgbClr val="8A94A1"/>
-                </a:solidFill>
-                <a:latin typeface="Inter"/>
-              </a:defRPr>
-            </a:pPr>
-            <a:r>
-              <a:rPr>
-                <a:latin typeface="Inter"/>
-              </a:rPr>
-              <a:t>Sources: S6</a:t>
-            </a:r>
-          </a:p>
-        </p:txBody>
-      </p:sp>
-      <p:sp>
-        <p:nvSpPr>
-          <p:cNvPr id="13" name="TextBox 12"/>
-          <p:cNvSpPr txBox="1"/>
-          <p:nvPr/>
-        </p:nvSpPr>
-        <p:spPr>
-          <a:xfrm>
-            <a:off x="4480560" y="6501384"/>
-            <a:ext cx="5303520" cy="146304"/>
-          </a:xfrm>
-          <a:prstGeom prst="rect">
-            <a:avLst/>
-          </a:prstGeom>
-          <a:noFill/>
-        </p:spPr>
-        <p:txBody>
-          <a:bodyPr wrap="none" lIns="9144" rIns="9144" tIns="9144" bIns="9144" anchor="t">
-            <a:spAutoFit/>
-          </a:bodyPr>
-          <a:lstStyle/>
-          <a:p>
-            <a:pPr algn="ctr">
-              <a:spcAft>
-                <a:spcPts val="0"/>
-              </a:spcAft>
-              <a:defRPr sz="650" b="0">
-                <a:solidFill>
-                  <a:srgbClr val="8A94A1"/>
-                </a:solidFill>
-                <a:latin typeface="Inter"/>
-              </a:defRPr>
-            </a:pPr>
-            <a:r>
-              <a:rPr>
-                <a:latin typeface="Inter"/>
-              </a:rPr>
-              <a:t>Confidential — private markets review · Data as of 2025-12-31</a:t>
-            </a:r>
-          </a:p>
-        </p:txBody>
-      </p:sp>
-      <p:sp>
-        <p:nvSpPr>
-          <p:cNvPr id="14" name="TextBox 13"/>
-          <p:cNvSpPr txBox="1"/>
-          <p:nvPr/>
-        </p:nvSpPr>
-        <p:spPr>
-          <a:xfrm>
-            <a:off x="10287000" y="6501384"/>
-            <a:ext cx="1261872" cy="146304"/>
-          </a:xfrm>
-          <a:prstGeom prst="rect">
-            <a:avLst/>
-          </a:prstGeom>
-          <a:noFill/>
-        </p:spPr>
-        <p:txBody>
-          <a:bodyPr wrap="none" lIns="9144" rIns="9144" tIns="9144" bIns="9144" anchor="t">
-            <a:spAutoFit/>
-          </a:bodyPr>
-          <a:lstStyle/>
-          <a:p>
-            <a:pPr algn="r">
-              <a:spcAft>
-                <a:spcPts val="0"/>
-              </a:spcAft>
-              <a:defRPr sz="650" b="0">
-                <a:solidFill>
-                  <a:srgbClr val="8A94A1"/>
-                </a:solidFill>
-                <a:latin typeface="Inter"/>
-              </a:defRPr>
-            </a:pPr>
-            <a:r>
-              <a:rPr>
-                <a:latin typeface="Inter"/>
-              </a:rPr>
-              <a:t>12</a:t>
-            </a:r>
-          </a:p>
-        </p:txBody>
-      </p:sp>
-    </p:spTree>
-  </p:cSld>
-  <p:clrMapOvr>
-    <a:masterClrMapping/>
-  </p:clrMapOvr>
-</p:sld>
-</file>
-
-<file path=ppt/slides/slide13.xml><?xml version="1.0" encoding="utf-8"?>
-<p:sld xmlns:a="http://schemas.openxmlformats.org/drawingml/2006/main" xmlns:p="http://schemas.openxmlformats.org/presentationml/2006/main" xmlns:r="http://schemas.openxmlformats.org/officeDocument/2006/relationships">
-  <p:cSld>
-    <p:spTree>
-      <p:nvGrpSpPr>
-        <p:cNvPr id="1" name=""/>
-        <p:cNvGrpSpPr/>
-        <p:nvPr/>
-      </p:nvGrpSpPr>
-      <p:grpSpPr/>
-      <p:sp>
-        <p:nvSpPr>
-          <p:cNvPr id="2" name="Rectangle 1"/>
-          <p:cNvSpPr/>
-          <p:nvPr/>
-        </p:nvSpPr>
-        <p:spPr>
-          <a:xfrm>
-            <a:off x="0" y="0"/>
-            <a:ext cx="12191695" cy="6858000"/>
-          </a:xfrm>
-          <a:prstGeom prst="rect">
-            <a:avLst/>
-          </a:prstGeom>
-          <a:solidFill>
-            <a:srgbClr val="FFFFFF"/>
-          </a:solidFill>
-          <a:ln>
-            <a:solidFill>
-              <a:srgbClr val="FFFFFF"/>
-            </a:solidFill>
-          </a:ln>
-        </p:spPr>
-        <p:style>
-          <a:lnRef idx="1">
-            <a:schemeClr val="accent1"/>
-          </a:lnRef>
-          <a:fillRef idx="3">
-            <a:schemeClr val="accent1"/>
-          </a:fillRef>
-          <a:effectRef idx="2">
-            <a:schemeClr val="accent1"/>
-          </a:effectRef>
-          <a:fontRef idx="minor">
-            <a:schemeClr val="lt1"/>
-          </a:fontRef>
-        </p:style>
-        <p:txBody>
-          <a:bodyPr rtlCol="0" anchor="ctr"/>
-          <a:lstStyle/>
-          <a:p>
-            <a:pPr algn="ctr">
-              <a:defRPr>
-                <a:latin typeface="Inter"/>
-              </a:defRPr>
-            </a:pPr>
-          </a:p>
-        </p:txBody>
-      </p:sp>
-      <p:sp>
-        <p:nvSpPr>
-          <p:cNvPr id="3" name="TextBox 2"/>
-          <p:cNvSpPr txBox="1"/>
-          <p:nvPr/>
-        </p:nvSpPr>
-        <p:spPr>
-          <a:xfrm>
-            <a:off x="640080" y="329184"/>
-            <a:ext cx="5303520" cy="182880"/>
-          </a:xfrm>
-          <a:prstGeom prst="rect">
-            <a:avLst/>
-          </a:prstGeom>
-          <a:noFill/>
-        </p:spPr>
-        <p:txBody>
-          <a:bodyPr wrap="none" lIns="9144" rIns="9144" tIns="9144" bIns="9144" anchor="t">
-            <a:spAutoFit/>
-          </a:bodyPr>
-          <a:lstStyle/>
-          <a:p>
-            <a:pPr algn="l">
-              <a:spcAft>
-                <a:spcPts val="0"/>
-              </a:spcAft>
-              <a:defRPr sz="750" b="1">
-                <a:solidFill>
-                  <a:srgbClr val="4F6B00"/>
-                </a:solidFill>
-                <a:latin typeface="Inter"/>
-              </a:defRPr>
-            </a:pPr>
-            <a:r>
-              <a:rPr>
-                <a:latin typeface="Inter"/>
-              </a:rPr>
-              <a:t>TVPI CROSSED 1.0X BEFORE NET IRR REACHED 12.6%</a:t>
-            </a:r>
-          </a:p>
-        </p:txBody>
-      </p:sp>
-      <p:sp>
-        <p:nvSpPr>
-          <p:cNvPr id="4" name="TextBox 3"/>
-          <p:cNvSpPr txBox="1"/>
-          <p:nvPr/>
-        </p:nvSpPr>
-        <p:spPr>
-          <a:xfrm>
-            <a:off x="5897880" y="310896"/>
-            <a:ext cx="4800600" cy="256032"/>
-          </a:xfrm>
-          <a:prstGeom prst="rect">
-            <a:avLst/>
-          </a:prstGeom>
-          <a:noFill/>
-        </p:spPr>
-        <p:txBody>
-          <a:bodyPr wrap="none" lIns="9144" rIns="9144" tIns="9144" bIns="9144" anchor="t">
-            <a:spAutoFit/>
-          </a:bodyPr>
-          <a:lstStyle/>
-          <a:p>
-            <a:pPr algn="r">
-              <a:spcAft>
-                <a:spcPts val="0"/>
-              </a:spcAft>
-              <a:defRPr sz="680" b="1">
-                <a:solidFill>
-                  <a:srgbClr val="4F6B00"/>
-                </a:solidFill>
-                <a:latin typeface="Inter"/>
-              </a:defRPr>
-            </a:pPr>
-            <a:r>
-              <a:rPr>
-                <a:latin typeface="Inter"/>
-              </a:rPr>
-              <a:t>Illustrative, Gradient Maintained — demo data, not the client's holdings or managers</a:t>
-            </a:r>
-          </a:p>
-        </p:txBody>
-      </p:sp>
-      <p:sp>
-        <p:nvSpPr>
-          <p:cNvPr id="5" name="TextBox 4"/>
-          <p:cNvSpPr txBox="1"/>
-          <p:nvPr/>
-        </p:nvSpPr>
-        <p:spPr>
-          <a:xfrm>
-            <a:off x="640080" y="566928"/>
-            <a:ext cx="10058400" cy="530352"/>
-          </a:xfrm>
-          <a:prstGeom prst="rect">
-            <a:avLst/>
-          </a:prstGeom>
-          <a:noFill/>
-        </p:spPr>
-        <p:txBody>
-          <a:bodyPr wrap="none" lIns="9144" rIns="9144" tIns="9144" bIns="9144" anchor="t">
-            <a:spAutoFit/>
-          </a:bodyPr>
-          <a:lstStyle/>
-          <a:p>
-            <a:pPr algn="l">
-              <a:spcAft>
-                <a:spcPts val="0"/>
-              </a:spcAft>
-              <a:defRPr sz="2300" b="1">
-                <a:solidFill>
-                  <a:srgbClr val="0D1117"/>
-                </a:solidFill>
-                <a:latin typeface="Inter"/>
-              </a:defRPr>
-            </a:pPr>
-            <a:r>
-              <a:rPr>
-                <a:latin typeface="Inter"/>
-              </a:rPr>
-              <a:t>IRR and multiple context — continued</a:t>
-            </a:r>
-          </a:p>
-        </p:txBody>
-      </p:sp>
-      <p:sp>
-        <p:nvSpPr>
-          <p:cNvPr id="6" name="Rectangle 5"/>
-          <p:cNvSpPr/>
-          <p:nvPr/>
-        </p:nvSpPr>
-        <p:spPr>
-          <a:xfrm>
-            <a:off x="640080" y="1115568"/>
-            <a:ext cx="10908792" cy="18288"/>
-          </a:xfrm>
-          <a:prstGeom prst="rect">
-            <a:avLst/>
-          </a:prstGeom>
-          <a:solidFill>
-            <a:srgbClr val="0D1117"/>
-          </a:solidFill>
-          <a:ln>
-            <a:solidFill>
-              <a:srgbClr val="0D1117"/>
-            </a:solidFill>
-          </a:ln>
-        </p:spPr>
-        <p:style>
-          <a:lnRef idx="1">
-            <a:schemeClr val="accent1"/>
-          </a:lnRef>
-          <a:fillRef idx="3">
-            <a:schemeClr val="accent1"/>
-          </a:fillRef>
-          <a:effectRef idx="2">
-            <a:schemeClr val="accent1"/>
-          </a:effectRef>
-          <a:fontRef idx="minor">
-            <a:schemeClr val="lt1"/>
-          </a:fontRef>
-        </p:style>
-        <p:txBody>
-          <a:bodyPr rtlCol="0" anchor="ctr"/>
-          <a:lstStyle/>
-          <a:p>
-            <a:pPr algn="ctr">
-              <a:defRPr>
-                <a:latin typeface="Inter"/>
-              </a:defRPr>
-            </a:pPr>
-          </a:p>
-        </p:txBody>
-      </p:sp>
-      <p:sp>
-        <p:nvSpPr>
-          <p:cNvPr id="7" name="Rectangle 6"/>
-          <p:cNvSpPr/>
-          <p:nvPr/>
-        </p:nvSpPr>
-        <p:spPr>
-          <a:xfrm>
-            <a:off x="11018520" y="502920"/>
-            <a:ext cx="530352" cy="393192"/>
-          </a:xfrm>
-          <a:prstGeom prst="rect">
-            <a:avLst/>
-          </a:prstGeom>
-          <a:solidFill>
-            <a:srgbClr val="C6F432"/>
-          </a:solidFill>
-          <a:ln>
-            <a:solidFill>
-              <a:srgbClr val="C6F432"/>
-            </a:solidFill>
-          </a:ln>
-        </p:spPr>
-        <p:style>
-          <a:lnRef idx="1">
-            <a:schemeClr val="accent1"/>
-          </a:lnRef>
-          <a:fillRef idx="3">
-            <a:schemeClr val="accent1"/>
-          </a:fillRef>
-          <a:effectRef idx="2">
-            <a:schemeClr val="accent1"/>
-          </a:effectRef>
-          <a:fontRef idx="minor">
-            <a:schemeClr val="lt1"/>
-          </a:fontRef>
-        </p:style>
-        <p:txBody>
-          <a:bodyPr rtlCol="0" anchor="ctr"/>
-          <a:lstStyle/>
-          <a:p>
-            <a:pPr algn="ctr">
-              <a:defRPr>
-                <a:latin typeface="Inter"/>
-              </a:defRPr>
-            </a:pPr>
-          </a:p>
-        </p:txBody>
-      </p:sp>
-      <p:sp>
-        <p:nvSpPr>
-          <p:cNvPr id="8" name="TextBox 7"/>
-          <p:cNvSpPr txBox="1"/>
-          <p:nvPr/>
-        </p:nvSpPr>
-        <p:spPr>
-          <a:xfrm>
-            <a:off x="11045952" y="557784"/>
-            <a:ext cx="475488" cy="182880"/>
-          </a:xfrm>
-          <a:prstGeom prst="rect">
-            <a:avLst/>
-          </a:prstGeom>
-          <a:noFill/>
-        </p:spPr>
-        <p:txBody>
-          <a:bodyPr wrap="none" lIns="9144" rIns="9144" tIns="9144" bIns="9144" anchor="t">
-            <a:spAutoFit/>
-          </a:bodyPr>
-          <a:lstStyle/>
-          <a:p>
-            <a:pPr algn="ctr">
-              <a:spcAft>
-                <a:spcPts val="0"/>
-              </a:spcAft>
-              <a:defRPr sz="1000" b="1">
-                <a:solidFill>
-                  <a:srgbClr val="0D1117"/>
-                </a:solidFill>
-                <a:latin typeface="Inter"/>
-              </a:defRPr>
-            </a:pPr>
-            <a:r>
-              <a:rPr>
-                <a:latin typeface="Inter"/>
-              </a:rPr>
-              <a:t>4</a:t>
-            </a:r>
-          </a:p>
-        </p:txBody>
-      </p:sp>
-      <p:sp>
-        <p:nvSpPr>
-          <p:cNvPr id="9" name="TextBox 8"/>
-          <p:cNvSpPr txBox="1"/>
-          <p:nvPr/>
-        </p:nvSpPr>
-        <p:spPr>
-          <a:xfrm>
-            <a:off x="640080" y="1325880"/>
-            <a:ext cx="10908792" cy="201168"/>
-          </a:xfrm>
-          <a:prstGeom prst="rect">
-            <a:avLst/>
-          </a:prstGeom>
-          <a:noFill/>
-        </p:spPr>
-        <p:txBody>
-          <a:bodyPr wrap="none" lIns="9144" rIns="9144" tIns="9144" bIns="9144" anchor="t">
-            <a:spAutoFit/>
-          </a:bodyPr>
-          <a:lstStyle/>
-          <a:p>
-            <a:pPr algn="l">
-              <a:spcAft>
-                <a:spcPts val="0"/>
-              </a:spcAft>
-              <a:defRPr sz="720" b="1">
-                <a:solidFill>
-                  <a:srgbClr val="4A5563"/>
-                </a:solidFill>
-                <a:latin typeface="Inter"/>
-              </a:defRPr>
-            </a:pPr>
-            <a:r>
-              <a:rPr>
-                <a:latin typeface="Inter"/>
-              </a:rPr>
-              <a:t>RETURNED FUND METRICS</a:t>
-            </a:r>
-          </a:p>
-        </p:txBody>
-      </p:sp>
-      <p:graphicFrame>
-        <p:nvGraphicFramePr>
-          <p:cNvPr id="10" name="Chart 9"/>
-          <p:cNvGraphicFramePr>
-            <a:graphicFrameLocks noGrp="1"/>
-          </p:cNvGraphicFramePr>
-          <p:nvPr/>
-        </p:nvGraphicFramePr>
-        <p:xfrm>
-          <a:off x="640080" y="1600200"/>
-          <a:ext cx="10908792" cy="4617720"/>
-        </p:xfrm>
-        <a:graphic>
-          <a:graphicData uri="http://schemas.openxmlformats.org/drawingml/2006/chart">
-            <c:chart xmlns:c="http://schemas.openxmlformats.org/drawingml/2006/chart" r:id="rId2"/>
-          </a:graphicData>
-        </a:graphic>
-      </p:graphicFrame>
-      <p:sp>
-        <p:nvSpPr>
-          <p:cNvPr id="11" name="Rectangle 10"/>
-          <p:cNvSpPr/>
-          <p:nvPr/>
-        </p:nvSpPr>
-        <p:spPr>
-          <a:xfrm>
-            <a:off x="640080" y="6446520"/>
-            <a:ext cx="10908792" cy="9144"/>
-          </a:xfrm>
-          <a:prstGeom prst="rect">
-            <a:avLst/>
-          </a:prstGeom>
-          <a:solidFill>
-            <a:srgbClr val="E3E7EC"/>
-          </a:solidFill>
-          <a:ln>
-            <a:solidFill>
-              <a:srgbClr val="E3E7EC"/>
-            </a:solidFill>
-          </a:ln>
-        </p:spPr>
-        <p:style>
-          <a:lnRef idx="1">
-            <a:schemeClr val="accent1"/>
-          </a:lnRef>
-          <a:fillRef idx="3">
-            <a:schemeClr val="accent1"/>
-          </a:fillRef>
-          <a:effectRef idx="2">
-            <a:schemeClr val="accent1"/>
-          </a:effectRef>
-          <a:fontRef idx="minor">
-            <a:schemeClr val="lt1"/>
-          </a:fontRef>
-        </p:style>
-        <p:txBody>
-          <a:bodyPr rtlCol="0" anchor="ctr"/>
-          <a:lstStyle/>
-          <a:p>
-            <a:pPr algn="ctr">
-              <a:defRPr>
-                <a:latin typeface="Inter"/>
-              </a:defRPr>
-            </a:pPr>
-          </a:p>
-        </p:txBody>
-      </p:sp>
-      <p:sp>
-        <p:nvSpPr>
-          <p:cNvPr id="12" name="TextBox 11"/>
-          <p:cNvSpPr txBox="1"/>
-          <p:nvPr/>
-        </p:nvSpPr>
-        <p:spPr>
-          <a:xfrm>
-            <a:off x="640080" y="6501384"/>
-            <a:ext cx="4297680" cy="146304"/>
-          </a:xfrm>
-          <a:prstGeom prst="rect">
-            <a:avLst/>
-          </a:prstGeom>
-          <a:noFill/>
-        </p:spPr>
-        <p:txBody>
-          <a:bodyPr wrap="none" lIns="9144" rIns="9144" tIns="9144" bIns="9144" anchor="t">
-            <a:spAutoFit/>
-          </a:bodyPr>
-          <a:lstStyle/>
-          <a:p>
-            <a:pPr algn="l">
-              <a:spcAft>
-                <a:spcPts val="0"/>
-              </a:spcAft>
-              <a:defRPr sz="650" b="0">
-                <a:solidFill>
-                  <a:srgbClr val="8A94A1"/>
-                </a:solidFill>
-                <a:latin typeface="Inter"/>
-              </a:defRPr>
-            </a:pPr>
-            <a:r>
-              <a:rPr>
-                <a:latin typeface="Inter"/>
-              </a:rPr>
-              <a:t>Sources: S3 · S6</a:t>
-            </a:r>
-          </a:p>
-        </p:txBody>
-      </p:sp>
-      <p:sp>
-        <p:nvSpPr>
-          <p:cNvPr id="13" name="TextBox 12"/>
-          <p:cNvSpPr txBox="1"/>
-          <p:nvPr/>
-        </p:nvSpPr>
-        <p:spPr>
-          <a:xfrm>
-            <a:off x="4480560" y="6501384"/>
-            <a:ext cx="5303520" cy="146304"/>
-          </a:xfrm>
-          <a:prstGeom prst="rect">
-            <a:avLst/>
-          </a:prstGeom>
-          <a:noFill/>
-        </p:spPr>
-        <p:txBody>
-          <a:bodyPr wrap="none" lIns="9144" rIns="9144" tIns="9144" bIns="9144" anchor="t">
-            <a:spAutoFit/>
-          </a:bodyPr>
-          <a:lstStyle/>
-          <a:p>
-            <a:pPr algn="ctr">
-              <a:spcAft>
-                <a:spcPts val="0"/>
-              </a:spcAft>
-              <a:defRPr sz="650" b="0">
-                <a:solidFill>
-                  <a:srgbClr val="8A94A1"/>
-                </a:solidFill>
-                <a:latin typeface="Inter"/>
-              </a:defRPr>
-            </a:pPr>
-            <a:r>
-              <a:rPr>
-                <a:latin typeface="Inter"/>
-              </a:rPr>
-              <a:t>Confidential — private markets review · Data as of 2025-12-31</a:t>
-            </a:r>
-          </a:p>
-        </p:txBody>
-      </p:sp>
-      <p:sp>
-        <p:nvSpPr>
-          <p:cNvPr id="14" name="TextBox 13"/>
-          <p:cNvSpPr txBox="1"/>
-          <p:nvPr/>
-        </p:nvSpPr>
-        <p:spPr>
-          <a:xfrm>
-            <a:off x="10287000" y="6501384"/>
-            <a:ext cx="1261872" cy="146304"/>
-          </a:xfrm>
-          <a:prstGeom prst="rect">
-            <a:avLst/>
-          </a:prstGeom>
-          <a:noFill/>
-        </p:spPr>
-        <p:txBody>
-          <a:bodyPr wrap="none" lIns="9144" rIns="9144" tIns="9144" bIns="9144" anchor="t">
-            <a:spAutoFit/>
-          </a:bodyPr>
-          <a:lstStyle/>
-          <a:p>
-            <a:pPr algn="r">
-              <a:spcAft>
-                <a:spcPts val="0"/>
-              </a:spcAft>
-              <a:defRPr sz="650" b="0">
-                <a:solidFill>
-                  <a:srgbClr val="8A94A1"/>
-                </a:solidFill>
-                <a:latin typeface="Inter"/>
-              </a:defRPr>
-            </a:pPr>
-            <a:r>
-              <a:rPr>
-                <a:latin typeface="Inter"/>
-              </a:rPr>
-              <a:t>13</a:t>
-            </a:r>
-          </a:p>
-        </p:txBody>
-      </p:sp>
-    </p:spTree>
-  </p:cSld>
-  <p:clrMapOvr>
-    <a:masterClrMapping/>
-  </p:clrMapOvr>
-</p:sld>
-</file>
-
-<file path=ppt/slides/slide14.xml><?xml version="1.0" encoding="utf-8"?>
-<p:sld xmlns:a="http://schemas.openxmlformats.org/drawingml/2006/main" xmlns:p="http://schemas.openxmlformats.org/presentationml/2006/main" xmlns:r="http://schemas.openxmlformats.org/officeDocument/2006/relationships">
-  <p:cSld>
-    <p:spTree>
-      <p:nvGrpSpPr>
-        <p:cNvPr id="1" name=""/>
-        <p:cNvGrpSpPr/>
-        <p:nvPr/>
-      </p:nvGrpSpPr>
-      <p:grpSpPr/>
-      <p:sp>
-        <p:nvSpPr>
-          <p:cNvPr id="2" name="Rectangle 1"/>
-          <p:cNvSpPr/>
-          <p:nvPr/>
-        </p:nvSpPr>
-        <p:spPr>
-          <a:xfrm>
-            <a:off x="0" y="0"/>
-            <a:ext cx="12191695" cy="6858000"/>
-          </a:xfrm>
-          <a:prstGeom prst="rect">
-            <a:avLst/>
-          </a:prstGeom>
-          <a:solidFill>
-            <a:srgbClr val="FFFFFF"/>
-          </a:solidFill>
-          <a:ln>
-            <a:solidFill>
-              <a:srgbClr val="FFFFFF"/>
-            </a:solidFill>
-          </a:ln>
-        </p:spPr>
-        <p:style>
-          <a:lnRef idx="1">
-            <a:schemeClr val="accent1"/>
-          </a:lnRef>
-          <a:fillRef idx="3">
-            <a:schemeClr val="accent1"/>
-          </a:fillRef>
-          <a:effectRef idx="2">
-            <a:schemeClr val="accent1"/>
-          </a:effectRef>
-          <a:fontRef idx="minor">
-            <a:schemeClr val="lt1"/>
-          </a:fontRef>
-        </p:style>
-        <p:txBody>
-          <a:bodyPr rtlCol="0" anchor="ctr"/>
-          <a:lstStyle/>
-          <a:p>
-            <a:pPr algn="ctr">
-              <a:defRPr>
-                <a:latin typeface="Inter"/>
-              </a:defRPr>
-            </a:pPr>
-          </a:p>
-        </p:txBody>
-      </p:sp>
-      <p:sp>
-        <p:nvSpPr>
-          <p:cNvPr id="3" name="TextBox 2"/>
-          <p:cNvSpPr txBox="1"/>
-          <p:nvPr/>
-        </p:nvSpPr>
-        <p:spPr>
-          <a:xfrm>
-            <a:off x="640080" y="329184"/>
-            <a:ext cx="5303520" cy="182880"/>
-          </a:xfrm>
-          <a:prstGeom prst="rect">
-            <a:avLst/>
-          </a:prstGeom>
-          <a:noFill/>
-        </p:spPr>
-        <p:txBody>
-          <a:bodyPr wrap="none" lIns="9144" rIns="9144" tIns="9144" bIns="9144" anchor="t">
-            <a:spAutoFit/>
-          </a:bodyPr>
-          <a:lstStyle/>
-          <a:p>
-            <a:pPr algn="l">
-              <a:spcAft>
-                <a:spcPts val="0"/>
-              </a:spcAft>
-              <a:defRPr sz="750" b="1">
-                <a:solidFill>
-                  <a:srgbClr val="4F6B00"/>
-                </a:solidFill>
-                <a:latin typeface="Inter"/>
-              </a:defRPr>
-            </a:pPr>
-            <a:r>
-              <a:rPr>
-                <a:latin typeface="Inter"/>
-              </a:rPr>
-              <a:t>TVPI CROSSED 1.0X BEFORE NET IRR REACHED 12.6%</a:t>
-            </a:r>
-          </a:p>
-        </p:txBody>
-      </p:sp>
-      <p:sp>
-        <p:nvSpPr>
-          <p:cNvPr id="4" name="TextBox 3"/>
-          <p:cNvSpPr txBox="1"/>
-          <p:nvPr/>
-        </p:nvSpPr>
-        <p:spPr>
-          <a:xfrm>
-            <a:off x="5897880" y="310896"/>
-            <a:ext cx="4800600" cy="256032"/>
-          </a:xfrm>
-          <a:prstGeom prst="rect">
-            <a:avLst/>
-          </a:prstGeom>
-          <a:noFill/>
-        </p:spPr>
-        <p:txBody>
-          <a:bodyPr wrap="none" lIns="9144" rIns="9144" tIns="9144" bIns="9144" anchor="t">
-            <a:spAutoFit/>
-          </a:bodyPr>
-          <a:lstStyle/>
-          <a:p>
-            <a:pPr algn="r">
-              <a:spcAft>
-                <a:spcPts val="0"/>
-              </a:spcAft>
-              <a:defRPr sz="680" b="1">
-                <a:solidFill>
-                  <a:srgbClr val="4F6B00"/>
-                </a:solidFill>
-                <a:latin typeface="Inter"/>
-              </a:defRPr>
-            </a:pPr>
-            <a:r>
-              <a:rPr>
-                <a:latin typeface="Inter"/>
-              </a:rPr>
-              <a:t>Illustrative, Gradient Maintained — demo data, not the client's holdings or managers</a:t>
-            </a:r>
-          </a:p>
-        </p:txBody>
-      </p:sp>
-      <p:sp>
-        <p:nvSpPr>
-          <p:cNvPr id="5" name="TextBox 4"/>
-          <p:cNvSpPr txBox="1"/>
-          <p:nvPr/>
-        </p:nvSpPr>
-        <p:spPr>
-          <a:xfrm>
-            <a:off x="640080" y="566928"/>
-            <a:ext cx="10058400" cy="530352"/>
-          </a:xfrm>
-          <a:prstGeom prst="rect">
-            <a:avLst/>
-          </a:prstGeom>
-          <a:noFill/>
-        </p:spPr>
-        <p:txBody>
-          <a:bodyPr wrap="none" lIns="9144" rIns="9144" tIns="9144" bIns="9144" anchor="t">
-            <a:spAutoFit/>
-          </a:bodyPr>
-          <a:lstStyle/>
-          <a:p>
-            <a:pPr algn="l">
-              <a:spcAft>
-                <a:spcPts val="0"/>
-              </a:spcAft>
-              <a:defRPr sz="2300" b="1">
-                <a:solidFill>
-                  <a:srgbClr val="0D1117"/>
-                </a:solidFill>
-                <a:latin typeface="Inter"/>
-              </a:defRPr>
-            </a:pPr>
-            <a:r>
-              <a:rPr>
-                <a:latin typeface="Inter"/>
-              </a:rPr>
-              <a:t>IRR and multiple context — continued</a:t>
-            </a:r>
-          </a:p>
-        </p:txBody>
-      </p:sp>
-      <p:sp>
-        <p:nvSpPr>
-          <p:cNvPr id="6" name="Rectangle 5"/>
-          <p:cNvSpPr/>
-          <p:nvPr/>
-        </p:nvSpPr>
-        <p:spPr>
-          <a:xfrm>
-            <a:off x="640080" y="1115568"/>
-            <a:ext cx="10908792" cy="18288"/>
-          </a:xfrm>
-          <a:prstGeom prst="rect">
-            <a:avLst/>
-          </a:prstGeom>
-          <a:solidFill>
-            <a:srgbClr val="0D1117"/>
-          </a:solidFill>
-          <a:ln>
-            <a:solidFill>
-              <a:srgbClr val="0D1117"/>
-            </a:solidFill>
-          </a:ln>
-        </p:spPr>
-        <p:style>
-          <a:lnRef idx="1">
-            <a:schemeClr val="accent1"/>
-          </a:lnRef>
-          <a:fillRef idx="3">
-            <a:schemeClr val="accent1"/>
-          </a:fillRef>
-          <a:effectRef idx="2">
-            <a:schemeClr val="accent1"/>
-          </a:effectRef>
-          <a:fontRef idx="minor">
-            <a:schemeClr val="lt1"/>
-          </a:fontRef>
-        </p:style>
-        <p:txBody>
-          <a:bodyPr rtlCol="0" anchor="ctr"/>
-          <a:lstStyle/>
-          <a:p>
-            <a:pPr algn="ctr">
-              <a:defRPr>
-                <a:latin typeface="Inter"/>
-              </a:defRPr>
-            </a:pPr>
-          </a:p>
-        </p:txBody>
-      </p:sp>
-      <p:sp>
-        <p:nvSpPr>
-          <p:cNvPr id="7" name="Rectangle 6"/>
-          <p:cNvSpPr/>
-          <p:nvPr/>
-        </p:nvSpPr>
-        <p:spPr>
-          <a:xfrm>
-            <a:off x="11018520" y="502920"/>
-            <a:ext cx="530352" cy="393192"/>
-          </a:xfrm>
-          <a:prstGeom prst="rect">
-            <a:avLst/>
-          </a:prstGeom>
-          <a:solidFill>
-            <a:srgbClr val="C6F432"/>
-          </a:solidFill>
-          <a:ln>
-            <a:solidFill>
-              <a:srgbClr val="C6F432"/>
-            </a:solidFill>
-          </a:ln>
-        </p:spPr>
-        <p:style>
-          <a:lnRef idx="1">
-            <a:schemeClr val="accent1"/>
-          </a:lnRef>
-          <a:fillRef idx="3">
-            <a:schemeClr val="accent1"/>
-          </a:fillRef>
-          <a:effectRef idx="2">
-            <a:schemeClr val="accent1"/>
-          </a:effectRef>
-          <a:fontRef idx="minor">
-            <a:schemeClr val="lt1"/>
-          </a:fontRef>
-        </p:style>
-        <p:txBody>
-          <a:bodyPr rtlCol="0" anchor="ctr"/>
-          <a:lstStyle/>
-          <a:p>
-            <a:pPr algn="ctr">
-              <a:defRPr>
-                <a:latin typeface="Inter"/>
-              </a:defRPr>
-            </a:pPr>
-          </a:p>
-        </p:txBody>
-      </p:sp>
-      <p:sp>
-        <p:nvSpPr>
-          <p:cNvPr id="8" name="TextBox 7"/>
-          <p:cNvSpPr txBox="1"/>
-          <p:nvPr/>
-        </p:nvSpPr>
-        <p:spPr>
-          <a:xfrm>
-            <a:off x="11045952" y="557784"/>
-            <a:ext cx="475488" cy="182880"/>
-          </a:xfrm>
-          <a:prstGeom prst="rect">
-            <a:avLst/>
-          </a:prstGeom>
-          <a:noFill/>
-        </p:spPr>
-        <p:txBody>
-          <a:bodyPr wrap="none" lIns="9144" rIns="9144" tIns="9144" bIns="9144" anchor="t">
-            <a:spAutoFit/>
-          </a:bodyPr>
-          <a:lstStyle/>
-          <a:p>
-            <a:pPr algn="ctr">
-              <a:spcAft>
-                <a:spcPts val="0"/>
-              </a:spcAft>
-              <a:defRPr sz="1000" b="1">
-                <a:solidFill>
-                  <a:srgbClr val="0D1117"/>
-                </a:solidFill>
-                <a:latin typeface="Inter"/>
-              </a:defRPr>
-            </a:pPr>
-            <a:r>
-              <a:rPr>
-                <a:latin typeface="Inter"/>
-              </a:rPr>
-              <a:t>4</a:t>
-            </a:r>
-          </a:p>
-        </p:txBody>
-      </p:sp>
-      <p:sp>
-        <p:nvSpPr>
-          <p:cNvPr id="9" name="Rectangle 8"/>
-          <p:cNvSpPr/>
-          <p:nvPr/>
-        </p:nvSpPr>
-        <p:spPr>
-          <a:xfrm>
-            <a:off x="640080" y="1325880"/>
-            <a:ext cx="10908792" cy="4892040"/>
-          </a:xfrm>
-          <a:prstGeom prst="rect">
-            <a:avLst/>
-          </a:prstGeom>
-          <a:solidFill>
-            <a:srgbClr val="F5F7F9"/>
-          </a:solidFill>
-          <a:ln>
-            <a:solidFill>
-              <a:srgbClr val="E3E7EC"/>
-            </a:solidFill>
-          </a:ln>
-        </p:spPr>
-        <p:style>
-          <a:lnRef idx="1">
-            <a:schemeClr val="accent1"/>
-          </a:lnRef>
-          <a:fillRef idx="3">
-            <a:schemeClr val="accent1"/>
-          </a:fillRef>
-          <a:effectRef idx="2">
-            <a:schemeClr val="accent1"/>
-          </a:effectRef>
-          <a:fontRef idx="minor">
-            <a:schemeClr val="lt1"/>
-          </a:fontRef>
-        </p:style>
-        <p:txBody>
-          <a:bodyPr rtlCol="0" anchor="ctr"/>
-          <a:lstStyle/>
-          <a:p>
-            <a:pPr algn="ctr">
-              <a:defRPr>
-                <a:latin typeface="Inter"/>
-              </a:defRPr>
-            </a:pPr>
-          </a:p>
-        </p:txBody>
-      </p:sp>
-      <p:sp>
-        <p:nvSpPr>
-          <p:cNvPr id="10" name="Rectangle 9"/>
-          <p:cNvSpPr/>
-          <p:nvPr/>
-        </p:nvSpPr>
-        <p:spPr>
-          <a:xfrm>
-            <a:off x="640080" y="1325880"/>
-            <a:ext cx="54864" cy="4892040"/>
-          </a:xfrm>
-          <a:prstGeom prst="rect">
-            <a:avLst/>
-          </a:prstGeom>
-          <a:solidFill>
-            <a:srgbClr val="0D1117"/>
-          </a:solidFill>
-          <a:ln>
-            <a:solidFill>
-              <a:srgbClr val="0D1117"/>
-            </a:solidFill>
-          </a:ln>
-        </p:spPr>
-        <p:style>
-          <a:lnRef idx="1">
-            <a:schemeClr val="accent1"/>
-          </a:lnRef>
-          <a:fillRef idx="3">
-            <a:schemeClr val="accent1"/>
-          </a:fillRef>
-          <a:effectRef idx="2">
-            <a:schemeClr val="accent1"/>
-          </a:effectRef>
-          <a:fontRef idx="minor">
-            <a:schemeClr val="lt1"/>
-          </a:fontRef>
-        </p:style>
-        <p:txBody>
-          <a:bodyPr rtlCol="0" anchor="ctr"/>
-          <a:lstStyle/>
-          <a:p>
-            <a:pPr algn="ctr">
-              <a:defRPr>
-                <a:latin typeface="Inter"/>
-              </a:defRPr>
-            </a:pPr>
-          </a:p>
-        </p:txBody>
-      </p:sp>
-      <p:sp>
-        <p:nvSpPr>
-          <p:cNvPr id="11" name="TextBox 10"/>
-          <p:cNvSpPr txBox="1"/>
-          <p:nvPr/>
-        </p:nvSpPr>
-        <p:spPr>
-          <a:xfrm>
-            <a:off x="804671" y="1435607"/>
-            <a:ext cx="10616184" cy="228600"/>
-          </a:xfrm>
-          <a:prstGeom prst="rect">
-            <a:avLst/>
-          </a:prstGeom>
-          <a:noFill/>
-        </p:spPr>
-        <p:txBody>
-          <a:bodyPr wrap="none" lIns="9144" rIns="9144" tIns="9144" bIns="9144" anchor="t">
-            <a:spAutoFit/>
-          </a:bodyPr>
-          <a:lstStyle/>
-          <a:p>
-            <a:pPr algn="l">
-              <a:spcAft>
-                <a:spcPts val="0"/>
-              </a:spcAft>
-              <a:defRPr sz="1000" b="1">
-                <a:solidFill>
-                  <a:srgbClr val="0D1117"/>
-                </a:solidFill>
-                <a:latin typeface="Inter"/>
-              </a:defRPr>
-            </a:pPr>
-            <a:r>
-              <a:rPr>
-                <a:latin typeface="Inter"/>
-              </a:rPr>
-              <a:t>Analysis — Realized and residual value</a:t>
-            </a:r>
-          </a:p>
-        </p:txBody>
-      </p:sp>
-      <p:sp>
-        <p:nvSpPr>
-          <p:cNvPr id="12" name="TextBox 11"/>
-          <p:cNvSpPr txBox="1"/>
-          <p:nvPr/>
-        </p:nvSpPr>
-        <p:spPr>
-          <a:xfrm>
-            <a:off x="804671" y="1719072"/>
-            <a:ext cx="10616184" cy="4407408"/>
-          </a:xfrm>
-          <a:prstGeom prst="rect">
-            <a:avLst/>
-          </a:prstGeom>
-          <a:noFill/>
-        </p:spPr>
-        <p:txBody>
-          <a:bodyPr wrap="none" lIns="9144" rIns="9144" tIns="9144" bIns="9144" anchor="t">
-            <a:spAutoFit/>
-          </a:bodyPr>
-          <a:lstStyle/>
-          <a:p>
-            <a:pPr algn="l">
-              <a:spcAft>
-                <a:spcPts val="0"/>
-              </a:spcAft>
-              <a:defRPr sz="950" b="0">
-                <a:solidFill>
-                  <a:srgbClr val="4A5563"/>
-                </a:solidFill>
-                <a:latin typeface="Inter"/>
-              </a:defRPr>
-            </a:pPr>
-            <a:r>
-              <a:rPr>
-                <a:latin typeface="Inter"/>
-              </a:rPr>
-              <a:t>Observation: Net IRR was 12.6%, while 0.75x RVPI exceeded 0.66x DPI [S6]. Why it matters: More value remains unrealized than distributed. Uncertainty: The result depends on reported residual…</a:t>
-            </a:r>
-          </a:p>
-        </p:txBody>
-      </p:sp>
-      <p:sp>
-        <p:nvSpPr>
-          <p:cNvPr id="13" name="Rectangle 12"/>
-          <p:cNvSpPr/>
-          <p:nvPr/>
-        </p:nvSpPr>
-        <p:spPr>
-          <a:xfrm>
-            <a:off x="640080" y="6446520"/>
-            <a:ext cx="10908792" cy="9144"/>
-          </a:xfrm>
-          <a:prstGeom prst="rect">
-            <a:avLst/>
-          </a:prstGeom>
-          <a:solidFill>
-            <a:srgbClr val="E3E7EC"/>
-          </a:solidFill>
-          <a:ln>
-            <a:solidFill>
-              <a:srgbClr val="E3E7EC"/>
-            </a:solidFill>
-          </a:ln>
-        </p:spPr>
-        <p:style>
-          <a:lnRef idx="1">
-            <a:schemeClr val="accent1"/>
-          </a:lnRef>
-          <a:fillRef idx="3">
-            <a:schemeClr val="accent1"/>
-          </a:fillRef>
-          <a:effectRef idx="2">
-            <a:schemeClr val="accent1"/>
-          </a:effectRef>
-          <a:fontRef idx="minor">
-            <a:schemeClr val="lt1"/>
-          </a:fontRef>
-        </p:style>
-        <p:txBody>
-          <a:bodyPr rtlCol="0" anchor="ctr"/>
-          <a:lstStyle/>
-          <a:p>
-            <a:pPr algn="ctr">
-              <a:defRPr>
-                <a:latin typeface="Inter"/>
-              </a:defRPr>
-            </a:pPr>
-          </a:p>
-        </p:txBody>
-      </p:sp>
-      <p:sp>
-        <p:nvSpPr>
-          <p:cNvPr id="14" name="TextBox 13"/>
-          <p:cNvSpPr txBox="1"/>
-          <p:nvPr/>
-        </p:nvSpPr>
-        <p:spPr>
-          <a:xfrm>
-            <a:off x="640080" y="6501384"/>
-            <a:ext cx="4297680" cy="146304"/>
-          </a:xfrm>
-          <a:prstGeom prst="rect">
-            <a:avLst/>
-          </a:prstGeom>
-          <a:noFill/>
-        </p:spPr>
-        <p:txBody>
-          <a:bodyPr wrap="none" lIns="9144" rIns="9144" tIns="9144" bIns="9144" anchor="t">
-            <a:spAutoFit/>
-          </a:bodyPr>
-          <a:lstStyle/>
-          <a:p>
-            <a:pPr algn="l">
-              <a:spcAft>
-                <a:spcPts val="0"/>
-              </a:spcAft>
-              <a:defRPr sz="650" b="0">
-                <a:solidFill>
-                  <a:srgbClr val="8A94A1"/>
-                </a:solidFill>
-                <a:latin typeface="Inter"/>
-              </a:defRPr>
-            </a:pPr>
-            <a:r>
-              <a:rPr>
-                <a:latin typeface="Inter"/>
-              </a:rPr>
-              <a:t>Sources: S6</a:t>
-            </a:r>
-          </a:p>
-        </p:txBody>
-      </p:sp>
-      <p:sp>
-        <p:nvSpPr>
-          <p:cNvPr id="15" name="TextBox 14"/>
-          <p:cNvSpPr txBox="1"/>
-          <p:nvPr/>
-        </p:nvSpPr>
-        <p:spPr>
-          <a:xfrm>
-            <a:off x="4480560" y="6501384"/>
-            <a:ext cx="5303520" cy="146304"/>
-          </a:xfrm>
-          <a:prstGeom prst="rect">
-            <a:avLst/>
-          </a:prstGeom>
-          <a:noFill/>
-        </p:spPr>
-        <p:txBody>
-          <a:bodyPr wrap="none" lIns="9144" rIns="9144" tIns="9144" bIns="9144" anchor="t">
-            <a:spAutoFit/>
-          </a:bodyPr>
-          <a:lstStyle/>
-          <a:p>
-            <a:pPr algn="ctr">
-              <a:spcAft>
-                <a:spcPts val="0"/>
-              </a:spcAft>
-              <a:defRPr sz="650" b="0">
-                <a:solidFill>
-                  <a:srgbClr val="8A94A1"/>
-                </a:solidFill>
-                <a:latin typeface="Inter"/>
-              </a:defRPr>
-            </a:pPr>
-            <a:r>
-              <a:rPr>
-                <a:latin typeface="Inter"/>
-              </a:rPr>
-              <a:t>Confidential — private markets review · Data as of 2025-12-31</a:t>
-            </a:r>
-          </a:p>
-        </p:txBody>
-      </p:sp>
-      <p:sp>
-        <p:nvSpPr>
-          <p:cNvPr id="16" name="TextBox 15"/>
-          <p:cNvSpPr txBox="1"/>
-          <p:nvPr/>
-        </p:nvSpPr>
-        <p:spPr>
-          <a:xfrm>
-            <a:off x="10287000" y="6501384"/>
-            <a:ext cx="1261872" cy="146304"/>
-          </a:xfrm>
-          <a:prstGeom prst="rect">
-            <a:avLst/>
-          </a:prstGeom>
-          <a:noFill/>
-        </p:spPr>
-        <p:txBody>
-          <a:bodyPr wrap="none" lIns="9144" rIns="9144" tIns="9144" bIns="9144" anchor="t">
-            <a:spAutoFit/>
-          </a:bodyPr>
-          <a:lstStyle/>
-          <a:p>
-            <a:pPr algn="r">
-              <a:spcAft>
-                <a:spcPts val="0"/>
-              </a:spcAft>
-              <a:defRPr sz="650" b="0">
-                <a:solidFill>
-                  <a:srgbClr val="8A94A1"/>
-                </a:solidFill>
-                <a:latin typeface="Inter"/>
-              </a:defRPr>
-            </a:pPr>
-            <a:r>
-              <a:rPr>
-                <a:latin typeface="Inter"/>
-              </a:rPr>
-              <a:t>14</a:t>
-            </a:r>
-          </a:p>
-        </p:txBody>
-      </p:sp>
-    </p:spTree>
-  </p:cSld>
-  <p:clrMapOvr>
-    <a:masterClrMapping/>
-  </p:clrMapOvr>
-</p:sld>
-</file>
-
-<file path=ppt/slides/slide15.xml><?xml version="1.0" encoding="utf-8"?>
-<p:sld xmlns:a="http://schemas.openxmlformats.org/drawingml/2006/main" xmlns:p="http://schemas.openxmlformats.org/presentationml/2006/main" xmlns:r="http://schemas.openxmlformats.org/officeDocument/2006/relationships">
-  <p:cSld>
-    <p:spTree>
-      <p:nvGrpSpPr>
-        <p:cNvPr id="1" name=""/>
-        <p:cNvGrpSpPr/>
-        <p:nvPr/>
-      </p:nvGrpSpPr>
-      <p:grpSpPr/>
-      <p:sp>
-        <p:nvSpPr>
-          <p:cNvPr id="2" name="Rectangle 1"/>
-          <p:cNvSpPr/>
-          <p:nvPr/>
-        </p:nvSpPr>
-        <p:spPr>
-          <a:xfrm>
-            <a:off x="0" y="0"/>
-            <a:ext cx="12191695" cy="6858000"/>
-          </a:xfrm>
-          <a:prstGeom prst="rect">
-            <a:avLst/>
-          </a:prstGeom>
-          <a:solidFill>
-            <a:srgbClr val="FFFFFF"/>
-          </a:solidFill>
-          <a:ln>
-            <a:solidFill>
-              <a:srgbClr val="FFFFFF"/>
-            </a:solidFill>
-          </a:ln>
-        </p:spPr>
-        <p:style>
-          <a:lnRef idx="1">
-            <a:schemeClr val="accent1"/>
-          </a:lnRef>
-          <a:fillRef idx="3">
-            <a:schemeClr val="accent1"/>
-          </a:fillRef>
-          <a:effectRef idx="2">
-            <a:schemeClr val="accent1"/>
-          </a:effectRef>
-          <a:fontRef idx="minor">
-            <a:schemeClr val="lt1"/>
-          </a:fontRef>
-        </p:style>
-        <p:txBody>
-          <a:bodyPr rtlCol="0" anchor="ctr"/>
-          <a:lstStyle/>
-          <a:p>
-            <a:pPr algn="ctr">
-              <a:defRPr>
-                <a:latin typeface="Inter"/>
-              </a:defRPr>
-            </a:pPr>
-          </a:p>
-        </p:txBody>
-      </p:sp>
-      <p:sp>
-        <p:nvSpPr>
-          <p:cNvPr id="3" name="TextBox 2"/>
-          <p:cNvSpPr txBox="1"/>
-          <p:nvPr/>
-        </p:nvSpPr>
-        <p:spPr>
-          <a:xfrm>
-            <a:off x="640080" y="329184"/>
-            <a:ext cx="5303520" cy="182880"/>
-          </a:xfrm>
-          <a:prstGeom prst="rect">
-            <a:avLst/>
-          </a:prstGeom>
-          <a:noFill/>
-        </p:spPr>
-        <p:txBody>
-          <a:bodyPr wrap="none" lIns="9144" rIns="9144" tIns="9144" bIns="9144" anchor="t">
-            <a:spAutoFit/>
-          </a:bodyPr>
-          <a:lstStyle/>
-          <a:p>
-            <a:pPr algn="l">
-              <a:spcAft>
-                <a:spcPts val="0"/>
-              </a:spcAft>
-              <a:defRPr sz="750" b="1">
-                <a:solidFill>
-                  <a:srgbClr val="4F6B00"/>
-                </a:solidFill>
-                <a:latin typeface="Inter"/>
-              </a:defRPr>
-            </a:pPr>
-            <a:r>
-              <a:rPr>
-                <a:latin typeface="Inter"/>
-              </a:rPr>
-              <a:t>BOTH SEPARATELY BUILT PATHS REMAIN ABOVE PARITY</a:t>
-            </a:r>
-          </a:p>
-        </p:txBody>
-      </p:sp>
-      <p:sp>
-        <p:nvSpPr>
-          <p:cNvPr id="4" name="TextBox 3"/>
-          <p:cNvSpPr txBox="1"/>
-          <p:nvPr/>
-        </p:nvSpPr>
-        <p:spPr>
-          <a:xfrm>
-            <a:off x="5897880" y="310896"/>
-            <a:ext cx="4800600" cy="256032"/>
-          </a:xfrm>
-          <a:prstGeom prst="rect">
-            <a:avLst/>
-          </a:prstGeom>
-          <a:noFill/>
-        </p:spPr>
-        <p:txBody>
-          <a:bodyPr wrap="none" lIns="9144" rIns="9144" tIns="9144" bIns="9144" anchor="t">
-            <a:spAutoFit/>
-          </a:bodyPr>
-          <a:lstStyle/>
-          <a:p>
-            <a:pPr algn="r">
-              <a:spcAft>
-                <a:spcPts val="0"/>
-              </a:spcAft>
-              <a:defRPr sz="680" b="1">
-                <a:solidFill>
-                  <a:srgbClr val="4F6B00"/>
-                </a:solidFill>
-                <a:latin typeface="Inter"/>
-              </a:defRPr>
-            </a:pPr>
-            <a:r>
-              <a:rPr>
-                <a:latin typeface="Inter"/>
-              </a:rPr>
-              <a:t>Illustrative, Gradient Maintained — demo data, not the client's holdings or managers</a:t>
-            </a:r>
-          </a:p>
-        </p:txBody>
-      </p:sp>
-      <p:sp>
-        <p:nvSpPr>
-          <p:cNvPr id="5" name="TextBox 4"/>
-          <p:cNvSpPr txBox="1"/>
-          <p:nvPr/>
-        </p:nvSpPr>
-        <p:spPr>
-          <a:xfrm>
-            <a:off x="640080" y="566928"/>
-            <a:ext cx="10058400" cy="530352"/>
-          </a:xfrm>
-          <a:prstGeom prst="rect">
-            <a:avLst/>
-          </a:prstGeom>
-          <a:noFill/>
-        </p:spPr>
-        <p:txBody>
-          <a:bodyPr wrap="none" lIns="9144" rIns="9144" tIns="9144" bIns="9144" anchor="t">
-            <a:spAutoFit/>
-          </a:bodyPr>
-          <a:lstStyle/>
-          <a:p>
-            <a:pPr algn="l">
-              <a:spcAft>
-                <a:spcPts val="0"/>
-              </a:spcAft>
-              <a:defRPr sz="2300" b="1">
-                <a:solidFill>
-                  <a:srgbClr val="0D1117"/>
-                </a:solidFill>
-                <a:latin typeface="Inter"/>
-              </a:defRPr>
-            </a:pPr>
-            <a:r>
-              <a:rPr>
-                <a:latin typeface="Inter"/>
-              </a:rPr>
-              <a:t>Benchmark sensitivity</a:t>
-            </a:r>
-          </a:p>
-        </p:txBody>
-      </p:sp>
-      <p:sp>
-        <p:nvSpPr>
-          <p:cNvPr id="6" name="Rectangle 5"/>
-          <p:cNvSpPr/>
-          <p:nvPr/>
-        </p:nvSpPr>
-        <p:spPr>
-          <a:xfrm>
-            <a:off x="640080" y="1115568"/>
-            <a:ext cx="10908792" cy="18288"/>
-          </a:xfrm>
-          <a:prstGeom prst="rect">
-            <a:avLst/>
-          </a:prstGeom>
-          <a:solidFill>
-            <a:srgbClr val="0D1117"/>
-          </a:solidFill>
-          <a:ln>
-            <a:solidFill>
-              <a:srgbClr val="0D1117"/>
-            </a:solidFill>
-          </a:ln>
-        </p:spPr>
-        <p:style>
-          <a:lnRef idx="1">
-            <a:schemeClr val="accent1"/>
-          </a:lnRef>
-          <a:fillRef idx="3">
-            <a:schemeClr val="accent1"/>
-          </a:fillRef>
-          <a:effectRef idx="2">
-            <a:schemeClr val="accent1"/>
-          </a:effectRef>
-          <a:fontRef idx="minor">
-            <a:schemeClr val="lt1"/>
-          </a:fontRef>
-        </p:style>
-        <p:txBody>
-          <a:bodyPr rtlCol="0" anchor="ctr"/>
-          <a:lstStyle/>
-          <a:p>
-            <a:pPr algn="ctr">
-              <a:defRPr>
-                <a:latin typeface="Inter"/>
-              </a:defRPr>
-            </a:pPr>
-          </a:p>
-        </p:txBody>
-      </p:sp>
-      <p:sp>
-        <p:nvSpPr>
-          <p:cNvPr id="7" name="Rectangle 6"/>
-          <p:cNvSpPr/>
-          <p:nvPr/>
-        </p:nvSpPr>
-        <p:spPr>
-          <a:xfrm>
-            <a:off x="11018520" y="502920"/>
-            <a:ext cx="530352" cy="393192"/>
-          </a:xfrm>
-          <a:prstGeom prst="rect">
-            <a:avLst/>
-          </a:prstGeom>
-          <a:solidFill>
-            <a:srgbClr val="C6F432"/>
-          </a:solidFill>
-          <a:ln>
-            <a:solidFill>
-              <a:srgbClr val="C6F432"/>
-            </a:solidFill>
-          </a:ln>
-        </p:spPr>
-        <p:style>
-          <a:lnRef idx="1">
-            <a:schemeClr val="accent1"/>
-          </a:lnRef>
-          <a:fillRef idx="3">
-            <a:schemeClr val="accent1"/>
-          </a:fillRef>
-          <a:effectRef idx="2">
-            <a:schemeClr val="accent1"/>
-          </a:effectRef>
-          <a:fontRef idx="minor">
-            <a:schemeClr val="lt1"/>
-          </a:fontRef>
-        </p:style>
-        <p:txBody>
-          <a:bodyPr rtlCol="0" anchor="ctr"/>
-          <a:lstStyle/>
-          <a:p>
-            <a:pPr algn="ctr">
-              <a:defRPr>
-                <a:latin typeface="Inter"/>
-              </a:defRPr>
-            </a:pPr>
-          </a:p>
-        </p:txBody>
-      </p:sp>
-      <p:sp>
-        <p:nvSpPr>
-          <p:cNvPr id="8" name="TextBox 7"/>
-          <p:cNvSpPr txBox="1"/>
-          <p:nvPr/>
-        </p:nvSpPr>
-        <p:spPr>
-          <a:xfrm>
-            <a:off x="11045952" y="557784"/>
-            <a:ext cx="475488" cy="182880"/>
-          </a:xfrm>
-          <a:prstGeom prst="rect">
-            <a:avLst/>
-          </a:prstGeom>
-          <a:noFill/>
-        </p:spPr>
-        <p:txBody>
-          <a:bodyPr wrap="none" lIns="9144" rIns="9144" tIns="9144" bIns="9144" anchor="t">
-            <a:spAutoFit/>
-          </a:bodyPr>
-          <a:lstStyle/>
-          <a:p>
-            <a:pPr algn="ctr">
-              <a:spcAft>
-                <a:spcPts val="0"/>
-              </a:spcAft>
-              <a:defRPr sz="1000" b="1">
-                <a:solidFill>
-                  <a:srgbClr val="0D1117"/>
-                </a:solidFill>
-                <a:latin typeface="Inter"/>
-              </a:defRPr>
-            </a:pPr>
-            <a:r>
-              <a:rPr>
-                <a:latin typeface="Inter"/>
-              </a:rPr>
-              <a:t>5</a:t>
-            </a:r>
-          </a:p>
-        </p:txBody>
-      </p:sp>
-      <p:sp>
-        <p:nvSpPr>
-          <p:cNvPr id="9" name="TextBox 8"/>
-          <p:cNvSpPr txBox="1"/>
-          <p:nvPr/>
-        </p:nvSpPr>
-        <p:spPr>
-          <a:xfrm>
-            <a:off x="640080" y="1325880"/>
-            <a:ext cx="10908792" cy="201168"/>
-          </a:xfrm>
-          <a:prstGeom prst="rect">
-            <a:avLst/>
-          </a:prstGeom>
-          <a:noFill/>
-        </p:spPr>
-        <p:txBody>
-          <a:bodyPr wrap="none" lIns="9144" rIns="9144" tIns="9144" bIns="9144" anchor="t">
-            <a:spAutoFit/>
-          </a:bodyPr>
-          <a:lstStyle/>
-          <a:p>
-            <a:pPr algn="l">
-              <a:spcAft>
-                <a:spcPts val="0"/>
-              </a:spcAft>
-              <a:defRPr sz="720" b="1">
-                <a:solidFill>
-                  <a:srgbClr val="4A5563"/>
-                </a:solidFill>
-                <a:latin typeface="Inter"/>
-              </a:defRPr>
-            </a:pPr>
-            <a:r>
-              <a:rPr>
-                <a:latin typeface="Inter"/>
-              </a:rPr>
-              <a:t>KS-PME BY BENCHMARK PATH</a:t>
-            </a:r>
-          </a:p>
-        </p:txBody>
-      </p:sp>
-      <p:graphicFrame>
-        <p:nvGraphicFramePr>
-          <p:cNvPr id="10" name="Chart 9"/>
-          <p:cNvGraphicFramePr>
-            <a:graphicFrameLocks noGrp="1"/>
-          </p:cNvGraphicFramePr>
-          <p:nvPr/>
-        </p:nvGraphicFramePr>
-        <p:xfrm>
-          <a:off x="640080" y="1600200"/>
-          <a:ext cx="10908792" cy="4617720"/>
-        </p:xfrm>
-        <a:graphic>
-          <a:graphicData uri="http://schemas.openxmlformats.org/drawingml/2006/chart">
-            <c:chart xmlns:c="http://schemas.openxmlformats.org/drawingml/2006/chart" r:id="rId2"/>
-          </a:graphicData>
-        </a:graphic>
-      </p:graphicFrame>
-      <p:sp>
-        <p:nvSpPr>
-          <p:cNvPr id="11" name="Rectangle 10"/>
-          <p:cNvSpPr/>
-          <p:nvPr/>
-        </p:nvSpPr>
-        <p:spPr>
-          <a:xfrm>
-            <a:off x="640080" y="6446520"/>
-            <a:ext cx="10908792" cy="9144"/>
-          </a:xfrm>
-          <a:prstGeom prst="rect">
-            <a:avLst/>
-          </a:prstGeom>
-          <a:solidFill>
-            <a:srgbClr val="E3E7EC"/>
-          </a:solidFill>
-          <a:ln>
-            <a:solidFill>
-              <a:srgbClr val="E3E7EC"/>
-            </a:solidFill>
-          </a:ln>
-        </p:spPr>
-        <p:style>
-          <a:lnRef idx="1">
-            <a:schemeClr val="accent1"/>
-          </a:lnRef>
-          <a:fillRef idx="3">
-            <a:schemeClr val="accent1"/>
-          </a:fillRef>
-          <a:effectRef idx="2">
-            <a:schemeClr val="accent1"/>
-          </a:effectRef>
-          <a:fontRef idx="minor">
-            <a:schemeClr val="lt1"/>
-          </a:fontRef>
-        </p:style>
-        <p:txBody>
-          <a:bodyPr rtlCol="0" anchor="ctr"/>
-          <a:lstStyle/>
-          <a:p>
-            <a:pPr algn="ctr">
-              <a:defRPr>
-                <a:latin typeface="Inter"/>
-              </a:defRPr>
-            </a:pPr>
-          </a:p>
-        </p:txBody>
-      </p:sp>
-      <p:sp>
-        <p:nvSpPr>
-          <p:cNvPr id="12" name="TextBox 11"/>
-          <p:cNvSpPr txBox="1"/>
-          <p:nvPr/>
-        </p:nvSpPr>
-        <p:spPr>
-          <a:xfrm>
-            <a:off x="640080" y="6501384"/>
-            <a:ext cx="4297680" cy="146304"/>
-          </a:xfrm>
-          <a:prstGeom prst="rect">
-            <a:avLst/>
-          </a:prstGeom>
-          <a:noFill/>
-        </p:spPr>
-        <p:txBody>
-          <a:bodyPr wrap="none" lIns="9144" rIns="9144" tIns="9144" bIns="9144" anchor="t">
-            <a:spAutoFit/>
-          </a:bodyPr>
-          <a:lstStyle/>
-          <a:p>
-            <a:pPr algn="l">
-              <a:spcAft>
-                <a:spcPts val="0"/>
-              </a:spcAft>
-              <a:defRPr sz="650" b="0">
-                <a:solidFill>
-                  <a:srgbClr val="8A94A1"/>
-                </a:solidFill>
-                <a:latin typeface="Inter"/>
-              </a:defRPr>
-            </a:pPr>
-            <a:r>
-              <a:rPr>
-                <a:latin typeface="Inter"/>
-              </a:rPr>
-              <a:t>Sources: S6 · S7</a:t>
-            </a:r>
-          </a:p>
-        </p:txBody>
-      </p:sp>
-      <p:sp>
-        <p:nvSpPr>
-          <p:cNvPr id="13" name="TextBox 12"/>
-          <p:cNvSpPr txBox="1"/>
-          <p:nvPr/>
-        </p:nvSpPr>
-        <p:spPr>
-          <a:xfrm>
-            <a:off x="4480560" y="6501384"/>
-            <a:ext cx="5303520" cy="146304"/>
-          </a:xfrm>
-          <a:prstGeom prst="rect">
-            <a:avLst/>
-          </a:prstGeom>
-          <a:noFill/>
-        </p:spPr>
-        <p:txBody>
-          <a:bodyPr wrap="none" lIns="9144" rIns="9144" tIns="9144" bIns="9144" anchor="t">
-            <a:spAutoFit/>
-          </a:bodyPr>
-          <a:lstStyle/>
-          <a:p>
-            <a:pPr algn="ctr">
-              <a:spcAft>
-                <a:spcPts val="0"/>
-              </a:spcAft>
-              <a:defRPr sz="650" b="0">
-                <a:solidFill>
-                  <a:srgbClr val="8A94A1"/>
-                </a:solidFill>
-                <a:latin typeface="Inter"/>
-              </a:defRPr>
-            </a:pPr>
-            <a:r>
-              <a:rPr>
-                <a:latin typeface="Inter"/>
-              </a:rPr>
-              <a:t>Confidential — private markets review · Data as of 2025-12-31</a:t>
-            </a:r>
-          </a:p>
-        </p:txBody>
-      </p:sp>
-      <p:sp>
-        <p:nvSpPr>
-          <p:cNvPr id="14" name="TextBox 13"/>
-          <p:cNvSpPr txBox="1"/>
-          <p:nvPr/>
-        </p:nvSpPr>
-        <p:spPr>
-          <a:xfrm>
-            <a:off x="10287000" y="6501384"/>
-            <a:ext cx="1261872" cy="146304"/>
-          </a:xfrm>
-          <a:prstGeom prst="rect">
-            <a:avLst/>
-          </a:prstGeom>
-          <a:noFill/>
-        </p:spPr>
-        <p:txBody>
-          <a:bodyPr wrap="none" lIns="9144" rIns="9144" tIns="9144" bIns="9144" anchor="t">
-            <a:spAutoFit/>
-          </a:bodyPr>
-          <a:lstStyle/>
-          <a:p>
-            <a:pPr algn="r">
-              <a:spcAft>
-                <a:spcPts val="0"/>
-              </a:spcAft>
-              <a:defRPr sz="650" b="0">
-                <a:solidFill>
-                  <a:srgbClr val="8A94A1"/>
-                </a:solidFill>
-                <a:latin typeface="Inter"/>
-              </a:defRPr>
-            </a:pPr>
-            <a:r>
-              <a:rPr>
-                <a:latin typeface="Inter"/>
-              </a:rPr>
-              <a:t>15</a:t>
-            </a:r>
-          </a:p>
-        </p:txBody>
-      </p:sp>
-    </p:spTree>
-  </p:cSld>
-  <p:clrMapOvr>
-    <a:masterClrMapping/>
-  </p:clrMapOvr>
-</p:sld>
-</file>
-
-<file path=ppt/slides/slide16.xml><?xml version="1.0" encoding="utf-8"?>
-<p:sld xmlns:a="http://schemas.openxmlformats.org/drawingml/2006/main" xmlns:p="http://schemas.openxmlformats.org/presentationml/2006/main" xmlns:r="http://schemas.openxmlformats.org/officeDocument/2006/relationships">
-  <p:cSld>
-    <p:spTree>
-      <p:nvGrpSpPr>
-        <p:cNvPr id="1" name=""/>
-        <p:cNvGrpSpPr/>
-        <p:nvPr/>
-      </p:nvGrpSpPr>
-      <p:grpSpPr/>
-      <p:sp>
-        <p:nvSpPr>
-          <p:cNvPr id="2" name="Rectangle 1"/>
-          <p:cNvSpPr/>
-          <p:nvPr/>
-        </p:nvSpPr>
-        <p:spPr>
-          <a:xfrm>
-            <a:off x="0" y="0"/>
-            <a:ext cx="12191695" cy="6858000"/>
-          </a:xfrm>
-          <a:prstGeom prst="rect">
-            <a:avLst/>
-          </a:prstGeom>
-          <a:solidFill>
-            <a:srgbClr val="FFFFFF"/>
-          </a:solidFill>
-          <a:ln>
-            <a:solidFill>
-              <a:srgbClr val="FFFFFF"/>
-            </a:solidFill>
-          </a:ln>
-        </p:spPr>
-        <p:style>
-          <a:lnRef idx="1">
-            <a:schemeClr val="accent1"/>
-          </a:lnRef>
-          <a:fillRef idx="3">
-            <a:schemeClr val="accent1"/>
-          </a:fillRef>
-          <a:effectRef idx="2">
-            <a:schemeClr val="accent1"/>
-          </a:effectRef>
-          <a:fontRef idx="minor">
-            <a:schemeClr val="lt1"/>
-          </a:fontRef>
-        </p:style>
-        <p:txBody>
-          <a:bodyPr rtlCol="0" anchor="ctr"/>
-          <a:lstStyle/>
-          <a:p>
-            <a:pPr algn="ctr">
-              <a:defRPr>
-                <a:latin typeface="Inter"/>
-              </a:defRPr>
-            </a:pPr>
-          </a:p>
-        </p:txBody>
-      </p:sp>
-      <p:sp>
-        <p:nvSpPr>
-          <p:cNvPr id="3" name="TextBox 2"/>
-          <p:cNvSpPr txBox="1"/>
-          <p:nvPr/>
-        </p:nvSpPr>
-        <p:spPr>
-          <a:xfrm>
-            <a:off x="640080" y="329184"/>
-            <a:ext cx="5303520" cy="182880"/>
-          </a:xfrm>
-          <a:prstGeom prst="rect">
-            <a:avLst/>
-          </a:prstGeom>
-          <a:noFill/>
-        </p:spPr>
-        <p:txBody>
-          <a:bodyPr wrap="none" lIns="9144" rIns="9144" tIns="9144" bIns="9144" anchor="t">
-            <a:spAutoFit/>
-          </a:bodyPr>
-          <a:lstStyle/>
-          <a:p>
-            <a:pPr algn="l">
-              <a:spcAft>
-                <a:spcPts val="0"/>
-              </a:spcAft>
-              <a:defRPr sz="750" b="1">
-                <a:solidFill>
-                  <a:srgbClr val="4F6B00"/>
-                </a:solidFill>
-                <a:latin typeface="Inter"/>
-              </a:defRPr>
-            </a:pPr>
-            <a:r>
-              <a:rPr>
-                <a:latin typeface="Inter"/>
-              </a:rPr>
-              <a:t>BOTH SEPARATELY BUILT PATHS REMAIN ABOVE PARITY</a:t>
-            </a:r>
-          </a:p>
-        </p:txBody>
-      </p:sp>
-      <p:sp>
-        <p:nvSpPr>
-          <p:cNvPr id="4" name="TextBox 3"/>
-          <p:cNvSpPr txBox="1"/>
-          <p:nvPr/>
-        </p:nvSpPr>
-        <p:spPr>
-          <a:xfrm>
-            <a:off x="5897880" y="310896"/>
-            <a:ext cx="4800600" cy="256032"/>
-          </a:xfrm>
-          <a:prstGeom prst="rect">
-            <a:avLst/>
-          </a:prstGeom>
-          <a:noFill/>
-        </p:spPr>
-        <p:txBody>
-          <a:bodyPr wrap="none" lIns="9144" rIns="9144" tIns="9144" bIns="9144" anchor="t">
-            <a:spAutoFit/>
-          </a:bodyPr>
-          <a:lstStyle/>
-          <a:p>
-            <a:pPr algn="r">
-              <a:spcAft>
-                <a:spcPts val="0"/>
-              </a:spcAft>
-              <a:defRPr sz="680" b="1">
-                <a:solidFill>
-                  <a:srgbClr val="4F6B00"/>
-                </a:solidFill>
-                <a:latin typeface="Inter"/>
-              </a:defRPr>
-            </a:pPr>
-            <a:r>
-              <a:rPr>
-                <a:latin typeface="Inter"/>
-              </a:rPr>
-              <a:t>Illustrative, Gradient Maintained — demo data, not the client's holdings or managers</a:t>
-            </a:r>
-          </a:p>
-        </p:txBody>
-      </p:sp>
-      <p:sp>
-        <p:nvSpPr>
-          <p:cNvPr id="5" name="TextBox 4"/>
-          <p:cNvSpPr txBox="1"/>
-          <p:nvPr/>
-        </p:nvSpPr>
-        <p:spPr>
-          <a:xfrm>
-            <a:off x="640080" y="566928"/>
-            <a:ext cx="10058400" cy="530352"/>
-          </a:xfrm>
-          <a:prstGeom prst="rect">
-            <a:avLst/>
-          </a:prstGeom>
-          <a:noFill/>
-        </p:spPr>
-        <p:txBody>
-          <a:bodyPr wrap="none" lIns="9144" rIns="9144" tIns="9144" bIns="9144" anchor="t">
-            <a:spAutoFit/>
-          </a:bodyPr>
-          <a:lstStyle/>
-          <a:p>
-            <a:pPr algn="l">
-              <a:spcAft>
-                <a:spcPts val="0"/>
-              </a:spcAft>
-              <a:defRPr sz="2300" b="1">
-                <a:solidFill>
-                  <a:srgbClr val="0D1117"/>
-                </a:solidFill>
-                <a:latin typeface="Inter"/>
-              </a:defRPr>
-            </a:pPr>
-            <a:r>
-              <a:rPr>
-                <a:latin typeface="Inter"/>
-              </a:rPr>
-              <a:t>Benchmark sensitivity — continued</a:t>
-            </a:r>
-          </a:p>
-        </p:txBody>
-      </p:sp>
-      <p:sp>
-        <p:nvSpPr>
-          <p:cNvPr id="6" name="Rectangle 5"/>
-          <p:cNvSpPr/>
-          <p:nvPr/>
-        </p:nvSpPr>
-        <p:spPr>
-          <a:xfrm>
-            <a:off x="640080" y="1115568"/>
-            <a:ext cx="10908792" cy="18288"/>
-          </a:xfrm>
-          <a:prstGeom prst="rect">
-            <a:avLst/>
-          </a:prstGeom>
-          <a:solidFill>
-            <a:srgbClr val="0D1117"/>
-          </a:solidFill>
-          <a:ln>
-            <a:solidFill>
-              <a:srgbClr val="0D1117"/>
-            </a:solidFill>
-          </a:ln>
-        </p:spPr>
-        <p:style>
-          <a:lnRef idx="1">
-            <a:schemeClr val="accent1"/>
-          </a:lnRef>
-          <a:fillRef idx="3">
-            <a:schemeClr val="accent1"/>
-          </a:fillRef>
-          <a:effectRef idx="2">
-            <a:schemeClr val="accent1"/>
-          </a:effectRef>
-          <a:fontRef idx="minor">
-            <a:schemeClr val="lt1"/>
-          </a:fontRef>
-        </p:style>
-        <p:txBody>
-          <a:bodyPr rtlCol="0" anchor="ctr"/>
-          <a:lstStyle/>
-          <a:p>
-            <a:pPr algn="ctr">
-              <a:defRPr>
-                <a:latin typeface="Inter"/>
-              </a:defRPr>
-            </a:pPr>
-          </a:p>
-        </p:txBody>
-      </p:sp>
-      <p:sp>
-        <p:nvSpPr>
-          <p:cNvPr id="7" name="Rectangle 6"/>
-          <p:cNvSpPr/>
-          <p:nvPr/>
-        </p:nvSpPr>
-        <p:spPr>
-          <a:xfrm>
-            <a:off x="11018520" y="502920"/>
-            <a:ext cx="530352" cy="393192"/>
-          </a:xfrm>
-          <a:prstGeom prst="rect">
-            <a:avLst/>
-          </a:prstGeom>
-          <a:solidFill>
-            <a:srgbClr val="C6F432"/>
-          </a:solidFill>
-          <a:ln>
-            <a:solidFill>
-              <a:srgbClr val="C6F432"/>
-            </a:solidFill>
-          </a:ln>
-        </p:spPr>
-        <p:style>
-          <a:lnRef idx="1">
-            <a:schemeClr val="accent1"/>
-          </a:lnRef>
-          <a:fillRef idx="3">
-            <a:schemeClr val="accent1"/>
-          </a:fillRef>
-          <a:effectRef idx="2">
-            <a:schemeClr val="accent1"/>
-          </a:effectRef>
-          <a:fontRef idx="minor">
-            <a:schemeClr val="lt1"/>
-          </a:fontRef>
-        </p:style>
-        <p:txBody>
-          <a:bodyPr rtlCol="0" anchor="ctr"/>
-          <a:lstStyle/>
-          <a:p>
-            <a:pPr algn="ctr">
-              <a:defRPr>
-                <a:latin typeface="Inter"/>
-              </a:defRPr>
-            </a:pPr>
-          </a:p>
-        </p:txBody>
-      </p:sp>
-      <p:sp>
-        <p:nvSpPr>
-          <p:cNvPr id="8" name="TextBox 7"/>
-          <p:cNvSpPr txBox="1"/>
-          <p:nvPr/>
-        </p:nvSpPr>
-        <p:spPr>
-          <a:xfrm>
-            <a:off x="11045952" y="557784"/>
-            <a:ext cx="475488" cy="182880"/>
-          </a:xfrm>
-          <a:prstGeom prst="rect">
-            <a:avLst/>
-          </a:prstGeom>
-          <a:noFill/>
-        </p:spPr>
-        <p:txBody>
-          <a:bodyPr wrap="none" lIns="9144" rIns="9144" tIns="9144" bIns="9144" anchor="t">
-            <a:spAutoFit/>
-          </a:bodyPr>
-          <a:lstStyle/>
-          <a:p>
-            <a:pPr algn="ctr">
-              <a:spcAft>
-                <a:spcPts val="0"/>
-              </a:spcAft>
-              <a:defRPr sz="1000" b="1">
-                <a:solidFill>
-                  <a:srgbClr val="0D1117"/>
-                </a:solidFill>
-                <a:latin typeface="Inter"/>
-              </a:defRPr>
-            </a:pPr>
-            <a:r>
-              <a:rPr>
-                <a:latin typeface="Inter"/>
-              </a:rPr>
-              <a:t>5</a:t>
-            </a:r>
-          </a:p>
-        </p:txBody>
-      </p:sp>
-      <p:sp>
-        <p:nvSpPr>
-          <p:cNvPr id="9" name="TextBox 8"/>
-          <p:cNvSpPr txBox="1"/>
-          <p:nvPr/>
-        </p:nvSpPr>
-        <p:spPr>
-          <a:xfrm>
-            <a:off x="640080" y="1325880"/>
-            <a:ext cx="10908792" cy="201168"/>
-          </a:xfrm>
-          <a:prstGeom prst="rect">
-            <a:avLst/>
-          </a:prstGeom>
-          <a:noFill/>
-        </p:spPr>
-        <p:txBody>
-          <a:bodyPr wrap="none" lIns="9144" rIns="9144" tIns="9144" bIns="9144" anchor="t">
-            <a:spAutoFit/>
-          </a:bodyPr>
-          <a:lstStyle/>
-          <a:p>
-            <a:pPr algn="l">
-              <a:spcAft>
-                <a:spcPts val="0"/>
-              </a:spcAft>
-              <a:defRPr sz="720" b="1">
-                <a:solidFill>
-                  <a:srgbClr val="4A5563"/>
-                </a:solidFill>
-                <a:latin typeface="Inter"/>
-              </a:defRPr>
-            </a:pPr>
-            <a:r>
-              <a:rPr>
-                <a:latin typeface="Inter"/>
-              </a:rPr>
               <a:t>PRIMARY AND SENSITIVITY BENCHMARK RESULTS</a:t>
             </a:r>
           </a:p>
@@ -10112,7 +7039,7 @@
         </p:nvGraphicFramePr>
         <p:xfrm>
           <a:off x="640080" y="1600200"/>
-          <a:ext cx="10908790" cy="1818128"/>
+          <a:ext cx="10908790" cy="2253036"/>
         </p:xfrm>
         <a:graphic>
           <a:graphicData uri="http://schemas.openxmlformats.org/drawingml/2006/table">
@@ -10128,7 +7055,7 @@
                 <a:gridCol w="1779422"/>
                 <a:gridCol w="1779422"/>
               </a:tblGrid>
-              <a:tr h="606042">
+              <a:tr h="751012">
                 <a:tc>
                   <a:txBody>
                     <a:bodyPr/>
@@ -10292,7 +7219,7 @@
                   </a:tcPr>
                 </a:tc>
               </a:tr>
-              <a:tr h="606042">
+              <a:tr h="751012">
                 <a:tc>
                   <a:txBody>
                     <a:bodyPr/>
@@ -10456,7 +7383,7 @@
                   </a:tcPr>
                 </a:tc>
               </a:tr>
-              <a:tr h="606044">
+              <a:tr h="751012">
                 <a:tc>
                   <a:txBody>
                     <a:bodyPr/>
@@ -10632,7 +7559,7 @@
         </p:nvSpPr>
         <p:spPr>
           <a:xfrm>
-            <a:off x="640080" y="3436616"/>
+            <a:off x="640080" y="3871524"/>
             <a:ext cx="10908792" cy="164592"/>
           </a:xfrm>
           <a:prstGeom prst="rect">
@@ -10674,8 +7601,8 @@
         </p:nvSpPr>
         <p:spPr>
           <a:xfrm>
-            <a:off x="640080" y="3729224"/>
-            <a:ext cx="10908792" cy="2488695"/>
+            <a:off x="640080" y="4164132"/>
+            <a:ext cx="10908792" cy="2053787"/>
           </a:xfrm>
           <a:prstGeom prst="rect">
             <a:avLst/>
@@ -10723,8 +7650,8 @@
         </p:nvSpPr>
         <p:spPr>
           <a:xfrm>
-            <a:off x="640080" y="3729224"/>
-            <a:ext cx="54864" cy="2488695"/>
+            <a:off x="640080" y="4164132"/>
+            <a:ext cx="54864" cy="2053787"/>
           </a:xfrm>
           <a:prstGeom prst="rect">
             <a:avLst/>
@@ -10772,7 +7699,7 @@
         </p:nvSpPr>
         <p:spPr>
           <a:xfrm>
-            <a:off x="804671" y="3838952"/>
+            <a:off x="804671" y="4273860"/>
             <a:ext cx="10616184" cy="228600"/>
           </a:xfrm>
           <a:prstGeom prst="rect">
@@ -10814,8 +7741,8 @@
         </p:nvSpPr>
         <p:spPr>
           <a:xfrm>
-            <a:off x="804671" y="4122416"/>
-            <a:ext cx="10616184" cy="2004063"/>
+            <a:off x="804671" y="4557324"/>
+            <a:ext cx="10616184" cy="1569155"/>
           </a:xfrm>
           <a:prstGeom prst="rect">
             <a:avLst/>
@@ -11018,7 +7945,7 @@
               <a:rPr>
                 <a:latin typeface="Inter"/>
               </a:rPr>
-              <a:t>16</a:t>
+              <a:t>11</a:t>
             </a:r>
           </a:p>
         </p:txBody>
@@ -11031,7 +7958,7 @@
 </p:sld>
 </file>
 
-<file path=ppt/slides/slide17.xml><?xml version="1.0" encoding="utf-8"?>
+<file path=ppt/slides/slide12.xml><?xml version="1.0" encoding="utf-8"?>
 <p:sld xmlns:a="http://schemas.openxmlformats.org/drawingml/2006/main" xmlns:p="http://schemas.openxmlformats.org/presentationml/2006/main" xmlns:r="http://schemas.openxmlformats.org/officeDocument/2006/relationships">
   <p:cSld>
     <p:spTree>
@@ -11407,7 +8334,7 @@
         <p:spPr>
           <a:xfrm>
             <a:off x="640080" y="1600200"/>
-            <a:ext cx="10908792" cy="1789365"/>
+            <a:ext cx="10908792" cy="1348374"/>
           </a:xfrm>
           <a:prstGeom prst="rect">
             <a:avLst/>
@@ -11486,8 +8413,8 @@
         </p:nvSpPr>
         <p:spPr>
           <a:xfrm>
-            <a:off x="640080" y="3499293"/>
-            <a:ext cx="10908792" cy="2718626"/>
+            <a:off x="640080" y="3058302"/>
+            <a:ext cx="10908792" cy="3159617"/>
           </a:xfrm>
           <a:prstGeom prst="rect">
             <a:avLst/>
@@ -11749,7 +8676,7 @@
               <a:rPr>
                 <a:latin typeface="Inter"/>
               </a:rPr>
-              <a:t>17</a:t>
+              <a:t>12</a:t>
             </a:r>
           </a:p>
         </p:txBody>
@@ -11762,7 +8689,7 @@
 </p:sld>
 </file>
 
-<file path=ppt/slides/slide18.xml><?xml version="1.0" encoding="utf-8"?>
+<file path=ppt/slides/slide13.xml><?xml version="1.0" encoding="utf-8"?>
 <p:sld xmlns:a="http://schemas.openxmlformats.org/drawingml/2006/main" xmlns:p="http://schemas.openxmlformats.org/presentationml/2006/main" xmlns:r="http://schemas.openxmlformats.org/officeDocument/2006/relationships">
   <p:cSld>
     <p:spTree>
@@ -14292,7 +11219,7 @@
               <a:rPr>
                 <a:latin typeface="Inter"/>
               </a:rPr>
-              <a:t>18</a:t>
+              <a:t>13</a:t>
             </a:r>
           </a:p>
         </p:txBody>
@@ -14305,7 +11232,7 @@
 </p:sld>
 </file>
 
-<file path=ppt/slides/slide19.xml><?xml version="1.0" encoding="utf-8"?>
+<file path=ppt/slides/slide14.xml><?xml version="1.0" encoding="utf-8"?>
 <p:sld xmlns:a="http://schemas.openxmlformats.org/drawingml/2006/main" xmlns:p="http://schemas.openxmlformats.org/presentationml/2006/main" xmlns:r="http://schemas.openxmlformats.org/officeDocument/2006/relationships">
   <p:cSld>
     <p:spTree>
@@ -15865,7 +12792,7 @@
               <a:rPr>
                 <a:latin typeface="Inter"/>
               </a:rPr>
-              <a:t>19</a:t>
+              <a:t>14</a:t>
             </a:r>
           </a:p>
         </p:txBody>
@@ -16212,7 +13139,7 @@
         <p:spPr>
           <a:xfrm>
             <a:off x="640080" y="1325880"/>
-            <a:ext cx="10908792" cy="1592216"/>
+            <a:ext cx="10908792" cy="1557527"/>
           </a:xfrm>
           <a:prstGeom prst="rect">
             <a:avLst/>
@@ -16261,7 +13188,7 @@
         <p:spPr>
           <a:xfrm>
             <a:off x="640080" y="1325880"/>
-            <a:ext cx="54864" cy="1592216"/>
+            <a:ext cx="54864" cy="1557527"/>
           </a:xfrm>
           <a:prstGeom prst="rect">
             <a:avLst/>
@@ -16352,7 +13279,7 @@
         <p:spPr>
           <a:xfrm>
             <a:off x="804671" y="1719072"/>
-            <a:ext cx="10616184" cy="1107584"/>
+            <a:ext cx="10616184" cy="1072895"/>
           </a:xfrm>
           <a:prstGeom prst="rect">
             <a:avLst/>
@@ -16393,8 +13320,8 @@
         </p:nvSpPr>
         <p:spPr>
           <a:xfrm>
-            <a:off x="640080" y="3027824"/>
-            <a:ext cx="10908792" cy="1670266"/>
+            <a:off x="640080" y="2993136"/>
+            <a:ext cx="10908792" cy="1557527"/>
           </a:xfrm>
           <a:prstGeom prst="rect">
             <a:avLst/>
@@ -16442,8 +13369,8 @@
         </p:nvSpPr>
         <p:spPr>
           <a:xfrm>
-            <a:off x="640080" y="3027824"/>
-            <a:ext cx="54864" cy="1670266"/>
+            <a:off x="640080" y="2993136"/>
+            <a:ext cx="54864" cy="1557527"/>
           </a:xfrm>
           <a:prstGeom prst="rect">
             <a:avLst/>
@@ -16491,7 +13418,7 @@
         </p:nvSpPr>
         <p:spPr>
           <a:xfrm>
-            <a:off x="804671" y="3137552"/>
+            <a:off x="804671" y="3102864"/>
             <a:ext cx="10616184" cy="228600"/>
           </a:xfrm>
           <a:prstGeom prst="rect">
@@ -16533,8 +13460,8 @@
         </p:nvSpPr>
         <p:spPr>
           <a:xfrm>
-            <a:off x="804671" y="3421016"/>
-            <a:ext cx="10616184" cy="1185634"/>
+            <a:off x="804671" y="3386328"/>
+            <a:ext cx="10616184" cy="1072895"/>
           </a:xfrm>
           <a:prstGeom prst="rect">
             <a:avLst/>
@@ -16575,8 +13502,8 @@
         </p:nvSpPr>
         <p:spPr>
           <a:xfrm>
-            <a:off x="640080" y="4807819"/>
-            <a:ext cx="10908792" cy="1410100"/>
+            <a:off x="640080" y="4660392"/>
+            <a:ext cx="10908792" cy="1557527"/>
           </a:xfrm>
           <a:prstGeom prst="rect">
             <a:avLst/>
@@ -16624,8 +13551,8 @@
         </p:nvSpPr>
         <p:spPr>
           <a:xfrm>
-            <a:off x="640080" y="4807819"/>
-            <a:ext cx="54864" cy="1410100"/>
+            <a:off x="640080" y="4660392"/>
+            <a:ext cx="54864" cy="1557527"/>
           </a:xfrm>
           <a:prstGeom prst="rect">
             <a:avLst/>
@@ -16673,7 +13600,7 @@
         </p:nvSpPr>
         <p:spPr>
           <a:xfrm>
-            <a:off x="804671" y="4917547"/>
+            <a:off x="804671" y="4770120"/>
             <a:ext cx="10616184" cy="228600"/>
           </a:xfrm>
           <a:prstGeom prst="rect">
@@ -16715,8 +13642,8 @@
         </p:nvSpPr>
         <p:spPr>
           <a:xfrm>
-            <a:off x="804671" y="5201011"/>
-            <a:ext cx="10616184" cy="925468"/>
+            <a:off x="804671" y="5053584"/>
+            <a:ext cx="10616184" cy="1072896"/>
           </a:xfrm>
           <a:prstGeom prst="rect">
             <a:avLst/>
@@ -18216,7 +15143,7 @@
         <p:spPr>
           <a:xfrm>
             <a:off x="640080" y="1325880"/>
-            <a:ext cx="10908792" cy="201168"/>
+            <a:ext cx="5239512" cy="201168"/>
           </a:xfrm>
           <a:prstGeom prst="rect">
             <a:avLst/>
@@ -18259,7 +15186,7 @@
         </p:nvGraphicFramePr>
         <p:xfrm>
           <a:off x="640080" y="1600200"/>
-          <a:ext cx="10908792" cy="4617720"/>
+          <a:ext cx="5239512" cy="4617720"/>
         </p:xfrm>
         <a:graphic>
           <a:graphicData uri="http://schemas.openxmlformats.org/drawingml/2006/chart">
@@ -18275,8 +15202,8 @@
         </p:nvSpPr>
         <p:spPr>
           <a:xfrm>
-            <a:off x="640080" y="6446520"/>
-            <a:ext cx="10908792" cy="9144"/>
+            <a:off x="6080760" y="1325880"/>
+            <a:ext cx="9144" cy="4892040"/>
           </a:xfrm>
           <a:prstGeom prst="rect">
             <a:avLst/>
@@ -18324,6 +15251,115 @@
         </p:nvSpPr>
         <p:spPr>
           <a:xfrm>
+            <a:off x="6309360" y="1325880"/>
+            <a:ext cx="5239512" cy="201168"/>
+          </a:xfrm>
+          <a:prstGeom prst="rect">
+            <a:avLst/>
+          </a:prstGeom>
+          <a:noFill/>
+        </p:spPr>
+        <p:txBody>
+          <a:bodyPr wrap="none" lIns="9144" rIns="9144" tIns="9144" bIns="9144" anchor="t">
+            <a:spAutoFit/>
+          </a:bodyPr>
+          <a:lstStyle/>
+          <a:p>
+            <a:pPr algn="l">
+              <a:spcAft>
+                <a:spcPts val="0"/>
+              </a:spcAft>
+              <a:defRPr sz="720" b="1">
+                <a:solidFill>
+                  <a:srgbClr val="4A5563"/>
+                </a:solidFill>
+                <a:latin typeface="Inter"/>
+              </a:defRPr>
+            </a:pPr>
+            <a:r>
+              <a:rPr>
+                <a:latin typeface="Inter"/>
+              </a:rPr>
+              <a:t>CONTEXT ONLY — NOT A PME INPUT · SECTOR MIX [S3]</a:t>
+            </a:r>
+          </a:p>
+        </p:txBody>
+      </p:sp>
+      <p:graphicFrame>
+        <p:nvGraphicFramePr>
+          <p:cNvPr id="13" name="Chart 12"/>
+          <p:cNvGraphicFramePr>
+            <a:graphicFrameLocks noGrp="1"/>
+          </p:cNvGraphicFramePr>
+          <p:nvPr/>
+        </p:nvGraphicFramePr>
+        <p:xfrm>
+          <a:off x="6309360" y="1600200"/>
+          <a:ext cx="5239512" cy="4617720"/>
+        </p:xfrm>
+        <a:graphic>
+          <a:graphicData uri="http://schemas.openxmlformats.org/drawingml/2006/chart">
+            <c:chart xmlns:c="http://schemas.openxmlformats.org/drawingml/2006/chart" r:id="rId3"/>
+          </a:graphicData>
+        </a:graphic>
+      </p:graphicFrame>
+      <p:sp>
+        <p:nvSpPr>
+          <p:cNvPr id="14" name="Rectangle 13"/>
+          <p:cNvSpPr/>
+          <p:nvPr/>
+        </p:nvSpPr>
+        <p:spPr>
+          <a:xfrm>
+            <a:off x="640080" y="6446520"/>
+            <a:ext cx="10908792" cy="9144"/>
+          </a:xfrm>
+          <a:prstGeom prst="rect">
+            <a:avLst/>
+          </a:prstGeom>
+          <a:solidFill>
+            <a:srgbClr val="E3E7EC"/>
+          </a:solidFill>
+          <a:ln>
+            <a:solidFill>
+              <a:srgbClr val="E3E7EC"/>
+            </a:solidFill>
+          </a:ln>
+        </p:spPr>
+        <p:style>
+          <a:lnRef idx="1">
+            <a:schemeClr val="accent1"/>
+          </a:lnRef>
+          <a:fillRef idx="3">
+            <a:schemeClr val="accent1"/>
+          </a:fillRef>
+          <a:effectRef idx="2">
+            <a:schemeClr val="accent1"/>
+          </a:effectRef>
+          <a:fontRef idx="minor">
+            <a:schemeClr val="lt1"/>
+          </a:fontRef>
+        </p:style>
+        <p:txBody>
+          <a:bodyPr rtlCol="0" anchor="ctr"/>
+          <a:lstStyle/>
+          <a:p>
+            <a:pPr algn="ctr">
+              <a:defRPr>
+                <a:latin typeface="Inter"/>
+              </a:defRPr>
+            </a:pPr>
+          </a:p>
+        </p:txBody>
+      </p:sp>
+      <p:sp>
+        <p:nvSpPr>
+          <p:cNvPr id="15" name="TextBox 14"/>
+          <p:cNvSpPr txBox="1"/>
+          <p:nvPr/>
+        </p:nvSpPr>
+        <p:spPr>
+          <a:xfrm>
             <a:off x="640080" y="6501384"/>
             <a:ext cx="4297680" cy="146304"/>
           </a:xfrm>
@@ -18360,7 +15396,7 @@
       </p:sp>
       <p:sp>
         <p:nvSpPr>
-          <p:cNvPr id="13" name="TextBox 12"/>
+          <p:cNvPr id="16" name="TextBox 15"/>
           <p:cNvSpPr txBox="1"/>
           <p:nvPr/>
         </p:nvSpPr>
@@ -18402,7 +15438,7 @@
       </p:sp>
       <p:sp>
         <p:nvSpPr>
-          <p:cNvPr id="14" name="TextBox 13"/>
+          <p:cNvPr id="17" name="TextBox 16"/>
           <p:cNvSpPr txBox="1"/>
           <p:nvPr/>
         </p:nvSpPr>
@@ -18812,7 +15848,7 @@
               <a:rPr>
                 <a:latin typeface="Inter"/>
               </a:rPr>
-              <a:t>CONTEXT ONLY — NOT A PME INPUT · SECTOR MIX [S3]</a:t>
+              <a:t>CONTEXT ONLY — NOT A PME INPUT · GEOGRAPHY MIX [S3]</a:t>
             </a:r>
           </a:p>
         </p:txBody>
@@ -19114,7 +16150,7 @@
               <a:rPr>
                 <a:latin typeface="Inter"/>
               </a:rPr>
-              <a:t>CANONICAL COMMITMENT IDENTITY SUPPORTS ONE BENCHMARK PATH</a:t>
+              <a:t>CASH-FLOW AND PUBLIC-MARKET PATHS BOTH FINISH ABOVE PARITY</a:t>
             </a:r>
           </a:p>
         </p:txBody>
@@ -19198,7 +16234,7 @@
               <a:rPr>
                 <a:latin typeface="Inter"/>
               </a:rPr>
-              <a:t>Cash-flow and benchmark coverage — continued</a:t>
+              <a:t>PME and direct alpha</a:t>
             </a:r>
           </a:p>
         </p:txBody>
@@ -19338,7 +16374,7 @@
               <a:rPr>
                 <a:latin typeface="Inter"/>
               </a:rPr>
-              <a:t>2</a:t>
+              <a:t>3</a:t>
             </a:r>
           </a:p>
         </p:txBody>
@@ -19352,7 +16388,7 @@
         <p:spPr>
           <a:xfrm>
             <a:off x="640080" y="1325880"/>
-            <a:ext cx="10908792" cy="201168"/>
+            <a:ext cx="5239512" cy="201168"/>
           </a:xfrm>
           <a:prstGeom prst="rect">
             <a:avLst/>
@@ -19380,7 +16416,7 @@
               <a:rPr>
                 <a:latin typeface="Inter"/>
               </a:rPr>
-              <a:t>CONTEXT ONLY — NOT A PME INPUT · GEOGRAPHY MIX [S3]</a:t>
+              <a:t>J-CURVE CASH-FLOW PATH · 2019-06-30 TO 2025-12-31 [S6]</a:t>
             </a:r>
           </a:p>
         </p:txBody>
@@ -19395,7 +16431,7 @@
         </p:nvGraphicFramePr>
         <p:xfrm>
           <a:off x="640080" y="1600200"/>
-          <a:ext cx="10908792" cy="4617720"/>
+          <a:ext cx="5239512" cy="4617720"/>
         </p:xfrm>
         <a:graphic>
           <a:graphicData uri="http://schemas.openxmlformats.org/drawingml/2006/chart">
@@ -19411,8 +16447,8 @@
         </p:nvSpPr>
         <p:spPr>
           <a:xfrm>
-            <a:off x="640080" y="6446520"/>
-            <a:ext cx="10908792" cy="9144"/>
+            <a:off x="6080760" y="1325880"/>
+            <a:ext cx="9144" cy="4892040"/>
           </a:xfrm>
           <a:prstGeom prst="rect">
             <a:avLst/>
@@ -19460,6 +16496,115 @@
         </p:nvSpPr>
         <p:spPr>
           <a:xfrm>
+            <a:off x="6309360" y="1325880"/>
+            <a:ext cx="5239512" cy="201168"/>
+          </a:xfrm>
+          <a:prstGeom prst="rect">
+            <a:avLst/>
+          </a:prstGeom>
+          <a:noFill/>
+        </p:spPr>
+        <p:txBody>
+          <a:bodyPr wrap="none" lIns="9144" rIns="9144" tIns="9144" bIns="9144" anchor="t">
+            <a:spAutoFit/>
+          </a:bodyPr>
+          <a:lstStyle/>
+          <a:p>
+            <a:pPr algn="l">
+              <a:spcAft>
+                <a:spcPts val="0"/>
+              </a:spcAft>
+              <a:defRPr sz="720" b="1">
+                <a:solidFill>
+                  <a:srgbClr val="4A5563"/>
+                </a:solidFill>
+                <a:latin typeface="Inter"/>
+              </a:defRPr>
+            </a:pPr>
+            <a:r>
+              <a:rPr>
+                <a:latin typeface="Inter"/>
+              </a:rPr>
+              <a:t>PME PATH · PRIMARY KS-PME THROUGH 2025-12-31 [S6]</a:t>
+            </a:r>
+          </a:p>
+        </p:txBody>
+      </p:sp>
+      <p:graphicFrame>
+        <p:nvGraphicFramePr>
+          <p:cNvPr id="13" name="Chart 12"/>
+          <p:cNvGraphicFramePr>
+            <a:graphicFrameLocks noGrp="1"/>
+          </p:cNvGraphicFramePr>
+          <p:nvPr/>
+        </p:nvGraphicFramePr>
+        <p:xfrm>
+          <a:off x="6309360" y="1600200"/>
+          <a:ext cx="5239512" cy="4617720"/>
+        </p:xfrm>
+        <a:graphic>
+          <a:graphicData uri="http://schemas.openxmlformats.org/drawingml/2006/chart">
+            <c:chart xmlns:c="http://schemas.openxmlformats.org/drawingml/2006/chart" r:id="rId3"/>
+          </a:graphicData>
+        </a:graphic>
+      </p:graphicFrame>
+      <p:sp>
+        <p:nvSpPr>
+          <p:cNvPr id="14" name="Rectangle 13"/>
+          <p:cNvSpPr/>
+          <p:nvPr/>
+        </p:nvSpPr>
+        <p:spPr>
+          <a:xfrm>
+            <a:off x="640080" y="6446520"/>
+            <a:ext cx="10908792" cy="9144"/>
+          </a:xfrm>
+          <a:prstGeom prst="rect">
+            <a:avLst/>
+          </a:prstGeom>
+          <a:solidFill>
+            <a:srgbClr val="E3E7EC"/>
+          </a:solidFill>
+          <a:ln>
+            <a:solidFill>
+              <a:srgbClr val="E3E7EC"/>
+            </a:solidFill>
+          </a:ln>
+        </p:spPr>
+        <p:style>
+          <a:lnRef idx="1">
+            <a:schemeClr val="accent1"/>
+          </a:lnRef>
+          <a:fillRef idx="3">
+            <a:schemeClr val="accent1"/>
+          </a:fillRef>
+          <a:effectRef idx="2">
+            <a:schemeClr val="accent1"/>
+          </a:effectRef>
+          <a:fontRef idx="minor">
+            <a:schemeClr val="lt1"/>
+          </a:fontRef>
+        </p:style>
+        <p:txBody>
+          <a:bodyPr rtlCol="0" anchor="ctr"/>
+          <a:lstStyle/>
+          <a:p>
+            <a:pPr algn="ctr">
+              <a:defRPr>
+                <a:latin typeface="Inter"/>
+              </a:defRPr>
+            </a:pPr>
+          </a:p>
+        </p:txBody>
+      </p:sp>
+      <p:sp>
+        <p:nvSpPr>
+          <p:cNvPr id="15" name="TextBox 14"/>
+          <p:cNvSpPr txBox="1"/>
+          <p:nvPr/>
+        </p:nvSpPr>
+        <p:spPr>
+          <a:xfrm>
             <a:off x="640080" y="6501384"/>
             <a:ext cx="4297680" cy="146304"/>
           </a:xfrm>
@@ -19489,14 +16634,14 @@
               <a:rPr>
                 <a:latin typeface="Inter"/>
               </a:rPr>
-              <a:t>Sources: S3</a:t>
-            </a:r>
-          </a:p>
-        </p:txBody>
-      </p:sp>
-      <p:sp>
-        <p:nvSpPr>
-          <p:cNvPr id="13" name="TextBox 12"/>
+              <a:t>Sources: S6</a:t>
+            </a:r>
+          </a:p>
+        </p:txBody>
+      </p:sp>
+      <p:sp>
+        <p:nvSpPr>
+          <p:cNvPr id="16" name="TextBox 15"/>
           <p:cNvSpPr txBox="1"/>
           <p:nvPr/>
         </p:nvSpPr>
@@ -19538,7 +16683,7 @@
       </p:sp>
       <p:sp>
         <p:nvSpPr>
-          <p:cNvPr id="14" name="TextBox 13"/>
+          <p:cNvPr id="17" name="TextBox 16"/>
           <p:cNvSpPr txBox="1"/>
           <p:nvPr/>
         </p:nvSpPr>
@@ -19766,7 +16911,7 @@
               <a:rPr>
                 <a:latin typeface="Inter"/>
               </a:rPr>
-              <a:t>PME and direct alpha</a:t>
+              <a:t>PME and direct alpha — continued</a:t>
             </a:r>
           </a:p>
         </p:txBody>
@@ -19948,7 +17093,7 @@
               <a:rPr>
                 <a:latin typeface="Inter"/>
               </a:rPr>
-              <a:t>J-CURVE CASH-FLOW PATH · 2019-06-30 TO 2025-12-31 [S6]</a:t>
+              <a:t>PRIMARY PUBLIC-MARKET-EQUIVALENT RESULT</a:t>
             </a:r>
           </a:p>
         </p:txBody>
@@ -19963,7 +17108,7 @@
         </p:nvGraphicFramePr>
         <p:xfrm>
           <a:off x="640080" y="1600200"/>
-          <a:ext cx="10908792" cy="4617720"/>
+          <a:ext cx="10908792" cy="3661410"/>
         </p:xfrm>
         <a:graphic>
           <a:graphicData uri="http://schemas.openxmlformats.org/drawingml/2006/chart">
@@ -19974,6 +17119,188 @@
       <p:sp>
         <p:nvSpPr>
           <p:cNvPr id="11" name="Rectangle 10"/>
+          <p:cNvSpPr/>
+          <p:nvPr/>
+        </p:nvSpPr>
+        <p:spPr>
+          <a:xfrm>
+            <a:off x="640080" y="5371338"/>
+            <a:ext cx="10908792" cy="846582"/>
+          </a:xfrm>
+          <a:prstGeom prst="rect">
+            <a:avLst/>
+          </a:prstGeom>
+          <a:solidFill>
+            <a:srgbClr val="F5F7F9"/>
+          </a:solidFill>
+          <a:ln>
+            <a:solidFill>
+              <a:srgbClr val="E3E7EC"/>
+            </a:solidFill>
+          </a:ln>
+        </p:spPr>
+        <p:style>
+          <a:lnRef idx="1">
+            <a:schemeClr val="accent1"/>
+          </a:lnRef>
+          <a:fillRef idx="3">
+            <a:schemeClr val="accent1"/>
+          </a:fillRef>
+          <a:effectRef idx="2">
+            <a:schemeClr val="accent1"/>
+          </a:effectRef>
+          <a:fontRef idx="minor">
+            <a:schemeClr val="lt1"/>
+          </a:fontRef>
+        </p:style>
+        <p:txBody>
+          <a:bodyPr rtlCol="0" anchor="ctr"/>
+          <a:lstStyle/>
+          <a:p>
+            <a:pPr algn="ctr">
+              <a:defRPr>
+                <a:latin typeface="Inter"/>
+              </a:defRPr>
+            </a:pPr>
+          </a:p>
+        </p:txBody>
+      </p:sp>
+      <p:sp>
+        <p:nvSpPr>
+          <p:cNvPr id="12" name="Rectangle 11"/>
+          <p:cNvSpPr/>
+          <p:nvPr/>
+        </p:nvSpPr>
+        <p:spPr>
+          <a:xfrm>
+            <a:off x="640080" y="5371338"/>
+            <a:ext cx="54864" cy="846582"/>
+          </a:xfrm>
+          <a:prstGeom prst="rect">
+            <a:avLst/>
+          </a:prstGeom>
+          <a:solidFill>
+            <a:srgbClr val="0D1117"/>
+          </a:solidFill>
+          <a:ln>
+            <a:solidFill>
+              <a:srgbClr val="0D1117"/>
+            </a:solidFill>
+          </a:ln>
+        </p:spPr>
+        <p:style>
+          <a:lnRef idx="1">
+            <a:schemeClr val="accent1"/>
+          </a:lnRef>
+          <a:fillRef idx="3">
+            <a:schemeClr val="accent1"/>
+          </a:fillRef>
+          <a:effectRef idx="2">
+            <a:schemeClr val="accent1"/>
+          </a:effectRef>
+          <a:fontRef idx="minor">
+            <a:schemeClr val="lt1"/>
+          </a:fontRef>
+        </p:style>
+        <p:txBody>
+          <a:bodyPr rtlCol="0" anchor="ctr"/>
+          <a:lstStyle/>
+          <a:p>
+            <a:pPr algn="ctr">
+              <a:defRPr>
+                <a:latin typeface="Inter"/>
+              </a:defRPr>
+            </a:pPr>
+          </a:p>
+        </p:txBody>
+      </p:sp>
+      <p:sp>
+        <p:nvSpPr>
+          <p:cNvPr id="13" name="TextBox 12"/>
+          <p:cNvSpPr txBox="1"/>
+          <p:nvPr/>
+        </p:nvSpPr>
+        <p:spPr>
+          <a:xfrm>
+            <a:off x="804671" y="5481066"/>
+            <a:ext cx="10616184" cy="228600"/>
+          </a:xfrm>
+          <a:prstGeom prst="rect">
+            <a:avLst/>
+          </a:prstGeom>
+          <a:noFill/>
+        </p:spPr>
+        <p:txBody>
+          <a:bodyPr wrap="none" lIns="9144" rIns="9144" tIns="9144" bIns="9144" anchor="t">
+            <a:spAutoFit/>
+          </a:bodyPr>
+          <a:lstStyle/>
+          <a:p>
+            <a:pPr algn="l">
+              <a:spcAft>
+                <a:spcPts val="0"/>
+              </a:spcAft>
+              <a:defRPr sz="1000" b="1">
+                <a:solidFill>
+                  <a:srgbClr val="0D1117"/>
+                </a:solidFill>
+                <a:latin typeface="Inter"/>
+              </a:defRPr>
+            </a:pPr>
+            <a:r>
+              <a:rPr>
+                <a:latin typeface="Inter"/>
+              </a:rPr>
+              <a:t>Analysis — Primary PME result</a:t>
+            </a:r>
+          </a:p>
+        </p:txBody>
+      </p:sp>
+      <p:sp>
+        <p:nvSpPr>
+          <p:cNvPr id="14" name="TextBox 13"/>
+          <p:cNvSpPr txBox="1"/>
+          <p:nvPr/>
+        </p:nvSpPr>
+        <p:spPr>
+          <a:xfrm>
+            <a:off x="804671" y="5764530"/>
+            <a:ext cx="10616184" cy="361950"/>
+          </a:xfrm>
+          <a:prstGeom prst="rect">
+            <a:avLst/>
+          </a:prstGeom>
+          <a:noFill/>
+        </p:spPr>
+        <p:txBody>
+          <a:bodyPr wrap="none" lIns="9144" rIns="9144" tIns="9144" bIns="9144" anchor="t">
+            <a:spAutoFit/>
+          </a:bodyPr>
+          <a:lstStyle/>
+          <a:p>
+            <a:pPr algn="l">
+              <a:spcAft>
+                <a:spcPts val="0"/>
+              </a:spcAft>
+              <a:defRPr sz="950" b="0">
+                <a:solidFill>
+                  <a:srgbClr val="4A5563"/>
+                </a:solidFill>
+                <a:latin typeface="Inter"/>
+              </a:defRPr>
+            </a:pPr>
+            <a:r>
+              <a:rPr>
+                <a:latin typeface="Inter"/>
+              </a:rPr>
+              <a:t>Observation: KS-PME ended at 1.08x and direct alpha at +1.9% [S6]. Why it matters: Both returned relative measures are positive. Uncertainty: Persistence evidence is limited because PME stayed…</a:t>
+            </a:r>
+          </a:p>
+        </p:txBody>
+      </p:sp>
+      <p:sp>
+        <p:nvSpPr>
+          <p:cNvPr id="15" name="Rectangle 14"/>
           <p:cNvSpPr/>
           <p:nvPr/>
         </p:nvSpPr>
@@ -20022,7 +17349,7 @@
       </p:sp>
       <p:sp>
         <p:nvSpPr>
-          <p:cNvPr id="12" name="TextBox 11"/>
+          <p:cNvPr id="16" name="TextBox 15"/>
           <p:cNvSpPr txBox="1"/>
           <p:nvPr/>
         </p:nvSpPr>
@@ -20064,7 +17391,7 @@
       </p:sp>
       <p:sp>
         <p:nvSpPr>
-          <p:cNvPr id="13" name="TextBox 12"/>
+          <p:cNvPr id="17" name="TextBox 16"/>
           <p:cNvSpPr txBox="1"/>
           <p:nvPr/>
         </p:nvSpPr>
@@ -20106,7 +17433,7 @@
       </p:sp>
       <p:sp>
         <p:nvSpPr>
-          <p:cNvPr id="14" name="TextBox 13"/>
+          <p:cNvPr id="18" name="TextBox 17"/>
           <p:cNvSpPr txBox="1"/>
           <p:nvPr/>
         </p:nvSpPr>
@@ -20250,7 +17577,7 @@
               <a:rPr>
                 <a:latin typeface="Inter"/>
               </a:rPr>
-              <a:t>CASH-FLOW AND PUBLIC-MARKET PATHS BOTH FINISH ABOVE PARITY</a:t>
+              <a:t>TVPI CROSSED 1.0X BEFORE NET IRR REACHED 12.6%</a:t>
             </a:r>
           </a:p>
         </p:txBody>
@@ -20334,7 +17661,7 @@
               <a:rPr>
                 <a:latin typeface="Inter"/>
               </a:rPr>
-              <a:t>PME and direct alpha — continued</a:t>
+              <a:t>IRR and multiple context</a:t>
             </a:r>
           </a:p>
         </p:txBody>
@@ -20474,7 +17801,7 @@
               <a:rPr>
                 <a:latin typeface="Inter"/>
               </a:rPr>
-              <a:t>3</a:t>
+              <a:t>4</a:t>
             </a:r>
           </a:p>
         </p:txBody>
@@ -20488,7 +17815,7 @@
         <p:spPr>
           <a:xfrm>
             <a:off x="640080" y="1325880"/>
-            <a:ext cx="10908792" cy="201168"/>
+            <a:ext cx="5239512" cy="201168"/>
           </a:xfrm>
           <a:prstGeom prst="rect">
             <a:avLst/>
@@ -20516,7 +17843,7 @@
               <a:rPr>
                 <a:latin typeface="Inter"/>
               </a:rPr>
-              <a:t>PME PATH · PRIMARY KS-PME THROUGH 2025-12-31 [S6]</a:t>
+              <a:t>FUND MULTIPLES PATH · TVPI, DPI AND RVPI [S6]</a:t>
             </a:r>
           </a:p>
         </p:txBody>
@@ -20531,7 +17858,7 @@
         </p:nvGraphicFramePr>
         <p:xfrm>
           <a:off x="640080" y="1600200"/>
-          <a:ext cx="10908792" cy="4617720"/>
+          <a:ext cx="5239512" cy="4617720"/>
         </p:xfrm>
         <a:graphic>
           <a:graphicData uri="http://schemas.openxmlformats.org/drawingml/2006/chart">
@@ -20547,8 +17874,8 @@
         </p:nvSpPr>
         <p:spPr>
           <a:xfrm>
-            <a:off x="640080" y="6446520"/>
-            <a:ext cx="10908792" cy="9144"/>
+            <a:off x="6080760" y="1325880"/>
+            <a:ext cx="9144" cy="4892040"/>
           </a:xfrm>
           <a:prstGeom prst="rect">
             <a:avLst/>
@@ -20596,6 +17923,115 @@
         </p:nvSpPr>
         <p:spPr>
           <a:xfrm>
+            <a:off x="6309360" y="1325880"/>
+            <a:ext cx="5239512" cy="201168"/>
+          </a:xfrm>
+          <a:prstGeom prst="rect">
+            <a:avLst/>
+          </a:prstGeom>
+          <a:noFill/>
+        </p:spPr>
+        <p:txBody>
+          <a:bodyPr wrap="none" lIns="9144" rIns="9144" tIns="9144" bIns="9144" anchor="t">
+            <a:spAutoFit/>
+          </a:bodyPr>
+          <a:lstStyle/>
+          <a:p>
+            <a:pPr algn="l">
+              <a:spcAft>
+                <a:spcPts val="0"/>
+              </a:spcAft>
+              <a:defRPr sz="720" b="1">
+                <a:solidFill>
+                  <a:srgbClr val="4A5563"/>
+                </a:solidFill>
+                <a:latin typeface="Inter"/>
+              </a:defRPr>
+            </a:pPr>
+            <a:r>
+              <a:rPr>
+                <a:latin typeface="Inter"/>
+              </a:rPr>
+              <a:t>NET IRR PATH · 2020-12-31 TO 2025-12-31 [S6]</a:t>
+            </a:r>
+          </a:p>
+        </p:txBody>
+      </p:sp>
+      <p:graphicFrame>
+        <p:nvGraphicFramePr>
+          <p:cNvPr id="13" name="Chart 12"/>
+          <p:cNvGraphicFramePr>
+            <a:graphicFrameLocks noGrp="1"/>
+          </p:cNvGraphicFramePr>
+          <p:nvPr/>
+        </p:nvGraphicFramePr>
+        <p:xfrm>
+          <a:off x="6309360" y="1600200"/>
+          <a:ext cx="5239512" cy="4617720"/>
+        </p:xfrm>
+        <a:graphic>
+          <a:graphicData uri="http://schemas.openxmlformats.org/drawingml/2006/chart">
+            <c:chart xmlns:c="http://schemas.openxmlformats.org/drawingml/2006/chart" r:id="rId3"/>
+          </a:graphicData>
+        </a:graphic>
+      </p:graphicFrame>
+      <p:sp>
+        <p:nvSpPr>
+          <p:cNvPr id="14" name="Rectangle 13"/>
+          <p:cNvSpPr/>
+          <p:nvPr/>
+        </p:nvSpPr>
+        <p:spPr>
+          <a:xfrm>
+            <a:off x="640080" y="6446520"/>
+            <a:ext cx="10908792" cy="9144"/>
+          </a:xfrm>
+          <a:prstGeom prst="rect">
+            <a:avLst/>
+          </a:prstGeom>
+          <a:solidFill>
+            <a:srgbClr val="E3E7EC"/>
+          </a:solidFill>
+          <a:ln>
+            <a:solidFill>
+              <a:srgbClr val="E3E7EC"/>
+            </a:solidFill>
+          </a:ln>
+        </p:spPr>
+        <p:style>
+          <a:lnRef idx="1">
+            <a:schemeClr val="accent1"/>
+          </a:lnRef>
+          <a:fillRef idx="3">
+            <a:schemeClr val="accent1"/>
+          </a:fillRef>
+          <a:effectRef idx="2">
+            <a:schemeClr val="accent1"/>
+          </a:effectRef>
+          <a:fontRef idx="minor">
+            <a:schemeClr val="lt1"/>
+          </a:fontRef>
+        </p:style>
+        <p:txBody>
+          <a:bodyPr rtlCol="0" anchor="ctr"/>
+          <a:lstStyle/>
+          <a:p>
+            <a:pPr algn="ctr">
+              <a:defRPr>
+                <a:latin typeface="Inter"/>
+              </a:defRPr>
+            </a:pPr>
+          </a:p>
+        </p:txBody>
+      </p:sp>
+      <p:sp>
+        <p:nvSpPr>
+          <p:cNvPr id="15" name="TextBox 14"/>
+          <p:cNvSpPr txBox="1"/>
+          <p:nvPr/>
+        </p:nvSpPr>
+        <p:spPr>
+          <a:xfrm>
             <a:off x="640080" y="6501384"/>
             <a:ext cx="4297680" cy="146304"/>
           </a:xfrm>
@@ -20632,7 +18068,7 @@
       </p:sp>
       <p:sp>
         <p:nvSpPr>
-          <p:cNvPr id="13" name="TextBox 12"/>
+          <p:cNvPr id="16" name="TextBox 15"/>
           <p:cNvSpPr txBox="1"/>
           <p:nvPr/>
         </p:nvSpPr>
@@ -20674,7 +18110,7 @@
       </p:sp>
       <p:sp>
         <p:nvSpPr>
-          <p:cNvPr id="14" name="TextBox 13"/>
+          <p:cNvPr id="17" name="TextBox 16"/>
           <p:cNvSpPr txBox="1"/>
           <p:nvPr/>
         </p:nvSpPr>
@@ -20818,7 +18254,7 @@
               <a:rPr>
                 <a:latin typeface="Inter"/>
               </a:rPr>
-              <a:t>CASH-FLOW AND PUBLIC-MARKET PATHS BOTH FINISH ABOVE PARITY</a:t>
+              <a:t>TVPI CROSSED 1.0X BEFORE NET IRR REACHED 12.6%</a:t>
             </a:r>
           </a:p>
         </p:txBody>
@@ -20902,7 +18338,7 @@
               <a:rPr>
                 <a:latin typeface="Inter"/>
               </a:rPr>
-              <a:t>PME and direct alpha — continued</a:t>
+              <a:t>IRR and multiple context — continued</a:t>
             </a:r>
           </a:p>
         </p:txBody>
@@ -21042,7 +18478,7 @@
               <a:rPr>
                 <a:latin typeface="Inter"/>
               </a:rPr>
-              <a:t>3</a:t>
+              <a:t>4</a:t>
             </a:r>
           </a:p>
         </p:txBody>
@@ -21084,7 +18520,7 @@
               <a:rPr>
                 <a:latin typeface="Inter"/>
               </a:rPr>
-              <a:t>PRIMARY PUBLIC-MARKET-EQUIVALENT RESULT</a:t>
+              <a:t>RETURNED FUND METRICS</a:t>
             </a:r>
           </a:p>
         </p:txBody>
@@ -21099,7 +18535,7 @@
         </p:nvGraphicFramePr>
         <p:xfrm>
           <a:off x="640080" y="1600200"/>
-          <a:ext cx="10908792" cy="4617720"/>
+          <a:ext cx="10908792" cy="3661410"/>
         </p:xfrm>
         <a:graphic>
           <a:graphicData uri="http://schemas.openxmlformats.org/drawingml/2006/chart">
@@ -21110,6 +18546,188 @@
       <p:sp>
         <p:nvSpPr>
           <p:cNvPr id="11" name="Rectangle 10"/>
+          <p:cNvSpPr/>
+          <p:nvPr/>
+        </p:nvSpPr>
+        <p:spPr>
+          <a:xfrm>
+            <a:off x="640080" y="5371338"/>
+            <a:ext cx="10908792" cy="846582"/>
+          </a:xfrm>
+          <a:prstGeom prst="rect">
+            <a:avLst/>
+          </a:prstGeom>
+          <a:solidFill>
+            <a:srgbClr val="F5F7F9"/>
+          </a:solidFill>
+          <a:ln>
+            <a:solidFill>
+              <a:srgbClr val="E3E7EC"/>
+            </a:solidFill>
+          </a:ln>
+        </p:spPr>
+        <p:style>
+          <a:lnRef idx="1">
+            <a:schemeClr val="accent1"/>
+          </a:lnRef>
+          <a:fillRef idx="3">
+            <a:schemeClr val="accent1"/>
+          </a:fillRef>
+          <a:effectRef idx="2">
+            <a:schemeClr val="accent1"/>
+          </a:effectRef>
+          <a:fontRef idx="minor">
+            <a:schemeClr val="lt1"/>
+          </a:fontRef>
+        </p:style>
+        <p:txBody>
+          <a:bodyPr rtlCol="0" anchor="ctr"/>
+          <a:lstStyle/>
+          <a:p>
+            <a:pPr algn="ctr">
+              <a:defRPr>
+                <a:latin typeface="Inter"/>
+              </a:defRPr>
+            </a:pPr>
+          </a:p>
+        </p:txBody>
+      </p:sp>
+      <p:sp>
+        <p:nvSpPr>
+          <p:cNvPr id="12" name="Rectangle 11"/>
+          <p:cNvSpPr/>
+          <p:nvPr/>
+        </p:nvSpPr>
+        <p:spPr>
+          <a:xfrm>
+            <a:off x="640080" y="5371338"/>
+            <a:ext cx="54864" cy="846582"/>
+          </a:xfrm>
+          <a:prstGeom prst="rect">
+            <a:avLst/>
+          </a:prstGeom>
+          <a:solidFill>
+            <a:srgbClr val="0D1117"/>
+          </a:solidFill>
+          <a:ln>
+            <a:solidFill>
+              <a:srgbClr val="0D1117"/>
+            </a:solidFill>
+          </a:ln>
+        </p:spPr>
+        <p:style>
+          <a:lnRef idx="1">
+            <a:schemeClr val="accent1"/>
+          </a:lnRef>
+          <a:fillRef idx="3">
+            <a:schemeClr val="accent1"/>
+          </a:fillRef>
+          <a:effectRef idx="2">
+            <a:schemeClr val="accent1"/>
+          </a:effectRef>
+          <a:fontRef idx="minor">
+            <a:schemeClr val="lt1"/>
+          </a:fontRef>
+        </p:style>
+        <p:txBody>
+          <a:bodyPr rtlCol="0" anchor="ctr"/>
+          <a:lstStyle/>
+          <a:p>
+            <a:pPr algn="ctr">
+              <a:defRPr>
+                <a:latin typeface="Inter"/>
+              </a:defRPr>
+            </a:pPr>
+          </a:p>
+        </p:txBody>
+      </p:sp>
+      <p:sp>
+        <p:nvSpPr>
+          <p:cNvPr id="13" name="TextBox 12"/>
+          <p:cNvSpPr txBox="1"/>
+          <p:nvPr/>
+        </p:nvSpPr>
+        <p:spPr>
+          <a:xfrm>
+            <a:off x="804671" y="5481066"/>
+            <a:ext cx="10616184" cy="228600"/>
+          </a:xfrm>
+          <a:prstGeom prst="rect">
+            <a:avLst/>
+          </a:prstGeom>
+          <a:noFill/>
+        </p:spPr>
+        <p:txBody>
+          <a:bodyPr wrap="none" lIns="9144" rIns="9144" tIns="9144" bIns="9144" anchor="t">
+            <a:spAutoFit/>
+          </a:bodyPr>
+          <a:lstStyle/>
+          <a:p>
+            <a:pPr algn="l">
+              <a:spcAft>
+                <a:spcPts val="0"/>
+              </a:spcAft>
+              <a:defRPr sz="1000" b="1">
+                <a:solidFill>
+                  <a:srgbClr val="0D1117"/>
+                </a:solidFill>
+                <a:latin typeface="Inter"/>
+              </a:defRPr>
+            </a:pPr>
+            <a:r>
+              <a:rPr>
+                <a:latin typeface="Inter"/>
+              </a:rPr>
+              <a:t>Analysis — Realized and residual value</a:t>
+            </a:r>
+          </a:p>
+        </p:txBody>
+      </p:sp>
+      <p:sp>
+        <p:nvSpPr>
+          <p:cNvPr id="14" name="TextBox 13"/>
+          <p:cNvSpPr txBox="1"/>
+          <p:nvPr/>
+        </p:nvSpPr>
+        <p:spPr>
+          <a:xfrm>
+            <a:off x="804671" y="5764530"/>
+            <a:ext cx="10616184" cy="361950"/>
+          </a:xfrm>
+          <a:prstGeom prst="rect">
+            <a:avLst/>
+          </a:prstGeom>
+          <a:noFill/>
+        </p:spPr>
+        <p:txBody>
+          <a:bodyPr wrap="none" lIns="9144" rIns="9144" tIns="9144" bIns="9144" anchor="t">
+            <a:spAutoFit/>
+          </a:bodyPr>
+          <a:lstStyle/>
+          <a:p>
+            <a:pPr algn="l">
+              <a:spcAft>
+                <a:spcPts val="0"/>
+              </a:spcAft>
+              <a:defRPr sz="950" b="0">
+                <a:solidFill>
+                  <a:srgbClr val="4A5563"/>
+                </a:solidFill>
+                <a:latin typeface="Inter"/>
+              </a:defRPr>
+            </a:pPr>
+            <a:r>
+              <a:rPr>
+                <a:latin typeface="Inter"/>
+              </a:rPr>
+              <a:t>Observation: Net IRR was 12.6%, while 0.75x RVPI exceeded 0.66x DPI [S6]. Why it matters: More value remains unrealized than distributed. Uncertainty: The result depends on reported residual…</a:t>
+            </a:r>
+          </a:p>
+        </p:txBody>
+      </p:sp>
+      <p:sp>
+        <p:nvSpPr>
+          <p:cNvPr id="15" name="Rectangle 14"/>
           <p:cNvSpPr/>
           <p:nvPr/>
         </p:nvSpPr>
@@ -21158,7 +18776,7 @@
       </p:sp>
       <p:sp>
         <p:nvSpPr>
-          <p:cNvPr id="12" name="TextBox 11"/>
+          <p:cNvPr id="16" name="TextBox 15"/>
           <p:cNvSpPr txBox="1"/>
           <p:nvPr/>
         </p:nvSpPr>
@@ -21193,14 +18811,14 @@
               <a:rPr>
                 <a:latin typeface="Inter"/>
               </a:rPr>
-              <a:t>Sources: S6</a:t>
-            </a:r>
-          </a:p>
-        </p:txBody>
-      </p:sp>
-      <p:sp>
-        <p:nvSpPr>
-          <p:cNvPr id="13" name="TextBox 12"/>
+              <a:t>Sources: S3 · S6</a:t>
+            </a:r>
+          </a:p>
+        </p:txBody>
+      </p:sp>
+      <p:sp>
+        <p:nvSpPr>
+          <p:cNvPr id="17" name="TextBox 16"/>
           <p:cNvSpPr txBox="1"/>
           <p:nvPr/>
         </p:nvSpPr>
@@ -21242,7 +18860,7 @@
       </p:sp>
       <p:sp>
         <p:nvSpPr>
-          <p:cNvPr id="14" name="TextBox 13"/>
+          <p:cNvPr id="18" name="TextBox 17"/>
           <p:cNvSpPr txBox="1"/>
           <p:nvPr/>
         </p:nvSpPr>

--- a/plugins/gradient-cio/assets/examples/gradient-idd-private-markets-pme.pptx
+++ b/plugins/gradient-cio/assets/examples/gradient-idd-private-markets-pme.pptx
@@ -19,6 +19,7 @@
     <ns0:sldId id="267" ns1:id="rId18"/>
     <ns0:sldId id="268" ns1:id="rId19"/>
     <ns0:sldId id="269" ns1:id="rId20"/>
+    <ns0:sldId id="270" ns1:id="rId21"/>
   </ns0:sldIdLst>
   <ns0:sldSz cx="12191695" cy="6858000" type="screen16x9"/>
   <ns0:notesSz cx="6858000" cy="9144000"/>
@@ -5612,7 +5613,7 @@
               <a:rPr>
                 <a:latin typeface="Inter"/>
               </a:rPr>
-              <a:t>AUDIENCE</a:t>
+              <a:t>PREPARED FOR</a:t>
             </a:r>
           </a:p>
         </p:txBody>
@@ -5745,224 +5746,7 @@
       </p:sp>
       <p:sp>
         <p:nvSpPr>
-          <p:cNvPr id="17" name="Rectangle 16"/>
-          <p:cNvSpPr/>
-          <p:nvPr/>
-        </p:nvSpPr>
-        <p:spPr>
-          <a:xfrm>
-            <a:off x="685800" y="5687568"/>
-            <a:ext cx="3337560" cy="530352"/>
-          </a:xfrm>
-          <a:prstGeom prst="rect">
-            <a:avLst/>
-          </a:prstGeom>
-          <a:solidFill>
-            <a:srgbClr val="C6F432"/>
-          </a:solidFill>
-          <a:ln>
-            <a:solidFill>
-              <a:srgbClr val="C6F432"/>
-            </a:solidFill>
-          </a:ln>
-        </p:spPr>
-        <p:style>
-          <a:lnRef idx="1">
-            <a:schemeClr val="accent1"/>
-          </a:lnRef>
-          <a:fillRef idx="3">
-            <a:schemeClr val="accent1"/>
-          </a:fillRef>
-          <a:effectRef idx="2">
-            <a:schemeClr val="accent1"/>
-          </a:effectRef>
-          <a:fontRef idx="minor">
-            <a:schemeClr val="lt1"/>
-          </a:fontRef>
-        </p:style>
-        <p:txBody>
-          <a:bodyPr rtlCol="0" anchor="ctr"/>
-          <a:lstStyle/>
-          <a:p>
-            <a:pPr algn="ctr">
-              <a:defRPr>
-                <a:latin typeface="Inter"/>
-              </a:defRPr>
-            </a:pPr>
-          </a:p>
-        </p:txBody>
-      </p:sp>
-      <p:sp>
-        <p:nvSpPr>
-          <p:cNvPr id="18" name="TextBox 17"/>
-          <p:cNvSpPr txBox="1"/>
-          <p:nvPr/>
-        </p:nvSpPr>
-        <p:spPr>
-          <a:xfrm>
-            <a:off x="822960" y="5760720"/>
-            <a:ext cx="3063240" cy="128016"/>
-          </a:xfrm>
-          <a:prstGeom prst="rect">
-            <a:avLst/>
-          </a:prstGeom>
-          <a:noFill/>
-        </p:spPr>
-        <p:txBody>
-          <a:bodyPr wrap="none" lIns="9144" rIns="9144" tIns="9144" bIns="9144" anchor="t">
-            <a:spAutoFit/>
-          </a:bodyPr>
-          <a:lstStyle/>
-          <a:p>
-            <a:pPr algn="l">
-              <a:spcAft>
-                <a:spcPts val="0"/>
-              </a:spcAft>
-              <a:defRPr sz="620" b="1">
-                <a:solidFill>
-                  <a:srgbClr val="0D1117"/>
-                </a:solidFill>
-                <a:latin typeface="Inter"/>
-              </a:defRPr>
-            </a:pPr>
-            <a:r>
-              <a:rPr>
-                <a:latin typeface="Inter"/>
-              </a:rPr>
-              <a:t>OVERALL VIEW</a:t>
-            </a:r>
-          </a:p>
-        </p:txBody>
-      </p:sp>
-      <p:sp>
-        <p:nvSpPr>
-          <p:cNvPr id="19" name="TextBox 18"/>
-          <p:cNvSpPr txBox="1"/>
-          <p:nvPr/>
-        </p:nvSpPr>
-        <p:spPr>
-          <a:xfrm>
-            <a:off x="822960" y="5916168"/>
-            <a:ext cx="3063240" cy="182880"/>
-          </a:xfrm>
-          <a:prstGeom prst="rect">
-            <a:avLst/>
-          </a:prstGeom>
-          <a:noFill/>
-        </p:spPr>
-        <p:txBody>
-          <a:bodyPr wrap="none" lIns="9144" rIns="9144" tIns="9144" bIns="9144" anchor="t">
-            <a:spAutoFit/>
-          </a:bodyPr>
-          <a:lstStyle/>
-          <a:p>
-            <a:pPr algn="l">
-              <a:spcAft>
-                <a:spcPts val="0"/>
-              </a:spcAft>
-              <a:defRPr sz="900" b="1">
-                <a:solidFill>
-                  <a:srgbClr val="0D1117"/>
-                </a:solidFill>
-                <a:latin typeface="Inter"/>
-              </a:defRPr>
-            </a:pPr>
-            <a:r>
-              <a:rPr>
-                <a:latin typeface="Inter"/>
-              </a:rPr>
-              <a:t>PME positive across both benchmarks</a:t>
-            </a:r>
-          </a:p>
-        </p:txBody>
-      </p:sp>
-      <p:sp>
-        <p:nvSpPr>
-          <p:cNvPr id="20" name="TextBox 19"/>
-          <p:cNvSpPr txBox="1"/>
-          <p:nvPr/>
-        </p:nvSpPr>
-        <p:spPr>
-          <a:xfrm>
-            <a:off x="4297680" y="5733288"/>
-            <a:ext cx="3108960" cy="164592"/>
-          </a:xfrm>
-          <a:prstGeom prst="rect">
-            <a:avLst/>
-          </a:prstGeom>
-          <a:noFill/>
-        </p:spPr>
-        <p:txBody>
-          <a:bodyPr wrap="none" lIns="9144" rIns="9144" tIns="9144" bIns="9144" anchor="t">
-            <a:spAutoFit/>
-          </a:bodyPr>
-          <a:lstStyle/>
-          <a:p>
-            <a:pPr algn="l">
-              <a:spcAft>
-                <a:spcPts val="0"/>
-              </a:spcAft>
-              <a:defRPr sz="650" b="1">
-                <a:solidFill>
-                  <a:srgbClr val="8A94A1"/>
-                </a:solidFill>
-                <a:latin typeface="Inter"/>
-              </a:defRPr>
-            </a:pPr>
-            <a:r>
-              <a:rPr>
-                <a:latin typeface="Inter"/>
-              </a:rPr>
-              <a:t>SCOPE REVIEWED</a:t>
-            </a:r>
-          </a:p>
-        </p:txBody>
-      </p:sp>
-      <p:sp>
-        <p:nvSpPr>
-          <p:cNvPr id="21" name="TextBox 20"/>
-          <p:cNvSpPr txBox="1"/>
-          <p:nvPr/>
-        </p:nvSpPr>
-        <p:spPr>
-          <a:xfrm>
-            <a:off x="4297680" y="5934456"/>
-            <a:ext cx="3108960" cy="201168"/>
-          </a:xfrm>
-          <a:prstGeom prst="rect">
-            <a:avLst/>
-          </a:prstGeom>
-          <a:noFill/>
-        </p:spPr>
-        <p:txBody>
-          <a:bodyPr wrap="none" lIns="9144" rIns="9144" tIns="9144" bIns="9144" anchor="t">
-            <a:spAutoFit/>
-          </a:bodyPr>
-          <a:lstStyle/>
-          <a:p>
-            <a:pPr algn="l">
-              <a:spcAft>
-                <a:spcPts val="0"/>
-              </a:spcAft>
-              <a:defRPr sz="800" b="1">
-                <a:solidFill>
-                  <a:srgbClr val="FFFFFF"/>
-                </a:solidFill>
-                <a:latin typeface="Inter"/>
-              </a:defRPr>
-            </a:pPr>
-            <a:r>
-              <a:rPr>
-                <a:latin typeface="Inter"/>
-              </a:rPr>
-              <a:t>7 of 7 · Complete</a:t>
-            </a:r>
-          </a:p>
-        </p:txBody>
-      </p:sp>
-      <p:sp>
-        <p:nvSpPr>
-          <p:cNvPr id="22" name="TextBox 21"/>
+          <p:cNvPr id="17" name="TextBox 16"/>
           <p:cNvSpPr txBox="1"/>
           <p:nvPr/>
         </p:nvSpPr>
@@ -6004,7 +5788,7 @@
       </p:sp>
       <p:sp>
         <p:nvSpPr>
-          <p:cNvPr id="23" name="TextBox 22"/>
+          <p:cNvPr id="18" name="TextBox 17"/>
           <p:cNvSpPr txBox="1"/>
           <p:nvPr/>
         </p:nvSpPr>
@@ -6046,7 +5830,7 @@
       </p:sp>
       <p:sp>
         <p:nvSpPr>
-          <p:cNvPr id="24" name="TextBox 23"/>
+          <p:cNvPr id="19" name="TextBox 18"/>
           <p:cNvSpPr txBox="1"/>
           <p:nvPr/>
         </p:nvSpPr>
@@ -6162,7 +5946,7 @@
         <p:spPr>
           <a:xfrm>
             <a:off x="640080" y="329184"/>
-            <a:ext cx="5303520" cy="182880"/>
+            <a:ext cx="9875520" cy="182880"/>
           </a:xfrm>
           <a:prstGeom prst="rect">
             <a:avLst/>
@@ -6203,48 +5987,6 @@
         </p:nvSpPr>
         <p:spPr>
           <a:xfrm>
-            <a:off x="5897880" y="310896"/>
-            <a:ext cx="4800600" cy="256032"/>
-          </a:xfrm>
-          <a:prstGeom prst="rect">
-            <a:avLst/>
-          </a:prstGeom>
-          <a:noFill/>
-        </p:spPr>
-        <p:txBody>
-          <a:bodyPr wrap="none" lIns="9144" rIns="9144" tIns="9144" bIns="9144" anchor="t">
-            <a:spAutoFit/>
-          </a:bodyPr>
-          <a:lstStyle/>
-          <a:p>
-            <a:pPr algn="r">
-              <a:spcAft>
-                <a:spcPts val="0"/>
-              </a:spcAft>
-              <a:defRPr sz="680" b="1">
-                <a:solidFill>
-                  <a:srgbClr val="4F6B00"/>
-                </a:solidFill>
-                <a:latin typeface="Inter"/>
-              </a:defRPr>
-            </a:pPr>
-            <a:r>
-              <a:rPr>
-                <a:latin typeface="Inter"/>
-              </a:rPr>
-              <a:t>Illustrative, Gradient Maintained — demo data, not the client's holdings or managers</a:t>
-            </a:r>
-          </a:p>
-        </p:txBody>
-      </p:sp>
-      <p:sp>
-        <p:nvSpPr>
-          <p:cNvPr id="5" name="TextBox 4"/>
-          <p:cNvSpPr txBox="1"/>
-          <p:nvPr/>
-        </p:nvSpPr>
-        <p:spPr>
-          <a:xfrm>
             <a:off x="640080" y="566928"/>
             <a:ext cx="10058400" cy="530352"/>
           </a:xfrm>
@@ -6281,7 +6023,7 @@
       </p:sp>
       <p:sp>
         <p:nvSpPr>
-          <p:cNvPr id="6" name="Rectangle 5"/>
+          <p:cNvPr id="5" name="Rectangle 4"/>
           <p:cNvSpPr/>
           <p:nvPr/>
         </p:nvSpPr>
@@ -6330,7 +6072,7 @@
       </p:sp>
       <p:sp>
         <p:nvSpPr>
-          <p:cNvPr id="7" name="Rectangle 6"/>
+          <p:cNvPr id="6" name="Rectangle 5"/>
           <p:cNvSpPr/>
           <p:nvPr/>
         </p:nvSpPr>
@@ -6379,7 +6121,7 @@
       </p:sp>
       <p:sp>
         <p:nvSpPr>
-          <p:cNvPr id="8" name="TextBox 7"/>
+          <p:cNvPr id="7" name="TextBox 6"/>
           <p:cNvSpPr txBox="1"/>
           <p:nvPr/>
         </p:nvSpPr>
@@ -6421,7 +6163,7 @@
       </p:sp>
       <p:sp>
         <p:nvSpPr>
-          <p:cNvPr id="9" name="TextBox 8"/>
+          <p:cNvPr id="8" name="TextBox 7"/>
           <p:cNvSpPr txBox="1"/>
           <p:nvPr/>
         </p:nvSpPr>
@@ -6463,7 +6205,7 @@
       </p:sp>
       <p:graphicFrame>
         <p:nvGraphicFramePr>
-          <p:cNvPr id="10" name="Chart 9"/>
+          <p:cNvPr id="9" name="Chart 8"/>
           <p:cNvGraphicFramePr>
             <a:graphicFrameLocks noGrp="1"/>
           </p:cNvGraphicFramePr>
@@ -6481,7 +6223,7 @@
       </p:graphicFrame>
       <p:sp>
         <p:nvSpPr>
-          <p:cNvPr id="11" name="Rectangle 10"/>
+          <p:cNvPr id="10" name="Rectangle 9"/>
           <p:cNvSpPr/>
           <p:nvPr/>
         </p:nvSpPr>
@@ -6530,7 +6272,7 @@
       </p:sp>
       <p:sp>
         <p:nvSpPr>
-          <p:cNvPr id="12" name="TextBox 11"/>
+          <p:cNvPr id="11" name="TextBox 10"/>
           <p:cNvSpPr txBox="1"/>
           <p:nvPr/>
         </p:nvSpPr>
@@ -6572,7 +6314,7 @@
       </p:sp>
       <p:sp>
         <p:nvSpPr>
-          <p:cNvPr id="13" name="TextBox 12"/>
+          <p:cNvPr id="12" name="TextBox 11"/>
           <p:cNvSpPr txBox="1"/>
           <p:nvPr/>
         </p:nvSpPr>
@@ -6614,7 +6356,7 @@
       </p:sp>
       <p:sp>
         <p:nvSpPr>
-          <p:cNvPr id="14" name="TextBox 13"/>
+          <p:cNvPr id="13" name="TextBox 12"/>
           <p:cNvSpPr txBox="1"/>
           <p:nvPr/>
         </p:nvSpPr>
@@ -6730,7 +6472,7 @@
         <p:spPr>
           <a:xfrm>
             <a:off x="640080" y="329184"/>
-            <a:ext cx="5303520" cy="182880"/>
+            <a:ext cx="9875520" cy="182880"/>
           </a:xfrm>
           <a:prstGeom prst="rect">
             <a:avLst/>
@@ -6771,48 +6513,6 @@
         </p:nvSpPr>
         <p:spPr>
           <a:xfrm>
-            <a:off x="5897880" y="310896"/>
-            <a:ext cx="4800600" cy="256032"/>
-          </a:xfrm>
-          <a:prstGeom prst="rect">
-            <a:avLst/>
-          </a:prstGeom>
-          <a:noFill/>
-        </p:spPr>
-        <p:txBody>
-          <a:bodyPr wrap="none" lIns="9144" rIns="9144" tIns="9144" bIns="9144" anchor="t">
-            <a:spAutoFit/>
-          </a:bodyPr>
-          <a:lstStyle/>
-          <a:p>
-            <a:pPr algn="r">
-              <a:spcAft>
-                <a:spcPts val="0"/>
-              </a:spcAft>
-              <a:defRPr sz="680" b="1">
-                <a:solidFill>
-                  <a:srgbClr val="4F6B00"/>
-                </a:solidFill>
-                <a:latin typeface="Inter"/>
-              </a:defRPr>
-            </a:pPr>
-            <a:r>
-              <a:rPr>
-                <a:latin typeface="Inter"/>
-              </a:rPr>
-              <a:t>Illustrative, Gradient Maintained — demo data, not the client's holdings or managers</a:t>
-            </a:r>
-          </a:p>
-        </p:txBody>
-      </p:sp>
-      <p:sp>
-        <p:nvSpPr>
-          <p:cNvPr id="5" name="TextBox 4"/>
-          <p:cNvSpPr txBox="1"/>
-          <p:nvPr/>
-        </p:nvSpPr>
-        <p:spPr>
-          <a:xfrm>
             <a:off x="640080" y="566928"/>
             <a:ext cx="10058400" cy="530352"/>
           </a:xfrm>
@@ -6849,7 +6549,7 @@
       </p:sp>
       <p:sp>
         <p:nvSpPr>
-          <p:cNvPr id="6" name="Rectangle 5"/>
+          <p:cNvPr id="5" name="Rectangle 4"/>
           <p:cNvSpPr/>
           <p:nvPr/>
         </p:nvSpPr>
@@ -6898,7 +6598,7 @@
       </p:sp>
       <p:sp>
         <p:nvSpPr>
-          <p:cNvPr id="7" name="Rectangle 6"/>
+          <p:cNvPr id="6" name="Rectangle 5"/>
           <p:cNvSpPr/>
           <p:nvPr/>
         </p:nvSpPr>
@@ -6947,7 +6647,7 @@
       </p:sp>
       <p:sp>
         <p:nvSpPr>
-          <p:cNvPr id="8" name="TextBox 7"/>
+          <p:cNvPr id="7" name="TextBox 6"/>
           <p:cNvSpPr txBox="1"/>
           <p:nvPr/>
         </p:nvSpPr>
@@ -6989,7 +6689,7 @@
       </p:sp>
       <p:sp>
         <p:nvSpPr>
-          <p:cNvPr id="9" name="TextBox 8"/>
+          <p:cNvPr id="8" name="TextBox 7"/>
           <p:cNvSpPr txBox="1"/>
           <p:nvPr/>
         </p:nvSpPr>
@@ -7031,7 +6731,7 @@
       </p:sp>
       <p:graphicFrame>
         <p:nvGraphicFramePr>
-          <p:cNvPr id="10" name="Table 9"/>
+          <p:cNvPr id="9" name="Table 8"/>
           <p:cNvGraphicFramePr>
             <a:graphicFrameLocks noGrp="1"/>
           </p:cNvGraphicFramePr>
@@ -7553,7 +7253,7 @@
       </p:graphicFrame>
       <p:sp>
         <p:nvSpPr>
-          <p:cNvPr id="11" name="TextBox 10"/>
+          <p:cNvPr id="10" name="TextBox 9"/>
           <p:cNvSpPr txBox="1"/>
           <p:nvPr/>
         </p:nvSpPr>
@@ -7595,7 +7295,7 @@
       </p:sp>
       <p:sp>
         <p:nvSpPr>
-          <p:cNvPr id="12" name="Rectangle 11"/>
+          <p:cNvPr id="11" name="Rectangle 10"/>
           <p:cNvSpPr/>
           <p:nvPr/>
         </p:nvSpPr>
@@ -7644,7 +7344,7 @@
       </p:sp>
       <p:sp>
         <p:nvSpPr>
-          <p:cNvPr id="13" name="Rectangle 12"/>
+          <p:cNvPr id="12" name="Rectangle 11"/>
           <p:cNvSpPr/>
           <p:nvPr/>
         </p:nvSpPr>
@@ -7693,7 +7393,7 @@
       </p:sp>
       <p:sp>
         <p:nvSpPr>
-          <p:cNvPr id="14" name="TextBox 13"/>
+          <p:cNvPr id="13" name="TextBox 12"/>
           <p:cNvSpPr txBox="1"/>
           <p:nvPr/>
         </p:nvSpPr>
@@ -7735,7 +7435,7 @@
       </p:sp>
       <p:sp>
         <p:nvSpPr>
-          <p:cNvPr id="15" name="TextBox 14"/>
+          <p:cNvPr id="14" name="TextBox 13"/>
           <p:cNvSpPr txBox="1"/>
           <p:nvPr/>
         </p:nvSpPr>
@@ -7777,7 +7477,7 @@
       </p:sp>
       <p:sp>
         <p:nvSpPr>
-          <p:cNvPr id="16" name="Rectangle 15"/>
+          <p:cNvPr id="15" name="Rectangle 14"/>
           <p:cNvSpPr/>
           <p:nvPr/>
         </p:nvSpPr>
@@ -7826,7 +7526,7 @@
       </p:sp>
       <p:sp>
         <p:nvSpPr>
-          <p:cNvPr id="17" name="TextBox 16"/>
+          <p:cNvPr id="16" name="TextBox 15"/>
           <p:cNvSpPr txBox="1"/>
           <p:nvPr/>
         </p:nvSpPr>
@@ -7868,7 +7568,7 @@
       </p:sp>
       <p:sp>
         <p:nvSpPr>
-          <p:cNvPr id="18" name="TextBox 17"/>
+          <p:cNvPr id="17" name="TextBox 16"/>
           <p:cNvSpPr txBox="1"/>
           <p:nvPr/>
         </p:nvSpPr>
@@ -7910,7 +7610,7 @@
       </p:sp>
       <p:sp>
         <p:nvSpPr>
-          <p:cNvPr id="19" name="TextBox 18"/>
+          <p:cNvPr id="18" name="TextBox 17"/>
           <p:cNvSpPr txBox="1"/>
           <p:nvPr/>
         </p:nvSpPr>
@@ -8026,7 +7726,7 @@
         <p:spPr>
           <a:xfrm>
             <a:off x="640080" y="329184"/>
-            <a:ext cx="5303520" cy="182880"/>
+            <a:ext cx="9875520" cy="182880"/>
           </a:xfrm>
           <a:prstGeom prst="rect">
             <a:avLst/>
@@ -8067,48 +7767,6 @@
         </p:nvSpPr>
         <p:spPr>
           <a:xfrm>
-            <a:off x="5897880" y="310896"/>
-            <a:ext cx="4800600" cy="256032"/>
-          </a:xfrm>
-          <a:prstGeom prst="rect">
-            <a:avLst/>
-          </a:prstGeom>
-          <a:noFill/>
-        </p:spPr>
-        <p:txBody>
-          <a:bodyPr wrap="none" lIns="9144" rIns="9144" tIns="9144" bIns="9144" anchor="t">
-            <a:spAutoFit/>
-          </a:bodyPr>
-          <a:lstStyle/>
-          <a:p>
-            <a:pPr algn="r">
-              <a:spcAft>
-                <a:spcPts val="0"/>
-              </a:spcAft>
-              <a:defRPr sz="680" b="1">
-                <a:solidFill>
-                  <a:srgbClr val="4F6B00"/>
-                </a:solidFill>
-                <a:latin typeface="Inter"/>
-              </a:defRPr>
-            </a:pPr>
-            <a:r>
-              <a:rPr>
-                <a:latin typeface="Inter"/>
-              </a:rPr>
-              <a:t>Illustrative, Gradient Maintained — demo data, not the client's holdings or managers</a:t>
-            </a:r>
-          </a:p>
-        </p:txBody>
-      </p:sp>
-      <p:sp>
-        <p:nvSpPr>
-          <p:cNvPr id="5" name="TextBox 4"/>
-          <p:cNvSpPr txBox="1"/>
-          <p:nvPr/>
-        </p:nvSpPr>
-        <p:spPr>
-          <a:xfrm>
             <a:off x="640080" y="566928"/>
             <a:ext cx="10058400" cy="530352"/>
           </a:xfrm>
@@ -8145,7 +7803,7 @@
       </p:sp>
       <p:sp>
         <p:nvSpPr>
-          <p:cNvPr id="6" name="Rectangle 5"/>
+          <p:cNvPr id="5" name="Rectangle 4"/>
           <p:cNvSpPr/>
           <p:nvPr/>
         </p:nvSpPr>
@@ -8194,7 +7852,7 @@
       </p:sp>
       <p:sp>
         <p:nvSpPr>
-          <p:cNvPr id="7" name="Rectangle 6"/>
+          <p:cNvPr id="6" name="Rectangle 5"/>
           <p:cNvSpPr/>
           <p:nvPr/>
         </p:nvSpPr>
@@ -8243,7 +7901,7 @@
       </p:sp>
       <p:sp>
         <p:nvSpPr>
-          <p:cNvPr id="8" name="TextBox 7"/>
+          <p:cNvPr id="7" name="TextBox 6"/>
           <p:cNvSpPr txBox="1"/>
           <p:nvPr/>
         </p:nvSpPr>
@@ -8285,7 +7943,7 @@
       </p:sp>
       <p:sp>
         <p:nvSpPr>
-          <p:cNvPr id="9" name="TextBox 8"/>
+          <p:cNvPr id="8" name="TextBox 7"/>
           <p:cNvSpPr txBox="1"/>
           <p:nvPr/>
         </p:nvSpPr>
@@ -8327,7 +7985,7 @@
       </p:sp>
       <p:sp>
         <p:nvSpPr>
-          <p:cNvPr id="10" name="TextBox 9"/>
+          <p:cNvPr id="9" name="TextBox 8"/>
           <p:cNvSpPr txBox="1"/>
           <p:nvPr/>
         </p:nvSpPr>
@@ -8407,7 +8065,7 @@
       </p:sp>
       <p:sp>
         <p:nvSpPr>
-          <p:cNvPr id="11" name="TextBox 10"/>
+          <p:cNvPr id="10" name="TextBox 9"/>
           <p:cNvSpPr txBox="1"/>
           <p:nvPr/>
         </p:nvSpPr>
@@ -8508,7 +8166,7 @@
       </p:sp>
       <p:sp>
         <p:nvSpPr>
-          <p:cNvPr id="12" name="Rectangle 11"/>
+          <p:cNvPr id="11" name="Rectangle 10"/>
           <p:cNvSpPr/>
           <p:nvPr/>
         </p:nvSpPr>
@@ -8557,7 +8215,7 @@
       </p:sp>
       <p:sp>
         <p:nvSpPr>
-          <p:cNvPr id="13" name="TextBox 12"/>
+          <p:cNvPr id="12" name="TextBox 11"/>
           <p:cNvSpPr txBox="1"/>
           <p:nvPr/>
         </p:nvSpPr>
@@ -8599,7 +8257,7 @@
       </p:sp>
       <p:sp>
         <p:nvSpPr>
-          <p:cNvPr id="14" name="TextBox 13"/>
+          <p:cNvPr id="13" name="TextBox 12"/>
           <p:cNvSpPr txBox="1"/>
           <p:nvPr/>
         </p:nvSpPr>
@@ -8641,7 +8299,7 @@
       </p:sp>
       <p:sp>
         <p:nvSpPr>
-          <p:cNvPr id="15" name="TextBox 14"/>
+          <p:cNvPr id="14" name="TextBox 13"/>
           <p:cNvSpPr txBox="1"/>
           <p:nvPr/>
         </p:nvSpPr>
@@ -8757,7 +8415,7 @@
         <p:spPr>
           <a:xfrm>
             <a:off x="640080" y="329184"/>
-            <a:ext cx="5303520" cy="182880"/>
+            <a:ext cx="9875520" cy="182880"/>
           </a:xfrm>
           <a:prstGeom prst="rect">
             <a:avLst/>
@@ -8798,48 +8456,6 @@
         </p:nvSpPr>
         <p:spPr>
           <a:xfrm>
-            <a:off x="5897880" y="310896"/>
-            <a:ext cx="4800600" cy="256032"/>
-          </a:xfrm>
-          <a:prstGeom prst="rect">
-            <a:avLst/>
-          </a:prstGeom>
-          <a:noFill/>
-        </p:spPr>
-        <p:txBody>
-          <a:bodyPr wrap="none" lIns="9144" rIns="9144" tIns="9144" bIns="9144" anchor="t">
-            <a:spAutoFit/>
-          </a:bodyPr>
-          <a:lstStyle/>
-          <a:p>
-            <a:pPr algn="r">
-              <a:spcAft>
-                <a:spcPts val="0"/>
-              </a:spcAft>
-              <a:defRPr sz="680" b="1">
-                <a:solidFill>
-                  <a:srgbClr val="4F6B00"/>
-                </a:solidFill>
-                <a:latin typeface="Inter"/>
-              </a:defRPr>
-            </a:pPr>
-            <a:r>
-              <a:rPr>
-                <a:latin typeface="Inter"/>
-              </a:rPr>
-              <a:t>Illustrative, Gradient Maintained — demo data, not the client's holdings or managers</a:t>
-            </a:r>
-          </a:p>
-        </p:txBody>
-      </p:sp>
-      <p:sp>
-        <p:nvSpPr>
-          <p:cNvPr id="5" name="TextBox 4"/>
-          <p:cNvSpPr txBox="1"/>
-          <p:nvPr/>
-        </p:nvSpPr>
-        <p:spPr>
-          <a:xfrm>
             <a:off x="640080" y="566928"/>
             <a:ext cx="10058400" cy="530352"/>
           </a:xfrm>
@@ -8876,7 +8492,7 @@
       </p:sp>
       <p:sp>
         <p:nvSpPr>
-          <p:cNvPr id="6" name="Rectangle 5"/>
+          <p:cNvPr id="5" name="Rectangle 4"/>
           <p:cNvSpPr/>
           <p:nvPr/>
         </p:nvSpPr>
@@ -8925,7 +8541,7 @@
       </p:sp>
       <p:sp>
         <p:nvSpPr>
-          <p:cNvPr id="7" name="Rectangle 6"/>
+          <p:cNvPr id="6" name="Rectangle 5"/>
           <p:cNvSpPr/>
           <p:nvPr/>
         </p:nvSpPr>
@@ -8974,7 +8590,7 @@
       </p:sp>
       <p:sp>
         <p:nvSpPr>
-          <p:cNvPr id="8" name="TextBox 7"/>
+          <p:cNvPr id="7" name="TextBox 6"/>
           <p:cNvSpPr txBox="1"/>
           <p:nvPr/>
         </p:nvSpPr>
@@ -9016,7 +8632,7 @@
       </p:sp>
       <p:graphicFrame>
         <p:nvGraphicFramePr>
-          <p:cNvPr id="9" name="Table 8"/>
+          <p:cNvPr id="8" name="Table 7"/>
           <p:cNvGraphicFramePr>
             <a:graphicFrameLocks noGrp="1"/>
           </p:cNvGraphicFramePr>
@@ -9034,14 +8650,10 @@
               </a:tblPr>
               <a:tblGrid>
                 <a:gridCol w="2011680"/>
-                <a:gridCol w="1112139"/>
-                <a:gridCol w="1112139"/>
-                <a:gridCol w="1112139"/>
-                <a:gridCol w="1112139"/>
-                <a:gridCol w="1112139"/>
-                <a:gridCol w="1112139"/>
-                <a:gridCol w="1112139"/>
-                <a:gridCol w="1112139"/>
+                <a:gridCol w="2224278"/>
+                <a:gridCol w="2224278"/>
+                <a:gridCol w="2224278"/>
+                <a:gridCol w="2224278"/>
               </a:tblGrid>
               <a:tr h="586359">
                 <a:tc>
@@ -9115,7 +8727,7 @@
                         <a:rPr>
                           <a:latin typeface="Inter"/>
                         </a:rPr>
-                        <a:t>Basis</a:t>
+                        <a:t>Source</a:t>
                       </a:r>
                     </a:p>
                   </a:txBody>
@@ -9142,7 +8754,1600 @@
                         <a:rPr>
                           <a:latin typeface="Inter"/>
                         </a:rPr>
-                        <a:t>Tool / view</a:t>
+                        <a:t>As of</a:t>
+                      </a:r>
+                    </a:p>
+                  </a:txBody>
+                  <a:tcPr marL="54864" marR="54864" marT="27432" marB="27432" anchor="ctr">
+                    <a:solidFill>
+                      <a:srgbClr val="0D1117"/>
+                    </a:solidFill>
+                  </a:tcPr>
+                </a:tc>
+                <a:tc>
+                  <a:txBody>
+                    <a:bodyPr/>
+                    <a:lstStyle/>
+                    <a:p>
+                      <a:pPr>
+                        <a:defRPr sz="750" b="1">
+                          <a:solidFill>
+                            <a:srgbClr val="FFFFFF"/>
+                          </a:solidFill>
+                          <a:latin typeface="Inter"/>
+                        </a:defRPr>
+                      </a:pPr>
+                      <a:r>
+                        <a:rPr>
+                          <a:latin typeface="Inter"/>
+                        </a:rPr>
+                        <a:t>Check</a:t>
+                      </a:r>
+                    </a:p>
+                  </a:txBody>
+                  <a:tcPr marL="54864" marR="54864" marT="27432" marB="27432" anchor="ctr">
+                    <a:solidFill>
+                      <a:srgbClr val="0D1117"/>
+                    </a:solidFill>
+                  </a:tcPr>
+                </a:tc>
+              </a:tr>
+              <a:tr h="586359">
+                <a:tc>
+                  <a:txBody>
+                    <a:bodyPr/>
+                    <a:lstStyle/>
+                    <a:p>
+                      <a:pPr>
+                        <a:defRPr sz="720" b="1">
+                          <a:solidFill>
+                            <a:srgbClr val="0D1117"/>
+                          </a:solidFill>
+                          <a:latin typeface="Inter"/>
+                        </a:defRPr>
+                      </a:pPr>
+                      <a:r>
+                        <a:rPr>
+                          <a:latin typeface="Inter"/>
+                        </a:rPr>
+                        <a:t>S1</a:t>
+                      </a:r>
+                    </a:p>
+                  </a:txBody>
+                  <a:tcPr marL="54864" marR="54864" marT="27432" marB="27432" anchor="ctr">
+                    <a:solidFill>
+                      <a:srgbClr val="FFFFFF"/>
+                    </a:solidFill>
+                  </a:tcPr>
+                </a:tc>
+                <a:tc>
+                  <a:txBody>
+                    <a:bodyPr/>
+                    <a:lstStyle/>
+                    <a:p>
+                      <a:pPr>
+                        <a:defRPr sz="720" b="0">
+                          <a:solidFill>
+                            <a:srgbClr val="0D1117"/>
+                          </a:solidFill>
+                          <a:latin typeface="Inter"/>
+                        </a:defRPr>
+                      </a:pPr>
+                      <a:r>
+                        <a:rPr>
+                          <a:latin typeface="Inter"/>
+                        </a:rPr>
+                        <a:t>Canonical portfolio</a:t>
+                      </a:r>
+                    </a:p>
+                  </a:txBody>
+                  <a:tcPr marL="54864" marR="54864" marT="27432" marB="27432" anchor="ctr">
+                    <a:solidFill>
+                      <a:srgbClr val="FFFFFF"/>
+                    </a:solidFill>
+                  </a:tcPr>
+                </a:tc>
+                <a:tc>
+                  <a:txBody>
+                    <a:bodyPr/>
+                    <a:lstStyle/>
+                    <a:p>
+                      <a:pPr>
+                        <a:defRPr sz="720" b="0">
+                          <a:solidFill>
+                            <a:srgbClr val="0D1117"/>
+                          </a:solidFill>
+                          <a:latin typeface="Inter"/>
+                        </a:defRPr>
+                      </a:pPr>
+                      <a:r>
+                        <a:rPr>
+                          <a:latin typeface="Inter"/>
+                        </a:rPr>
+                        <a:t>list_portfolios</a:t>
+                      </a:r>
+                    </a:p>
+                  </a:txBody>
+                  <a:tcPr marL="54864" marR="54864" marT="27432" marB="27432" anchor="ctr">
+                    <a:solidFill>
+                      <a:srgbClr val="FFFFFF"/>
+                    </a:solidFill>
+                  </a:tcPr>
+                </a:tc>
+                <a:tc>
+                  <a:txBody>
+                    <a:bodyPr/>
+                    <a:lstStyle/>
+                    <a:p>
+                      <a:pPr>
+                        <a:defRPr sz="720" b="0">
+                          <a:solidFill>
+                            <a:srgbClr val="0D1117"/>
+                          </a:solidFill>
+                          <a:latin typeface="Inter"/>
+                        </a:defRPr>
+                      </a:pPr>
+                      <a:r>
+                        <a:rPr>
+                          <a:latin typeface="Inter"/>
+                        </a:rPr>
+                        <a:t>2025-12-31</a:t>
+                      </a:r>
+                    </a:p>
+                  </a:txBody>
+                  <a:tcPr marL="54864" marR="54864" marT="27432" marB="27432" anchor="ctr">
+                    <a:solidFill>
+                      <a:srgbClr val="FFFFFF"/>
+                    </a:solidFill>
+                  </a:tcPr>
+                </a:tc>
+                <a:tc>
+                  <a:txBody>
+                    <a:bodyPr/>
+                    <a:lstStyle/>
+                    <a:p>
+                      <a:pPr>
+                        <a:defRPr sz="720" b="1">
+                          <a:solidFill>
+                            <a:srgbClr val="C6F432"/>
+                          </a:solidFill>
+                          <a:latin typeface="Inter"/>
+                        </a:defRPr>
+                      </a:pPr>
+                      <a:r>
+                        <a:rPr>
+                          <a:latin typeface="Inter"/>
+                        </a:rPr>
+                        <a:t>● Passed</a:t>
+                      </a:r>
+                    </a:p>
+                  </a:txBody>
+                  <a:tcPr marL="54864" marR="54864" marT="27432" marB="27432" anchor="ctr">
+                    <a:solidFill>
+                      <a:srgbClr val="F5F7F9"/>
+                    </a:solidFill>
+                  </a:tcPr>
+                </a:tc>
+              </a:tr>
+              <a:tr h="586359">
+                <a:tc>
+                  <a:txBody>
+                    <a:bodyPr/>
+                    <a:lstStyle/>
+                    <a:p>
+                      <a:pPr>
+                        <a:defRPr sz="720" b="1">
+                          <a:solidFill>
+                            <a:srgbClr val="0D1117"/>
+                          </a:solidFill>
+                          <a:latin typeface="Inter"/>
+                        </a:defRPr>
+                      </a:pPr>
+                      <a:r>
+                        <a:rPr>
+                          <a:latin typeface="Inter"/>
+                        </a:rPr>
+                        <a:t>S2</a:t>
+                      </a:r>
+                    </a:p>
+                  </a:txBody>
+                  <a:tcPr marL="54864" marR="54864" marT="27432" marB="27432" anchor="ctr">
+                    <a:solidFill>
+                      <a:srgbClr val="F5F7F9"/>
+                    </a:solidFill>
+                  </a:tcPr>
+                </a:tc>
+                <a:tc>
+                  <a:txBody>
+                    <a:bodyPr/>
+                    <a:lstStyle/>
+                    <a:p>
+                      <a:pPr>
+                        <a:defRPr sz="720" b="0">
+                          <a:solidFill>
+                            <a:srgbClr val="0D1117"/>
+                          </a:solidFill>
+                          <a:latin typeface="Inter"/>
+                        </a:defRPr>
+                      </a:pPr>
+                      <a:r>
+                        <a:rPr>
+                          <a:latin typeface="Inter"/>
+                        </a:rPr>
+                        <a:t>Canonical commitment</a:t>
+                      </a:r>
+                    </a:p>
+                  </a:txBody>
+                  <a:tcPr marL="54864" marR="54864" marT="27432" marB="27432" anchor="ctr">
+                    <a:solidFill>
+                      <a:srgbClr val="F5F7F9"/>
+                    </a:solidFill>
+                  </a:tcPr>
+                </a:tc>
+                <a:tc>
+                  <a:txBody>
+                    <a:bodyPr/>
+                    <a:lstStyle/>
+                    <a:p>
+                      <a:pPr>
+                        <a:defRPr sz="720" b="0">
+                          <a:solidFill>
+                            <a:srgbClr val="0D1117"/>
+                          </a:solidFill>
+                          <a:latin typeface="Inter"/>
+                        </a:defRPr>
+                      </a:pPr>
+                      <a:r>
+                        <a:rPr>
+                          <a:latin typeface="Inter"/>
+                        </a:rPr>
+                        <a:t>get_portfolio_exposure</a:t>
+                      </a:r>
+                    </a:p>
+                  </a:txBody>
+                  <a:tcPr marL="54864" marR="54864" marT="27432" marB="27432" anchor="ctr">
+                    <a:solidFill>
+                      <a:srgbClr val="F5F7F9"/>
+                    </a:solidFill>
+                  </a:tcPr>
+                </a:tc>
+                <a:tc>
+                  <a:txBody>
+                    <a:bodyPr/>
+                    <a:lstStyle/>
+                    <a:p>
+                      <a:pPr>
+                        <a:defRPr sz="720" b="0">
+                          <a:solidFill>
+                            <a:srgbClr val="0D1117"/>
+                          </a:solidFill>
+                          <a:latin typeface="Inter"/>
+                        </a:defRPr>
+                      </a:pPr>
+                      <a:r>
+                        <a:rPr>
+                          <a:latin typeface="Inter"/>
+                        </a:rPr>
+                        <a:t>2025-12-31</a:t>
+                      </a:r>
+                    </a:p>
+                  </a:txBody>
+                  <a:tcPr marL="54864" marR="54864" marT="27432" marB="27432" anchor="ctr">
+                    <a:solidFill>
+                      <a:srgbClr val="F5F7F9"/>
+                    </a:solidFill>
+                  </a:tcPr>
+                </a:tc>
+                <a:tc>
+                  <a:txBody>
+                    <a:bodyPr/>
+                    <a:lstStyle/>
+                    <a:p>
+                      <a:pPr>
+                        <a:defRPr sz="720" b="1">
+                          <a:solidFill>
+                            <a:srgbClr val="C6F432"/>
+                          </a:solidFill>
+                          <a:latin typeface="Inter"/>
+                        </a:defRPr>
+                      </a:pPr>
+                      <a:r>
+                        <a:rPr>
+                          <a:latin typeface="Inter"/>
+                        </a:rPr>
+                        <a:t>● Passed</a:t>
+                      </a:r>
+                    </a:p>
+                  </a:txBody>
+                  <a:tcPr marL="54864" marR="54864" marT="27432" marB="27432" anchor="ctr">
+                    <a:solidFill>
+                      <a:srgbClr val="F5F7F9"/>
+                    </a:solidFill>
+                  </a:tcPr>
+                </a:tc>
+              </a:tr>
+              <a:tr h="586359">
+                <a:tc>
+                  <a:txBody>
+                    <a:bodyPr/>
+                    <a:lstStyle/>
+                    <a:p>
+                      <a:pPr>
+                        <a:defRPr sz="720" b="1">
+                          <a:solidFill>
+                            <a:srgbClr val="0D1117"/>
+                          </a:solidFill>
+                          <a:latin typeface="Inter"/>
+                        </a:defRPr>
+                      </a:pPr>
+                      <a:r>
+                        <a:rPr>
+                          <a:latin typeface="Inter"/>
+                        </a:rPr>
+                        <a:t>S3</a:t>
+                      </a:r>
+                    </a:p>
+                  </a:txBody>
+                  <a:tcPr marL="54864" marR="54864" marT="27432" marB="27432" anchor="ctr">
+                    <a:solidFill>
+                      <a:srgbClr val="FFFFFF"/>
+                    </a:solidFill>
+                  </a:tcPr>
+                </a:tc>
+                <a:tc>
+                  <a:txBody>
+                    <a:bodyPr/>
+                    <a:lstStyle/>
+                    <a:p>
+                      <a:pPr>
+                        <a:defRPr sz="720" b="0">
+                          <a:solidFill>
+                            <a:srgbClr val="0D1117"/>
+                          </a:solidFill>
+                          <a:latin typeface="Inter"/>
+                        </a:defRPr>
+                      </a:pPr>
+                      <a:r>
+                        <a:rPr>
+                          <a:latin typeface="Inter"/>
+                        </a:rPr>
+                        <a:t>Holdings and ILPA context</a:t>
+                      </a:r>
+                    </a:p>
+                  </a:txBody>
+                  <a:tcPr marL="54864" marR="54864" marT="27432" marB="27432" anchor="ctr">
+                    <a:solidFill>
+                      <a:srgbClr val="FFFFFF"/>
+                    </a:solidFill>
+                  </a:tcPr>
+                </a:tc>
+                <a:tc>
+                  <a:txBody>
+                    <a:bodyPr/>
+                    <a:lstStyle/>
+                    <a:p>
+                      <a:pPr>
+                        <a:defRPr sz="720" b="0">
+                          <a:solidFill>
+                            <a:srgbClr val="0D1117"/>
+                          </a:solidFill>
+                          <a:latin typeface="Inter"/>
+                        </a:defRPr>
+                      </a:pPr>
+                      <a:r>
+                        <a:rPr>
+                          <a:latin typeface="Inter"/>
+                        </a:rPr>
+                        <a:t>get_private_markets_holdings</a:t>
+                      </a:r>
+                    </a:p>
+                  </a:txBody>
+                  <a:tcPr marL="54864" marR="54864" marT="27432" marB="27432" anchor="ctr">
+                    <a:solidFill>
+                      <a:srgbClr val="FFFFFF"/>
+                    </a:solidFill>
+                  </a:tcPr>
+                </a:tc>
+                <a:tc>
+                  <a:txBody>
+                    <a:bodyPr/>
+                    <a:lstStyle/>
+                    <a:p>
+                      <a:pPr>
+                        <a:defRPr sz="720" b="0">
+                          <a:solidFill>
+                            <a:srgbClr val="0D1117"/>
+                          </a:solidFill>
+                          <a:latin typeface="Inter"/>
+                        </a:defRPr>
+                      </a:pPr>
+                      <a:r>
+                        <a:rPr>
+                          <a:latin typeface="Inter"/>
+                        </a:rPr>
+                        <a:t>2025-12-31</a:t>
+                      </a:r>
+                    </a:p>
+                  </a:txBody>
+                  <a:tcPr marL="54864" marR="54864" marT="27432" marB="27432" anchor="ctr">
+                    <a:solidFill>
+                      <a:srgbClr val="FFFFFF"/>
+                    </a:solidFill>
+                  </a:tcPr>
+                </a:tc>
+                <a:tc>
+                  <a:txBody>
+                    <a:bodyPr/>
+                    <a:lstStyle/>
+                    <a:p>
+                      <a:pPr>
+                        <a:defRPr sz="720" b="1">
+                          <a:solidFill>
+                            <a:srgbClr val="F2A93B"/>
+                          </a:solidFill>
+                          <a:latin typeface="Inter"/>
+                        </a:defRPr>
+                      </a:pPr>
+                      <a:r>
+                        <a:rPr>
+                          <a:latin typeface="Inter"/>
+                        </a:rPr>
+                        <a:t>● Partly available</a:t>
+                      </a:r>
+                    </a:p>
+                  </a:txBody>
+                  <a:tcPr marL="54864" marR="54864" marT="27432" marB="27432" anchor="ctr">
+                    <a:solidFill>
+                      <a:srgbClr val="F5F7F9"/>
+                    </a:solidFill>
+                  </a:tcPr>
+                </a:tc>
+              </a:tr>
+              <a:tr h="586359">
+                <a:tc>
+                  <a:txBody>
+                    <a:bodyPr/>
+                    <a:lstStyle/>
+                    <a:p>
+                      <a:pPr>
+                        <a:defRPr sz="720" b="1">
+                          <a:solidFill>
+                            <a:srgbClr val="0D1117"/>
+                          </a:solidFill>
+                          <a:latin typeface="Inter"/>
+                        </a:defRPr>
+                      </a:pPr>
+                      <a:r>
+                        <a:rPr>
+                          <a:latin typeface="Inter"/>
+                        </a:rPr>
+                        <a:t>S4</a:t>
+                      </a:r>
+                    </a:p>
+                  </a:txBody>
+                  <a:tcPr marL="54864" marR="54864" marT="27432" marB="27432" anchor="ctr">
+                    <a:solidFill>
+                      <a:srgbClr val="F5F7F9"/>
+                    </a:solidFill>
+                  </a:tcPr>
+                </a:tc>
+                <a:tc>
+                  <a:txBody>
+                    <a:bodyPr/>
+                    <a:lstStyle/>
+                    <a:p>
+                      <a:pPr>
+                        <a:defRPr sz="720" b="0">
+                          <a:solidFill>
+                            <a:srgbClr val="0D1117"/>
+                          </a:solidFill>
+                          <a:latin typeface="Inter"/>
+                        </a:defRPr>
+                      </a:pPr>
+                      <a:r>
+                        <a:rPr>
+                          <a:latin typeface="Inter"/>
+                        </a:rPr>
+                        <a:t>Primary and sensitivity benchmark identities</a:t>
+                      </a:r>
+                    </a:p>
+                  </a:txBody>
+                  <a:tcPr marL="54864" marR="54864" marT="27432" marB="27432" anchor="ctr">
+                    <a:solidFill>
+                      <a:srgbClr val="F5F7F9"/>
+                    </a:solidFill>
+                  </a:tcPr>
+                </a:tc>
+                <a:tc>
+                  <a:txBody>
+                    <a:bodyPr/>
+                    <a:lstStyle/>
+                    <a:p>
+                      <a:pPr>
+                        <a:defRPr sz="720" b="0">
+                          <a:solidFill>
+                            <a:srgbClr val="0D1117"/>
+                          </a:solidFill>
+                          <a:latin typeface="Inter"/>
+                        </a:defRPr>
+                      </a:pPr>
+                      <a:r>
+                        <a:rPr>
+                          <a:latin typeface="Inter"/>
+                        </a:rPr>
+                        <a:t>get_benchmarks</a:t>
+                      </a:r>
+                    </a:p>
+                  </a:txBody>
+                  <a:tcPr marL="54864" marR="54864" marT="27432" marB="27432" anchor="ctr">
+                    <a:solidFill>
+                      <a:srgbClr val="F5F7F9"/>
+                    </a:solidFill>
+                  </a:tcPr>
+                </a:tc>
+                <a:tc>
+                  <a:txBody>
+                    <a:bodyPr/>
+                    <a:lstStyle/>
+                    <a:p>
+                      <a:pPr>
+                        <a:defRPr sz="720" b="0">
+                          <a:solidFill>
+                            <a:srgbClr val="0D1117"/>
+                          </a:solidFill>
+                          <a:latin typeface="Inter"/>
+                        </a:defRPr>
+                      </a:pPr>
+                      <a:r>
+                        <a:rPr>
+                          <a:latin typeface="Inter"/>
+                        </a:rPr>
+                        <a:t>2025-12-31</a:t>
+                      </a:r>
+                    </a:p>
+                  </a:txBody>
+                  <a:tcPr marL="54864" marR="54864" marT="27432" marB="27432" anchor="ctr">
+                    <a:solidFill>
+                      <a:srgbClr val="F5F7F9"/>
+                    </a:solidFill>
+                  </a:tcPr>
+                </a:tc>
+                <a:tc>
+                  <a:txBody>
+                    <a:bodyPr/>
+                    <a:lstStyle/>
+                    <a:p>
+                      <a:pPr>
+                        <a:defRPr sz="720" b="1">
+                          <a:solidFill>
+                            <a:srgbClr val="C6F432"/>
+                          </a:solidFill>
+                          <a:latin typeface="Inter"/>
+                        </a:defRPr>
+                      </a:pPr>
+                      <a:r>
+                        <a:rPr>
+                          <a:latin typeface="Inter"/>
+                        </a:rPr>
+                        <a:t>● Passed</a:t>
+                      </a:r>
+                    </a:p>
+                  </a:txBody>
+                  <a:tcPr marL="54864" marR="54864" marT="27432" marB="27432" anchor="ctr">
+                    <a:solidFill>
+                      <a:srgbClr val="F5F7F9"/>
+                    </a:solidFill>
+                  </a:tcPr>
+                </a:tc>
+              </a:tr>
+              <a:tr h="586359">
+                <a:tc>
+                  <a:txBody>
+                    <a:bodyPr/>
+                    <a:lstStyle/>
+                    <a:p>
+                      <a:pPr>
+                        <a:defRPr sz="720" b="1">
+                          <a:solidFill>
+                            <a:srgbClr val="0D1117"/>
+                          </a:solidFill>
+                          <a:latin typeface="Inter"/>
+                        </a:defRPr>
+                      </a:pPr>
+                      <a:r>
+                        <a:rPr>
+                          <a:latin typeface="Inter"/>
+                        </a:rPr>
+                        <a:t>S5</a:t>
+                      </a:r>
+                    </a:p>
+                  </a:txBody>
+                  <a:tcPr marL="54864" marR="54864" marT="27432" marB="27432" anchor="ctr">
+                    <a:solidFill>
+                      <a:srgbClr val="FFFFFF"/>
+                    </a:solidFill>
+                  </a:tcPr>
+                </a:tc>
+                <a:tc>
+                  <a:txBody>
+                    <a:bodyPr/>
+                    <a:lstStyle/>
+                    <a:p>
+                      <a:pPr>
+                        <a:defRPr sz="720" b="0">
+                          <a:solidFill>
+                            <a:srgbClr val="0D1117"/>
+                          </a:solidFill>
+                          <a:latin typeface="Inter"/>
+                        </a:defRPr>
+                      </a:pPr>
+                      <a:r>
+                        <a:rPr>
+                          <a:latin typeface="Inter"/>
+                        </a:rPr>
+                        <a:t>Primary commitment-scoped session</a:t>
+                      </a:r>
+                    </a:p>
+                  </a:txBody>
+                  <a:tcPr marL="54864" marR="54864" marT="27432" marB="27432" anchor="ctr">
+                    <a:solidFill>
+                      <a:srgbClr val="FFFFFF"/>
+                    </a:solidFill>
+                  </a:tcPr>
+                </a:tc>
+                <a:tc>
+                  <a:txBody>
+                    <a:bodyPr/>
+                    <a:lstStyle/>
+                    <a:p>
+                      <a:pPr>
+                        <a:defRPr sz="720" b="0">
+                          <a:solidFill>
+                            <a:srgbClr val="0D1117"/>
+                          </a:solidFill>
+                          <a:latin typeface="Inter"/>
+                        </a:defRPr>
+                      </a:pPr>
+                      <a:r>
+                        <a:rPr>
+                          <a:latin typeface="Inter"/>
+                        </a:rPr>
+                        <a:t>build_strategy_lab_session</a:t>
+                      </a:r>
+                    </a:p>
+                  </a:txBody>
+                  <a:tcPr marL="54864" marR="54864" marT="27432" marB="27432" anchor="ctr">
+                    <a:solidFill>
+                      <a:srgbClr val="FFFFFF"/>
+                    </a:solidFill>
+                  </a:tcPr>
+                </a:tc>
+                <a:tc>
+                  <a:txBody>
+                    <a:bodyPr/>
+                    <a:lstStyle/>
+                    <a:p>
+                      <a:pPr>
+                        <a:defRPr sz="720" b="0">
+                          <a:solidFill>
+                            <a:srgbClr val="0D1117"/>
+                          </a:solidFill>
+                          <a:latin typeface="Inter"/>
+                        </a:defRPr>
+                      </a:pPr>
+                      <a:r>
+                        <a:rPr>
+                          <a:latin typeface="Inter"/>
+                        </a:rPr>
+                        <a:t>2025-12-31</a:t>
+                      </a:r>
+                    </a:p>
+                  </a:txBody>
+                  <a:tcPr marL="54864" marR="54864" marT="27432" marB="27432" anchor="ctr">
+                    <a:solidFill>
+                      <a:srgbClr val="FFFFFF"/>
+                    </a:solidFill>
+                  </a:tcPr>
+                </a:tc>
+                <a:tc>
+                  <a:txBody>
+                    <a:bodyPr/>
+                    <a:lstStyle/>
+                    <a:p>
+                      <a:pPr>
+                        <a:defRPr sz="720" b="1">
+                          <a:solidFill>
+                            <a:srgbClr val="C6F432"/>
+                          </a:solidFill>
+                          <a:latin typeface="Inter"/>
+                        </a:defRPr>
+                      </a:pPr>
+                      <a:r>
+                        <a:rPr>
+                          <a:latin typeface="Inter"/>
+                        </a:rPr>
+                        <a:t>● Passed</a:t>
+                      </a:r>
+                    </a:p>
+                  </a:txBody>
+                  <a:tcPr marL="54864" marR="54864" marT="27432" marB="27432" anchor="ctr">
+                    <a:solidFill>
+                      <a:srgbClr val="F5F7F9"/>
+                    </a:solidFill>
+                  </a:tcPr>
+                </a:tc>
+              </a:tr>
+              <a:tr h="586359">
+                <a:tc>
+                  <a:txBody>
+                    <a:bodyPr/>
+                    <a:lstStyle/>
+                    <a:p>
+                      <a:pPr>
+                        <a:defRPr sz="720" b="1">
+                          <a:solidFill>
+                            <a:srgbClr val="0D1117"/>
+                          </a:solidFill>
+                          <a:latin typeface="Inter"/>
+                        </a:defRPr>
+                      </a:pPr>
+                      <a:r>
+                        <a:rPr>
+                          <a:latin typeface="Inter"/>
+                        </a:rPr>
+                        <a:t>S6</a:t>
+                      </a:r>
+                    </a:p>
+                  </a:txBody>
+                  <a:tcPr marL="54864" marR="54864" marT="27432" marB="27432" anchor="ctr">
+                    <a:solidFill>
+                      <a:srgbClr val="F5F7F9"/>
+                    </a:solidFill>
+                  </a:tcPr>
+                </a:tc>
+                <a:tc>
+                  <a:txBody>
+                    <a:bodyPr/>
+                    <a:lstStyle/>
+                    <a:p>
+                      <a:pPr>
+                        <a:defRPr sz="720" b="0">
+                          <a:solidFill>
+                            <a:srgbClr val="0D1117"/>
+                          </a:solidFill>
+                          <a:latin typeface="Inter"/>
+                        </a:defRPr>
+                      </a:pPr>
+                      <a:r>
+                        <a:rPr>
+                          <a:latin typeface="Inter"/>
+                        </a:rPr>
+                        <a:t>Primary PME metrics</a:t>
+                      </a:r>
+                    </a:p>
+                  </a:txBody>
+                  <a:tcPr marL="54864" marR="54864" marT="27432" marB="27432" anchor="ctr">
+                    <a:solidFill>
+                      <a:srgbClr val="F5F7F9"/>
+                    </a:solidFill>
+                  </a:tcPr>
+                </a:tc>
+                <a:tc>
+                  <a:txBody>
+                    <a:bodyPr/>
+                    <a:lstStyle/>
+                    <a:p>
+                      <a:pPr>
+                        <a:defRPr sz="720" b="0">
+                          <a:solidFill>
+                            <a:srgbClr val="0D1117"/>
+                          </a:solidFill>
+                          <a:latin typeface="Inter"/>
+                        </a:defRPr>
+                      </a:pPr>
+                      <a:r>
+                        <a:rPr>
+                          <a:latin typeface="Inter"/>
+                        </a:rPr>
+                        <a:t>run_strategy_lab_private_markets_pme</a:t>
+                      </a:r>
+                    </a:p>
+                  </a:txBody>
+                  <a:tcPr marL="54864" marR="54864" marT="27432" marB="27432" anchor="ctr">
+                    <a:solidFill>
+                      <a:srgbClr val="F5F7F9"/>
+                    </a:solidFill>
+                  </a:tcPr>
+                </a:tc>
+                <a:tc>
+                  <a:txBody>
+                    <a:bodyPr/>
+                    <a:lstStyle/>
+                    <a:p>
+                      <a:pPr>
+                        <a:defRPr sz="720" b="0">
+                          <a:solidFill>
+                            <a:srgbClr val="0D1117"/>
+                          </a:solidFill>
+                          <a:latin typeface="Inter"/>
+                        </a:defRPr>
+                      </a:pPr>
+                      <a:r>
+                        <a:rPr>
+                          <a:latin typeface="Inter"/>
+                        </a:rPr>
+                        <a:t>2025-12-31</a:t>
+                      </a:r>
+                    </a:p>
+                  </a:txBody>
+                  <a:tcPr marL="54864" marR="54864" marT="27432" marB="27432" anchor="ctr">
+                    <a:solidFill>
+                      <a:srgbClr val="F5F7F9"/>
+                    </a:solidFill>
+                  </a:tcPr>
+                </a:tc>
+                <a:tc>
+                  <a:txBody>
+                    <a:bodyPr/>
+                    <a:lstStyle/>
+                    <a:p>
+                      <a:pPr>
+                        <a:defRPr sz="720" b="1">
+                          <a:solidFill>
+                            <a:srgbClr val="C6F432"/>
+                          </a:solidFill>
+                          <a:latin typeface="Inter"/>
+                        </a:defRPr>
+                      </a:pPr>
+                      <a:r>
+                        <a:rPr>
+                          <a:latin typeface="Inter"/>
+                        </a:rPr>
+                        <a:t>● Passed</a:t>
+                      </a:r>
+                    </a:p>
+                  </a:txBody>
+                  <a:tcPr marL="54864" marR="54864" marT="27432" marB="27432" anchor="ctr">
+                    <a:solidFill>
+                      <a:srgbClr val="F5F7F9"/>
+                    </a:solidFill>
+                  </a:tcPr>
+                </a:tc>
+              </a:tr>
+              <a:tr h="586359">
+                <a:tc>
+                  <a:txBody>
+                    <a:bodyPr/>
+                    <a:lstStyle/>
+                    <a:p>
+                      <a:pPr>
+                        <a:defRPr sz="720" b="1">
+                          <a:solidFill>
+                            <a:srgbClr val="0D1117"/>
+                          </a:solidFill>
+                          <a:latin typeface="Inter"/>
+                        </a:defRPr>
+                      </a:pPr>
+                      <a:r>
+                        <a:rPr>
+                          <a:latin typeface="Inter"/>
+                        </a:rPr>
+                        <a:t>S7</a:t>
+                      </a:r>
+                    </a:p>
+                  </a:txBody>
+                  <a:tcPr marL="54864" marR="54864" marT="27432" marB="27432" anchor="ctr">
+                    <a:solidFill>
+                      <a:srgbClr val="FFFFFF"/>
+                    </a:solidFill>
+                  </a:tcPr>
+                </a:tc>
+                <a:tc>
+                  <a:txBody>
+                    <a:bodyPr/>
+                    <a:lstStyle/>
+                    <a:p>
+                      <a:pPr>
+                        <a:defRPr sz="720" b="0">
+                          <a:solidFill>
+                            <a:srgbClr val="0D1117"/>
+                          </a:solidFill>
+                          <a:latin typeface="Inter"/>
+                        </a:defRPr>
+                      </a:pPr>
+                      <a:r>
+                        <a:rPr>
+                          <a:latin typeface="Inter"/>
+                        </a:rPr>
+                        <a:t>Sensitivity PME metrics</a:t>
+                      </a:r>
+                    </a:p>
+                  </a:txBody>
+                  <a:tcPr marL="54864" marR="54864" marT="27432" marB="27432" anchor="ctr">
+                    <a:solidFill>
+                      <a:srgbClr val="FFFFFF"/>
+                    </a:solidFill>
+                  </a:tcPr>
+                </a:tc>
+                <a:tc>
+                  <a:txBody>
+                    <a:bodyPr/>
+                    <a:lstStyle/>
+                    <a:p>
+                      <a:pPr>
+                        <a:defRPr sz="720" b="0">
+                          <a:solidFill>
+                            <a:srgbClr val="0D1117"/>
+                          </a:solidFill>
+                          <a:latin typeface="Inter"/>
+                        </a:defRPr>
+                      </a:pPr>
+                      <a:r>
+                        <a:rPr>
+                          <a:latin typeface="Inter"/>
+                        </a:rPr>
+                        <a:t>run_strategy_lab_private_markets_pme</a:t>
+                      </a:r>
+                    </a:p>
+                  </a:txBody>
+                  <a:tcPr marL="54864" marR="54864" marT="27432" marB="27432" anchor="ctr">
+                    <a:solidFill>
+                      <a:srgbClr val="FFFFFF"/>
+                    </a:solidFill>
+                  </a:tcPr>
+                </a:tc>
+                <a:tc>
+                  <a:txBody>
+                    <a:bodyPr/>
+                    <a:lstStyle/>
+                    <a:p>
+                      <a:pPr>
+                        <a:defRPr sz="720" b="0">
+                          <a:solidFill>
+                            <a:srgbClr val="0D1117"/>
+                          </a:solidFill>
+                          <a:latin typeface="Inter"/>
+                        </a:defRPr>
+                      </a:pPr>
+                      <a:r>
+                        <a:rPr>
+                          <a:latin typeface="Inter"/>
+                        </a:rPr>
+                        <a:t>2025-12-31</a:t>
+                      </a:r>
+                    </a:p>
+                  </a:txBody>
+                  <a:tcPr marL="54864" marR="54864" marT="27432" marB="27432" anchor="ctr">
+                    <a:solidFill>
+                      <a:srgbClr val="FFFFFF"/>
+                    </a:solidFill>
+                  </a:tcPr>
+                </a:tc>
+                <a:tc>
+                  <a:txBody>
+                    <a:bodyPr/>
+                    <a:lstStyle/>
+                    <a:p>
+                      <a:pPr>
+                        <a:defRPr sz="720" b="1">
+                          <a:solidFill>
+                            <a:srgbClr val="C6F432"/>
+                          </a:solidFill>
+                          <a:latin typeface="Inter"/>
+                        </a:defRPr>
+                      </a:pPr>
+                      <a:r>
+                        <a:rPr>
+                          <a:latin typeface="Inter"/>
+                        </a:rPr>
+                        <a:t>● Passed</a:t>
+                      </a:r>
+                    </a:p>
+                  </a:txBody>
+                  <a:tcPr marL="54864" marR="54864" marT="27432" marB="27432" anchor="ctr">
+                    <a:solidFill>
+                      <a:srgbClr val="F5F7F9"/>
+                    </a:solidFill>
+                  </a:tcPr>
+                </a:tc>
+              </a:tr>
+            </a:tbl>
+          </a:graphicData>
+        </a:graphic>
+      </p:graphicFrame>
+      <p:sp>
+        <p:nvSpPr>
+          <p:cNvPr id="9" name="TextBox 8"/>
+          <p:cNvSpPr txBox="1"/>
+          <p:nvPr/>
+        </p:nvSpPr>
+        <p:spPr>
+          <a:xfrm>
+            <a:off x="640080" y="6035040"/>
+            <a:ext cx="10908792" cy="164592"/>
+          </a:xfrm>
+          <a:prstGeom prst="rect">
+            <a:avLst/>
+          </a:prstGeom>
+          <a:noFill/>
+        </p:spPr>
+        <p:txBody>
+          <a:bodyPr wrap="none" lIns="9144" rIns="9144" tIns="9144" bIns="9144" anchor="t">
+            <a:spAutoFit/>
+          </a:bodyPr>
+          <a:lstStyle/>
+          <a:p>
+            <a:pPr algn="l">
+              <a:spcAft>
+                <a:spcPts val="0"/>
+              </a:spcAft>
+              <a:defRPr sz="680" b="0">
+                <a:solidFill>
+                  <a:srgbClr val="8A94A1"/>
+                </a:solidFill>
+                <a:latin typeface="Inter"/>
+              </a:defRPr>
+            </a:pPr>
+            <a:r>
+              <a:rPr>
+                <a:latin typeface="Inter"/>
+              </a:rPr>
+              <a:t>Illustrative, Gradient Maintained — demo data, not the client's holdings or managers. All organizations, portfolios, managers and results in this public example are illustrative.</a:t>
+            </a:r>
+          </a:p>
+        </p:txBody>
+      </p:sp>
+      <p:sp>
+        <p:nvSpPr>
+          <p:cNvPr id="10" name="Rectangle 9"/>
+          <p:cNvSpPr/>
+          <p:nvPr/>
+        </p:nvSpPr>
+        <p:spPr>
+          <a:xfrm>
+            <a:off x="640080" y="6446520"/>
+            <a:ext cx="10908792" cy="9144"/>
+          </a:xfrm>
+          <a:prstGeom prst="rect">
+            <a:avLst/>
+          </a:prstGeom>
+          <a:solidFill>
+            <a:srgbClr val="E3E7EC"/>
+          </a:solidFill>
+          <a:ln>
+            <a:solidFill>
+              <a:srgbClr val="E3E7EC"/>
+            </a:solidFill>
+          </a:ln>
+        </p:spPr>
+        <p:style>
+          <a:lnRef idx="1">
+            <a:schemeClr val="accent1"/>
+          </a:lnRef>
+          <a:fillRef idx="3">
+            <a:schemeClr val="accent1"/>
+          </a:fillRef>
+          <a:effectRef idx="2">
+            <a:schemeClr val="accent1"/>
+          </a:effectRef>
+          <a:fontRef idx="minor">
+            <a:schemeClr val="lt1"/>
+          </a:fontRef>
+        </p:style>
+        <p:txBody>
+          <a:bodyPr rtlCol="0" anchor="ctr"/>
+          <a:lstStyle/>
+          <a:p>
+            <a:pPr algn="ctr">
+              <a:defRPr>
+                <a:latin typeface="Inter"/>
+              </a:defRPr>
+            </a:pPr>
+          </a:p>
+        </p:txBody>
+      </p:sp>
+      <p:sp>
+        <p:nvSpPr>
+          <p:cNvPr id="11" name="TextBox 10"/>
+          <p:cNvSpPr txBox="1"/>
+          <p:nvPr/>
+        </p:nvSpPr>
+        <p:spPr>
+          <a:xfrm>
+            <a:off x="640080" y="6501384"/>
+            <a:ext cx="4297680" cy="146304"/>
+          </a:xfrm>
+          <a:prstGeom prst="rect">
+            <a:avLst/>
+          </a:prstGeom>
+          <a:noFill/>
+        </p:spPr>
+        <p:txBody>
+          <a:bodyPr wrap="none" lIns="9144" rIns="9144" tIns="9144" bIns="9144" anchor="t">
+            <a:spAutoFit/>
+          </a:bodyPr>
+          <a:lstStyle/>
+          <a:p>
+            <a:pPr algn="l">
+              <a:spcAft>
+                <a:spcPts val="0"/>
+              </a:spcAft>
+              <a:defRPr sz="650" b="0">
+                <a:solidFill>
+                  <a:srgbClr val="8A94A1"/>
+                </a:solidFill>
+                <a:latin typeface="Inter"/>
+              </a:defRPr>
+            </a:pPr>
+            <a:r>
+              <a:rPr>
+                <a:latin typeface="Inter"/>
+              </a:rPr>
+              <a:t>Sources: S1 · S2 · S3 · S4 · S5 · S6 · S7</a:t>
+            </a:r>
+          </a:p>
+        </p:txBody>
+      </p:sp>
+      <p:sp>
+        <p:nvSpPr>
+          <p:cNvPr id="12" name="TextBox 11"/>
+          <p:cNvSpPr txBox="1"/>
+          <p:nvPr/>
+        </p:nvSpPr>
+        <p:spPr>
+          <a:xfrm>
+            <a:off x="4480560" y="6501384"/>
+            <a:ext cx="5303520" cy="146304"/>
+          </a:xfrm>
+          <a:prstGeom prst="rect">
+            <a:avLst/>
+          </a:prstGeom>
+          <a:noFill/>
+        </p:spPr>
+        <p:txBody>
+          <a:bodyPr wrap="none" lIns="9144" rIns="9144" tIns="9144" bIns="9144" anchor="t">
+            <a:spAutoFit/>
+          </a:bodyPr>
+          <a:lstStyle/>
+          <a:p>
+            <a:pPr algn="ctr">
+              <a:spcAft>
+                <a:spcPts val="0"/>
+              </a:spcAft>
+              <a:defRPr sz="650" b="0">
+                <a:solidFill>
+                  <a:srgbClr val="8A94A1"/>
+                </a:solidFill>
+                <a:latin typeface="Inter"/>
+              </a:defRPr>
+            </a:pPr>
+            <a:r>
+              <a:rPr>
+                <a:latin typeface="Inter"/>
+              </a:rPr>
+              <a:t>Confidential — private markets review · Data as of 2025-12-31</a:t>
+            </a:r>
+          </a:p>
+        </p:txBody>
+      </p:sp>
+      <p:sp>
+        <p:nvSpPr>
+          <p:cNvPr id="13" name="TextBox 12"/>
+          <p:cNvSpPr txBox="1"/>
+          <p:nvPr/>
+        </p:nvSpPr>
+        <p:spPr>
+          <a:xfrm>
+            <a:off x="10287000" y="6501384"/>
+            <a:ext cx="1261872" cy="146304"/>
+          </a:xfrm>
+          <a:prstGeom prst="rect">
+            <a:avLst/>
+          </a:prstGeom>
+          <a:noFill/>
+        </p:spPr>
+        <p:txBody>
+          <a:bodyPr wrap="none" lIns="9144" rIns="9144" tIns="9144" bIns="9144" anchor="t">
+            <a:spAutoFit/>
+          </a:bodyPr>
+          <a:lstStyle/>
+          <a:p>
+            <a:pPr algn="r">
+              <a:spcAft>
+                <a:spcPts val="0"/>
+              </a:spcAft>
+              <a:defRPr sz="650" b="0">
+                <a:solidFill>
+                  <a:srgbClr val="8A94A1"/>
+                </a:solidFill>
+                <a:latin typeface="Inter"/>
+              </a:defRPr>
+            </a:pPr>
+            <a:r>
+              <a:rPr>
+                <a:latin typeface="Inter"/>
+              </a:rPr>
+              <a:t>13</a:t>
+            </a:r>
+          </a:p>
+        </p:txBody>
+      </p:sp>
+    </p:spTree>
+  </p:cSld>
+  <p:clrMapOvr>
+    <a:masterClrMapping/>
+  </p:clrMapOvr>
+</p:sld>
+</file>
+
+<file path=ppt/slides/slide14.xml><?xml version="1.0" encoding="utf-8"?>
+<p:sld xmlns:a="http://schemas.openxmlformats.org/drawingml/2006/main" xmlns:p="http://schemas.openxmlformats.org/presentationml/2006/main" xmlns:r="http://schemas.openxmlformats.org/officeDocument/2006/relationships">
+  <p:cSld>
+    <p:spTree>
+      <p:nvGrpSpPr>
+        <p:cNvPr id="1" name=""/>
+        <p:cNvGrpSpPr/>
+        <p:nvPr/>
+      </p:nvGrpSpPr>
+      <p:grpSpPr/>
+      <p:sp>
+        <p:nvSpPr>
+          <p:cNvPr id="2" name="Rectangle 1"/>
+          <p:cNvSpPr/>
+          <p:nvPr/>
+        </p:nvSpPr>
+        <p:spPr>
+          <a:xfrm>
+            <a:off x="0" y="0"/>
+            <a:ext cx="12191695" cy="6858000"/>
+          </a:xfrm>
+          <a:prstGeom prst="rect">
+            <a:avLst/>
+          </a:prstGeom>
+          <a:solidFill>
+            <a:srgbClr val="FFFFFF"/>
+          </a:solidFill>
+          <a:ln>
+            <a:solidFill>
+              <a:srgbClr val="FFFFFF"/>
+            </a:solidFill>
+          </a:ln>
+        </p:spPr>
+        <p:style>
+          <a:lnRef idx="1">
+            <a:schemeClr val="accent1"/>
+          </a:lnRef>
+          <a:fillRef idx="3">
+            <a:schemeClr val="accent1"/>
+          </a:fillRef>
+          <a:effectRef idx="2">
+            <a:schemeClr val="accent1"/>
+          </a:effectRef>
+          <a:fontRef idx="minor">
+            <a:schemeClr val="lt1"/>
+          </a:fontRef>
+        </p:style>
+        <p:txBody>
+          <a:bodyPr rtlCol="0" anchor="ctr"/>
+          <a:lstStyle/>
+          <a:p>
+            <a:pPr algn="ctr">
+              <a:defRPr>
+                <a:latin typeface="Inter"/>
+              </a:defRPr>
+            </a:pPr>
+          </a:p>
+        </p:txBody>
+      </p:sp>
+      <p:sp>
+        <p:nvSpPr>
+          <p:cNvPr id="3" name="TextBox 2"/>
+          <p:cNvSpPr txBox="1"/>
+          <p:nvPr/>
+        </p:nvSpPr>
+        <p:spPr>
+          <a:xfrm>
+            <a:off x="640080" y="329184"/>
+            <a:ext cx="9875520" cy="182880"/>
+          </a:xfrm>
+          <a:prstGeom prst="rect">
+            <a:avLst/>
+          </a:prstGeom>
+          <a:noFill/>
+        </p:spPr>
+        <p:txBody>
+          <a:bodyPr wrap="none" lIns="9144" rIns="9144" tIns="9144" bIns="9144" anchor="t">
+            <a:spAutoFit/>
+          </a:bodyPr>
+          <a:lstStyle/>
+          <a:p>
+            <a:pPr algn="l">
+              <a:spcAft>
+                <a:spcPts val="0"/>
+              </a:spcAft>
+              <a:defRPr sz="750" b="1">
+                <a:solidFill>
+                  <a:srgbClr val="4F6B00"/>
+                </a:solidFill>
+                <a:latin typeface="Inter"/>
+              </a:defRPr>
+            </a:pPr>
+            <a:r>
+              <a:rPr>
+                <a:latin typeface="Inter"/>
+              </a:rPr>
+              <a:t>SAVED ILLUSTRATIVE COMMITMENT, BENCHMARK, BUILDER AND PME EVIDENCE</a:t>
+            </a:r>
+          </a:p>
+        </p:txBody>
+      </p:sp>
+      <p:sp>
+        <p:nvSpPr>
+          <p:cNvPr id="4" name="TextBox 3"/>
+          <p:cNvSpPr txBox="1"/>
+          <p:nvPr/>
+        </p:nvSpPr>
+        <p:spPr>
+          <a:xfrm>
+            <a:off x="640080" y="566928"/>
+            <a:ext cx="10058400" cy="530352"/>
+          </a:xfrm>
+          <a:prstGeom prst="rect">
+            <a:avLst/>
+          </a:prstGeom>
+          <a:noFill/>
+        </p:spPr>
+        <p:txBody>
+          <a:bodyPr wrap="none" lIns="9144" rIns="9144" tIns="9144" bIns="9144" anchor="t">
+            <a:spAutoFit/>
+          </a:bodyPr>
+          <a:lstStyle/>
+          <a:p>
+            <a:pPr algn="l">
+              <a:spcAft>
+                <a:spcPts val="0"/>
+              </a:spcAft>
+              <a:defRPr sz="2300" b="1">
+                <a:solidFill>
+                  <a:srgbClr val="0D1117"/>
+                </a:solidFill>
+                <a:latin typeface="Inter"/>
+              </a:defRPr>
+            </a:pPr>
+            <a:r>
+              <a:rPr>
+                <a:latin typeface="Inter"/>
+              </a:rPr>
+              <a:t>Appendix — Sources and methods — continued</a:t>
+            </a:r>
+          </a:p>
+        </p:txBody>
+      </p:sp>
+      <p:sp>
+        <p:nvSpPr>
+          <p:cNvPr id="5" name="Rectangle 4"/>
+          <p:cNvSpPr/>
+          <p:nvPr/>
+        </p:nvSpPr>
+        <p:spPr>
+          <a:xfrm>
+            <a:off x="640080" y="1115568"/>
+            <a:ext cx="10908792" cy="18288"/>
+          </a:xfrm>
+          <a:prstGeom prst="rect">
+            <a:avLst/>
+          </a:prstGeom>
+          <a:solidFill>
+            <a:srgbClr val="0D1117"/>
+          </a:solidFill>
+          <a:ln>
+            <a:solidFill>
+              <a:srgbClr val="0D1117"/>
+            </a:solidFill>
+          </a:ln>
+        </p:spPr>
+        <p:style>
+          <a:lnRef idx="1">
+            <a:schemeClr val="accent1"/>
+          </a:lnRef>
+          <a:fillRef idx="3">
+            <a:schemeClr val="accent1"/>
+          </a:fillRef>
+          <a:effectRef idx="2">
+            <a:schemeClr val="accent1"/>
+          </a:effectRef>
+          <a:fontRef idx="minor">
+            <a:schemeClr val="lt1"/>
+          </a:fontRef>
+        </p:style>
+        <p:txBody>
+          <a:bodyPr rtlCol="0" anchor="ctr"/>
+          <a:lstStyle/>
+          <a:p>
+            <a:pPr algn="ctr">
+              <a:defRPr>
+                <a:latin typeface="Inter"/>
+              </a:defRPr>
+            </a:pPr>
+          </a:p>
+        </p:txBody>
+      </p:sp>
+      <p:sp>
+        <p:nvSpPr>
+          <p:cNvPr id="6" name="Rectangle 5"/>
+          <p:cNvSpPr/>
+          <p:nvPr/>
+        </p:nvSpPr>
+        <p:spPr>
+          <a:xfrm>
+            <a:off x="11018520" y="502920"/>
+            <a:ext cx="530352" cy="393192"/>
+          </a:xfrm>
+          <a:prstGeom prst="rect">
+            <a:avLst/>
+          </a:prstGeom>
+          <a:solidFill>
+            <a:srgbClr val="9AA5B1"/>
+          </a:solidFill>
+          <a:ln>
+            <a:solidFill>
+              <a:srgbClr val="9AA5B1"/>
+            </a:solidFill>
+          </a:ln>
+        </p:spPr>
+        <p:style>
+          <a:lnRef idx="1">
+            <a:schemeClr val="accent1"/>
+          </a:lnRef>
+          <a:fillRef idx="3">
+            <a:schemeClr val="accent1"/>
+          </a:fillRef>
+          <a:effectRef idx="2">
+            <a:schemeClr val="accent1"/>
+          </a:effectRef>
+          <a:fontRef idx="minor">
+            <a:schemeClr val="lt1"/>
+          </a:fontRef>
+        </p:style>
+        <p:txBody>
+          <a:bodyPr rtlCol="0" anchor="ctr"/>
+          <a:lstStyle/>
+          <a:p>
+            <a:pPr algn="ctr">
+              <a:defRPr>
+                <a:latin typeface="Inter"/>
+              </a:defRPr>
+            </a:pPr>
+          </a:p>
+        </p:txBody>
+      </p:sp>
+      <p:sp>
+        <p:nvSpPr>
+          <p:cNvPr id="7" name="TextBox 6"/>
+          <p:cNvSpPr txBox="1"/>
+          <p:nvPr/>
+        </p:nvSpPr>
+        <p:spPr>
+          <a:xfrm>
+            <a:off x="11045952" y="557784"/>
+            <a:ext cx="475488" cy="182880"/>
+          </a:xfrm>
+          <a:prstGeom prst="rect">
+            <a:avLst/>
+          </a:prstGeom>
+          <a:noFill/>
+        </p:spPr>
+        <p:txBody>
+          <a:bodyPr wrap="none" lIns="9144" rIns="9144" tIns="9144" bIns="9144" anchor="t">
+            <a:spAutoFit/>
+          </a:bodyPr>
+          <a:lstStyle/>
+          <a:p>
+            <a:pPr algn="ctr">
+              <a:spcAft>
+                <a:spcPts val="0"/>
+              </a:spcAft>
+              <a:defRPr sz="1000" b="1">
+                <a:solidFill>
+                  <a:srgbClr val="0D1117"/>
+                </a:solidFill>
+                <a:latin typeface="Inter"/>
+              </a:defRPr>
+            </a:pPr>
+            <a:r>
+              <a:rPr>
+                <a:latin typeface="Inter"/>
+              </a:rPr>
+              <a:t>A</a:t>
+            </a:r>
+          </a:p>
+        </p:txBody>
+      </p:sp>
+      <p:sp>
+        <p:nvSpPr>
+          <p:cNvPr id="8" name="TextBox 7"/>
+          <p:cNvSpPr txBox="1"/>
+          <p:nvPr/>
+        </p:nvSpPr>
+        <p:spPr>
+          <a:xfrm>
+            <a:off x="640080" y="1325880"/>
+            <a:ext cx="10908792" cy="201168"/>
+          </a:xfrm>
+          <a:prstGeom prst="rect">
+            <a:avLst/>
+          </a:prstGeom>
+          <a:noFill/>
+        </p:spPr>
+        <p:txBody>
+          <a:bodyPr wrap="none" lIns="9144" rIns="9144" tIns="9144" bIns="9144" anchor="t">
+            <a:spAutoFit/>
+          </a:bodyPr>
+          <a:lstStyle/>
+          <a:p>
+            <a:pPr algn="l">
+              <a:spcAft>
+                <a:spcPts val="0"/>
+              </a:spcAft>
+              <a:defRPr sz="720" b="1">
+                <a:solidFill>
+                  <a:srgbClr val="4A5563"/>
+                </a:solidFill>
+                <a:latin typeface="Inter"/>
+              </a:defRPr>
+            </a:pPr>
+            <a:r>
+              <a:rPr>
+                <a:latin typeface="Inter"/>
+              </a:rPr>
+              <a:t>SOURCE AUDIT TRAIL</a:t>
+            </a:r>
+          </a:p>
+        </p:txBody>
+      </p:sp>
+      <p:graphicFrame>
+        <p:nvGraphicFramePr>
+          <p:cNvPr id="9" name="Table 8"/>
+          <p:cNvGraphicFramePr>
+            <a:graphicFrameLocks noGrp="1"/>
+          </p:cNvGraphicFramePr>
+          <p:nvPr/>
+        </p:nvGraphicFramePr>
+        <p:xfrm>
+          <a:off x="640080" y="1600200"/>
+          <a:ext cx="10908792" cy="4416552"/>
+        </p:xfrm>
+        <a:graphic>
+          <a:graphicData uri="http://schemas.openxmlformats.org/drawingml/2006/table">
+            <a:tbl>
+              <a:tblPr firstRow="1" bandRow="1">
+                <a:tableStyleId>{5C22544A-7EE6-4342-B048-85BDC9FD1C3A}</a:tableStyleId>
+              </a:tblPr>
+              <a:tblGrid>
+                <a:gridCol w="2011680"/>
+                <a:gridCol w="2965704"/>
+                <a:gridCol w="2965704"/>
+                <a:gridCol w="2965704"/>
+              </a:tblGrid>
+              <a:tr h="552069">
+                <a:tc>
+                  <a:txBody>
+                    <a:bodyPr/>
+                    <a:lstStyle/>
+                    <a:p>
+                      <a:pPr>
+                        <a:defRPr sz="750" b="1">
+                          <a:solidFill>
+                            <a:srgbClr val="FFFFFF"/>
+                          </a:solidFill>
+                          <a:latin typeface="Inter"/>
+                        </a:defRPr>
+                      </a:pPr>
+                      <a:r>
+                        <a:rPr>
+                          <a:latin typeface="Inter"/>
+                        </a:rPr>
+                        <a:t>Tag</a:t>
                       </a:r>
                     </a:p>
                   </a:txBody>
@@ -9196,33 +10401,6 @@
                         <a:rPr>
                           <a:latin typeface="Inter"/>
                         </a:rPr>
-                        <a:t>As of</a:t>
-                      </a:r>
-                    </a:p>
-                  </a:txBody>
-                  <a:tcPr marL="54864" marR="54864" marT="27432" marB="27432" anchor="ctr">
-                    <a:solidFill>
-                      <a:srgbClr val="0D1117"/>
-                    </a:solidFill>
-                  </a:tcPr>
-                </a:tc>
-                <a:tc>
-                  <a:txBody>
-                    <a:bodyPr/>
-                    <a:lstStyle/>
-                    <a:p>
-                      <a:pPr>
-                        <a:defRPr sz="750" b="1">
-                          <a:solidFill>
-                            <a:srgbClr val="FFFFFF"/>
-                          </a:solidFill>
-                          <a:latin typeface="Inter"/>
-                        </a:defRPr>
-                      </a:pPr>
-                      <a:r>
-                        <a:rPr>
-                          <a:latin typeface="Inter"/>
-                        </a:rPr>
                         <a:t>Data scope</a:t>
                       </a:r>
                     </a:p>
@@ -9250,33 +10428,6 @@
                         <a:rPr>
                           <a:latin typeface="Inter"/>
                         </a:rPr>
-                        <a:t>Validation</a:t>
-                      </a:r>
-                    </a:p>
-                  </a:txBody>
-                  <a:tcPr marL="54864" marR="54864" marT="27432" marB="27432" anchor="ctr">
-                    <a:solidFill>
-                      <a:srgbClr val="0D1117"/>
-                    </a:solidFill>
-                  </a:tcPr>
-                </a:tc>
-                <a:tc>
-                  <a:txBody>
-                    <a:bodyPr/>
-                    <a:lstStyle/>
-                    <a:p>
-                      <a:pPr>
-                        <a:defRPr sz="750" b="1">
-                          <a:solidFill>
-                            <a:srgbClr val="FFFFFF"/>
-                          </a:solidFill>
-                          <a:latin typeface="Inter"/>
-                        </a:defRPr>
-                      </a:pPr>
-                      <a:r>
-                        <a:rPr>
-                          <a:latin typeface="Inter"/>
-                        </a:rPr>
                         <a:t>Digest</a:t>
                       </a:r>
                     </a:p>
@@ -9288,14 +10439,14 @@
                   </a:tcPr>
                 </a:tc>
               </a:tr>
-              <a:tr h="586359">
+              <a:tr h="552069">
                 <a:tc>
                   <a:txBody>
                     <a:bodyPr/>
                     <a:lstStyle/>
                     <a:p>
                       <a:pPr>
-                        <a:defRPr sz="650" b="1">
+                        <a:defRPr sz="800" b="1">
                           <a:solidFill>
                             <a:srgbClr val="0D1117"/>
                           </a:solidFill>
@@ -9322,88 +10473,7 @@
                     <a:lstStyle/>
                     <a:p>
                       <a:pPr>
-                        <a:defRPr sz="650" b="0">
-                          <a:solidFill>
-                            <a:srgbClr val="0D1117"/>
-                          </a:solidFill>
-                          <a:latin typeface="Inter"/>
-                        </a:defRPr>
-                      </a:pPr>
-                      <a:r>
-                        <a:rPr>
-                          <a:latin typeface="Inter"/>
-                        </a:rPr>
-                        <a:t>Canonical portfolio</a:t>
-                      </a:r>
-                    </a:p>
-                  </a:txBody>
-                  <a:tcPr marL="54864" marR="54864" marT="27432" marB="27432" anchor="ctr">
-                    <a:solidFill>
-                      <a:srgbClr val="FFFFFF"/>
-                    </a:solidFill>
-                  </a:tcPr>
-                </a:tc>
-                <a:tc>
-                  <a:txBody>
-                    <a:bodyPr/>
-                    <a:lstStyle/>
-                    <a:p>
-                      <a:pPr>
-                        <a:defRPr sz="650" b="0">
-                          <a:solidFill>
-                            <a:srgbClr val="0D1117"/>
-                          </a:solidFill>
-                          <a:latin typeface="Inter"/>
-                        </a:defRPr>
-                      </a:pPr>
-                      <a:r>
-                        <a:rPr>
-                          <a:latin typeface="Inter"/>
-                        </a:rPr>
-                        <a:t>gradient_tool</a:t>
-                      </a:r>
-                    </a:p>
-                  </a:txBody>
-                  <a:tcPr marL="54864" marR="54864" marT="27432" marB="27432" anchor="ctr">
-                    <a:solidFill>
-                      <a:srgbClr val="FFFFFF"/>
-                    </a:solidFill>
-                  </a:tcPr>
-                </a:tc>
-                <a:tc>
-                  <a:txBody>
-                    <a:bodyPr/>
-                    <a:lstStyle/>
-                    <a:p>
-                      <a:pPr>
-                        <a:defRPr sz="650" b="0">
-                          <a:solidFill>
-                            <a:srgbClr val="0D1117"/>
-                          </a:solidFill>
-                          <a:latin typeface="Inter"/>
-                        </a:defRPr>
-                      </a:pPr>
-                      <a:r>
-                        <a:rPr>
-                          <a:latin typeface="Inter"/>
-                        </a:rPr>
-                        <a:t>list_portfolios</a:t>
-                      </a:r>
-                    </a:p>
-                  </a:txBody>
-                  <a:tcPr marL="54864" marR="54864" marT="27432" marB="27432" anchor="ctr">
-                    <a:solidFill>
-                      <a:srgbClr val="FFFFFF"/>
-                    </a:solidFill>
-                  </a:tcPr>
-                </a:tc>
-                <a:tc>
-                  <a:txBody>
-                    <a:bodyPr/>
-                    <a:lstStyle/>
-                    <a:p>
-                      <a:pPr>
-                        <a:defRPr sz="650" b="0">
+                        <a:defRPr sz="800" b="0">
                           <a:solidFill>
                             <a:srgbClr val="0D1117"/>
                           </a:solidFill>
@@ -9430,34 +10500,7 @@
                     <a:lstStyle/>
                     <a:p>
                       <a:pPr>
-                        <a:defRPr sz="650" b="0">
-                          <a:solidFill>
-                            <a:srgbClr val="0D1117"/>
-                          </a:solidFill>
-                          <a:latin typeface="Inter"/>
-                        </a:defRPr>
-                      </a:pPr>
-                      <a:r>
-                        <a:rPr>
-                          <a:latin typeface="Inter"/>
-                        </a:rPr>
-                        <a:t>2025-12-31</a:t>
-                      </a:r>
-                    </a:p>
-                  </a:txBody>
-                  <a:tcPr marL="54864" marR="54864" marT="27432" marB="27432" anchor="ctr">
-                    <a:solidFill>
-                      <a:srgbClr val="FFFFFF"/>
-                    </a:solidFill>
-                  </a:tcPr>
-                </a:tc>
-                <a:tc>
-                  <a:txBody>
-                    <a:bodyPr/>
-                    <a:lstStyle/>
-                    <a:p>
-                      <a:pPr>
-                        <a:defRPr sz="650" b="0">
+                        <a:defRPr sz="800" b="0">
                           <a:solidFill>
                             <a:srgbClr val="0D1117"/>
                           </a:solidFill>
@@ -9484,34 +10527,7 @@
                     <a:lstStyle/>
                     <a:p>
                       <a:pPr>
-                        <a:defRPr sz="650" b="0">
-                          <a:solidFill>
-                            <a:srgbClr val="0D1117"/>
-                          </a:solidFill>
-                          <a:latin typeface="Inter"/>
-                        </a:defRPr>
-                      </a:pPr>
-                      <a:r>
-                        <a:rPr>
-                          <a:latin typeface="Inter"/>
-                        </a:rPr>
-                        <a:t>passed</a:t>
-                      </a:r>
-                    </a:p>
-                  </a:txBody>
-                  <a:tcPr marL="54864" marR="54864" marT="27432" marB="27432" anchor="ctr">
-                    <a:solidFill>
-                      <a:srgbClr val="FFFFFF"/>
-                    </a:solidFill>
-                  </a:tcPr>
-                </a:tc>
-                <a:tc>
-                  <a:txBody>
-                    <a:bodyPr/>
-                    <a:lstStyle/>
-                    <a:p>
-                      <a:pPr>
-                        <a:defRPr sz="650" b="0">
+                        <a:defRPr sz="800" b="0">
                           <a:solidFill>
                             <a:srgbClr val="0D1117"/>
                           </a:solidFill>
@@ -9533,14 +10549,14 @@
                   </a:tcPr>
                 </a:tc>
               </a:tr>
-              <a:tr h="586359">
+              <a:tr h="552069">
                 <a:tc>
                   <a:txBody>
                     <a:bodyPr/>
                     <a:lstStyle/>
                     <a:p>
                       <a:pPr>
-                        <a:defRPr sz="650" b="1">
+                        <a:defRPr sz="800" b="1">
                           <a:solidFill>
                             <a:srgbClr val="0D1117"/>
                           </a:solidFill>
@@ -9567,88 +10583,7 @@
                     <a:lstStyle/>
                     <a:p>
                       <a:pPr>
-                        <a:defRPr sz="650" b="0">
-                          <a:solidFill>
-                            <a:srgbClr val="0D1117"/>
-                          </a:solidFill>
-                          <a:latin typeface="Inter"/>
-                        </a:defRPr>
-                      </a:pPr>
-                      <a:r>
-                        <a:rPr>
-                          <a:latin typeface="Inter"/>
-                        </a:rPr>
-                        <a:t>Canonical commitment</a:t>
-                      </a:r>
-                    </a:p>
-                  </a:txBody>
-                  <a:tcPr marL="54864" marR="54864" marT="27432" marB="27432" anchor="ctr">
-                    <a:solidFill>
-                      <a:srgbClr val="F5F7F9"/>
-                    </a:solidFill>
-                  </a:tcPr>
-                </a:tc>
-                <a:tc>
-                  <a:txBody>
-                    <a:bodyPr/>
-                    <a:lstStyle/>
-                    <a:p>
-                      <a:pPr>
-                        <a:defRPr sz="650" b="0">
-                          <a:solidFill>
-                            <a:srgbClr val="0D1117"/>
-                          </a:solidFill>
-                          <a:latin typeface="Inter"/>
-                        </a:defRPr>
-                      </a:pPr>
-                      <a:r>
-                        <a:rPr>
-                          <a:latin typeface="Inter"/>
-                        </a:rPr>
-                        <a:t>gradient_tool</a:t>
-                      </a:r>
-                    </a:p>
-                  </a:txBody>
-                  <a:tcPr marL="54864" marR="54864" marT="27432" marB="27432" anchor="ctr">
-                    <a:solidFill>
-                      <a:srgbClr val="F5F7F9"/>
-                    </a:solidFill>
-                  </a:tcPr>
-                </a:tc>
-                <a:tc>
-                  <a:txBody>
-                    <a:bodyPr/>
-                    <a:lstStyle/>
-                    <a:p>
-                      <a:pPr>
-                        <a:defRPr sz="650" b="0">
-                          <a:solidFill>
-                            <a:srgbClr val="0D1117"/>
-                          </a:solidFill>
-                          <a:latin typeface="Inter"/>
-                        </a:defRPr>
-                      </a:pPr>
-                      <a:r>
-                        <a:rPr>
-                          <a:latin typeface="Inter"/>
-                        </a:rPr>
-                        <a:t>get_portfolio_exposure</a:t>
-                      </a:r>
-                    </a:p>
-                  </a:txBody>
-                  <a:tcPr marL="54864" marR="54864" marT="27432" marB="27432" anchor="ctr">
-                    <a:solidFill>
-                      <a:srgbClr val="F5F7F9"/>
-                    </a:solidFill>
-                  </a:tcPr>
-                </a:tc>
-                <a:tc>
-                  <a:txBody>
-                    <a:bodyPr/>
-                    <a:lstStyle/>
-                    <a:p>
-                      <a:pPr>
-                        <a:defRPr sz="650" b="0">
+                        <a:defRPr sz="800" b="0">
                           <a:solidFill>
                             <a:srgbClr val="0D1117"/>
                           </a:solidFill>
@@ -9675,34 +10610,7 @@
                     <a:lstStyle/>
                     <a:p>
                       <a:pPr>
-                        <a:defRPr sz="650" b="0">
-                          <a:solidFill>
-                            <a:srgbClr val="0D1117"/>
-                          </a:solidFill>
-                          <a:latin typeface="Inter"/>
-                        </a:defRPr>
-                      </a:pPr>
-                      <a:r>
-                        <a:rPr>
-                          <a:latin typeface="Inter"/>
-                        </a:rPr>
-                        <a:t>2025-12-31</a:t>
-                      </a:r>
-                    </a:p>
-                  </a:txBody>
-                  <a:tcPr marL="54864" marR="54864" marT="27432" marB="27432" anchor="ctr">
-                    <a:solidFill>
-                      <a:srgbClr val="F5F7F9"/>
-                    </a:solidFill>
-                  </a:tcPr>
-                </a:tc>
-                <a:tc>
-                  <a:txBody>
-                    <a:bodyPr/>
-                    <a:lstStyle/>
-                    <a:p>
-                      <a:pPr>
-                        <a:defRPr sz="650" b="0">
+                        <a:defRPr sz="800" b="0">
                           <a:solidFill>
                             <a:srgbClr val="0D1117"/>
                           </a:solidFill>
@@ -9729,34 +10637,7 @@
                     <a:lstStyle/>
                     <a:p>
                       <a:pPr>
-                        <a:defRPr sz="650" b="0">
-                          <a:solidFill>
-                            <a:srgbClr val="0D1117"/>
-                          </a:solidFill>
-                          <a:latin typeface="Inter"/>
-                        </a:defRPr>
-                      </a:pPr>
-                      <a:r>
-                        <a:rPr>
-                          <a:latin typeface="Inter"/>
-                        </a:rPr>
-                        <a:t>passed</a:t>
-                      </a:r>
-                    </a:p>
-                  </a:txBody>
-                  <a:tcPr marL="54864" marR="54864" marT="27432" marB="27432" anchor="ctr">
-                    <a:solidFill>
-                      <a:srgbClr val="F5F7F9"/>
-                    </a:solidFill>
-                  </a:tcPr>
-                </a:tc>
-                <a:tc>
-                  <a:txBody>
-                    <a:bodyPr/>
-                    <a:lstStyle/>
-                    <a:p>
-                      <a:pPr>
-                        <a:defRPr sz="650" b="0">
+                        <a:defRPr sz="800" b="0">
                           <a:solidFill>
                             <a:srgbClr val="0D1117"/>
                           </a:solidFill>
@@ -9778,14 +10659,14 @@
                   </a:tcPr>
                 </a:tc>
               </a:tr>
-              <a:tr h="586359">
+              <a:tr h="552069">
                 <a:tc>
                   <a:txBody>
                     <a:bodyPr/>
                     <a:lstStyle/>
                     <a:p>
                       <a:pPr>
-                        <a:defRPr sz="650" b="1">
+                        <a:defRPr sz="800" b="1">
                           <a:solidFill>
                             <a:srgbClr val="0D1117"/>
                           </a:solidFill>
@@ -9812,88 +10693,7 @@
                     <a:lstStyle/>
                     <a:p>
                       <a:pPr>
-                        <a:defRPr sz="650" b="0">
-                          <a:solidFill>
-                            <a:srgbClr val="0D1117"/>
-                          </a:solidFill>
-                          <a:latin typeface="Inter"/>
-                        </a:defRPr>
-                      </a:pPr>
-                      <a:r>
-                        <a:rPr>
-                          <a:latin typeface="Inter"/>
-                        </a:rPr>
-                        <a:t>Holdings and ILPA context</a:t>
-                      </a:r>
-                    </a:p>
-                  </a:txBody>
-                  <a:tcPr marL="54864" marR="54864" marT="27432" marB="27432" anchor="ctr">
-                    <a:solidFill>
-                      <a:srgbClr val="FFFFFF"/>
-                    </a:solidFill>
-                  </a:tcPr>
-                </a:tc>
-                <a:tc>
-                  <a:txBody>
-                    <a:bodyPr/>
-                    <a:lstStyle/>
-                    <a:p>
-                      <a:pPr>
-                        <a:defRPr sz="650" b="0">
-                          <a:solidFill>
-                            <a:srgbClr val="0D1117"/>
-                          </a:solidFill>
-                          <a:latin typeface="Inter"/>
-                        </a:defRPr>
-                      </a:pPr>
-                      <a:r>
-                        <a:rPr>
-                          <a:latin typeface="Inter"/>
-                        </a:rPr>
-                        <a:t>gradient_tool</a:t>
-                      </a:r>
-                    </a:p>
-                  </a:txBody>
-                  <a:tcPr marL="54864" marR="54864" marT="27432" marB="27432" anchor="ctr">
-                    <a:solidFill>
-                      <a:srgbClr val="FFFFFF"/>
-                    </a:solidFill>
-                  </a:tcPr>
-                </a:tc>
-                <a:tc>
-                  <a:txBody>
-                    <a:bodyPr/>
-                    <a:lstStyle/>
-                    <a:p>
-                      <a:pPr>
-                        <a:defRPr sz="650" b="0">
-                          <a:solidFill>
-                            <a:srgbClr val="0D1117"/>
-                          </a:solidFill>
-                          <a:latin typeface="Inter"/>
-                        </a:defRPr>
-                      </a:pPr>
-                      <a:r>
-                        <a:rPr>
-                          <a:latin typeface="Inter"/>
-                        </a:rPr>
-                        <a:t>get_private_markets_holdings</a:t>
-                      </a:r>
-                    </a:p>
-                  </a:txBody>
-                  <a:tcPr marL="54864" marR="54864" marT="27432" marB="27432" anchor="ctr">
-                    <a:solidFill>
-                      <a:srgbClr val="FFFFFF"/>
-                    </a:solidFill>
-                  </a:tcPr>
-                </a:tc>
-                <a:tc>
-                  <a:txBody>
-                    <a:bodyPr/>
-                    <a:lstStyle/>
-                    <a:p>
-                      <a:pPr>
-                        <a:defRPr sz="650" b="0">
+                        <a:defRPr sz="800" b="0">
                           <a:solidFill>
                             <a:srgbClr val="0D1117"/>
                           </a:solidFill>
@@ -9920,34 +10720,7 @@
                     <a:lstStyle/>
                     <a:p>
                       <a:pPr>
-                        <a:defRPr sz="650" b="0">
-                          <a:solidFill>
-                            <a:srgbClr val="0D1117"/>
-                          </a:solidFill>
-                          <a:latin typeface="Inter"/>
-                        </a:defRPr>
-                      </a:pPr>
-                      <a:r>
-                        <a:rPr>
-                          <a:latin typeface="Inter"/>
-                        </a:rPr>
-                        <a:t>2025-12-31</a:t>
-                      </a:r>
-                    </a:p>
-                  </a:txBody>
-                  <a:tcPr marL="54864" marR="54864" marT="27432" marB="27432" anchor="ctr">
-                    <a:solidFill>
-                      <a:srgbClr val="FFFFFF"/>
-                    </a:solidFill>
-                  </a:tcPr>
-                </a:tc>
-                <a:tc>
-                  <a:txBody>
-                    <a:bodyPr/>
-                    <a:lstStyle/>
-                    <a:p>
-                      <a:pPr>
-                        <a:defRPr sz="650" b="0">
+                        <a:defRPr sz="800" b="0">
                           <a:solidFill>
                             <a:srgbClr val="0D1117"/>
                           </a:solidFill>
@@ -9974,34 +10747,7 @@
                     <a:lstStyle/>
                     <a:p>
                       <a:pPr>
-                        <a:defRPr sz="650" b="0">
-                          <a:solidFill>
-                            <a:srgbClr val="0D1117"/>
-                          </a:solidFill>
-                          <a:latin typeface="Inter"/>
-                        </a:defRPr>
-                      </a:pPr>
-                      <a:r>
-                        <a:rPr>
-                          <a:latin typeface="Inter"/>
-                        </a:rPr>
-                        <a:t>partial</a:t>
-                      </a:r>
-                    </a:p>
-                  </a:txBody>
-                  <a:tcPr marL="54864" marR="54864" marT="27432" marB="27432" anchor="ctr">
-                    <a:solidFill>
-                      <a:srgbClr val="FFFFFF"/>
-                    </a:solidFill>
-                  </a:tcPr>
-                </a:tc>
-                <a:tc>
-                  <a:txBody>
-                    <a:bodyPr/>
-                    <a:lstStyle/>
-                    <a:p>
-                      <a:pPr>
-                        <a:defRPr sz="650" b="0">
+                        <a:defRPr sz="800" b="0">
                           <a:solidFill>
                             <a:srgbClr val="0D1117"/>
                           </a:solidFill>
@@ -10023,14 +10769,14 @@
                   </a:tcPr>
                 </a:tc>
               </a:tr>
-              <a:tr h="586359">
+              <a:tr h="552069">
                 <a:tc>
                   <a:txBody>
                     <a:bodyPr/>
                     <a:lstStyle/>
                     <a:p>
                       <a:pPr>
-                        <a:defRPr sz="650" b="1">
+                        <a:defRPr sz="800" b="1">
                           <a:solidFill>
                             <a:srgbClr val="0D1117"/>
                           </a:solidFill>
@@ -10057,88 +10803,7 @@
                     <a:lstStyle/>
                     <a:p>
                       <a:pPr>
-                        <a:defRPr sz="650" b="0">
-                          <a:solidFill>
-                            <a:srgbClr val="0D1117"/>
-                          </a:solidFill>
-                          <a:latin typeface="Inter"/>
-                        </a:defRPr>
-                      </a:pPr>
-                      <a:r>
-                        <a:rPr>
-                          <a:latin typeface="Inter"/>
-                        </a:rPr>
-                        <a:t>Primary and sensitivity benchmark identities</a:t>
-                      </a:r>
-                    </a:p>
-                  </a:txBody>
-                  <a:tcPr marL="54864" marR="54864" marT="27432" marB="27432" anchor="ctr">
-                    <a:solidFill>
-                      <a:srgbClr val="F5F7F9"/>
-                    </a:solidFill>
-                  </a:tcPr>
-                </a:tc>
-                <a:tc>
-                  <a:txBody>
-                    <a:bodyPr/>
-                    <a:lstStyle/>
-                    <a:p>
-                      <a:pPr>
-                        <a:defRPr sz="650" b="0">
-                          <a:solidFill>
-                            <a:srgbClr val="0D1117"/>
-                          </a:solidFill>
-                          <a:latin typeface="Inter"/>
-                        </a:defRPr>
-                      </a:pPr>
-                      <a:r>
-                        <a:rPr>
-                          <a:latin typeface="Inter"/>
-                        </a:rPr>
-                        <a:t>gradient_tool</a:t>
-                      </a:r>
-                    </a:p>
-                  </a:txBody>
-                  <a:tcPr marL="54864" marR="54864" marT="27432" marB="27432" anchor="ctr">
-                    <a:solidFill>
-                      <a:srgbClr val="F5F7F9"/>
-                    </a:solidFill>
-                  </a:tcPr>
-                </a:tc>
-                <a:tc>
-                  <a:txBody>
-                    <a:bodyPr/>
-                    <a:lstStyle/>
-                    <a:p>
-                      <a:pPr>
-                        <a:defRPr sz="650" b="0">
-                          <a:solidFill>
-                            <a:srgbClr val="0D1117"/>
-                          </a:solidFill>
-                          <a:latin typeface="Inter"/>
-                        </a:defRPr>
-                      </a:pPr>
-                      <a:r>
-                        <a:rPr>
-                          <a:latin typeface="Inter"/>
-                        </a:rPr>
-                        <a:t>get_benchmarks</a:t>
-                      </a:r>
-                    </a:p>
-                  </a:txBody>
-                  <a:tcPr marL="54864" marR="54864" marT="27432" marB="27432" anchor="ctr">
-                    <a:solidFill>
-                      <a:srgbClr val="F5F7F9"/>
-                    </a:solidFill>
-                  </a:tcPr>
-                </a:tc>
-                <a:tc>
-                  <a:txBody>
-                    <a:bodyPr/>
-                    <a:lstStyle/>
-                    <a:p>
-                      <a:pPr>
-                        <a:defRPr sz="650" b="0">
+                        <a:defRPr sz="800" b="0">
                           <a:solidFill>
                             <a:srgbClr val="0D1117"/>
                           </a:solidFill>
@@ -10165,34 +10830,7 @@
                     <a:lstStyle/>
                     <a:p>
                       <a:pPr>
-                        <a:defRPr sz="650" b="0">
-                          <a:solidFill>
-                            <a:srgbClr val="0D1117"/>
-                          </a:solidFill>
-                          <a:latin typeface="Inter"/>
-                        </a:defRPr>
-                      </a:pPr>
-                      <a:r>
-                        <a:rPr>
-                          <a:latin typeface="Inter"/>
-                        </a:rPr>
-                        <a:t>2025-12-31</a:t>
-                      </a:r>
-                    </a:p>
-                  </a:txBody>
-                  <a:tcPr marL="54864" marR="54864" marT="27432" marB="27432" anchor="ctr">
-                    <a:solidFill>
-                      <a:srgbClr val="F5F7F9"/>
-                    </a:solidFill>
-                  </a:tcPr>
-                </a:tc>
-                <a:tc>
-                  <a:txBody>
-                    <a:bodyPr/>
-                    <a:lstStyle/>
-                    <a:p>
-                      <a:pPr>
-                        <a:defRPr sz="650" b="0">
+                        <a:defRPr sz="800" b="0">
                           <a:solidFill>
                             <a:srgbClr val="0D1117"/>
                           </a:solidFill>
@@ -10219,34 +10857,7 @@
                     <a:lstStyle/>
                     <a:p>
                       <a:pPr>
-                        <a:defRPr sz="650" b="0">
-                          <a:solidFill>
-                            <a:srgbClr val="0D1117"/>
-                          </a:solidFill>
-                          <a:latin typeface="Inter"/>
-                        </a:defRPr>
-                      </a:pPr>
-                      <a:r>
-                        <a:rPr>
-                          <a:latin typeface="Inter"/>
-                        </a:rPr>
-                        <a:t>passed</a:t>
-                      </a:r>
-                    </a:p>
-                  </a:txBody>
-                  <a:tcPr marL="54864" marR="54864" marT="27432" marB="27432" anchor="ctr">
-                    <a:solidFill>
-                      <a:srgbClr val="F5F7F9"/>
-                    </a:solidFill>
-                  </a:tcPr>
-                </a:tc>
-                <a:tc>
-                  <a:txBody>
-                    <a:bodyPr/>
-                    <a:lstStyle/>
-                    <a:p>
-                      <a:pPr>
-                        <a:defRPr sz="650" b="0">
+                        <a:defRPr sz="800" b="0">
                           <a:solidFill>
                             <a:srgbClr val="0D1117"/>
                           </a:solidFill>
@@ -10268,14 +10879,14 @@
                   </a:tcPr>
                 </a:tc>
               </a:tr>
-              <a:tr h="586359">
+              <a:tr h="552069">
                 <a:tc>
                   <a:txBody>
                     <a:bodyPr/>
                     <a:lstStyle/>
                     <a:p>
                       <a:pPr>
-                        <a:defRPr sz="650" b="1">
+                        <a:defRPr sz="800" b="1">
                           <a:solidFill>
                             <a:srgbClr val="0D1117"/>
                           </a:solidFill>
@@ -10302,88 +10913,7 @@
                     <a:lstStyle/>
                     <a:p>
                       <a:pPr>
-                        <a:defRPr sz="650" b="0">
-                          <a:solidFill>
-                            <a:srgbClr val="0D1117"/>
-                          </a:solidFill>
-                          <a:latin typeface="Inter"/>
-                        </a:defRPr>
-                      </a:pPr>
-                      <a:r>
-                        <a:rPr>
-                          <a:latin typeface="Inter"/>
-                        </a:rPr>
-                        <a:t>Primary commitment-scoped session</a:t>
-                      </a:r>
-                    </a:p>
-                  </a:txBody>
-                  <a:tcPr marL="54864" marR="54864" marT="27432" marB="27432" anchor="ctr">
-                    <a:solidFill>
-                      <a:srgbClr val="FFFFFF"/>
-                    </a:solidFill>
-                  </a:tcPr>
-                </a:tc>
-                <a:tc>
-                  <a:txBody>
-                    <a:bodyPr/>
-                    <a:lstStyle/>
-                    <a:p>
-                      <a:pPr>
-                        <a:defRPr sz="650" b="0">
-                          <a:solidFill>
-                            <a:srgbClr val="0D1117"/>
-                          </a:solidFill>
-                          <a:latin typeface="Inter"/>
-                        </a:defRPr>
-                      </a:pPr>
-                      <a:r>
-                        <a:rPr>
-                          <a:latin typeface="Inter"/>
-                        </a:rPr>
-                        <a:t>gradient_tool</a:t>
-                      </a:r>
-                    </a:p>
-                  </a:txBody>
-                  <a:tcPr marL="54864" marR="54864" marT="27432" marB="27432" anchor="ctr">
-                    <a:solidFill>
-                      <a:srgbClr val="FFFFFF"/>
-                    </a:solidFill>
-                  </a:tcPr>
-                </a:tc>
-                <a:tc>
-                  <a:txBody>
-                    <a:bodyPr/>
-                    <a:lstStyle/>
-                    <a:p>
-                      <a:pPr>
-                        <a:defRPr sz="650" b="0">
-                          <a:solidFill>
-                            <a:srgbClr val="0D1117"/>
-                          </a:solidFill>
-                          <a:latin typeface="Inter"/>
-                        </a:defRPr>
-                      </a:pPr>
-                      <a:r>
-                        <a:rPr>
-                          <a:latin typeface="Inter"/>
-                        </a:rPr>
-                        <a:t>build_strategy_lab_session</a:t>
-                      </a:r>
-                    </a:p>
-                  </a:txBody>
-                  <a:tcPr marL="54864" marR="54864" marT="27432" marB="27432" anchor="ctr">
-                    <a:solidFill>
-                      <a:srgbClr val="FFFFFF"/>
-                    </a:solidFill>
-                  </a:tcPr>
-                </a:tc>
-                <a:tc>
-                  <a:txBody>
-                    <a:bodyPr/>
-                    <a:lstStyle/>
-                    <a:p>
-                      <a:pPr>
-                        <a:defRPr sz="650" b="0">
+                        <a:defRPr sz="800" b="0">
                           <a:solidFill>
                             <a:srgbClr val="0D1117"/>
                           </a:solidFill>
@@ -10410,34 +10940,7 @@
                     <a:lstStyle/>
                     <a:p>
                       <a:pPr>
-                        <a:defRPr sz="650" b="0">
-                          <a:solidFill>
-                            <a:srgbClr val="0D1117"/>
-                          </a:solidFill>
-                          <a:latin typeface="Inter"/>
-                        </a:defRPr>
-                      </a:pPr>
-                      <a:r>
-                        <a:rPr>
-                          <a:latin typeface="Inter"/>
-                        </a:rPr>
-                        <a:t>2025-12-31</a:t>
-                      </a:r>
-                    </a:p>
-                  </a:txBody>
-                  <a:tcPr marL="54864" marR="54864" marT="27432" marB="27432" anchor="ctr">
-                    <a:solidFill>
-                      <a:srgbClr val="FFFFFF"/>
-                    </a:solidFill>
-                  </a:tcPr>
-                </a:tc>
-                <a:tc>
-                  <a:txBody>
-                    <a:bodyPr/>
-                    <a:lstStyle/>
-                    <a:p>
-                      <a:pPr>
-                        <a:defRPr sz="650" b="0">
+                        <a:defRPr sz="800" b="0">
                           <a:solidFill>
                             <a:srgbClr val="0D1117"/>
                           </a:solidFill>
@@ -10464,34 +10967,7 @@
                     <a:lstStyle/>
                     <a:p>
                       <a:pPr>
-                        <a:defRPr sz="650" b="0">
-                          <a:solidFill>
-                            <a:srgbClr val="0D1117"/>
-                          </a:solidFill>
-                          <a:latin typeface="Inter"/>
-                        </a:defRPr>
-                      </a:pPr>
-                      <a:r>
-                        <a:rPr>
-                          <a:latin typeface="Inter"/>
-                        </a:rPr>
-                        <a:t>passed</a:t>
-                      </a:r>
-                    </a:p>
-                  </a:txBody>
-                  <a:tcPr marL="54864" marR="54864" marT="27432" marB="27432" anchor="ctr">
-                    <a:solidFill>
-                      <a:srgbClr val="FFFFFF"/>
-                    </a:solidFill>
-                  </a:tcPr>
-                </a:tc>
-                <a:tc>
-                  <a:txBody>
-                    <a:bodyPr/>
-                    <a:lstStyle/>
-                    <a:p>
-                      <a:pPr>
-                        <a:defRPr sz="650" b="0">
+                        <a:defRPr sz="800" b="0">
                           <a:solidFill>
                             <a:srgbClr val="0D1117"/>
                           </a:solidFill>
@@ -10513,14 +10989,14 @@
                   </a:tcPr>
                 </a:tc>
               </a:tr>
-              <a:tr h="586359">
+              <a:tr h="552069">
                 <a:tc>
                   <a:txBody>
                     <a:bodyPr/>
                     <a:lstStyle/>
                     <a:p>
                       <a:pPr>
-                        <a:defRPr sz="650" b="1">
+                        <a:defRPr sz="800" b="1">
                           <a:solidFill>
                             <a:srgbClr val="0D1117"/>
                           </a:solidFill>
@@ -10547,88 +11023,7 @@
                     <a:lstStyle/>
                     <a:p>
                       <a:pPr>
-                        <a:defRPr sz="650" b="0">
-                          <a:solidFill>
-                            <a:srgbClr val="0D1117"/>
-                          </a:solidFill>
-                          <a:latin typeface="Inter"/>
-                        </a:defRPr>
-                      </a:pPr>
-                      <a:r>
-                        <a:rPr>
-                          <a:latin typeface="Inter"/>
-                        </a:rPr>
-                        <a:t>Primary PME metrics</a:t>
-                      </a:r>
-                    </a:p>
-                  </a:txBody>
-                  <a:tcPr marL="54864" marR="54864" marT="27432" marB="27432" anchor="ctr">
-                    <a:solidFill>
-                      <a:srgbClr val="F5F7F9"/>
-                    </a:solidFill>
-                  </a:tcPr>
-                </a:tc>
-                <a:tc>
-                  <a:txBody>
-                    <a:bodyPr/>
-                    <a:lstStyle/>
-                    <a:p>
-                      <a:pPr>
-                        <a:defRPr sz="650" b="0">
-                          <a:solidFill>
-                            <a:srgbClr val="0D1117"/>
-                          </a:solidFill>
-                          <a:latin typeface="Inter"/>
-                        </a:defRPr>
-                      </a:pPr>
-                      <a:r>
-                        <a:rPr>
-                          <a:latin typeface="Inter"/>
-                        </a:rPr>
-                        <a:t>gradient_tool</a:t>
-                      </a:r>
-                    </a:p>
-                  </a:txBody>
-                  <a:tcPr marL="54864" marR="54864" marT="27432" marB="27432" anchor="ctr">
-                    <a:solidFill>
-                      <a:srgbClr val="F5F7F9"/>
-                    </a:solidFill>
-                  </a:tcPr>
-                </a:tc>
-                <a:tc>
-                  <a:txBody>
-                    <a:bodyPr/>
-                    <a:lstStyle/>
-                    <a:p>
-                      <a:pPr>
-                        <a:defRPr sz="650" b="0">
-                          <a:solidFill>
-                            <a:srgbClr val="0D1117"/>
-                          </a:solidFill>
-                          <a:latin typeface="Inter"/>
-                        </a:defRPr>
-                      </a:pPr>
-                      <a:r>
-                        <a:rPr>
-                          <a:latin typeface="Inter"/>
-                        </a:rPr>
-                        <a:t>run_strategy_lab_private_markets_pme</a:t>
-                      </a:r>
-                    </a:p>
-                  </a:txBody>
-                  <a:tcPr marL="54864" marR="54864" marT="27432" marB="27432" anchor="ctr">
-                    <a:solidFill>
-                      <a:srgbClr val="F5F7F9"/>
-                    </a:solidFill>
-                  </a:tcPr>
-                </a:tc>
-                <a:tc>
-                  <a:txBody>
-                    <a:bodyPr/>
-                    <a:lstStyle/>
-                    <a:p>
-                      <a:pPr>
-                        <a:defRPr sz="650" b="0">
+                        <a:defRPr sz="800" b="0">
                           <a:solidFill>
                             <a:srgbClr val="0D1117"/>
                           </a:solidFill>
@@ -10655,34 +11050,7 @@
                     <a:lstStyle/>
                     <a:p>
                       <a:pPr>
-                        <a:defRPr sz="650" b="0">
-                          <a:solidFill>
-                            <a:srgbClr val="0D1117"/>
-                          </a:solidFill>
-                          <a:latin typeface="Inter"/>
-                        </a:defRPr>
-                      </a:pPr>
-                      <a:r>
-                        <a:rPr>
-                          <a:latin typeface="Inter"/>
-                        </a:rPr>
-                        <a:t>2025-12-31</a:t>
-                      </a:r>
-                    </a:p>
-                  </a:txBody>
-                  <a:tcPr marL="54864" marR="54864" marT="27432" marB="27432" anchor="ctr">
-                    <a:solidFill>
-                      <a:srgbClr val="F5F7F9"/>
-                    </a:solidFill>
-                  </a:tcPr>
-                </a:tc>
-                <a:tc>
-                  <a:txBody>
-                    <a:bodyPr/>
-                    <a:lstStyle/>
-                    <a:p>
-                      <a:pPr>
-                        <a:defRPr sz="650" b="0">
+                        <a:defRPr sz="800" b="0">
                           <a:solidFill>
                             <a:srgbClr val="0D1117"/>
                           </a:solidFill>
@@ -10709,34 +11077,7 @@
                     <a:lstStyle/>
                     <a:p>
                       <a:pPr>
-                        <a:defRPr sz="650" b="0">
-                          <a:solidFill>
-                            <a:srgbClr val="0D1117"/>
-                          </a:solidFill>
-                          <a:latin typeface="Inter"/>
-                        </a:defRPr>
-                      </a:pPr>
-                      <a:r>
-                        <a:rPr>
-                          <a:latin typeface="Inter"/>
-                        </a:rPr>
-                        <a:t>passed</a:t>
-                      </a:r>
-                    </a:p>
-                  </a:txBody>
-                  <a:tcPr marL="54864" marR="54864" marT="27432" marB="27432" anchor="ctr">
-                    <a:solidFill>
-                      <a:srgbClr val="F5F7F9"/>
-                    </a:solidFill>
-                  </a:tcPr>
-                </a:tc>
-                <a:tc>
-                  <a:txBody>
-                    <a:bodyPr/>
-                    <a:lstStyle/>
-                    <a:p>
-                      <a:pPr>
-                        <a:defRPr sz="650" b="0">
+                        <a:defRPr sz="800" b="0">
                           <a:solidFill>
                             <a:srgbClr val="0D1117"/>
                           </a:solidFill>
@@ -10758,14 +11099,14 @@
                   </a:tcPr>
                 </a:tc>
               </a:tr>
-              <a:tr h="586359">
+              <a:tr h="552069">
                 <a:tc>
                   <a:txBody>
                     <a:bodyPr/>
                     <a:lstStyle/>
                     <a:p>
                       <a:pPr>
-                        <a:defRPr sz="650" b="1">
+                        <a:defRPr sz="800" b="1">
                           <a:solidFill>
                             <a:srgbClr val="0D1117"/>
                           </a:solidFill>
@@ -10792,88 +11133,7 @@
                     <a:lstStyle/>
                     <a:p>
                       <a:pPr>
-                        <a:defRPr sz="650" b="0">
-                          <a:solidFill>
-                            <a:srgbClr val="0D1117"/>
-                          </a:solidFill>
-                          <a:latin typeface="Inter"/>
-                        </a:defRPr>
-                      </a:pPr>
-                      <a:r>
-                        <a:rPr>
-                          <a:latin typeface="Inter"/>
-                        </a:rPr>
-                        <a:t>Sensitivity PME metrics</a:t>
-                      </a:r>
-                    </a:p>
-                  </a:txBody>
-                  <a:tcPr marL="54864" marR="54864" marT="27432" marB="27432" anchor="ctr">
-                    <a:solidFill>
-                      <a:srgbClr val="FFFFFF"/>
-                    </a:solidFill>
-                  </a:tcPr>
-                </a:tc>
-                <a:tc>
-                  <a:txBody>
-                    <a:bodyPr/>
-                    <a:lstStyle/>
-                    <a:p>
-                      <a:pPr>
-                        <a:defRPr sz="650" b="0">
-                          <a:solidFill>
-                            <a:srgbClr val="0D1117"/>
-                          </a:solidFill>
-                          <a:latin typeface="Inter"/>
-                        </a:defRPr>
-                      </a:pPr>
-                      <a:r>
-                        <a:rPr>
-                          <a:latin typeface="Inter"/>
-                        </a:rPr>
-                        <a:t>gradient_tool</a:t>
-                      </a:r>
-                    </a:p>
-                  </a:txBody>
-                  <a:tcPr marL="54864" marR="54864" marT="27432" marB="27432" anchor="ctr">
-                    <a:solidFill>
-                      <a:srgbClr val="FFFFFF"/>
-                    </a:solidFill>
-                  </a:tcPr>
-                </a:tc>
-                <a:tc>
-                  <a:txBody>
-                    <a:bodyPr/>
-                    <a:lstStyle/>
-                    <a:p>
-                      <a:pPr>
-                        <a:defRPr sz="650" b="0">
-                          <a:solidFill>
-                            <a:srgbClr val="0D1117"/>
-                          </a:solidFill>
-                          <a:latin typeface="Inter"/>
-                        </a:defRPr>
-                      </a:pPr>
-                      <a:r>
-                        <a:rPr>
-                          <a:latin typeface="Inter"/>
-                        </a:rPr>
-                        <a:t>run_strategy_lab_private_markets_pme</a:t>
-                      </a:r>
-                    </a:p>
-                  </a:txBody>
-                  <a:tcPr marL="54864" marR="54864" marT="27432" marB="27432" anchor="ctr">
-                    <a:solidFill>
-                      <a:srgbClr val="FFFFFF"/>
-                    </a:solidFill>
-                  </a:tcPr>
-                </a:tc>
-                <a:tc>
-                  <a:txBody>
-                    <a:bodyPr/>
-                    <a:lstStyle/>
-                    <a:p>
-                      <a:pPr>
-                        <a:defRPr sz="650" b="0">
+                        <a:defRPr sz="800" b="0">
                           <a:solidFill>
                             <a:srgbClr val="0D1117"/>
                           </a:solidFill>
@@ -10900,34 +11160,7 @@
                     <a:lstStyle/>
                     <a:p>
                       <a:pPr>
-                        <a:defRPr sz="650" b="0">
-                          <a:solidFill>
-                            <a:srgbClr val="0D1117"/>
-                          </a:solidFill>
-                          <a:latin typeface="Inter"/>
-                        </a:defRPr>
-                      </a:pPr>
-                      <a:r>
-                        <a:rPr>
-                          <a:latin typeface="Inter"/>
-                        </a:rPr>
-                        <a:t>2025-12-31</a:t>
-                      </a:r>
-                    </a:p>
-                  </a:txBody>
-                  <a:tcPr marL="54864" marR="54864" marT="27432" marB="27432" anchor="ctr">
-                    <a:solidFill>
-                      <a:srgbClr val="FFFFFF"/>
-                    </a:solidFill>
-                  </a:tcPr>
-                </a:tc>
-                <a:tc>
-                  <a:txBody>
-                    <a:bodyPr/>
-                    <a:lstStyle/>
-                    <a:p>
-                      <a:pPr>
-                        <a:defRPr sz="650" b="0">
+                        <a:defRPr sz="800" b="0">
                           <a:solidFill>
                             <a:srgbClr val="0D1117"/>
                           </a:solidFill>
@@ -10954,34 +11187,7 @@
                     <a:lstStyle/>
                     <a:p>
                       <a:pPr>
-                        <a:defRPr sz="650" b="0">
-                          <a:solidFill>
-                            <a:srgbClr val="0D1117"/>
-                          </a:solidFill>
-                          <a:latin typeface="Inter"/>
-                        </a:defRPr>
-                      </a:pPr>
-                      <a:r>
-                        <a:rPr>
-                          <a:latin typeface="Inter"/>
-                        </a:rPr>
-                        <a:t>passed</a:t>
-                      </a:r>
-                    </a:p>
-                  </a:txBody>
-                  <a:tcPr marL="54864" marR="54864" marT="27432" marB="27432" anchor="ctr">
-                    <a:solidFill>
-                      <a:srgbClr val="FFFFFF"/>
-                    </a:solidFill>
-                  </a:tcPr>
-                </a:tc>
-                <a:tc>
-                  <a:txBody>
-                    <a:bodyPr/>
-                    <a:lstStyle/>
-                    <a:p>
-                      <a:pPr>
-                        <a:defRPr sz="650" b="0">
+                        <a:defRPr sz="800" b="0">
                           <a:solidFill>
                             <a:srgbClr val="0D1117"/>
                           </a:solidFill>
@@ -11044,7 +11250,7 @@
               <a:rPr>
                 <a:latin typeface="Inter"/>
               </a:rPr>
-              <a:t>Illustrative, Gradient Maintained — demo data, not the client's holdings or managers. All organizations, portfolios, managers and results in this public example are illustrative.</a:t>
+              <a:t>Each digest is the SHA-256 fingerprint of the exact data the report used.</a:t>
             </a:r>
           </a:p>
         </p:txBody>
@@ -11219,7 +11425,7 @@
               <a:rPr>
                 <a:latin typeface="Inter"/>
               </a:rPr>
-              <a:t>13</a:t>
+              <a:t>14</a:t>
             </a:r>
           </a:p>
         </p:txBody>
@@ -11232,7 +11438,7 @@
 </p:sld>
 </file>
 
-<file path=ppt/slides/slide14.xml><?xml version="1.0" encoding="utf-8"?>
+<file path=ppt/slides/slide15.xml><?xml version="1.0" encoding="utf-8"?>
 <p:sld xmlns:a="http://schemas.openxmlformats.org/drawingml/2006/main" xmlns:p="http://schemas.openxmlformats.org/presentationml/2006/main" xmlns:r="http://schemas.openxmlformats.org/officeDocument/2006/relationships">
   <p:cSld>
     <p:spTree>
@@ -11300,7 +11506,7 @@
         <p:spPr>
           <a:xfrm>
             <a:off x="640080" y="329184"/>
-            <a:ext cx="5303520" cy="182880"/>
+            <a:ext cx="9875520" cy="182880"/>
           </a:xfrm>
           <a:prstGeom prst="rect">
             <a:avLst/>
@@ -11341,48 +11547,6 @@
         </p:nvSpPr>
         <p:spPr>
           <a:xfrm>
-            <a:off x="5897880" y="310896"/>
-            <a:ext cx="4800600" cy="256032"/>
-          </a:xfrm>
-          <a:prstGeom prst="rect">
-            <a:avLst/>
-          </a:prstGeom>
-          <a:noFill/>
-        </p:spPr>
-        <p:txBody>
-          <a:bodyPr wrap="none" lIns="9144" rIns="9144" tIns="9144" bIns="9144" anchor="t">
-            <a:spAutoFit/>
-          </a:bodyPr>
-          <a:lstStyle/>
-          <a:p>
-            <a:pPr algn="r">
-              <a:spcAft>
-                <a:spcPts val="0"/>
-              </a:spcAft>
-              <a:defRPr sz="680" b="1">
-                <a:solidFill>
-                  <a:srgbClr val="4F6B00"/>
-                </a:solidFill>
-                <a:latin typeface="Inter"/>
-              </a:defRPr>
-            </a:pPr>
-            <a:r>
-              <a:rPr>
-                <a:latin typeface="Inter"/>
-              </a:rPr>
-              <a:t>Illustrative, Gradient Maintained — demo data, not the client's holdings or managers</a:t>
-            </a:r>
-          </a:p>
-        </p:txBody>
-      </p:sp>
-      <p:sp>
-        <p:nvSpPr>
-          <p:cNvPr id="5" name="TextBox 4"/>
-          <p:cNvSpPr txBox="1"/>
-          <p:nvPr/>
-        </p:nvSpPr>
-        <p:spPr>
-          <a:xfrm>
             <a:off x="640080" y="566928"/>
             <a:ext cx="10058400" cy="530352"/>
           </a:xfrm>
@@ -11419,7 +11583,7 @@
       </p:sp>
       <p:sp>
         <p:nvSpPr>
-          <p:cNvPr id="6" name="Rectangle 5"/>
+          <p:cNvPr id="5" name="Rectangle 4"/>
           <p:cNvSpPr/>
           <p:nvPr/>
         </p:nvSpPr>
@@ -11468,7 +11632,7 @@
       </p:sp>
       <p:sp>
         <p:nvSpPr>
-          <p:cNvPr id="7" name="Rectangle 6"/>
+          <p:cNvPr id="6" name="Rectangle 5"/>
           <p:cNvSpPr/>
           <p:nvPr/>
         </p:nvSpPr>
@@ -11517,7 +11681,7 @@
       </p:sp>
       <p:sp>
         <p:nvSpPr>
-          <p:cNvPr id="8" name="TextBox 7"/>
+          <p:cNvPr id="7" name="TextBox 6"/>
           <p:cNvSpPr txBox="1"/>
           <p:nvPr/>
         </p:nvSpPr>
@@ -11559,7 +11723,7 @@
       </p:sp>
       <p:sp>
         <p:nvSpPr>
-          <p:cNvPr id="9" name="TextBox 8"/>
+          <p:cNvPr id="8" name="TextBox 7"/>
           <p:cNvSpPr txBox="1"/>
           <p:nvPr/>
         </p:nvSpPr>
@@ -11601,7 +11765,7 @@
       </p:sp>
       <p:graphicFrame>
         <p:nvGraphicFramePr>
-          <p:cNvPr id="10" name="Table 9"/>
+          <p:cNvPr id="9" name="Table 8"/>
           <p:cNvGraphicFramePr>
             <a:graphicFrameLocks noGrp="1"/>
           </p:cNvGraphicFramePr>
@@ -12624,7 +12788,7 @@
       </p:graphicFrame>
       <p:sp>
         <p:nvSpPr>
-          <p:cNvPr id="11" name="Rectangle 10"/>
+          <p:cNvPr id="10" name="Rectangle 9"/>
           <p:cNvSpPr/>
           <p:nvPr/>
         </p:nvSpPr>
@@ -12673,7 +12837,7 @@
       </p:sp>
       <p:sp>
         <p:nvSpPr>
-          <p:cNvPr id="12" name="TextBox 11"/>
+          <p:cNvPr id="11" name="TextBox 10"/>
           <p:cNvSpPr txBox="1"/>
           <p:nvPr/>
         </p:nvSpPr>
@@ -12715,7 +12879,7 @@
       </p:sp>
       <p:sp>
         <p:nvSpPr>
-          <p:cNvPr id="13" name="TextBox 12"/>
+          <p:cNvPr id="12" name="TextBox 11"/>
           <p:cNvSpPr txBox="1"/>
           <p:nvPr/>
         </p:nvSpPr>
@@ -12757,7 +12921,7 @@
       </p:sp>
       <p:sp>
         <p:nvSpPr>
-          <p:cNvPr id="14" name="TextBox 13"/>
+          <p:cNvPr id="13" name="TextBox 12"/>
           <p:cNvSpPr txBox="1"/>
           <p:nvPr/>
         </p:nvSpPr>
@@ -12792,7 +12956,7 @@
               <a:rPr>
                 <a:latin typeface="Inter"/>
               </a:rPr>
-              <a:t>14</a:t>
+              <a:t>15</a:t>
             </a:r>
           </a:p>
         </p:txBody>
@@ -12873,7 +13037,7 @@
         <p:spPr>
           <a:xfrm>
             <a:off x="640080" y="329184"/>
-            <a:ext cx="5303520" cy="182880"/>
+            <a:ext cx="9875520" cy="182880"/>
           </a:xfrm>
           <a:prstGeom prst="rect">
             <a:avLst/>
@@ -12914,48 +13078,6 @@
         </p:nvSpPr>
         <p:spPr>
           <a:xfrm>
-            <a:off x="5897880" y="310896"/>
-            <a:ext cx="4800600" cy="256032"/>
-          </a:xfrm>
-          <a:prstGeom prst="rect">
-            <a:avLst/>
-          </a:prstGeom>
-          <a:noFill/>
-        </p:spPr>
-        <p:txBody>
-          <a:bodyPr wrap="none" lIns="9144" rIns="9144" tIns="9144" bIns="9144" anchor="t">
-            <a:spAutoFit/>
-          </a:bodyPr>
-          <a:lstStyle/>
-          <a:p>
-            <a:pPr algn="r">
-              <a:spcAft>
-                <a:spcPts val="0"/>
-              </a:spcAft>
-              <a:defRPr sz="680" b="1">
-                <a:solidFill>
-                  <a:srgbClr val="4F6B00"/>
-                </a:solidFill>
-                <a:latin typeface="Inter"/>
-              </a:defRPr>
-            </a:pPr>
-            <a:r>
-              <a:rPr>
-                <a:latin typeface="Inter"/>
-              </a:rPr>
-              <a:t>Illustrative, Gradient Maintained — demo data, not the client's holdings or managers</a:t>
-            </a:r>
-          </a:p>
-        </p:txBody>
-      </p:sp>
-      <p:sp>
-        <p:nvSpPr>
-          <p:cNvPr id="5" name="TextBox 4"/>
-          <p:cNvSpPr txBox="1"/>
-          <p:nvPr/>
-        </p:nvSpPr>
-        <p:spPr>
-          <a:xfrm>
             <a:off x="640080" y="566928"/>
             <a:ext cx="10058400" cy="530352"/>
           </a:xfrm>
@@ -12992,7 +13114,7 @@
       </p:sp>
       <p:sp>
         <p:nvSpPr>
-          <p:cNvPr id="6" name="Rectangle 5"/>
+          <p:cNvPr id="5" name="Rectangle 4"/>
           <p:cNvSpPr/>
           <p:nvPr/>
         </p:nvSpPr>
@@ -13041,7 +13163,7 @@
       </p:sp>
       <p:sp>
         <p:nvSpPr>
-          <p:cNvPr id="7" name="Rectangle 6"/>
+          <p:cNvPr id="6" name="Rectangle 5"/>
           <p:cNvSpPr/>
           <p:nvPr/>
         </p:nvSpPr>
@@ -13090,7 +13212,7 @@
       </p:sp>
       <p:sp>
         <p:nvSpPr>
-          <p:cNvPr id="8" name="TextBox 7"/>
+          <p:cNvPr id="7" name="TextBox 6"/>
           <p:cNvSpPr txBox="1"/>
           <p:nvPr/>
         </p:nvSpPr>
@@ -13132,7 +13254,7 @@
       </p:sp>
       <p:sp>
         <p:nvSpPr>
-          <p:cNvPr id="9" name="Rectangle 8"/>
+          <p:cNvPr id="8" name="Rectangle 7"/>
           <p:cNvSpPr/>
           <p:nvPr/>
         </p:nvSpPr>
@@ -13181,7 +13303,7 @@
       </p:sp>
       <p:sp>
         <p:nvSpPr>
-          <p:cNvPr id="10" name="Rectangle 9"/>
+          <p:cNvPr id="9" name="Rectangle 8"/>
           <p:cNvSpPr/>
           <p:nvPr/>
         </p:nvSpPr>
@@ -13230,7 +13352,7 @@
       </p:sp>
       <p:sp>
         <p:nvSpPr>
-          <p:cNvPr id="11" name="TextBox 10"/>
+          <p:cNvPr id="10" name="TextBox 9"/>
           <p:cNvSpPr txBox="1"/>
           <p:nvPr/>
         </p:nvSpPr>
@@ -13272,7 +13394,7 @@
       </p:sp>
       <p:sp>
         <p:nvSpPr>
-          <p:cNvPr id="12" name="TextBox 11"/>
+          <p:cNvPr id="11" name="TextBox 10"/>
           <p:cNvSpPr txBox="1"/>
           <p:nvPr/>
         </p:nvSpPr>
@@ -13314,7 +13436,7 @@
       </p:sp>
       <p:sp>
         <p:nvSpPr>
-          <p:cNvPr id="13" name="Rectangle 12"/>
+          <p:cNvPr id="12" name="Rectangle 11"/>
           <p:cNvSpPr/>
           <p:nvPr/>
         </p:nvSpPr>
@@ -13363,7 +13485,7 @@
       </p:sp>
       <p:sp>
         <p:nvSpPr>
-          <p:cNvPr id="14" name="Rectangle 13"/>
+          <p:cNvPr id="13" name="Rectangle 12"/>
           <p:cNvSpPr/>
           <p:nvPr/>
         </p:nvSpPr>
@@ -13412,7 +13534,7 @@
       </p:sp>
       <p:sp>
         <p:nvSpPr>
-          <p:cNvPr id="15" name="TextBox 14"/>
+          <p:cNvPr id="14" name="TextBox 13"/>
           <p:cNvSpPr txBox="1"/>
           <p:nvPr/>
         </p:nvSpPr>
@@ -13454,7 +13576,7 @@
       </p:sp>
       <p:sp>
         <p:nvSpPr>
-          <p:cNvPr id="16" name="TextBox 15"/>
+          <p:cNvPr id="15" name="TextBox 14"/>
           <p:cNvSpPr txBox="1"/>
           <p:nvPr/>
         </p:nvSpPr>
@@ -13496,7 +13618,7 @@
       </p:sp>
       <p:sp>
         <p:nvSpPr>
-          <p:cNvPr id="17" name="Rectangle 16"/>
+          <p:cNvPr id="16" name="Rectangle 15"/>
           <p:cNvSpPr/>
           <p:nvPr/>
         </p:nvSpPr>
@@ -13545,7 +13667,7 @@
       </p:sp>
       <p:sp>
         <p:nvSpPr>
-          <p:cNvPr id="18" name="Rectangle 17"/>
+          <p:cNvPr id="17" name="Rectangle 16"/>
           <p:cNvSpPr/>
           <p:nvPr/>
         </p:nvSpPr>
@@ -13594,7 +13716,7 @@
       </p:sp>
       <p:sp>
         <p:nvSpPr>
-          <p:cNvPr id="19" name="TextBox 18"/>
+          <p:cNvPr id="18" name="TextBox 17"/>
           <p:cNvSpPr txBox="1"/>
           <p:nvPr/>
         </p:nvSpPr>
@@ -13636,7 +13758,7 @@
       </p:sp>
       <p:sp>
         <p:nvSpPr>
-          <p:cNvPr id="20" name="TextBox 19"/>
+          <p:cNvPr id="19" name="TextBox 18"/>
           <p:cNvSpPr txBox="1"/>
           <p:nvPr/>
         </p:nvSpPr>
@@ -13678,7 +13800,7 @@
       </p:sp>
       <p:sp>
         <p:nvSpPr>
-          <p:cNvPr id="21" name="Rectangle 20"/>
+          <p:cNvPr id="20" name="Rectangle 19"/>
           <p:cNvSpPr/>
           <p:nvPr/>
         </p:nvSpPr>
@@ -13727,7 +13849,7 @@
       </p:sp>
       <p:sp>
         <p:nvSpPr>
-          <p:cNvPr id="22" name="TextBox 21"/>
+          <p:cNvPr id="21" name="TextBox 20"/>
           <p:cNvSpPr txBox="1"/>
           <p:nvPr/>
         </p:nvSpPr>
@@ -13769,7 +13891,7 @@
       </p:sp>
       <p:sp>
         <p:nvSpPr>
-          <p:cNvPr id="23" name="TextBox 22"/>
+          <p:cNvPr id="22" name="TextBox 21"/>
           <p:cNvSpPr txBox="1"/>
           <p:nvPr/>
         </p:nvSpPr>
@@ -13811,7 +13933,7 @@
       </p:sp>
       <p:sp>
         <p:nvSpPr>
-          <p:cNvPr id="24" name="TextBox 23"/>
+          <p:cNvPr id="23" name="TextBox 22"/>
           <p:cNvSpPr txBox="1"/>
           <p:nvPr/>
         </p:nvSpPr>
@@ -13927,7 +14049,7 @@
         <p:spPr>
           <a:xfrm>
             <a:off x="640080" y="329184"/>
-            <a:ext cx="5303520" cy="182880"/>
+            <a:ext cx="9875520" cy="182880"/>
           </a:xfrm>
           <a:prstGeom prst="rect">
             <a:avLst/>
@@ -13968,48 +14090,6 @@
         </p:nvSpPr>
         <p:spPr>
           <a:xfrm>
-            <a:off x="5897880" y="310896"/>
-            <a:ext cx="4800600" cy="256032"/>
-          </a:xfrm>
-          <a:prstGeom prst="rect">
-            <a:avLst/>
-          </a:prstGeom>
-          <a:noFill/>
-        </p:spPr>
-        <p:txBody>
-          <a:bodyPr wrap="none" lIns="9144" rIns="9144" tIns="9144" bIns="9144" anchor="t">
-            <a:spAutoFit/>
-          </a:bodyPr>
-          <a:lstStyle/>
-          <a:p>
-            <a:pPr algn="r">
-              <a:spcAft>
-                <a:spcPts val="0"/>
-              </a:spcAft>
-              <a:defRPr sz="680" b="1">
-                <a:solidFill>
-                  <a:srgbClr val="4F6B00"/>
-                </a:solidFill>
-                <a:latin typeface="Inter"/>
-              </a:defRPr>
-            </a:pPr>
-            <a:r>
-              <a:rPr>
-                <a:latin typeface="Inter"/>
-              </a:rPr>
-              <a:t>Illustrative, Gradient Maintained — demo data, not the client's holdings or managers</a:t>
-            </a:r>
-          </a:p>
-        </p:txBody>
-      </p:sp>
-      <p:sp>
-        <p:nvSpPr>
-          <p:cNvPr id="5" name="TextBox 4"/>
-          <p:cNvSpPr txBox="1"/>
-          <p:nvPr/>
-        </p:nvSpPr>
-        <p:spPr>
-          <a:xfrm>
             <a:off x="640080" y="566928"/>
             <a:ext cx="10058400" cy="530352"/>
           </a:xfrm>
@@ -14046,7 +14126,7 @@
       </p:sp>
       <p:sp>
         <p:nvSpPr>
-          <p:cNvPr id="6" name="Rectangle 5"/>
+          <p:cNvPr id="5" name="Rectangle 4"/>
           <p:cNvSpPr/>
           <p:nvPr/>
         </p:nvSpPr>
@@ -14095,7 +14175,7 @@
       </p:sp>
       <p:sp>
         <p:nvSpPr>
-          <p:cNvPr id="7" name="Rectangle 6"/>
+          <p:cNvPr id="6" name="Rectangle 5"/>
           <p:cNvSpPr/>
           <p:nvPr/>
         </p:nvSpPr>
@@ -14144,7 +14224,7 @@
       </p:sp>
       <p:sp>
         <p:nvSpPr>
-          <p:cNvPr id="8" name="TextBox 7"/>
+          <p:cNvPr id="7" name="TextBox 6"/>
           <p:cNvSpPr txBox="1"/>
           <p:nvPr/>
         </p:nvSpPr>
@@ -14186,7 +14266,7 @@
       </p:sp>
       <p:graphicFrame>
         <p:nvGraphicFramePr>
-          <p:cNvPr id="9" name="Table 8"/>
+          <p:cNvPr id="8" name="Table 7"/>
           <p:cNvGraphicFramePr>
             <a:graphicFrameLocks noGrp="1"/>
           </p:cNvGraphicFramePr>
@@ -14335,7 +14415,7 @@
                         <a:rPr>
                           <a:latin typeface="Inter"/>
                         </a:rPr>
-                        <a:t>● available</a:t>
+                        <a:t>● Available</a:t>
                       </a:r>
                     </a:p>
                   </a:txBody>
@@ -14418,7 +14498,7 @@
                         <a:rPr>
                           <a:latin typeface="Inter"/>
                         </a:rPr>
-                        <a:t>● available</a:t>
+                        <a:t>● Available</a:t>
                       </a:r>
                     </a:p>
                   </a:txBody>
@@ -14501,7 +14581,7 @@
                         <a:rPr>
                           <a:latin typeface="Inter"/>
                         </a:rPr>
-                        <a:t>● available</a:t>
+                        <a:t>● Available</a:t>
                       </a:r>
                     </a:p>
                   </a:txBody>
@@ -14584,7 +14664,7 @@
                         <a:rPr>
                           <a:latin typeface="Inter"/>
                         </a:rPr>
-                        <a:t>● partial</a:t>
+                        <a:t>● Partly available</a:t>
                       </a:r>
                     </a:p>
                   </a:txBody>
@@ -14628,7 +14708,7 @@
       </p:graphicFrame>
       <p:sp>
         <p:nvSpPr>
-          <p:cNvPr id="10" name="Rectangle 9"/>
+          <p:cNvPr id="9" name="Rectangle 8"/>
           <p:cNvSpPr/>
           <p:nvPr/>
         </p:nvSpPr>
@@ -14677,7 +14757,7 @@
       </p:sp>
       <p:sp>
         <p:nvSpPr>
-          <p:cNvPr id="11" name="TextBox 10"/>
+          <p:cNvPr id="10" name="TextBox 9"/>
           <p:cNvSpPr txBox="1"/>
           <p:nvPr/>
         </p:nvSpPr>
@@ -14719,7 +14799,7 @@
       </p:sp>
       <p:sp>
         <p:nvSpPr>
-          <p:cNvPr id="12" name="TextBox 11"/>
+          <p:cNvPr id="11" name="TextBox 10"/>
           <p:cNvSpPr txBox="1"/>
           <p:nvPr/>
         </p:nvSpPr>
@@ -14761,7 +14841,7 @@
       </p:sp>
       <p:sp>
         <p:nvSpPr>
-          <p:cNvPr id="13" name="TextBox 12"/>
+          <p:cNvPr id="12" name="TextBox 11"/>
           <p:cNvSpPr txBox="1"/>
           <p:nvPr/>
         </p:nvSpPr>
@@ -14877,7 +14957,7 @@
         <p:spPr>
           <a:xfrm>
             <a:off x="640080" y="329184"/>
-            <a:ext cx="5303520" cy="182880"/>
+            <a:ext cx="9875520" cy="182880"/>
           </a:xfrm>
           <a:prstGeom prst="rect">
             <a:avLst/>
@@ -14918,48 +14998,6 @@
         </p:nvSpPr>
         <p:spPr>
           <a:xfrm>
-            <a:off x="5897880" y="310896"/>
-            <a:ext cx="4800600" cy="256032"/>
-          </a:xfrm>
-          <a:prstGeom prst="rect">
-            <a:avLst/>
-          </a:prstGeom>
-          <a:noFill/>
-        </p:spPr>
-        <p:txBody>
-          <a:bodyPr wrap="none" lIns="9144" rIns="9144" tIns="9144" bIns="9144" anchor="t">
-            <a:spAutoFit/>
-          </a:bodyPr>
-          <a:lstStyle/>
-          <a:p>
-            <a:pPr algn="r">
-              <a:spcAft>
-                <a:spcPts val="0"/>
-              </a:spcAft>
-              <a:defRPr sz="680" b="1">
-                <a:solidFill>
-                  <a:srgbClr val="4F6B00"/>
-                </a:solidFill>
-                <a:latin typeface="Inter"/>
-              </a:defRPr>
-            </a:pPr>
-            <a:r>
-              <a:rPr>
-                <a:latin typeface="Inter"/>
-              </a:rPr>
-              <a:t>Illustrative, Gradient Maintained — demo data, not the client's holdings or managers</a:t>
-            </a:r>
-          </a:p>
-        </p:txBody>
-      </p:sp>
-      <p:sp>
-        <p:nvSpPr>
-          <p:cNvPr id="5" name="TextBox 4"/>
-          <p:cNvSpPr txBox="1"/>
-          <p:nvPr/>
-        </p:nvSpPr>
-        <p:spPr>
-          <a:xfrm>
             <a:off x="640080" y="566928"/>
             <a:ext cx="10058400" cy="530352"/>
           </a:xfrm>
@@ -14996,7 +15034,7 @@
       </p:sp>
       <p:sp>
         <p:nvSpPr>
-          <p:cNvPr id="6" name="Rectangle 5"/>
+          <p:cNvPr id="5" name="Rectangle 4"/>
           <p:cNvSpPr/>
           <p:nvPr/>
         </p:nvSpPr>
@@ -15045,7 +15083,7 @@
       </p:sp>
       <p:sp>
         <p:nvSpPr>
-          <p:cNvPr id="7" name="Rectangle 6"/>
+          <p:cNvPr id="6" name="Rectangle 5"/>
           <p:cNvSpPr/>
           <p:nvPr/>
         </p:nvSpPr>
@@ -15094,7 +15132,7 @@
       </p:sp>
       <p:sp>
         <p:nvSpPr>
-          <p:cNvPr id="8" name="TextBox 7"/>
+          <p:cNvPr id="7" name="TextBox 6"/>
           <p:cNvSpPr txBox="1"/>
           <p:nvPr/>
         </p:nvSpPr>
@@ -15136,7 +15174,7 @@
       </p:sp>
       <p:sp>
         <p:nvSpPr>
-          <p:cNvPr id="9" name="TextBox 8"/>
+          <p:cNvPr id="8" name="TextBox 7"/>
           <p:cNvSpPr txBox="1"/>
           <p:nvPr/>
         </p:nvSpPr>
@@ -15178,7 +15216,7 @@
       </p:sp>
       <p:graphicFrame>
         <p:nvGraphicFramePr>
-          <p:cNvPr id="10" name="Chart 9"/>
+          <p:cNvPr id="9" name="Chart 8"/>
           <p:cNvGraphicFramePr>
             <a:graphicFrameLocks noGrp="1"/>
           </p:cNvGraphicFramePr>
@@ -15196,7 +15234,7 @@
       </p:graphicFrame>
       <p:sp>
         <p:nvSpPr>
-          <p:cNvPr id="11" name="Rectangle 10"/>
+          <p:cNvPr id="10" name="Rectangle 9"/>
           <p:cNvSpPr/>
           <p:nvPr/>
         </p:nvSpPr>
@@ -15245,7 +15283,7 @@
       </p:sp>
       <p:sp>
         <p:nvSpPr>
-          <p:cNvPr id="12" name="TextBox 11"/>
+          <p:cNvPr id="11" name="TextBox 10"/>
           <p:cNvSpPr txBox="1"/>
           <p:nvPr/>
         </p:nvSpPr>
@@ -15287,7 +15325,7 @@
       </p:sp>
       <p:graphicFrame>
         <p:nvGraphicFramePr>
-          <p:cNvPr id="13" name="Chart 12"/>
+          <p:cNvPr id="12" name="Chart 11"/>
           <p:cNvGraphicFramePr>
             <a:graphicFrameLocks noGrp="1"/>
           </p:cNvGraphicFramePr>
@@ -15305,7 +15343,7 @@
       </p:graphicFrame>
       <p:sp>
         <p:nvSpPr>
-          <p:cNvPr id="14" name="Rectangle 13"/>
+          <p:cNvPr id="13" name="Rectangle 12"/>
           <p:cNvSpPr/>
           <p:nvPr/>
         </p:nvSpPr>
@@ -15354,7 +15392,7 @@
       </p:sp>
       <p:sp>
         <p:nvSpPr>
-          <p:cNvPr id="15" name="TextBox 14"/>
+          <p:cNvPr id="14" name="TextBox 13"/>
           <p:cNvSpPr txBox="1"/>
           <p:nvPr/>
         </p:nvSpPr>
@@ -15396,7 +15434,7 @@
       </p:sp>
       <p:sp>
         <p:nvSpPr>
-          <p:cNvPr id="16" name="TextBox 15"/>
+          <p:cNvPr id="15" name="TextBox 14"/>
           <p:cNvSpPr txBox="1"/>
           <p:nvPr/>
         </p:nvSpPr>
@@ -15438,7 +15476,7 @@
       </p:sp>
       <p:sp>
         <p:nvSpPr>
-          <p:cNvPr id="17" name="TextBox 16"/>
+          <p:cNvPr id="16" name="TextBox 15"/>
           <p:cNvSpPr txBox="1"/>
           <p:nvPr/>
         </p:nvSpPr>
@@ -15554,7 +15592,7 @@
         <p:spPr>
           <a:xfrm>
             <a:off x="640080" y="329184"/>
-            <a:ext cx="5303520" cy="182880"/>
+            <a:ext cx="9875520" cy="182880"/>
           </a:xfrm>
           <a:prstGeom prst="rect">
             <a:avLst/>
@@ -15595,48 +15633,6 @@
         </p:nvSpPr>
         <p:spPr>
           <a:xfrm>
-            <a:off x="5897880" y="310896"/>
-            <a:ext cx="4800600" cy="256032"/>
-          </a:xfrm>
-          <a:prstGeom prst="rect">
-            <a:avLst/>
-          </a:prstGeom>
-          <a:noFill/>
-        </p:spPr>
-        <p:txBody>
-          <a:bodyPr wrap="none" lIns="9144" rIns="9144" tIns="9144" bIns="9144" anchor="t">
-            <a:spAutoFit/>
-          </a:bodyPr>
-          <a:lstStyle/>
-          <a:p>
-            <a:pPr algn="r">
-              <a:spcAft>
-                <a:spcPts val="0"/>
-              </a:spcAft>
-              <a:defRPr sz="680" b="1">
-                <a:solidFill>
-                  <a:srgbClr val="4F6B00"/>
-                </a:solidFill>
-                <a:latin typeface="Inter"/>
-              </a:defRPr>
-            </a:pPr>
-            <a:r>
-              <a:rPr>
-                <a:latin typeface="Inter"/>
-              </a:rPr>
-              <a:t>Illustrative, Gradient Maintained — demo data, not the client's holdings or managers</a:t>
-            </a:r>
-          </a:p>
-        </p:txBody>
-      </p:sp>
-      <p:sp>
-        <p:nvSpPr>
-          <p:cNvPr id="5" name="TextBox 4"/>
-          <p:cNvSpPr txBox="1"/>
-          <p:nvPr/>
-        </p:nvSpPr>
-        <p:spPr>
-          <a:xfrm>
             <a:off x="640080" y="566928"/>
             <a:ext cx="10058400" cy="530352"/>
           </a:xfrm>
@@ -15673,7 +15669,7 @@
       </p:sp>
       <p:sp>
         <p:nvSpPr>
-          <p:cNvPr id="6" name="Rectangle 5"/>
+          <p:cNvPr id="5" name="Rectangle 4"/>
           <p:cNvSpPr/>
           <p:nvPr/>
         </p:nvSpPr>
@@ -15722,7 +15718,7 @@
       </p:sp>
       <p:sp>
         <p:nvSpPr>
-          <p:cNvPr id="7" name="Rectangle 6"/>
+          <p:cNvPr id="6" name="Rectangle 5"/>
           <p:cNvSpPr/>
           <p:nvPr/>
         </p:nvSpPr>
@@ -15771,7 +15767,7 @@
       </p:sp>
       <p:sp>
         <p:nvSpPr>
-          <p:cNvPr id="8" name="TextBox 7"/>
+          <p:cNvPr id="7" name="TextBox 6"/>
           <p:cNvSpPr txBox="1"/>
           <p:nvPr/>
         </p:nvSpPr>
@@ -15813,7 +15809,7 @@
       </p:sp>
       <p:sp>
         <p:nvSpPr>
-          <p:cNvPr id="9" name="TextBox 8"/>
+          <p:cNvPr id="8" name="TextBox 7"/>
           <p:cNvSpPr txBox="1"/>
           <p:nvPr/>
         </p:nvSpPr>
@@ -15855,7 +15851,7 @@
       </p:sp>
       <p:graphicFrame>
         <p:nvGraphicFramePr>
-          <p:cNvPr id="10" name="Chart 9"/>
+          <p:cNvPr id="9" name="Chart 8"/>
           <p:cNvGraphicFramePr>
             <a:graphicFrameLocks noGrp="1"/>
           </p:cNvGraphicFramePr>
@@ -15873,7 +15869,7 @@
       </p:graphicFrame>
       <p:sp>
         <p:nvSpPr>
-          <p:cNvPr id="11" name="Rectangle 10"/>
+          <p:cNvPr id="10" name="Rectangle 9"/>
           <p:cNvSpPr/>
           <p:nvPr/>
         </p:nvSpPr>
@@ -15922,7 +15918,7 @@
       </p:sp>
       <p:sp>
         <p:nvSpPr>
-          <p:cNvPr id="12" name="TextBox 11"/>
+          <p:cNvPr id="11" name="TextBox 10"/>
           <p:cNvSpPr txBox="1"/>
           <p:nvPr/>
         </p:nvSpPr>
@@ -15964,7 +15960,7 @@
       </p:sp>
       <p:sp>
         <p:nvSpPr>
-          <p:cNvPr id="13" name="TextBox 12"/>
+          <p:cNvPr id="12" name="TextBox 11"/>
           <p:cNvSpPr txBox="1"/>
           <p:nvPr/>
         </p:nvSpPr>
@@ -16006,7 +16002,7 @@
       </p:sp>
       <p:sp>
         <p:nvSpPr>
-          <p:cNvPr id="14" name="TextBox 13"/>
+          <p:cNvPr id="13" name="TextBox 12"/>
           <p:cNvSpPr txBox="1"/>
           <p:nvPr/>
         </p:nvSpPr>
@@ -16122,7 +16118,7 @@
         <p:spPr>
           <a:xfrm>
             <a:off x="640080" y="329184"/>
-            <a:ext cx="5303520" cy="182880"/>
+            <a:ext cx="9875520" cy="182880"/>
           </a:xfrm>
           <a:prstGeom prst="rect">
             <a:avLst/>
@@ -16163,48 +16159,6 @@
         </p:nvSpPr>
         <p:spPr>
           <a:xfrm>
-            <a:off x="5897880" y="310896"/>
-            <a:ext cx="4800600" cy="256032"/>
-          </a:xfrm>
-          <a:prstGeom prst="rect">
-            <a:avLst/>
-          </a:prstGeom>
-          <a:noFill/>
-        </p:spPr>
-        <p:txBody>
-          <a:bodyPr wrap="none" lIns="9144" rIns="9144" tIns="9144" bIns="9144" anchor="t">
-            <a:spAutoFit/>
-          </a:bodyPr>
-          <a:lstStyle/>
-          <a:p>
-            <a:pPr algn="r">
-              <a:spcAft>
-                <a:spcPts val="0"/>
-              </a:spcAft>
-              <a:defRPr sz="680" b="1">
-                <a:solidFill>
-                  <a:srgbClr val="4F6B00"/>
-                </a:solidFill>
-                <a:latin typeface="Inter"/>
-              </a:defRPr>
-            </a:pPr>
-            <a:r>
-              <a:rPr>
-                <a:latin typeface="Inter"/>
-              </a:rPr>
-              <a:t>Illustrative, Gradient Maintained — demo data, not the client's holdings or managers</a:t>
-            </a:r>
-          </a:p>
-        </p:txBody>
-      </p:sp>
-      <p:sp>
-        <p:nvSpPr>
-          <p:cNvPr id="5" name="TextBox 4"/>
-          <p:cNvSpPr txBox="1"/>
-          <p:nvPr/>
-        </p:nvSpPr>
-        <p:spPr>
-          <a:xfrm>
             <a:off x="640080" y="566928"/>
             <a:ext cx="10058400" cy="530352"/>
           </a:xfrm>
@@ -16241,7 +16195,7 @@
       </p:sp>
       <p:sp>
         <p:nvSpPr>
-          <p:cNvPr id="6" name="Rectangle 5"/>
+          <p:cNvPr id="5" name="Rectangle 4"/>
           <p:cNvSpPr/>
           <p:nvPr/>
         </p:nvSpPr>
@@ -16290,7 +16244,7 @@
       </p:sp>
       <p:sp>
         <p:nvSpPr>
-          <p:cNvPr id="7" name="Rectangle 6"/>
+          <p:cNvPr id="6" name="Rectangle 5"/>
           <p:cNvSpPr/>
           <p:nvPr/>
         </p:nvSpPr>
@@ -16339,7 +16293,7 @@
       </p:sp>
       <p:sp>
         <p:nvSpPr>
-          <p:cNvPr id="8" name="TextBox 7"/>
+          <p:cNvPr id="7" name="TextBox 6"/>
           <p:cNvSpPr txBox="1"/>
           <p:nvPr/>
         </p:nvSpPr>
@@ -16381,7 +16335,7 @@
       </p:sp>
       <p:sp>
         <p:nvSpPr>
-          <p:cNvPr id="9" name="TextBox 8"/>
+          <p:cNvPr id="8" name="TextBox 7"/>
           <p:cNvSpPr txBox="1"/>
           <p:nvPr/>
         </p:nvSpPr>
@@ -16423,7 +16377,7 @@
       </p:sp>
       <p:graphicFrame>
         <p:nvGraphicFramePr>
-          <p:cNvPr id="10" name="Chart 9"/>
+          <p:cNvPr id="9" name="Chart 8"/>
           <p:cNvGraphicFramePr>
             <a:graphicFrameLocks noGrp="1"/>
           </p:cNvGraphicFramePr>
@@ -16441,7 +16395,7 @@
       </p:graphicFrame>
       <p:sp>
         <p:nvSpPr>
-          <p:cNvPr id="11" name="Rectangle 10"/>
+          <p:cNvPr id="10" name="Rectangle 9"/>
           <p:cNvSpPr/>
           <p:nvPr/>
         </p:nvSpPr>
@@ -16490,7 +16444,7 @@
       </p:sp>
       <p:sp>
         <p:nvSpPr>
-          <p:cNvPr id="12" name="TextBox 11"/>
+          <p:cNvPr id="11" name="TextBox 10"/>
           <p:cNvSpPr txBox="1"/>
           <p:nvPr/>
         </p:nvSpPr>
@@ -16532,7 +16486,7 @@
       </p:sp>
       <p:graphicFrame>
         <p:nvGraphicFramePr>
-          <p:cNvPr id="13" name="Chart 12"/>
+          <p:cNvPr id="12" name="Chart 11"/>
           <p:cNvGraphicFramePr>
             <a:graphicFrameLocks noGrp="1"/>
           </p:cNvGraphicFramePr>
@@ -16550,7 +16504,7 @@
       </p:graphicFrame>
       <p:sp>
         <p:nvSpPr>
-          <p:cNvPr id="14" name="Rectangle 13"/>
+          <p:cNvPr id="13" name="Rectangle 12"/>
           <p:cNvSpPr/>
           <p:nvPr/>
         </p:nvSpPr>
@@ -16599,7 +16553,7 @@
       </p:sp>
       <p:sp>
         <p:nvSpPr>
-          <p:cNvPr id="15" name="TextBox 14"/>
+          <p:cNvPr id="14" name="TextBox 13"/>
           <p:cNvSpPr txBox="1"/>
           <p:nvPr/>
         </p:nvSpPr>
@@ -16641,7 +16595,7 @@
       </p:sp>
       <p:sp>
         <p:nvSpPr>
-          <p:cNvPr id="16" name="TextBox 15"/>
+          <p:cNvPr id="15" name="TextBox 14"/>
           <p:cNvSpPr txBox="1"/>
           <p:nvPr/>
         </p:nvSpPr>
@@ -16683,7 +16637,7 @@
       </p:sp>
       <p:sp>
         <p:nvSpPr>
-          <p:cNvPr id="17" name="TextBox 16"/>
+          <p:cNvPr id="16" name="TextBox 15"/>
           <p:cNvSpPr txBox="1"/>
           <p:nvPr/>
         </p:nvSpPr>
@@ -16799,7 +16753,7 @@
         <p:spPr>
           <a:xfrm>
             <a:off x="640080" y="329184"/>
-            <a:ext cx="5303520" cy="182880"/>
+            <a:ext cx="9875520" cy="182880"/>
           </a:xfrm>
           <a:prstGeom prst="rect">
             <a:avLst/>
@@ -16840,48 +16794,6 @@
         </p:nvSpPr>
         <p:spPr>
           <a:xfrm>
-            <a:off x="5897880" y="310896"/>
-            <a:ext cx="4800600" cy="256032"/>
-          </a:xfrm>
-          <a:prstGeom prst="rect">
-            <a:avLst/>
-          </a:prstGeom>
-          <a:noFill/>
-        </p:spPr>
-        <p:txBody>
-          <a:bodyPr wrap="none" lIns="9144" rIns="9144" tIns="9144" bIns="9144" anchor="t">
-            <a:spAutoFit/>
-          </a:bodyPr>
-          <a:lstStyle/>
-          <a:p>
-            <a:pPr algn="r">
-              <a:spcAft>
-                <a:spcPts val="0"/>
-              </a:spcAft>
-              <a:defRPr sz="680" b="1">
-                <a:solidFill>
-                  <a:srgbClr val="4F6B00"/>
-                </a:solidFill>
-                <a:latin typeface="Inter"/>
-              </a:defRPr>
-            </a:pPr>
-            <a:r>
-              <a:rPr>
-                <a:latin typeface="Inter"/>
-              </a:rPr>
-              <a:t>Illustrative, Gradient Maintained — demo data, not the client's holdings or managers</a:t>
-            </a:r>
-          </a:p>
-        </p:txBody>
-      </p:sp>
-      <p:sp>
-        <p:nvSpPr>
-          <p:cNvPr id="5" name="TextBox 4"/>
-          <p:cNvSpPr txBox="1"/>
-          <p:nvPr/>
-        </p:nvSpPr>
-        <p:spPr>
-          <a:xfrm>
             <a:off x="640080" y="566928"/>
             <a:ext cx="10058400" cy="530352"/>
           </a:xfrm>
@@ -16918,7 +16830,7 @@
       </p:sp>
       <p:sp>
         <p:nvSpPr>
-          <p:cNvPr id="6" name="Rectangle 5"/>
+          <p:cNvPr id="5" name="Rectangle 4"/>
           <p:cNvSpPr/>
           <p:nvPr/>
         </p:nvSpPr>
@@ -16967,7 +16879,7 @@
       </p:sp>
       <p:sp>
         <p:nvSpPr>
-          <p:cNvPr id="7" name="Rectangle 6"/>
+          <p:cNvPr id="6" name="Rectangle 5"/>
           <p:cNvSpPr/>
           <p:nvPr/>
         </p:nvSpPr>
@@ -17016,7 +16928,7 @@
       </p:sp>
       <p:sp>
         <p:nvSpPr>
-          <p:cNvPr id="8" name="TextBox 7"/>
+          <p:cNvPr id="7" name="TextBox 6"/>
           <p:cNvSpPr txBox="1"/>
           <p:nvPr/>
         </p:nvSpPr>
@@ -17058,7 +16970,7 @@
       </p:sp>
       <p:sp>
         <p:nvSpPr>
-          <p:cNvPr id="9" name="TextBox 8"/>
+          <p:cNvPr id="8" name="TextBox 7"/>
           <p:cNvSpPr txBox="1"/>
           <p:nvPr/>
         </p:nvSpPr>
@@ -17100,7 +17012,7 @@
       </p:sp>
       <p:graphicFrame>
         <p:nvGraphicFramePr>
-          <p:cNvPr id="10" name="Chart 9"/>
+          <p:cNvPr id="9" name="Chart 8"/>
           <p:cNvGraphicFramePr>
             <a:graphicFrameLocks noGrp="1"/>
           </p:cNvGraphicFramePr>
@@ -17118,7 +17030,7 @@
       </p:graphicFrame>
       <p:sp>
         <p:nvSpPr>
-          <p:cNvPr id="11" name="Rectangle 10"/>
+          <p:cNvPr id="10" name="Rectangle 9"/>
           <p:cNvSpPr/>
           <p:nvPr/>
         </p:nvSpPr>
@@ -17167,7 +17079,7 @@
       </p:sp>
       <p:sp>
         <p:nvSpPr>
-          <p:cNvPr id="12" name="Rectangle 11"/>
+          <p:cNvPr id="11" name="Rectangle 10"/>
           <p:cNvSpPr/>
           <p:nvPr/>
         </p:nvSpPr>
@@ -17216,7 +17128,7 @@
       </p:sp>
       <p:sp>
         <p:nvSpPr>
-          <p:cNvPr id="13" name="TextBox 12"/>
+          <p:cNvPr id="12" name="TextBox 11"/>
           <p:cNvSpPr txBox="1"/>
           <p:nvPr/>
         </p:nvSpPr>
@@ -17258,7 +17170,7 @@
       </p:sp>
       <p:sp>
         <p:nvSpPr>
-          <p:cNvPr id="14" name="TextBox 13"/>
+          <p:cNvPr id="13" name="TextBox 12"/>
           <p:cNvSpPr txBox="1"/>
           <p:nvPr/>
         </p:nvSpPr>
@@ -17300,7 +17212,7 @@
       </p:sp>
       <p:sp>
         <p:nvSpPr>
-          <p:cNvPr id="15" name="Rectangle 14"/>
+          <p:cNvPr id="14" name="Rectangle 13"/>
           <p:cNvSpPr/>
           <p:nvPr/>
         </p:nvSpPr>
@@ -17349,7 +17261,7 @@
       </p:sp>
       <p:sp>
         <p:nvSpPr>
-          <p:cNvPr id="16" name="TextBox 15"/>
+          <p:cNvPr id="15" name="TextBox 14"/>
           <p:cNvSpPr txBox="1"/>
           <p:nvPr/>
         </p:nvSpPr>
@@ -17391,7 +17303,7 @@
       </p:sp>
       <p:sp>
         <p:nvSpPr>
-          <p:cNvPr id="17" name="TextBox 16"/>
+          <p:cNvPr id="16" name="TextBox 15"/>
           <p:cNvSpPr txBox="1"/>
           <p:nvPr/>
         </p:nvSpPr>
@@ -17433,7 +17345,7 @@
       </p:sp>
       <p:sp>
         <p:nvSpPr>
-          <p:cNvPr id="18" name="TextBox 17"/>
+          <p:cNvPr id="17" name="TextBox 16"/>
           <p:cNvSpPr txBox="1"/>
           <p:nvPr/>
         </p:nvSpPr>
@@ -17549,7 +17461,7 @@
         <p:spPr>
           <a:xfrm>
             <a:off x="640080" y="329184"/>
-            <a:ext cx="5303520" cy="182880"/>
+            <a:ext cx="9875520" cy="182880"/>
           </a:xfrm>
           <a:prstGeom prst="rect">
             <a:avLst/>
@@ -17590,48 +17502,6 @@
         </p:nvSpPr>
         <p:spPr>
           <a:xfrm>
-            <a:off x="5897880" y="310896"/>
-            <a:ext cx="4800600" cy="256032"/>
-          </a:xfrm>
-          <a:prstGeom prst="rect">
-            <a:avLst/>
-          </a:prstGeom>
-          <a:noFill/>
-        </p:spPr>
-        <p:txBody>
-          <a:bodyPr wrap="none" lIns="9144" rIns="9144" tIns="9144" bIns="9144" anchor="t">
-            <a:spAutoFit/>
-          </a:bodyPr>
-          <a:lstStyle/>
-          <a:p>
-            <a:pPr algn="r">
-              <a:spcAft>
-                <a:spcPts val="0"/>
-              </a:spcAft>
-              <a:defRPr sz="680" b="1">
-                <a:solidFill>
-                  <a:srgbClr val="4F6B00"/>
-                </a:solidFill>
-                <a:latin typeface="Inter"/>
-              </a:defRPr>
-            </a:pPr>
-            <a:r>
-              <a:rPr>
-                <a:latin typeface="Inter"/>
-              </a:rPr>
-              <a:t>Illustrative, Gradient Maintained — demo data, not the client's holdings or managers</a:t>
-            </a:r>
-          </a:p>
-        </p:txBody>
-      </p:sp>
-      <p:sp>
-        <p:nvSpPr>
-          <p:cNvPr id="5" name="TextBox 4"/>
-          <p:cNvSpPr txBox="1"/>
-          <p:nvPr/>
-        </p:nvSpPr>
-        <p:spPr>
-          <a:xfrm>
             <a:off x="640080" y="566928"/>
             <a:ext cx="10058400" cy="530352"/>
           </a:xfrm>
@@ -17668,7 +17538,7 @@
       </p:sp>
       <p:sp>
         <p:nvSpPr>
-          <p:cNvPr id="6" name="Rectangle 5"/>
+          <p:cNvPr id="5" name="Rectangle 4"/>
           <p:cNvSpPr/>
           <p:nvPr/>
         </p:nvSpPr>
@@ -17717,7 +17587,7 @@
       </p:sp>
       <p:sp>
         <p:nvSpPr>
-          <p:cNvPr id="7" name="Rectangle 6"/>
+          <p:cNvPr id="6" name="Rectangle 5"/>
           <p:cNvSpPr/>
           <p:nvPr/>
         </p:nvSpPr>
@@ -17766,7 +17636,7 @@
       </p:sp>
       <p:sp>
         <p:nvSpPr>
-          <p:cNvPr id="8" name="TextBox 7"/>
+          <p:cNvPr id="7" name="TextBox 6"/>
           <p:cNvSpPr txBox="1"/>
           <p:nvPr/>
         </p:nvSpPr>
@@ -17808,7 +17678,7 @@
       </p:sp>
       <p:sp>
         <p:nvSpPr>
-          <p:cNvPr id="9" name="TextBox 8"/>
+          <p:cNvPr id="8" name="TextBox 7"/>
           <p:cNvSpPr txBox="1"/>
           <p:nvPr/>
         </p:nvSpPr>
@@ -17850,7 +17720,7 @@
       </p:sp>
       <p:graphicFrame>
         <p:nvGraphicFramePr>
-          <p:cNvPr id="10" name="Chart 9"/>
+          <p:cNvPr id="9" name="Chart 8"/>
           <p:cNvGraphicFramePr>
             <a:graphicFrameLocks noGrp="1"/>
           </p:cNvGraphicFramePr>
@@ -17868,7 +17738,7 @@
       </p:graphicFrame>
       <p:sp>
         <p:nvSpPr>
-          <p:cNvPr id="11" name="Rectangle 10"/>
+          <p:cNvPr id="10" name="Rectangle 9"/>
           <p:cNvSpPr/>
           <p:nvPr/>
         </p:nvSpPr>
@@ -17917,7 +17787,7 @@
       </p:sp>
       <p:sp>
         <p:nvSpPr>
-          <p:cNvPr id="12" name="TextBox 11"/>
+          <p:cNvPr id="11" name="TextBox 10"/>
           <p:cNvSpPr txBox="1"/>
           <p:nvPr/>
         </p:nvSpPr>
@@ -17959,7 +17829,7 @@
       </p:sp>
       <p:graphicFrame>
         <p:nvGraphicFramePr>
-          <p:cNvPr id="13" name="Chart 12"/>
+          <p:cNvPr id="12" name="Chart 11"/>
           <p:cNvGraphicFramePr>
             <a:graphicFrameLocks noGrp="1"/>
           </p:cNvGraphicFramePr>
@@ -17977,7 +17847,7 @@
       </p:graphicFrame>
       <p:sp>
         <p:nvSpPr>
-          <p:cNvPr id="14" name="Rectangle 13"/>
+          <p:cNvPr id="13" name="Rectangle 12"/>
           <p:cNvSpPr/>
           <p:nvPr/>
         </p:nvSpPr>
@@ -18026,7 +17896,7 @@
       </p:sp>
       <p:sp>
         <p:nvSpPr>
-          <p:cNvPr id="15" name="TextBox 14"/>
+          <p:cNvPr id="14" name="TextBox 13"/>
           <p:cNvSpPr txBox="1"/>
           <p:nvPr/>
         </p:nvSpPr>
@@ -18068,7 +17938,7 @@
       </p:sp>
       <p:sp>
         <p:nvSpPr>
-          <p:cNvPr id="16" name="TextBox 15"/>
+          <p:cNvPr id="15" name="TextBox 14"/>
           <p:cNvSpPr txBox="1"/>
           <p:nvPr/>
         </p:nvSpPr>
@@ -18110,7 +17980,7 @@
       </p:sp>
       <p:sp>
         <p:nvSpPr>
-          <p:cNvPr id="17" name="TextBox 16"/>
+          <p:cNvPr id="16" name="TextBox 15"/>
           <p:cNvSpPr txBox="1"/>
           <p:nvPr/>
         </p:nvSpPr>
@@ -18226,7 +18096,7 @@
         <p:spPr>
           <a:xfrm>
             <a:off x="640080" y="329184"/>
-            <a:ext cx="5303520" cy="182880"/>
+            <a:ext cx="9875520" cy="182880"/>
           </a:xfrm>
           <a:prstGeom prst="rect">
             <a:avLst/>
@@ -18267,48 +18137,6 @@
         </p:nvSpPr>
         <p:spPr>
           <a:xfrm>
-            <a:off x="5897880" y="310896"/>
-            <a:ext cx="4800600" cy="256032"/>
-          </a:xfrm>
-          <a:prstGeom prst="rect">
-            <a:avLst/>
-          </a:prstGeom>
-          <a:noFill/>
-        </p:spPr>
-        <p:txBody>
-          <a:bodyPr wrap="none" lIns="9144" rIns="9144" tIns="9144" bIns="9144" anchor="t">
-            <a:spAutoFit/>
-          </a:bodyPr>
-          <a:lstStyle/>
-          <a:p>
-            <a:pPr algn="r">
-              <a:spcAft>
-                <a:spcPts val="0"/>
-              </a:spcAft>
-              <a:defRPr sz="680" b="1">
-                <a:solidFill>
-                  <a:srgbClr val="4F6B00"/>
-                </a:solidFill>
-                <a:latin typeface="Inter"/>
-              </a:defRPr>
-            </a:pPr>
-            <a:r>
-              <a:rPr>
-                <a:latin typeface="Inter"/>
-              </a:rPr>
-              <a:t>Illustrative, Gradient Maintained — demo data, not the client's holdings or managers</a:t>
-            </a:r>
-          </a:p>
-        </p:txBody>
-      </p:sp>
-      <p:sp>
-        <p:nvSpPr>
-          <p:cNvPr id="5" name="TextBox 4"/>
-          <p:cNvSpPr txBox="1"/>
-          <p:nvPr/>
-        </p:nvSpPr>
-        <p:spPr>
-          <a:xfrm>
             <a:off x="640080" y="566928"/>
             <a:ext cx="10058400" cy="530352"/>
           </a:xfrm>
@@ -18345,7 +18173,7 @@
       </p:sp>
       <p:sp>
         <p:nvSpPr>
-          <p:cNvPr id="6" name="Rectangle 5"/>
+          <p:cNvPr id="5" name="Rectangle 4"/>
           <p:cNvSpPr/>
           <p:nvPr/>
         </p:nvSpPr>
@@ -18394,7 +18222,7 @@
       </p:sp>
       <p:sp>
         <p:nvSpPr>
-          <p:cNvPr id="7" name="Rectangle 6"/>
+          <p:cNvPr id="6" name="Rectangle 5"/>
           <p:cNvSpPr/>
           <p:nvPr/>
         </p:nvSpPr>
@@ -18443,7 +18271,7 @@
       </p:sp>
       <p:sp>
         <p:nvSpPr>
-          <p:cNvPr id="8" name="TextBox 7"/>
+          <p:cNvPr id="7" name="TextBox 6"/>
           <p:cNvSpPr txBox="1"/>
           <p:nvPr/>
         </p:nvSpPr>
@@ -18485,7 +18313,7 @@
       </p:sp>
       <p:sp>
         <p:nvSpPr>
-          <p:cNvPr id="9" name="TextBox 8"/>
+          <p:cNvPr id="8" name="TextBox 7"/>
           <p:cNvSpPr txBox="1"/>
           <p:nvPr/>
         </p:nvSpPr>
@@ -18527,7 +18355,7 @@
       </p:sp>
       <p:graphicFrame>
         <p:nvGraphicFramePr>
-          <p:cNvPr id="10" name="Chart 9"/>
+          <p:cNvPr id="9" name="Chart 8"/>
           <p:cNvGraphicFramePr>
             <a:graphicFrameLocks noGrp="1"/>
           </p:cNvGraphicFramePr>
@@ -18545,7 +18373,7 @@
       </p:graphicFrame>
       <p:sp>
         <p:nvSpPr>
-          <p:cNvPr id="11" name="Rectangle 10"/>
+          <p:cNvPr id="10" name="Rectangle 9"/>
           <p:cNvSpPr/>
           <p:nvPr/>
         </p:nvSpPr>
@@ -18594,7 +18422,7 @@
       </p:sp>
       <p:sp>
         <p:nvSpPr>
-          <p:cNvPr id="12" name="Rectangle 11"/>
+          <p:cNvPr id="11" name="Rectangle 10"/>
           <p:cNvSpPr/>
           <p:nvPr/>
         </p:nvSpPr>
@@ -18643,7 +18471,7 @@
       </p:sp>
       <p:sp>
         <p:nvSpPr>
-          <p:cNvPr id="13" name="TextBox 12"/>
+          <p:cNvPr id="12" name="TextBox 11"/>
           <p:cNvSpPr txBox="1"/>
           <p:nvPr/>
         </p:nvSpPr>
@@ -18685,7 +18513,7 @@
       </p:sp>
       <p:sp>
         <p:nvSpPr>
-          <p:cNvPr id="14" name="TextBox 13"/>
+          <p:cNvPr id="13" name="TextBox 12"/>
           <p:cNvSpPr txBox="1"/>
           <p:nvPr/>
         </p:nvSpPr>
@@ -18727,7 +18555,7 @@
       </p:sp>
       <p:sp>
         <p:nvSpPr>
-          <p:cNvPr id="15" name="Rectangle 14"/>
+          <p:cNvPr id="14" name="Rectangle 13"/>
           <p:cNvSpPr/>
           <p:nvPr/>
         </p:nvSpPr>
@@ -18776,7 +18604,7 @@
       </p:sp>
       <p:sp>
         <p:nvSpPr>
-          <p:cNvPr id="16" name="TextBox 15"/>
+          <p:cNvPr id="15" name="TextBox 14"/>
           <p:cNvSpPr txBox="1"/>
           <p:nvPr/>
         </p:nvSpPr>
@@ -18818,7 +18646,7 @@
       </p:sp>
       <p:sp>
         <p:nvSpPr>
-          <p:cNvPr id="17" name="TextBox 16"/>
+          <p:cNvPr id="16" name="TextBox 15"/>
           <p:cNvSpPr txBox="1"/>
           <p:nvPr/>
         </p:nvSpPr>
@@ -18860,7 +18688,7 @@
       </p:sp>
       <p:sp>
         <p:nvSpPr>
-          <p:cNvPr id="18" name="TextBox 17"/>
+          <p:cNvPr id="17" name="TextBox 16"/>
           <p:cNvSpPr txBox="1"/>
           <p:nvPr/>
         </p:nvSpPr>
